--- a/ppt/HighFive_Step3_Submission.pptx
+++ b/ppt/HighFive_Step3_Submission.pptx
@@ -5,7 +5,7 @@
     <p:sldMasterId id="2147483648" r:id="rId1"/>
   </p:sldMasterIdLst>
   <p:notesMasterIdLst>
-    <p:notesMasterId r:id="rId14"/>
+    <p:notesMasterId r:id="rId15"/>
   </p:notesMasterIdLst>
   <p:sldIdLst>
     <p:sldId id="256" r:id="rId2"/>
@@ -15,11 +15,12 @@
     <p:sldId id="260" r:id="rId6"/>
     <p:sldId id="261" r:id="rId7"/>
     <p:sldId id="262" r:id="rId8"/>
-    <p:sldId id="269" r:id="rId9"/>
-    <p:sldId id="270" r:id="rId10"/>
-    <p:sldId id="271" r:id="rId11"/>
-    <p:sldId id="265" r:id="rId12"/>
-    <p:sldId id="268" r:id="rId13"/>
+    <p:sldId id="272" r:id="rId9"/>
+    <p:sldId id="269" r:id="rId10"/>
+    <p:sldId id="270" r:id="rId11"/>
+    <p:sldId id="271" r:id="rId12"/>
+    <p:sldId id="265" r:id="rId13"/>
+    <p:sldId id="268" r:id="rId14"/>
   </p:sldIdLst>
   <p:sldSz cx="12192000" cy="6858000"/>
   <p:notesSz cx="6858000" cy="12192000"/>
@@ -861,6 +862,90 @@
 </p:notes>
 </file>
 
+<file path=ppt/notesSlides/notesSlide13.xml><?xml version="1.0" encoding="utf-8"?>
+<p:notes xmlns:a="http://schemas.openxmlformats.org/drawingml/2006/main" xmlns:r="http://schemas.openxmlformats.org/officeDocument/2006/relationships" xmlns:p="http://schemas.openxmlformats.org/presentationml/2006/main">
+  <p:cSld>
+    <p:spTree>
+      <p:nvGrpSpPr>
+        <p:cNvPr id="1" name=""/>
+        <p:cNvGrpSpPr/>
+        <p:nvPr/>
+      </p:nvGrpSpPr>
+      <p:grpSpPr>
+        <a:xfrm>
+          <a:off x="0" y="0"/>
+          <a:ext cx="0" cy="0"/>
+          <a:chOff x="0" y="0"/>
+          <a:chExt cx="0" cy="0"/>
+        </a:xfrm>
+      </p:grpSpPr>
+      <p:sp>
+        <p:nvSpPr>
+          <p:cNvPr id="2" name="Slide Image Placeholder 1"/>
+          <p:cNvSpPr>
+            <a:spLocks noGrp="1" noRot="1" noChangeAspect="1"/>
+          </p:cNvSpPr>
+          <p:nvPr>
+            <p:ph type="sldImg"/>
+          </p:nvPr>
+        </p:nvSpPr>
+        <p:spPr/>
+      </p:sp>
+      <p:sp>
+        <p:nvSpPr>
+          <p:cNvPr id="3" name="Notes Placeholder 2"/>
+          <p:cNvSpPr>
+            <a:spLocks noGrp="1"/>
+          </p:cNvSpPr>
+          <p:nvPr>
+            <p:ph type="body" idx="1"/>
+          </p:nvPr>
+        </p:nvSpPr>
+        <p:spPr/>
+        <p:txBody>
+          <a:bodyPr/>
+          <a:lstStyle/>
+          <a:p>
+            <a:endParaRPr lang="en-US" dirty="0"/>
+          </a:p>
+        </p:txBody>
+      </p:sp>
+      <p:sp>
+        <p:nvSpPr>
+          <p:cNvPr id="4" name="Slide Number Placeholder 3"/>
+          <p:cNvSpPr>
+            <a:spLocks noGrp="1"/>
+          </p:cNvSpPr>
+          <p:nvPr>
+            <p:ph type="sldNum" sz="quarter" idx="10"/>
+          </p:nvPr>
+        </p:nvSpPr>
+        <p:spPr/>
+        <p:txBody>
+          <a:bodyPr/>
+          <a:lstStyle/>
+          <a:p>
+            <a:fld id="{F7021451-1387-4CA6-816F-3879F97B5CBC}" type="slidenum">
+              <a:rPr lang="en-US"/>
+              <a:t>13</a:t>
+            </a:fld>
+            <a:endParaRPr lang="en-US"/>
+          </a:p>
+        </p:txBody>
+      </p:sp>
+    </p:spTree>
+    <p:extLst>
+      <p:ext uri="{BB962C8B-B14F-4D97-AF65-F5344CB8AC3E}">
+        <p14:creationId xmlns:p14="http://schemas.microsoft.com/office/powerpoint/2010/main" val="1024086991"/>
+      </p:ext>
+    </p:extLst>
+  </p:cSld>
+  <p:clrMapOvr>
+    <a:masterClrMapping/>
+  </p:clrMapOvr>
+</p:notes>
+</file>
+
 <file path=ppt/notesSlides/notesSlide2.xml><?xml version="1.0" encoding="utf-8"?>
 <p:notes xmlns:a="http://schemas.openxmlformats.org/drawingml/2006/main" xmlns:r="http://schemas.openxmlformats.org/officeDocument/2006/relationships" xmlns:p="http://schemas.openxmlformats.org/presentationml/2006/main">
   <p:cSld>
@@ -1370,7 +1455,13 @@
   <p:cSld>
     <p:spTree>
       <p:nvGrpSpPr>
-        <p:cNvPr id="1" name=""/>
+        <p:cNvPr id="1" name="">
+          <a:extLst>
+            <a:ext uri="{FF2B5EF4-FFF2-40B4-BE49-F238E27FC236}">
+              <a16:creationId xmlns:a16="http://schemas.microsoft.com/office/drawing/2014/main" id="{135EEF0E-B2FC-A970-113C-E920588FCBA7}"/>
+            </a:ext>
+          </a:extLst>
+        </p:cNvPr>
         <p:cNvGrpSpPr/>
         <p:nvPr/>
       </p:nvGrpSpPr>
@@ -1384,7 +1475,13 @@
       </p:grpSpPr>
       <p:sp>
         <p:nvSpPr>
-          <p:cNvPr id="2" name="Slide Image Placeholder 1"/>
+          <p:cNvPr id="2" name="Slide Image Placeholder 1">
+            <a:extLst>
+              <a:ext uri="{FF2B5EF4-FFF2-40B4-BE49-F238E27FC236}">
+                <a16:creationId xmlns:a16="http://schemas.microsoft.com/office/drawing/2014/main" id="{A8C8247B-5FC3-DD78-BC68-0DB0C7C9A7AD}"/>
+              </a:ext>
+            </a:extLst>
+          </p:cNvPr>
           <p:cNvSpPr>
             <a:spLocks noGrp="1" noRot="1" noChangeAspect="1"/>
           </p:cNvSpPr>
@@ -1396,7 +1493,13 @@
       </p:sp>
       <p:sp>
         <p:nvSpPr>
-          <p:cNvPr id="3" name="Notes Placeholder 2"/>
+          <p:cNvPr id="3" name="Notes Placeholder 2">
+            <a:extLst>
+              <a:ext uri="{FF2B5EF4-FFF2-40B4-BE49-F238E27FC236}">
+                <a16:creationId xmlns:a16="http://schemas.microsoft.com/office/drawing/2014/main" id="{E24A70BF-5246-E676-E0BE-CE2BD8F8D5B5}"/>
+              </a:ext>
+            </a:extLst>
+          </p:cNvPr>
           <p:cNvSpPr>
             <a:spLocks noGrp="1"/>
           </p:cNvSpPr>
@@ -1415,7 +1518,13 @@
       </p:sp>
       <p:sp>
         <p:nvSpPr>
-          <p:cNvPr id="4" name="Slide Number Placeholder 3"/>
+          <p:cNvPr id="4" name="Slide Number Placeholder 3">
+            <a:extLst>
+              <a:ext uri="{FF2B5EF4-FFF2-40B4-BE49-F238E27FC236}">
+                <a16:creationId xmlns:a16="http://schemas.microsoft.com/office/drawing/2014/main" id="{854A4E9F-7E32-683B-0CF6-D6F4C4BDEED7}"/>
+              </a:ext>
+            </a:extLst>
+          </p:cNvPr>
           <p:cNvSpPr>
             <a:spLocks noGrp="1"/>
           </p:cNvSpPr>
@@ -1439,7 +1548,7 @@
     </p:spTree>
     <p:extLst>
       <p:ext uri="{BB962C8B-B14F-4D97-AF65-F5344CB8AC3E}">
-        <p14:creationId xmlns:p14="http://schemas.microsoft.com/office/powerpoint/2010/main" val="1024086991"/>
+        <p14:creationId xmlns:p14="http://schemas.microsoft.com/office/powerpoint/2010/main" val="2995370419"/>
       </p:ext>
     </p:extLst>
   </p:cSld>
@@ -2956,7 +3065,7 @@
                 <a:ea typeface="Calibri" pitchFamily="34" charset="-122"/>
                 <a:cs typeface="Calibri" pitchFamily="34" charset="-120"/>
               </a:rPr>
-              <a:t>Availability</a:t>
+              <a:t>Available for Use</a:t>
             </a:r>
             <a:endParaRPr lang="en-US" sz="1200" dirty="0"/>
           </a:p>
@@ -3154,7 +3263,7 @@
                 <a:ea typeface="Calibri" pitchFamily="34" charset="-122"/>
                 <a:cs typeface="Calibri" pitchFamily="34" charset="-120"/>
               </a:rPr>
-              <a:t>Skills</a:t>
+              <a:t>Digital Skills</a:t>
             </a:r>
             <a:endParaRPr lang="en-US" sz="1200" dirty="0"/>
           </a:p>
@@ -3373,6 +3482,1056 @@
 </file>
 
 <file path=ppt/slides/slide10.xml><?xml version="1.0" encoding="utf-8"?>
+<p:sld xmlns:a="http://schemas.openxmlformats.org/drawingml/2006/main" xmlns:r="http://schemas.openxmlformats.org/officeDocument/2006/relationships" xmlns:p="http://schemas.openxmlformats.org/presentationml/2006/main">
+  <p:cSld>
+    <p:spTree>
+      <p:nvGrpSpPr>
+        <p:cNvPr id="1" name=""/>
+        <p:cNvGrpSpPr/>
+        <p:nvPr/>
+      </p:nvGrpSpPr>
+      <p:grpSpPr>
+        <a:xfrm>
+          <a:off x="0" y="0"/>
+          <a:ext cx="0" cy="0"/>
+          <a:chOff x="0" y="0"/>
+          <a:chExt cx="0" cy="0"/>
+        </a:xfrm>
+      </p:grpSpPr>
+      <p:sp>
+        <p:nvSpPr>
+          <p:cNvPr id="2" name="Text 0"/>
+          <p:cNvSpPr/>
+          <p:nvPr/>
+        </p:nvSpPr>
+        <p:spPr>
+          <a:xfrm>
+            <a:off x="548640" y="182880"/>
+            <a:ext cx="7315200" cy="201168"/>
+          </a:xfrm>
+          <a:prstGeom prst="rect">
+            <a:avLst/>
+          </a:prstGeom>
+          <a:noFill/>
+          <a:ln/>
+        </p:spPr>
+        <p:txBody>
+          <a:bodyPr wrap="square" lIns="0" tIns="0" rIns="0" bIns="0" rtlCol="0" anchor="ctr"/>
+          <a:lstStyle/>
+          <a:p>
+            <a:pPr marL="0" indent="0" algn="l">
+              <a:buNone/>
+            </a:pPr>
+            <a:r>
+              <a:rPr lang="en-US" sz="900" b="1" kern="0" spc="300" dirty="0">
+                <a:solidFill>
+                  <a:srgbClr val="2E869B"/>
+                </a:solidFill>
+                <a:latin typeface="Calibri" pitchFamily="34" charset="0"/>
+                <a:ea typeface="Calibri" pitchFamily="34" charset="-122"/>
+                <a:cs typeface="Calibri" pitchFamily="34" charset="-120"/>
+              </a:rPr>
+              <a:t>SECTION III  ·  PRELIMINARY RESULTS  ·  4 / 6</a:t>
+            </a:r>
+            <a:endParaRPr lang="en-US" sz="900" dirty="0"/>
+          </a:p>
+        </p:txBody>
+      </p:sp>
+      <p:sp>
+        <p:nvSpPr>
+          <p:cNvPr id="3" name="Text 1"/>
+          <p:cNvSpPr/>
+          <p:nvPr/>
+        </p:nvSpPr>
+        <p:spPr>
+          <a:xfrm>
+            <a:off x="548640" y="365760"/>
+            <a:ext cx="10058400" cy="594360"/>
+          </a:xfrm>
+          <a:prstGeom prst="rect">
+            <a:avLst/>
+          </a:prstGeom>
+          <a:noFill/>
+          <a:ln/>
+        </p:spPr>
+        <p:txBody>
+          <a:bodyPr wrap="square" lIns="0" tIns="0" rIns="0" bIns="0" rtlCol="0" anchor="b"/>
+          <a:lstStyle/>
+          <a:p>
+            <a:pPr marL="0" indent="0" algn="l">
+              <a:buNone/>
+            </a:pPr>
+            <a:r>
+              <a:rPr lang="en-US" sz="3000" b="1" dirty="0">
+                <a:solidFill>
+                  <a:srgbClr val="14263D"/>
+                </a:solidFill>
+                <a:latin typeface="Calibri" pitchFamily="34" charset="0"/>
+                <a:ea typeface="Calibri" pitchFamily="34" charset="-122"/>
+                <a:cs typeface="Calibri" pitchFamily="34" charset="-120"/>
+              </a:rPr>
+              <a:t>Does infrastructure offset individual vulnerability?</a:t>
+            </a:r>
+            <a:endParaRPr lang="en-US" sz="3000" dirty="0"/>
+          </a:p>
+        </p:txBody>
+      </p:sp>
+      <p:sp>
+        <p:nvSpPr>
+          <p:cNvPr id="6" name="Shape 4"/>
+          <p:cNvSpPr/>
+          <p:nvPr/>
+        </p:nvSpPr>
+        <p:spPr>
+          <a:xfrm>
+            <a:off x="548640" y="978408"/>
+            <a:ext cx="594360" cy="41148"/>
+          </a:xfrm>
+          <a:prstGeom prst="rect">
+            <a:avLst/>
+          </a:prstGeom>
+          <a:solidFill>
+            <a:srgbClr val="2E869B"/>
+          </a:solidFill>
+          <a:ln/>
+        </p:spPr>
+        <p:txBody>
+          <a:bodyPr/>
+          <a:lstStyle/>
+          <a:p>
+            <a:endParaRPr lang="ko-KR" altLang="en-US"/>
+          </a:p>
+        </p:txBody>
+      </p:sp>
+      <p:sp>
+        <p:nvSpPr>
+          <p:cNvPr id="7" name="Text 5"/>
+          <p:cNvSpPr/>
+          <p:nvPr/>
+        </p:nvSpPr>
+        <p:spPr>
+          <a:xfrm>
+            <a:off x="548640" y="1069848"/>
+            <a:ext cx="11064240" cy="320040"/>
+          </a:xfrm>
+          <a:prstGeom prst="rect">
+            <a:avLst/>
+          </a:prstGeom>
+          <a:noFill/>
+          <a:ln/>
+        </p:spPr>
+        <p:txBody>
+          <a:bodyPr wrap="square" lIns="0" tIns="0" rIns="0" bIns="0" rtlCol="0" anchor="t"/>
+          <a:lstStyle/>
+          <a:p>
+            <a:pPr marL="0" indent="0" algn="l">
+              <a:buNone/>
+            </a:pPr>
+            <a:r>
+              <a:rPr lang="en-US" sz="1400" dirty="0">
+                <a:solidFill>
+                  <a:srgbClr val="6B6B6B"/>
+                </a:solidFill>
+                <a:latin typeface="Calibri" pitchFamily="34" charset="0"/>
+                <a:ea typeface="Calibri" pitchFamily="34" charset="-122"/>
+                <a:cs typeface="Calibri" pitchFamily="34" charset="-120"/>
+              </a:rPr>
+              <a:t>HLM: cross-level interactions</a:t>
+            </a:r>
+            <a:endParaRPr lang="en-US" sz="1400" dirty="0"/>
+          </a:p>
+        </p:txBody>
+      </p:sp>
+      <p:pic>
+        <p:nvPicPr>
+          <p:cNvPr id="8" name="Image 0" descr="/mnt/project/fig_interaction_cross.png"/>
+          <p:cNvPicPr>
+            <a:picLocks noChangeAspect="1"/>
+          </p:cNvPicPr>
+          <p:nvPr/>
+        </p:nvPicPr>
+        <p:blipFill>
+          <a:blip r:embed="rId3"/>
+          <a:stretch>
+            <a:fillRect/>
+          </a:stretch>
+        </p:blipFill>
+        <p:spPr>
+          <a:xfrm>
+            <a:off x="563472" y="1438326"/>
+            <a:ext cx="6900013" cy="4572000"/>
+          </a:xfrm>
+          <a:prstGeom prst="rect">
+            <a:avLst/>
+          </a:prstGeom>
+        </p:spPr>
+      </p:pic>
+      <p:sp>
+        <p:nvSpPr>
+          <p:cNvPr id="9" name="Text 6"/>
+          <p:cNvSpPr/>
+          <p:nvPr/>
+        </p:nvSpPr>
+        <p:spPr>
+          <a:xfrm>
+            <a:off x="365760" y="5917401"/>
+            <a:ext cx="7315200" cy="228600"/>
+          </a:xfrm>
+          <a:prstGeom prst="rect">
+            <a:avLst/>
+          </a:prstGeom>
+          <a:noFill/>
+          <a:ln/>
+        </p:spPr>
+        <p:txBody>
+          <a:bodyPr wrap="square" lIns="0" tIns="0" rIns="0" bIns="0" rtlCol="0" anchor="ctr"/>
+          <a:lstStyle/>
+          <a:p>
+            <a:pPr marL="0" indent="0" algn="ctr">
+              <a:buNone/>
+            </a:pPr>
+            <a:r>
+              <a:rPr lang="en-US" sz="1200" i="1" dirty="0">
+                <a:solidFill>
+                  <a:srgbClr val="6B6B6B"/>
+                </a:solidFill>
+                <a:latin typeface="Calibri" pitchFamily="34" charset="0"/>
+                <a:ea typeface="Calibri" pitchFamily="34" charset="-122"/>
+                <a:cs typeface="Calibri" pitchFamily="34" charset="-120"/>
+              </a:rPr>
+              <a:t>Cross-level interactions: how district-level UMC dimensions interact with vulnerable groups.</a:t>
+            </a:r>
+            <a:endParaRPr lang="en-US" sz="1200" dirty="0"/>
+          </a:p>
+        </p:txBody>
+      </p:sp>
+      <p:sp>
+        <p:nvSpPr>
+          <p:cNvPr id="10" name="Text 7"/>
+          <p:cNvSpPr/>
+          <p:nvPr/>
+        </p:nvSpPr>
+        <p:spPr>
+          <a:xfrm>
+            <a:off x="7794639" y="1538415"/>
+            <a:ext cx="4023360" cy="274320"/>
+          </a:xfrm>
+          <a:prstGeom prst="rect">
+            <a:avLst/>
+          </a:prstGeom>
+          <a:noFill/>
+          <a:ln/>
+        </p:spPr>
+        <p:txBody>
+          <a:bodyPr wrap="square" lIns="0" tIns="0" rIns="0" bIns="0" rtlCol="0" anchor="ctr"/>
+          <a:lstStyle/>
+          <a:p>
+            <a:pPr marL="0" indent="0" algn="l">
+              <a:buNone/>
+            </a:pPr>
+            <a:r>
+              <a:rPr lang="en-US" sz="1600" b="1" kern="0" spc="200" dirty="0">
+                <a:solidFill>
+                  <a:srgbClr val="2E869B"/>
+                </a:solidFill>
+                <a:latin typeface="Calibri" pitchFamily="34" charset="0"/>
+                <a:ea typeface="Calibri" pitchFamily="34" charset="-122"/>
+                <a:cs typeface="Calibri" pitchFamily="34" charset="-120"/>
+              </a:rPr>
+              <a:t>MAIN EFFECT</a:t>
+            </a:r>
+            <a:endParaRPr lang="en-US" sz="1600" dirty="0"/>
+          </a:p>
+        </p:txBody>
+      </p:sp>
+      <p:sp>
+        <p:nvSpPr>
+          <p:cNvPr id="11" name="Text 8"/>
+          <p:cNvSpPr/>
+          <p:nvPr/>
+        </p:nvSpPr>
+        <p:spPr>
+          <a:xfrm>
+            <a:off x="7794639" y="1862163"/>
+            <a:ext cx="4023360" cy="500000"/>
+          </a:xfrm>
+          <a:prstGeom prst="rect">
+            <a:avLst/>
+          </a:prstGeom>
+          <a:noFill/>
+          <a:ln/>
+        </p:spPr>
+        <p:txBody>
+          <a:bodyPr wrap="square" lIns="0" tIns="0" rIns="0" bIns="0" rtlCol="0" anchor="t"/>
+          <a:lstStyle/>
+          <a:p>
+            <a:pPr marL="0" indent="0" algn="l">
+              <a:lnSpc>
+                <a:spcPct val="110000"/>
+              </a:lnSpc>
+              <a:buNone/>
+            </a:pPr>
+            <a:r>
+              <a:rPr lang="en-US" sz="1300" dirty="0">
+                <a:solidFill>
+                  <a:srgbClr val="333333"/>
+                </a:solidFill>
+                <a:latin typeface="Calibri" pitchFamily="34" charset="0"/>
+                <a:ea typeface="Calibri" pitchFamily="34" charset="-122"/>
+                <a:cs typeface="Calibri" pitchFamily="34" charset="-120"/>
+              </a:rPr>
+              <a:t>District-level UMC dimensions show only weak, contextual associations with individual digital use.</a:t>
+            </a:r>
+            <a:endParaRPr lang="en-US" sz="1300" dirty="0"/>
+          </a:p>
+        </p:txBody>
+      </p:sp>
+      <p:sp>
+        <p:nvSpPr>
+          <p:cNvPr id="12" name="Shape 9"/>
+          <p:cNvSpPr/>
+          <p:nvPr/>
+        </p:nvSpPr>
+        <p:spPr>
+          <a:xfrm>
+            <a:off x="7794639" y="2407095"/>
+            <a:ext cx="4023360" cy="7315"/>
+          </a:xfrm>
+          <a:prstGeom prst="rect">
+            <a:avLst/>
+          </a:prstGeom>
+          <a:solidFill>
+            <a:srgbClr val="D0D0D0"/>
+          </a:solidFill>
+          <a:ln/>
+        </p:spPr>
+        <p:txBody>
+          <a:bodyPr/>
+          <a:lstStyle/>
+          <a:p>
+            <a:endParaRPr lang="ko-KR" altLang="en-US"/>
+          </a:p>
+        </p:txBody>
+      </p:sp>
+      <p:sp>
+        <p:nvSpPr>
+          <p:cNvPr id="13" name="Text 10"/>
+          <p:cNvSpPr/>
+          <p:nvPr/>
+        </p:nvSpPr>
+        <p:spPr>
+          <a:xfrm>
+            <a:off x="7794639" y="2544255"/>
+            <a:ext cx="4023360" cy="274320"/>
+          </a:xfrm>
+          <a:prstGeom prst="rect">
+            <a:avLst/>
+          </a:prstGeom>
+          <a:noFill/>
+          <a:ln/>
+        </p:spPr>
+        <p:txBody>
+          <a:bodyPr wrap="square" lIns="0" tIns="0" rIns="0" bIns="0" rtlCol="0" anchor="ctr"/>
+          <a:lstStyle/>
+          <a:p>
+            <a:pPr marL="0" indent="0" algn="l">
+              <a:buNone/>
+            </a:pPr>
+            <a:r>
+              <a:rPr lang="en-US" sz="1400" b="1" kern="0" spc="200" dirty="0">
+                <a:solidFill>
+                  <a:srgbClr val="2E869B"/>
+                </a:solidFill>
+                <a:latin typeface="Calibri" pitchFamily="34" charset="0"/>
+                <a:ea typeface="Calibri" pitchFamily="34" charset="-122"/>
+                <a:cs typeface="Calibri" pitchFamily="34" charset="-120"/>
+              </a:rPr>
+              <a:t>CROSS-LEVEL INTERACTIONS</a:t>
+            </a:r>
+            <a:endParaRPr lang="en-US" sz="1400" dirty="0"/>
+          </a:p>
+        </p:txBody>
+      </p:sp>
+      <p:sp>
+        <p:nvSpPr>
+          <p:cNvPr id="14" name="Text 11"/>
+          <p:cNvSpPr/>
+          <p:nvPr/>
+        </p:nvSpPr>
+        <p:spPr>
+          <a:xfrm>
+            <a:off x="7794639" y="2864295"/>
+            <a:ext cx="2200000" cy="300000"/>
+          </a:xfrm>
+          <a:prstGeom prst="rect">
+            <a:avLst/>
+          </a:prstGeom>
+          <a:noFill/>
+          <a:ln/>
+        </p:spPr>
+        <p:txBody>
+          <a:bodyPr wrap="square" lIns="0" tIns="0" rIns="0" bIns="0" rtlCol="0" anchor="ctr"/>
+          <a:lstStyle/>
+          <a:p>
+            <a:pPr marL="0" indent="0" algn="l">
+              <a:buNone/>
+            </a:pPr>
+            <a:r>
+              <a:rPr lang="en-US" sz="1300" dirty="0">
+                <a:solidFill>
+                  <a:srgbClr val="333333"/>
+                </a:solidFill>
+                <a:latin typeface="Calibri" pitchFamily="34" charset="0"/>
+                <a:ea typeface="Calibri" pitchFamily="34" charset="-122"/>
+                <a:cs typeface="Calibri" pitchFamily="34" charset="-120"/>
+              </a:rPr>
+              <a:t>Affordability × Elderly (65+)</a:t>
+            </a:r>
+            <a:endParaRPr lang="en-US" sz="1300" dirty="0"/>
+          </a:p>
+        </p:txBody>
+      </p:sp>
+      <p:sp>
+        <p:nvSpPr>
+          <p:cNvPr id="15" name="Text 12"/>
+          <p:cNvSpPr/>
+          <p:nvPr/>
+        </p:nvSpPr>
+        <p:spPr>
+          <a:xfrm>
+            <a:off x="9994639" y="2864295"/>
+            <a:ext cx="1823360" cy="300000"/>
+          </a:xfrm>
+          <a:prstGeom prst="rect">
+            <a:avLst/>
+          </a:prstGeom>
+          <a:noFill/>
+          <a:ln/>
+        </p:spPr>
+        <p:txBody>
+          <a:bodyPr wrap="square" lIns="0" tIns="0" rIns="0" bIns="0" rtlCol="0" anchor="ctr"/>
+          <a:lstStyle/>
+          <a:p>
+            <a:pPr marL="0" indent="0" algn="r">
+              <a:buNone/>
+            </a:pPr>
+            <a:r>
+              <a:rPr lang="en-US" sz="1400" b="1" dirty="0">
+                <a:solidFill>
+                  <a:srgbClr val="14263D"/>
+                </a:solidFill>
+                <a:latin typeface="Calibri" pitchFamily="34" charset="0"/>
+                <a:ea typeface="Calibri" pitchFamily="34" charset="-122"/>
+                <a:cs typeface="Calibri" pitchFamily="34" charset="-120"/>
+              </a:rPr>
+              <a:t>+3.23</a:t>
+            </a:r>
+            <a:r>
+              <a:rPr lang="en-US" sz="1000" i="1" dirty="0">
+                <a:solidFill>
+                  <a:srgbClr val="6B6B6B"/>
+                </a:solidFill>
+                <a:latin typeface="Calibri" pitchFamily="34" charset="0"/>
+                <a:ea typeface="Calibri" pitchFamily="34" charset="-122"/>
+                <a:cs typeface="Calibri" pitchFamily="34" charset="-120"/>
+              </a:rPr>
+              <a:t>  p=0.08 †</a:t>
+            </a:r>
+            <a:endParaRPr lang="en-US" sz="1400" dirty="0"/>
+          </a:p>
+        </p:txBody>
+      </p:sp>
+      <p:sp>
+        <p:nvSpPr>
+          <p:cNvPr id="16" name="Text 13"/>
+          <p:cNvSpPr/>
+          <p:nvPr/>
+        </p:nvSpPr>
+        <p:spPr>
+          <a:xfrm>
+            <a:off x="7794639" y="3164295"/>
+            <a:ext cx="2200000" cy="300000"/>
+          </a:xfrm>
+          <a:prstGeom prst="rect">
+            <a:avLst/>
+          </a:prstGeom>
+          <a:noFill/>
+          <a:ln/>
+        </p:spPr>
+        <p:txBody>
+          <a:bodyPr wrap="square" lIns="0" tIns="0" rIns="0" bIns="0" rtlCol="0" anchor="ctr"/>
+          <a:lstStyle/>
+          <a:p>
+            <a:pPr marL="0" indent="0" algn="l">
+              <a:buNone/>
+            </a:pPr>
+            <a:r>
+              <a:rPr lang="en-US" sz="1300" dirty="0">
+                <a:solidFill>
+                  <a:srgbClr val="6B6B6B"/>
+                </a:solidFill>
+                <a:latin typeface="Calibri" pitchFamily="34" charset="0"/>
+                <a:ea typeface="Calibri" pitchFamily="34" charset="-122"/>
+                <a:cs typeface="Calibri" pitchFamily="34" charset="-120"/>
+              </a:rPr>
+              <a:t>Connectivity × Elderly</a:t>
+            </a:r>
+            <a:endParaRPr lang="en-US" sz="1300" dirty="0"/>
+          </a:p>
+        </p:txBody>
+      </p:sp>
+      <p:sp>
+        <p:nvSpPr>
+          <p:cNvPr id="17" name="Text 14"/>
+          <p:cNvSpPr/>
+          <p:nvPr/>
+        </p:nvSpPr>
+        <p:spPr>
+          <a:xfrm>
+            <a:off x="9994639" y="3164295"/>
+            <a:ext cx="1823360" cy="300000"/>
+          </a:xfrm>
+          <a:prstGeom prst="rect">
+            <a:avLst/>
+          </a:prstGeom>
+          <a:noFill/>
+          <a:ln/>
+        </p:spPr>
+        <p:txBody>
+          <a:bodyPr wrap="square" lIns="0" tIns="0" rIns="0" bIns="0" rtlCol="0" anchor="ctr"/>
+          <a:lstStyle/>
+          <a:p>
+            <a:pPr marL="0" indent="0" algn="r">
+              <a:buNone/>
+            </a:pPr>
+            <a:r>
+              <a:rPr lang="en-US" sz="1400" b="1" dirty="0">
+                <a:solidFill>
+                  <a:srgbClr val="8A8A8A"/>
+                </a:solidFill>
+                <a:latin typeface="Calibri" pitchFamily="34" charset="0"/>
+                <a:ea typeface="Calibri" pitchFamily="34" charset="-122"/>
+                <a:cs typeface="Calibri" pitchFamily="34" charset="-120"/>
+              </a:rPr>
+              <a:t>+1.84</a:t>
+            </a:r>
+            <a:r>
+              <a:rPr lang="en-US" sz="1000" i="1" dirty="0">
+                <a:solidFill>
+                  <a:srgbClr val="8A8A8A"/>
+                </a:solidFill>
+                <a:latin typeface="Calibri" pitchFamily="34" charset="0"/>
+                <a:ea typeface="Calibri" pitchFamily="34" charset="-122"/>
+                <a:cs typeface="Calibri" pitchFamily="34" charset="-120"/>
+              </a:rPr>
+              <a:t>  n.s.</a:t>
+            </a:r>
+            <a:endParaRPr lang="en-US" sz="1400" dirty="0"/>
+          </a:p>
+        </p:txBody>
+      </p:sp>
+      <p:sp>
+        <p:nvSpPr>
+          <p:cNvPr id="18" name="Text 15"/>
+          <p:cNvSpPr/>
+          <p:nvPr/>
+        </p:nvSpPr>
+        <p:spPr>
+          <a:xfrm>
+            <a:off x="7794639" y="3464295"/>
+            <a:ext cx="2200000" cy="300000"/>
+          </a:xfrm>
+          <a:prstGeom prst="rect">
+            <a:avLst/>
+          </a:prstGeom>
+          <a:noFill/>
+          <a:ln/>
+        </p:spPr>
+        <p:txBody>
+          <a:bodyPr wrap="square" lIns="0" tIns="0" rIns="0" bIns="0" rtlCol="0" anchor="ctr"/>
+          <a:lstStyle/>
+          <a:p>
+            <a:pPr marL="0" indent="0" algn="l">
+              <a:buNone/>
+            </a:pPr>
+            <a:r>
+              <a:rPr lang="en-US" sz="1300" dirty="0">
+                <a:solidFill>
+                  <a:srgbClr val="6B6B6B"/>
+                </a:solidFill>
+                <a:latin typeface="Calibri" pitchFamily="34" charset="0"/>
+                <a:ea typeface="Calibri" pitchFamily="34" charset="-122"/>
+                <a:cs typeface="Calibri" pitchFamily="34" charset="-120"/>
+              </a:rPr>
+              <a:t>Available for Use × Elderly</a:t>
+            </a:r>
+            <a:endParaRPr lang="en-US" sz="1300" dirty="0"/>
+          </a:p>
+        </p:txBody>
+      </p:sp>
+      <p:sp>
+        <p:nvSpPr>
+          <p:cNvPr id="19" name="Text 16"/>
+          <p:cNvSpPr/>
+          <p:nvPr/>
+        </p:nvSpPr>
+        <p:spPr>
+          <a:xfrm>
+            <a:off x="9994639" y="3464295"/>
+            <a:ext cx="1823360" cy="300000"/>
+          </a:xfrm>
+          <a:prstGeom prst="rect">
+            <a:avLst/>
+          </a:prstGeom>
+          <a:noFill/>
+          <a:ln/>
+        </p:spPr>
+        <p:txBody>
+          <a:bodyPr wrap="square" lIns="0" tIns="0" rIns="0" bIns="0" rtlCol="0" anchor="ctr"/>
+          <a:lstStyle/>
+          <a:p>
+            <a:pPr marL="0" indent="0" algn="r">
+              <a:buNone/>
+            </a:pPr>
+            <a:r>
+              <a:rPr lang="en-US" sz="1400" b="1" dirty="0">
+                <a:solidFill>
+                  <a:srgbClr val="8A8A8A"/>
+                </a:solidFill>
+                <a:latin typeface="Calibri" pitchFamily="34" charset="0"/>
+                <a:ea typeface="Calibri" pitchFamily="34" charset="-122"/>
+                <a:cs typeface="Calibri" pitchFamily="34" charset="-120"/>
+              </a:rPr>
+              <a:t>+1.31</a:t>
+            </a:r>
+            <a:r>
+              <a:rPr lang="en-US" sz="1000" i="1" dirty="0">
+                <a:solidFill>
+                  <a:srgbClr val="8A8A8A"/>
+                </a:solidFill>
+                <a:latin typeface="Calibri" pitchFamily="34" charset="0"/>
+                <a:ea typeface="Calibri" pitchFamily="34" charset="-122"/>
+                <a:cs typeface="Calibri" pitchFamily="34" charset="-120"/>
+              </a:rPr>
+              <a:t>  n.s.</a:t>
+            </a:r>
+            <a:endParaRPr lang="en-US" sz="1400" dirty="0"/>
+          </a:p>
+        </p:txBody>
+      </p:sp>
+      <p:sp>
+        <p:nvSpPr>
+          <p:cNvPr id="50" name="Text Row 4 Label"/>
+          <p:cNvSpPr/>
+          <p:nvPr/>
+        </p:nvSpPr>
+        <p:spPr>
+          <a:xfrm>
+            <a:off x="7794639" y="3764295"/>
+            <a:ext cx="2200000" cy="300000"/>
+          </a:xfrm>
+          <a:prstGeom prst="rect">
+            <a:avLst/>
+          </a:prstGeom>
+          <a:noFill/>
+          <a:ln/>
+        </p:spPr>
+        <p:txBody>
+          <a:bodyPr wrap="square" lIns="0" tIns="0" rIns="0" bIns="0" rtlCol="0" anchor="ctr"/>
+          <a:lstStyle/>
+          <a:p>
+            <a:pPr marL="0" indent="0" algn="l">
+              <a:buNone/>
+            </a:pPr>
+            <a:r>
+              <a:rPr lang="en-US" sz="1300" dirty="0">
+                <a:solidFill>
+                  <a:srgbClr val="6B6B6B"/>
+                </a:solidFill>
+                <a:latin typeface="Calibri" pitchFamily="34" charset="0"/>
+                <a:ea typeface="Calibri" pitchFamily="34" charset="-122"/>
+                <a:cs typeface="Calibri" pitchFamily="34" charset="-120"/>
+              </a:rPr>
+              <a:t>Connectivity × Low education</a:t>
+            </a:r>
+            <a:endParaRPr lang="en-US" sz="1300" dirty="0"/>
+          </a:p>
+        </p:txBody>
+      </p:sp>
+      <p:sp>
+        <p:nvSpPr>
+          <p:cNvPr id="51" name="Text Row 4 Value"/>
+          <p:cNvSpPr/>
+          <p:nvPr/>
+        </p:nvSpPr>
+        <p:spPr>
+          <a:xfrm>
+            <a:off x="9994639" y="3764295"/>
+            <a:ext cx="1823360" cy="300000"/>
+          </a:xfrm>
+          <a:prstGeom prst="rect">
+            <a:avLst/>
+          </a:prstGeom>
+          <a:noFill/>
+          <a:ln/>
+        </p:spPr>
+        <p:txBody>
+          <a:bodyPr wrap="square" lIns="0" tIns="0" rIns="0" bIns="0" rtlCol="0" anchor="ctr"/>
+          <a:lstStyle/>
+          <a:p>
+            <a:pPr marL="0" indent="0" algn="r">
+              <a:buNone/>
+            </a:pPr>
+            <a:r>
+              <a:rPr lang="en-US" sz="1400" b="1" dirty="0">
+                <a:solidFill>
+                  <a:srgbClr val="8A8A8A"/>
+                </a:solidFill>
+                <a:latin typeface="Calibri" pitchFamily="34" charset="0"/>
+                <a:ea typeface="Calibri" pitchFamily="34" charset="-122"/>
+                <a:cs typeface="Calibri" pitchFamily="34" charset="-120"/>
+              </a:rPr>
+              <a:t>+4.18</a:t>
+            </a:r>
+            <a:r>
+              <a:rPr lang="en-US" sz="1000" i="1" dirty="0">
+                <a:solidFill>
+                  <a:srgbClr val="8A8A8A"/>
+                </a:solidFill>
+                <a:latin typeface="Calibri" pitchFamily="34" charset="0"/>
+                <a:ea typeface="Calibri" pitchFamily="34" charset="-122"/>
+                <a:cs typeface="Calibri" pitchFamily="34" charset="-120"/>
+              </a:rPr>
+              <a:t>  n.s.</a:t>
+            </a:r>
+            <a:endParaRPr lang="en-US" sz="1400" dirty="0"/>
+          </a:p>
+        </p:txBody>
+      </p:sp>
+      <p:sp>
+        <p:nvSpPr>
+          <p:cNvPr id="20" name="Shape 17"/>
+          <p:cNvSpPr/>
+          <p:nvPr/>
+        </p:nvSpPr>
+        <p:spPr>
+          <a:xfrm>
+            <a:off x="7794639" y="4291500"/>
+            <a:ext cx="4035717" cy="1763580"/>
+          </a:xfrm>
+          <a:prstGeom prst="roundRect">
+            <a:avLst>
+              <a:gd name="adj" fmla="val 2703"/>
+            </a:avLst>
+          </a:prstGeom>
+          <a:solidFill>
+            <a:srgbClr val="1F3864"/>
+          </a:solidFill>
+          <a:ln/>
+        </p:spPr>
+        <p:txBody>
+          <a:bodyPr/>
+          <a:lstStyle/>
+          <a:p>
+            <a:endParaRPr lang="ko-KR" altLang="en-US"/>
+          </a:p>
+        </p:txBody>
+      </p:sp>
+      <p:sp>
+        <p:nvSpPr>
+          <p:cNvPr id="21" name="Text 18"/>
+          <p:cNvSpPr/>
+          <p:nvPr/>
+        </p:nvSpPr>
+        <p:spPr>
+          <a:xfrm>
+            <a:off x="7989876" y="4401228"/>
+            <a:ext cx="3657600" cy="228600"/>
+          </a:xfrm>
+          <a:prstGeom prst="rect">
+            <a:avLst/>
+          </a:prstGeom>
+          <a:noFill/>
+          <a:ln/>
+        </p:spPr>
+        <p:txBody>
+          <a:bodyPr wrap="square" lIns="0" tIns="0" rIns="0" bIns="0" rtlCol="0" anchor="ctr"/>
+          <a:lstStyle/>
+          <a:p>
+            <a:pPr marL="0" indent="0" algn="l">
+              <a:buNone/>
+            </a:pPr>
+            <a:r>
+              <a:rPr lang="en-US" sz="1600" b="1" kern="0" spc="200" dirty="0">
+                <a:solidFill>
+                  <a:srgbClr val="7FE4C4"/>
+                </a:solidFill>
+                <a:latin typeface="Calibri" pitchFamily="34" charset="0"/>
+                <a:ea typeface="Calibri" pitchFamily="34" charset="-122"/>
+                <a:cs typeface="Calibri" pitchFamily="34" charset="-120"/>
+              </a:rPr>
+              <a:t>INTERPRETATION</a:t>
+            </a:r>
+            <a:endParaRPr lang="en-US" sz="1600" dirty="0"/>
+          </a:p>
+        </p:txBody>
+      </p:sp>
+      <p:sp>
+        <p:nvSpPr>
+          <p:cNvPr id="22" name="Text 19"/>
+          <p:cNvSpPr/>
+          <p:nvPr/>
+        </p:nvSpPr>
+        <p:spPr>
+          <a:xfrm>
+            <a:off x="7989876" y="4657260"/>
+            <a:ext cx="3586428" cy="1280160"/>
+          </a:xfrm>
+          <a:prstGeom prst="rect">
+            <a:avLst/>
+          </a:prstGeom>
+          <a:noFill/>
+          <a:ln/>
+        </p:spPr>
+        <p:txBody>
+          <a:bodyPr wrap="square" lIns="0" tIns="0" rIns="0" bIns="0" rtlCol="0" anchor="t"/>
+          <a:lstStyle/>
+          <a:p>
+            <a:pPr marL="0" indent="0" algn="l">
+              <a:lnSpc>
+                <a:spcPct val="115000"/>
+              </a:lnSpc>
+              <a:spcAft>
+                <a:spcPts val="400"/>
+              </a:spcAft>
+              <a:buNone/>
+            </a:pPr>
+            <a:r>
+              <a:rPr lang="en-US" sz="1200" dirty="0">
+                <a:solidFill>
+                  <a:srgbClr val="FFFFFF"/>
+                </a:solidFill>
+                <a:latin typeface="Calibri" pitchFamily="34" charset="0"/>
+                <a:ea typeface="Calibri" pitchFamily="34" charset="-122"/>
+                <a:cs typeface="Calibri" pitchFamily="34" charset="-120"/>
+              </a:rPr>
+              <a:t>Only the Affordability–Elderly interaction approaches significance. District infrastructure does not show a strong differential effect for vulnerable groups.</a:t>
+            </a:r>
+            <a:endParaRPr lang="en-US" sz="1200" dirty="0"/>
+          </a:p>
+          <a:p>
+            <a:pPr marL="0" indent="0" algn="l">
+              <a:lnSpc>
+                <a:spcPct val="115000"/>
+              </a:lnSpc>
+              <a:buNone/>
+            </a:pPr>
+            <a:r>
+              <a:rPr lang="en-US" sz="1200" dirty="0">
+                <a:solidFill>
+                  <a:srgbClr val="FFFFFF"/>
+                </a:solidFill>
+                <a:latin typeface="Calibri" pitchFamily="34" charset="0"/>
+                <a:ea typeface="Calibri" pitchFamily="34" charset="-122"/>
+                <a:cs typeface="Calibri" pitchFamily="34" charset="-120"/>
+              </a:rPr>
+              <a:t>District scores identify </a:t>
+            </a:r>
+            <a:r>
+              <a:rPr lang="en-US" sz="1200" b="1" dirty="0">
+                <a:solidFill>
+                  <a:srgbClr val="FFFFFF"/>
+                </a:solidFill>
+                <a:latin typeface="Calibri" pitchFamily="34" charset="0"/>
+                <a:ea typeface="Calibri" pitchFamily="34" charset="-122"/>
+                <a:cs typeface="Calibri" pitchFamily="34" charset="-120"/>
+              </a:rPr>
+              <a:t>where</a:t>
+            </a:r>
+            <a:r>
+              <a:rPr lang="en-US" sz="1200" dirty="0">
+                <a:solidFill>
+                  <a:srgbClr val="FFFFFF"/>
+                </a:solidFill>
+                <a:latin typeface="Calibri" pitchFamily="34" charset="0"/>
+                <a:ea typeface="Calibri" pitchFamily="34" charset="-122"/>
+                <a:cs typeface="Calibri" pitchFamily="34" charset="-120"/>
+              </a:rPr>
+              <a:t> vulnerable individuals are concentrated — supporting </a:t>
+            </a:r>
+            <a:r>
+              <a:rPr lang="en-US" sz="1200" b="1" i="1" dirty="0">
+                <a:solidFill>
+                  <a:srgbClr val="7FE4C4"/>
+                </a:solidFill>
+                <a:latin typeface="Calibri" pitchFamily="34" charset="0"/>
+                <a:ea typeface="Calibri" pitchFamily="34" charset="-122"/>
+                <a:cs typeface="Calibri" pitchFamily="34" charset="-120"/>
+              </a:rPr>
+              <a:t>place-sensitive</a:t>
+            </a:r>
+            <a:r>
+              <a:rPr lang="en-US" sz="1200" dirty="0">
+                <a:solidFill>
+                  <a:srgbClr val="FFFFFF"/>
+                </a:solidFill>
+                <a:latin typeface="Calibri" pitchFamily="34" charset="0"/>
+                <a:ea typeface="Calibri" pitchFamily="34" charset="-122"/>
+                <a:cs typeface="Calibri" pitchFamily="34" charset="-120"/>
+              </a:rPr>
+              <a:t> (not place-based) targeting.</a:t>
+            </a:r>
+            <a:endParaRPr lang="en-US" sz="1200" dirty="0"/>
+          </a:p>
+        </p:txBody>
+      </p:sp>
+      <p:sp>
+        <p:nvSpPr>
+          <p:cNvPr id="23" name="Shape 20"/>
+          <p:cNvSpPr/>
+          <p:nvPr/>
+        </p:nvSpPr>
+        <p:spPr>
+          <a:xfrm>
+            <a:off x="548640" y="6263640"/>
+            <a:ext cx="11064240" cy="7315"/>
+          </a:xfrm>
+          <a:prstGeom prst="rect">
+            <a:avLst/>
+          </a:prstGeom>
+          <a:solidFill>
+            <a:srgbClr val="D0D0D0"/>
+          </a:solidFill>
+          <a:ln/>
+        </p:spPr>
+        <p:txBody>
+          <a:bodyPr/>
+          <a:lstStyle/>
+          <a:p>
+            <a:endParaRPr lang="ko-KR" altLang="en-US"/>
+          </a:p>
+        </p:txBody>
+      </p:sp>
+      <p:pic>
+        <p:nvPicPr>
+          <p:cNvPr id="24" name="Image 1" descr="/home/claude/work/logo_gateway.jpeg"/>
+          <p:cNvPicPr>
+            <a:picLocks noChangeAspect="1"/>
+          </p:cNvPicPr>
+          <p:nvPr/>
+        </p:nvPicPr>
+        <p:blipFill>
+          <a:blip r:embed="rId4"/>
+          <a:stretch>
+            <a:fillRect/>
+          </a:stretch>
+        </p:blipFill>
+        <p:spPr>
+          <a:xfrm>
+            <a:off x="9555480" y="6355080"/>
+            <a:ext cx="640080" cy="411480"/>
+          </a:xfrm>
+          <a:prstGeom prst="rect">
+            <a:avLst/>
+          </a:prstGeom>
+        </p:spPr>
+      </p:pic>
+      <p:pic>
+        <p:nvPicPr>
+          <p:cNvPr id="25" name="Image 2" descr="/home/claude/work/logo_eu.jpeg"/>
+          <p:cNvPicPr>
+            <a:picLocks noChangeAspect="1"/>
+          </p:cNvPicPr>
+          <p:nvPr/>
+        </p:nvPicPr>
+        <p:blipFill>
+          <a:blip r:embed="rId5"/>
+          <a:stretch>
+            <a:fillRect/>
+          </a:stretch>
+        </p:blipFill>
+        <p:spPr>
+          <a:xfrm>
+            <a:off x="10296144" y="6400800"/>
+            <a:ext cx="1280160" cy="320040"/>
+          </a:xfrm>
+          <a:prstGeom prst="rect">
+            <a:avLst/>
+          </a:prstGeom>
+        </p:spPr>
+      </p:pic>
+      <p:pic>
+        <p:nvPicPr>
+          <p:cNvPr id="26" name="Image 3" descr="/home/claude/work/logo_itu.png"/>
+          <p:cNvPicPr>
+            <a:picLocks noChangeAspect="1"/>
+          </p:cNvPicPr>
+          <p:nvPr/>
+        </p:nvPicPr>
+        <p:blipFill>
+          <a:blip r:embed="rId6"/>
+          <a:stretch>
+            <a:fillRect/>
+          </a:stretch>
+        </p:blipFill>
+        <p:spPr>
+          <a:xfrm>
+            <a:off x="11686032" y="6355080"/>
+            <a:ext cx="411480" cy="411480"/>
+          </a:xfrm>
+          <a:prstGeom prst="rect">
+            <a:avLst/>
+          </a:prstGeom>
+        </p:spPr>
+      </p:pic>
+      <p:sp>
+        <p:nvSpPr>
+          <p:cNvPr id="27" name="Text 21"/>
+          <p:cNvSpPr/>
+          <p:nvPr/>
+        </p:nvSpPr>
+        <p:spPr>
+          <a:xfrm>
+            <a:off x="548640" y="6565392"/>
+            <a:ext cx="1371600" cy="201168"/>
+          </a:xfrm>
+          <a:prstGeom prst="rect">
+            <a:avLst/>
+          </a:prstGeom>
+          <a:noFill/>
+          <a:ln/>
+        </p:spPr>
+        <p:txBody>
+          <a:bodyPr wrap="square" lIns="0" tIns="0" rIns="0" bIns="0" rtlCol="0" anchor="ctr"/>
+          <a:lstStyle/>
+          <a:p>
+            <a:pPr marL="0" indent="0" algn="l">
+              <a:buNone/>
+            </a:pPr>
+            <a:r>
+              <a:rPr lang="en-US" sz="900" dirty="0">
+                <a:solidFill>
+                  <a:srgbClr val="B0B0B0"/>
+                </a:solidFill>
+                <a:latin typeface="Calibri" pitchFamily="34" charset="0"/>
+                <a:ea typeface="Calibri" pitchFamily="34" charset="-122"/>
+                <a:cs typeface="Calibri" pitchFamily="34" charset="-120"/>
+              </a:rPr>
+              <a:t>10 / 13</a:t>
+            </a:r>
+            <a:endParaRPr lang="en-US" sz="900" dirty="0"/>
+          </a:p>
+        </p:txBody>
+      </p:sp>
+    </p:spTree>
+  </p:cSld>
+  <p:clrMapOvr>
+    <a:masterClrMapping/>
+  </p:clrMapOvr>
+</p:sld>
+</file>
+
+<file path=ppt/slides/slide11.xml><?xml version="1.0" encoding="utf-8"?>
 <p:sld xmlns:a="http://schemas.openxmlformats.org/drawingml/2006/main" xmlns:r="http://schemas.openxmlformats.org/officeDocument/2006/relationships" xmlns:p="http://schemas.openxmlformats.org/presentationml/2006/main">
   <p:cSld>
     <p:spTree>
@@ -5108,7 +6267,7 @@
 </p:sld>
 </file>
 
-<file path=ppt/slides/slide11.xml><?xml version="1.0" encoding="utf-8"?>
+<file path=ppt/slides/slide12.xml><?xml version="1.0" encoding="utf-8"?>
 <p:sld xmlns:a="http://schemas.openxmlformats.org/drawingml/2006/main" xmlns:r="http://schemas.openxmlformats.org/officeDocument/2006/relationships" xmlns:p="http://schemas.openxmlformats.org/presentationml/2006/main">
   <p:cSld name="Slide 10">
     <p:bg>
@@ -5434,7 +6593,7 @@
                 <a:ea typeface="Calibri" pitchFamily="34" charset="-122"/>
                 <a:cs typeface="Calibri" pitchFamily="34" charset="-120"/>
               </a:rPr>
-              <a:t>10 / 13</a:t>
+              <a:t>12 / 13</a:t>
             </a:r>
             <a:endParaRPr lang="en-US" sz="900" dirty="0"/>
           </a:p>
@@ -5922,7 +7081,7 @@
 </p:sld>
 </file>
 
-<file path=ppt/slides/slide12.xml><?xml version="1.0" encoding="utf-8"?>
+<file path=ppt/slides/slide13.xml><?xml version="1.0" encoding="utf-8"?>
 <p:sld xmlns:a="http://schemas.openxmlformats.org/drawingml/2006/main" xmlns:r="http://schemas.openxmlformats.org/officeDocument/2006/relationships" xmlns:p="http://schemas.openxmlformats.org/presentationml/2006/main">
   <p:cSld name="Slide 13">
     <p:bg>
@@ -17874,7 +19033,7 @@
         <p:spPr>
           <a:xfrm>
             <a:off x="548640" y="365760"/>
-            <a:ext cx="10058400" cy="594360"/>
+            <a:ext cx="4342337" cy="594360"/>
           </a:xfrm>
           <a:prstGeom prst="rect">
             <a:avLst/>
@@ -19123,6 +20282,3950 @@
   <p:cSld>
     <p:spTree>
       <p:nvGrpSpPr>
+        <p:cNvPr id="1" name="">
+          <a:extLst>
+            <a:ext uri="{FF2B5EF4-FFF2-40B4-BE49-F238E27FC236}">
+              <a16:creationId xmlns:a16="http://schemas.microsoft.com/office/drawing/2014/main" id="{526CF3EB-9E13-BE72-ECF2-CFB9F235D50E}"/>
+            </a:ext>
+          </a:extLst>
+        </p:cNvPr>
+        <p:cNvGrpSpPr/>
+        <p:nvPr/>
+      </p:nvGrpSpPr>
+      <p:grpSpPr>
+        <a:xfrm>
+          <a:off x="0" y="0"/>
+          <a:ext cx="0" cy="0"/>
+          <a:chOff x="0" y="0"/>
+          <a:chExt cx="0" cy="0"/>
+        </a:xfrm>
+      </p:grpSpPr>
+      <p:sp>
+        <p:nvSpPr>
+          <p:cNvPr id="2" name="Text 0">
+            <a:extLst>
+              <a:ext uri="{FF2B5EF4-FFF2-40B4-BE49-F238E27FC236}">
+                <a16:creationId xmlns:a16="http://schemas.microsoft.com/office/drawing/2014/main" id="{0271651C-A770-3FEF-D351-3D329D2AD5ED}"/>
+              </a:ext>
+            </a:extLst>
+          </p:cNvPr>
+          <p:cNvSpPr/>
+          <p:nvPr/>
+        </p:nvSpPr>
+        <p:spPr>
+          <a:xfrm>
+            <a:off x="548640" y="182880"/>
+            <a:ext cx="7315200" cy="201168"/>
+          </a:xfrm>
+          <a:prstGeom prst="rect">
+            <a:avLst/>
+          </a:prstGeom>
+          <a:noFill/>
+          <a:ln/>
+        </p:spPr>
+        <p:txBody>
+          <a:bodyPr wrap="square" lIns="0" tIns="0" rIns="0" bIns="0" rtlCol="0" anchor="ctr"/>
+          <a:lstStyle/>
+          <a:p>
+            <a:pPr marL="0" indent="0" algn="l">
+              <a:buNone/>
+            </a:pPr>
+            <a:r>
+              <a:rPr lang="en-US" sz="900" b="1" kern="0" spc="300" dirty="0">
+                <a:solidFill>
+                  <a:srgbClr val="2E869B"/>
+                </a:solidFill>
+                <a:latin typeface="Calibri" pitchFamily="34" charset="0"/>
+                <a:ea typeface="Calibri" pitchFamily="34" charset="-122"/>
+                <a:cs typeface="Calibri" pitchFamily="34" charset="-120"/>
+              </a:rPr>
+              <a:t>SECTION III  ·  PRELIMINARY RESULTS  ·  3 / 6</a:t>
+            </a:r>
+            <a:endParaRPr lang="en-US" sz="900" dirty="0"/>
+          </a:p>
+        </p:txBody>
+      </p:sp>
+      <p:sp>
+        <p:nvSpPr>
+          <p:cNvPr id="3" name="Text 1">
+            <a:extLst>
+              <a:ext uri="{FF2B5EF4-FFF2-40B4-BE49-F238E27FC236}">
+                <a16:creationId xmlns:a16="http://schemas.microsoft.com/office/drawing/2014/main" id="{D754CC2D-5073-3F96-6E25-8036714E2BCE}"/>
+              </a:ext>
+            </a:extLst>
+          </p:cNvPr>
+          <p:cNvSpPr/>
+          <p:nvPr/>
+        </p:nvSpPr>
+        <p:spPr>
+          <a:xfrm>
+            <a:off x="548640" y="365760"/>
+            <a:ext cx="10058400" cy="594360"/>
+          </a:xfrm>
+          <a:prstGeom prst="rect">
+            <a:avLst/>
+          </a:prstGeom>
+          <a:noFill/>
+          <a:ln/>
+        </p:spPr>
+        <p:txBody>
+          <a:bodyPr wrap="square" lIns="0" tIns="0" rIns="0" bIns="0" rtlCol="0" anchor="b"/>
+          <a:lstStyle/>
+          <a:p>
+            <a:pPr marL="0" indent="0" algn="l">
+              <a:buNone/>
+            </a:pPr>
+            <a:r>
+              <a:rPr lang="en-US" sz="3000" b="1" dirty="0">
+                <a:solidFill>
+                  <a:srgbClr val="14263D"/>
+                </a:solidFill>
+                <a:latin typeface="Calibri" pitchFamily="34" charset="0"/>
+                <a:ea typeface="Calibri" pitchFamily="34" charset="-122"/>
+                <a:cs typeface="Calibri" pitchFamily="34" charset="-120"/>
+              </a:rPr>
+              <a:t>Why does the gap exist? — Individual differences dominate</a:t>
+            </a:r>
+            <a:endParaRPr lang="en-US" sz="3000" dirty="0"/>
+          </a:p>
+        </p:txBody>
+      </p:sp>
+      <p:sp>
+        <p:nvSpPr>
+          <p:cNvPr id="6" name="Shape 4">
+            <a:extLst>
+              <a:ext uri="{FF2B5EF4-FFF2-40B4-BE49-F238E27FC236}">
+                <a16:creationId xmlns:a16="http://schemas.microsoft.com/office/drawing/2014/main" id="{5D81C419-DBB5-8B36-C71A-CFAD64AE0841}"/>
+              </a:ext>
+            </a:extLst>
+          </p:cNvPr>
+          <p:cNvSpPr/>
+          <p:nvPr/>
+        </p:nvSpPr>
+        <p:spPr>
+          <a:xfrm>
+            <a:off x="548640" y="978408"/>
+            <a:ext cx="594360" cy="41148"/>
+          </a:xfrm>
+          <a:prstGeom prst="rect">
+            <a:avLst/>
+          </a:prstGeom>
+          <a:solidFill>
+            <a:srgbClr val="2E869B"/>
+          </a:solidFill>
+          <a:ln/>
+        </p:spPr>
+        <p:txBody>
+          <a:bodyPr/>
+          <a:lstStyle/>
+          <a:p>
+            <a:endParaRPr lang="ko-KR" altLang="en-US"/>
+          </a:p>
+        </p:txBody>
+      </p:sp>
+      <p:sp>
+        <p:nvSpPr>
+          <p:cNvPr id="33" name="Shape 30">
+            <a:extLst>
+              <a:ext uri="{FF2B5EF4-FFF2-40B4-BE49-F238E27FC236}">
+                <a16:creationId xmlns:a16="http://schemas.microsoft.com/office/drawing/2014/main" id="{F81005CA-342E-C572-CF21-E4520D3D9CA2}"/>
+              </a:ext>
+            </a:extLst>
+          </p:cNvPr>
+          <p:cNvSpPr/>
+          <p:nvPr/>
+        </p:nvSpPr>
+        <p:spPr>
+          <a:xfrm>
+            <a:off x="548640" y="6263640"/>
+            <a:ext cx="11064240" cy="7315"/>
+          </a:xfrm>
+          <a:prstGeom prst="rect">
+            <a:avLst/>
+          </a:prstGeom>
+          <a:solidFill>
+            <a:srgbClr val="D0D0D0"/>
+          </a:solidFill>
+          <a:ln/>
+        </p:spPr>
+        <p:txBody>
+          <a:bodyPr/>
+          <a:lstStyle/>
+          <a:p>
+            <a:endParaRPr lang="ko-KR" altLang="en-US"/>
+          </a:p>
+        </p:txBody>
+      </p:sp>
+      <p:pic>
+        <p:nvPicPr>
+          <p:cNvPr id="34" name="Image 1" descr="/home/claude/work/logo_gateway.jpeg">
+            <a:extLst>
+              <a:ext uri="{FF2B5EF4-FFF2-40B4-BE49-F238E27FC236}">
+                <a16:creationId xmlns:a16="http://schemas.microsoft.com/office/drawing/2014/main" id="{BA9DD910-7FD1-6799-B951-18C789F86CA8}"/>
+              </a:ext>
+            </a:extLst>
+          </p:cNvPr>
+          <p:cNvPicPr>
+            <a:picLocks noChangeAspect="1"/>
+          </p:cNvPicPr>
+          <p:nvPr/>
+        </p:nvPicPr>
+        <p:blipFill>
+          <a:blip r:embed="rId3"/>
+          <a:stretch>
+            <a:fillRect/>
+          </a:stretch>
+        </p:blipFill>
+        <p:spPr>
+          <a:xfrm>
+            <a:off x="9555480" y="6355080"/>
+            <a:ext cx="640080" cy="411480"/>
+          </a:xfrm>
+          <a:prstGeom prst="rect">
+            <a:avLst/>
+          </a:prstGeom>
+        </p:spPr>
+      </p:pic>
+      <p:pic>
+        <p:nvPicPr>
+          <p:cNvPr id="35" name="Image 2" descr="/home/claude/work/logo_eu.jpeg">
+            <a:extLst>
+              <a:ext uri="{FF2B5EF4-FFF2-40B4-BE49-F238E27FC236}">
+                <a16:creationId xmlns:a16="http://schemas.microsoft.com/office/drawing/2014/main" id="{2A0686E4-DC22-D899-AB53-A07E0FDE6F5E}"/>
+              </a:ext>
+            </a:extLst>
+          </p:cNvPr>
+          <p:cNvPicPr>
+            <a:picLocks noChangeAspect="1"/>
+          </p:cNvPicPr>
+          <p:nvPr/>
+        </p:nvPicPr>
+        <p:blipFill>
+          <a:blip r:embed="rId4"/>
+          <a:stretch>
+            <a:fillRect/>
+          </a:stretch>
+        </p:blipFill>
+        <p:spPr>
+          <a:xfrm>
+            <a:off x="10296144" y="6400800"/>
+            <a:ext cx="1280160" cy="320040"/>
+          </a:xfrm>
+          <a:prstGeom prst="rect">
+            <a:avLst/>
+          </a:prstGeom>
+        </p:spPr>
+      </p:pic>
+      <p:pic>
+        <p:nvPicPr>
+          <p:cNvPr id="36" name="Image 3" descr="/home/claude/work/logo_itu.png">
+            <a:extLst>
+              <a:ext uri="{FF2B5EF4-FFF2-40B4-BE49-F238E27FC236}">
+                <a16:creationId xmlns:a16="http://schemas.microsoft.com/office/drawing/2014/main" id="{F7D71821-BDDE-9313-4E67-60FFF1550C2E}"/>
+              </a:ext>
+            </a:extLst>
+          </p:cNvPr>
+          <p:cNvPicPr>
+            <a:picLocks noChangeAspect="1"/>
+          </p:cNvPicPr>
+          <p:nvPr/>
+        </p:nvPicPr>
+        <p:blipFill>
+          <a:blip r:embed="rId5"/>
+          <a:stretch>
+            <a:fillRect/>
+          </a:stretch>
+        </p:blipFill>
+        <p:spPr>
+          <a:xfrm>
+            <a:off x="11686032" y="6355080"/>
+            <a:ext cx="411480" cy="411480"/>
+          </a:xfrm>
+          <a:prstGeom prst="rect">
+            <a:avLst/>
+          </a:prstGeom>
+        </p:spPr>
+      </p:pic>
+      <p:sp>
+        <p:nvSpPr>
+          <p:cNvPr id="37" name="Text 31">
+            <a:extLst>
+              <a:ext uri="{FF2B5EF4-FFF2-40B4-BE49-F238E27FC236}">
+                <a16:creationId xmlns:a16="http://schemas.microsoft.com/office/drawing/2014/main" id="{563F04FD-1C7A-CA38-3DF7-9CFCD5A683E9}"/>
+              </a:ext>
+            </a:extLst>
+          </p:cNvPr>
+          <p:cNvSpPr/>
+          <p:nvPr/>
+        </p:nvSpPr>
+        <p:spPr>
+          <a:xfrm>
+            <a:off x="548640" y="6565392"/>
+            <a:ext cx="1371600" cy="201168"/>
+          </a:xfrm>
+          <a:prstGeom prst="rect">
+            <a:avLst/>
+          </a:prstGeom>
+          <a:noFill/>
+          <a:ln/>
+        </p:spPr>
+        <p:txBody>
+          <a:bodyPr wrap="square" lIns="0" tIns="0" rIns="0" bIns="0" rtlCol="0" anchor="ctr"/>
+          <a:lstStyle/>
+          <a:p>
+            <a:pPr marL="0" indent="0" algn="l">
+              <a:buNone/>
+            </a:pPr>
+            <a:r>
+              <a:rPr lang="en-US" sz="900" dirty="0">
+                <a:solidFill>
+                  <a:srgbClr val="B0B0B0"/>
+                </a:solidFill>
+                <a:latin typeface="Calibri" pitchFamily="34" charset="0"/>
+                <a:ea typeface="Calibri" pitchFamily="34" charset="-122"/>
+                <a:cs typeface="Calibri" pitchFamily="34" charset="-120"/>
+              </a:rPr>
+              <a:t>8 / 13</a:t>
+            </a:r>
+            <a:endParaRPr lang="en-US" sz="900" dirty="0"/>
+          </a:p>
+        </p:txBody>
+      </p:sp>
+      <p:graphicFrame>
+        <p:nvGraphicFramePr>
+          <p:cNvPr id="4" name="표 3">
+            <a:extLst>
+              <a:ext uri="{FF2B5EF4-FFF2-40B4-BE49-F238E27FC236}">
+                <a16:creationId xmlns:a16="http://schemas.microsoft.com/office/drawing/2014/main" id="{59F77DC4-A30B-9C53-9FF4-0F666543D6F5}"/>
+              </a:ext>
+            </a:extLst>
+          </p:cNvPr>
+          <p:cNvGraphicFramePr>
+            <a:graphicFrameLocks noGrp="1"/>
+          </p:cNvGraphicFramePr>
+          <p:nvPr>
+            <p:extLst>
+              <p:ext uri="{D42A27DB-BD31-4B8C-83A1-F6EECF244321}">
+                <p14:modId xmlns:p14="http://schemas.microsoft.com/office/powerpoint/2010/main" val="1963276421"/>
+              </p:ext>
+            </p:extLst>
+          </p:nvPr>
+        </p:nvGraphicFramePr>
+        <p:xfrm>
+          <a:off x="548640" y="987552"/>
+          <a:ext cx="6851620" cy="4686300"/>
+        </p:xfrm>
+        <a:graphic>
+          <a:graphicData uri="http://schemas.openxmlformats.org/drawingml/2006/table">
+            <a:tbl>
+              <a:tblPr firstRow="1" firstCol="1" bandRow="1">
+                <a:tableStyleId>{5C22544A-7EE6-4342-B048-85BDC9FD1C3A}</a:tableStyleId>
+              </a:tblPr>
+              <a:tblGrid>
+                <a:gridCol w="2524474">
+                  <a:extLst>
+                    <a:ext uri="{9D8B030D-6E8A-4147-A177-3AD203B41FA5}">
+                      <a16:colId xmlns:a16="http://schemas.microsoft.com/office/drawing/2014/main" val="3845813342"/>
+                    </a:ext>
+                  </a:extLst>
+                </a:gridCol>
+                <a:gridCol w="1527142">
+                  <a:extLst>
+                    <a:ext uri="{9D8B030D-6E8A-4147-A177-3AD203B41FA5}">
+                      <a16:colId xmlns:a16="http://schemas.microsoft.com/office/drawing/2014/main" val="3636806750"/>
+                    </a:ext>
+                  </a:extLst>
+                </a:gridCol>
+                <a:gridCol w="1557919">
+                  <a:extLst>
+                    <a:ext uri="{9D8B030D-6E8A-4147-A177-3AD203B41FA5}">
+                      <a16:colId xmlns:a16="http://schemas.microsoft.com/office/drawing/2014/main" val="3258051874"/>
+                    </a:ext>
+                  </a:extLst>
+                </a:gridCol>
+                <a:gridCol w="1242085">
+                  <a:extLst>
+                    <a:ext uri="{9D8B030D-6E8A-4147-A177-3AD203B41FA5}">
+                      <a16:colId xmlns:a16="http://schemas.microsoft.com/office/drawing/2014/main" val="3925040223"/>
+                    </a:ext>
+                  </a:extLst>
+                </a:gridCol>
+              </a:tblGrid>
+              <a:tr h="187452">
+                <a:tc>
+                  <a:txBody>
+                    <a:bodyPr/>
+                    <a:lstStyle/>
+                    <a:p>
+                      <a:pPr algn="ctr">
+                        <a:lnSpc>
+                          <a:spcPct val="107000"/>
+                        </a:lnSpc>
+                        <a:spcAft>
+                          <a:spcPts val="500"/>
+                        </a:spcAft>
+                        <a:buNone/>
+                      </a:pPr>
+                      <a:r>
+                        <a:rPr lang="ko-KR" sz="900" dirty="0" err="1">
+                          <a:effectLst/>
+                        </a:rPr>
+                        <a:t>Variable</a:t>
+                      </a:r>
+                      <a:endParaRPr lang="ko-KR" sz="1100" dirty="0">
+                        <a:solidFill>
+                          <a:srgbClr val="222222"/>
+                        </a:solidFill>
+                        <a:effectLst/>
+                        <a:latin typeface="Aptos" panose="020B0004020202020204" pitchFamily="34" charset="0"/>
+                        <a:ea typeface="Aptos" panose="020B0004020202020204" pitchFamily="34" charset="0"/>
+                        <a:cs typeface="Aptos" panose="020B0004020202020204" pitchFamily="34" charset="0"/>
+                      </a:endParaRPr>
+                    </a:p>
+                  </a:txBody>
+                  <a:tcPr marL="32116" marR="32116" marT="10972" marB="10972" anchor="ctr"/>
+                </a:tc>
+                <a:tc>
+                  <a:txBody>
+                    <a:bodyPr/>
+                    <a:lstStyle/>
+                    <a:p>
+                      <a:pPr algn="ctr">
+                        <a:lnSpc>
+                          <a:spcPct val="107000"/>
+                        </a:lnSpc>
+                        <a:spcAft>
+                          <a:spcPts val="500"/>
+                        </a:spcAft>
+                        <a:buNone/>
+                      </a:pPr>
+                      <a:r>
+                        <a:rPr lang="ko-KR" sz="900" dirty="0" err="1">
+                          <a:effectLst/>
+                        </a:rPr>
+                        <a:t>Model</a:t>
+                      </a:r>
+                      <a:r>
+                        <a:rPr lang="ko-KR" sz="900" dirty="0">
+                          <a:effectLst/>
+                        </a:rPr>
+                        <a:t> 1</a:t>
+                      </a:r>
+                      <a:endParaRPr lang="ko-KR" sz="1100" dirty="0">
+                        <a:solidFill>
+                          <a:srgbClr val="222222"/>
+                        </a:solidFill>
+                        <a:effectLst/>
+                        <a:latin typeface="Aptos" panose="020B0004020202020204" pitchFamily="34" charset="0"/>
+                        <a:ea typeface="Aptos" panose="020B0004020202020204" pitchFamily="34" charset="0"/>
+                        <a:cs typeface="Aptos" panose="020B0004020202020204" pitchFamily="34" charset="0"/>
+                      </a:endParaRPr>
+                    </a:p>
+                  </a:txBody>
+                  <a:tcPr marL="32116" marR="32116" marT="10972" marB="10972" anchor="ctr"/>
+                </a:tc>
+                <a:tc>
+                  <a:txBody>
+                    <a:bodyPr/>
+                    <a:lstStyle/>
+                    <a:p>
+                      <a:pPr algn="ctr">
+                        <a:lnSpc>
+                          <a:spcPct val="107000"/>
+                        </a:lnSpc>
+                        <a:spcAft>
+                          <a:spcPts val="500"/>
+                        </a:spcAft>
+                        <a:buNone/>
+                      </a:pPr>
+                      <a:r>
+                        <a:rPr lang="ko-KR" sz="900" dirty="0" err="1">
+                          <a:effectLst/>
+                        </a:rPr>
+                        <a:t>Model</a:t>
+                      </a:r>
+                      <a:r>
+                        <a:rPr lang="ko-KR" sz="900" dirty="0">
+                          <a:effectLst/>
+                        </a:rPr>
+                        <a:t> 2</a:t>
+                      </a:r>
+                      <a:endParaRPr lang="ko-KR" sz="1100" dirty="0">
+                        <a:solidFill>
+                          <a:srgbClr val="222222"/>
+                        </a:solidFill>
+                        <a:effectLst/>
+                        <a:latin typeface="Aptos" panose="020B0004020202020204" pitchFamily="34" charset="0"/>
+                        <a:ea typeface="Aptos" panose="020B0004020202020204" pitchFamily="34" charset="0"/>
+                        <a:cs typeface="Aptos" panose="020B0004020202020204" pitchFamily="34" charset="0"/>
+                      </a:endParaRPr>
+                    </a:p>
+                  </a:txBody>
+                  <a:tcPr marL="32116" marR="32116" marT="10972" marB="10972" anchor="ctr"/>
+                </a:tc>
+                <a:tc>
+                  <a:txBody>
+                    <a:bodyPr/>
+                    <a:lstStyle/>
+                    <a:p>
+                      <a:pPr algn="ctr">
+                        <a:lnSpc>
+                          <a:spcPct val="107000"/>
+                        </a:lnSpc>
+                        <a:spcAft>
+                          <a:spcPts val="500"/>
+                        </a:spcAft>
+                        <a:buNone/>
+                      </a:pPr>
+                      <a:r>
+                        <a:rPr lang="ko-KR" sz="900" dirty="0" err="1">
+                          <a:effectLst/>
+                        </a:rPr>
+                        <a:t>Model</a:t>
+                      </a:r>
+                      <a:r>
+                        <a:rPr lang="ko-KR" sz="900" dirty="0">
+                          <a:effectLst/>
+                        </a:rPr>
+                        <a:t> 3</a:t>
+                      </a:r>
+                      <a:endParaRPr lang="ko-KR" sz="1100" dirty="0">
+                        <a:solidFill>
+                          <a:srgbClr val="222222"/>
+                        </a:solidFill>
+                        <a:effectLst/>
+                        <a:latin typeface="Aptos" panose="020B0004020202020204" pitchFamily="34" charset="0"/>
+                        <a:ea typeface="Aptos" panose="020B0004020202020204" pitchFamily="34" charset="0"/>
+                        <a:cs typeface="Aptos" panose="020B0004020202020204" pitchFamily="34" charset="0"/>
+                      </a:endParaRPr>
+                    </a:p>
+                  </a:txBody>
+                  <a:tcPr marL="32116" marR="32116" marT="10972" marB="10972" anchor="ctr"/>
+                </a:tc>
+                <a:extLst>
+                  <a:ext uri="{0D108BD9-81ED-4DB2-BD59-A6C34878D82A}">
+                    <a16:rowId xmlns:a16="http://schemas.microsoft.com/office/drawing/2014/main" val="3031726232"/>
+                  </a:ext>
+                </a:extLst>
+              </a:tr>
+              <a:tr h="187452">
+                <a:tc>
+                  <a:txBody>
+                    <a:bodyPr/>
+                    <a:lstStyle/>
+                    <a:p>
+                      <a:pPr algn="ctr">
+                        <a:lnSpc>
+                          <a:spcPct val="107000"/>
+                        </a:lnSpc>
+                        <a:spcAft>
+                          <a:spcPts val="500"/>
+                        </a:spcAft>
+                        <a:buNone/>
+                      </a:pPr>
+                      <a:r>
+                        <a:rPr lang="ko-KR" sz="900" dirty="0" err="1">
+                          <a:effectLst/>
+                        </a:rPr>
+                        <a:t>Level</a:t>
+                      </a:r>
+                      <a:r>
+                        <a:rPr lang="ko-KR" sz="900" dirty="0">
+                          <a:effectLst/>
+                        </a:rPr>
+                        <a:t> 1: </a:t>
+                      </a:r>
+                      <a:r>
+                        <a:rPr lang="ko-KR" sz="900" dirty="0" err="1">
+                          <a:effectLst/>
+                        </a:rPr>
+                        <a:t>Individual</a:t>
+                      </a:r>
+                      <a:r>
+                        <a:rPr lang="ko-KR" sz="900" dirty="0">
+                          <a:effectLst/>
+                        </a:rPr>
+                        <a:t> </a:t>
+                      </a:r>
+                      <a:r>
+                        <a:rPr lang="ko-KR" sz="900" dirty="0" err="1">
+                          <a:effectLst/>
+                        </a:rPr>
+                        <a:t>characteristics</a:t>
+                      </a:r>
+                      <a:endParaRPr lang="ko-KR" sz="1000" dirty="0">
+                        <a:solidFill>
+                          <a:srgbClr val="222222"/>
+                        </a:solidFill>
+                        <a:effectLst/>
+                        <a:latin typeface="Aptos" panose="020B0004020202020204" pitchFamily="34" charset="0"/>
+                        <a:ea typeface="Aptos" panose="020B0004020202020204" pitchFamily="34" charset="0"/>
+                        <a:cs typeface="Aptos" panose="020B0004020202020204" pitchFamily="34" charset="0"/>
+                      </a:endParaRPr>
+                    </a:p>
+                  </a:txBody>
+                  <a:tcPr marL="34586" marR="34586" marT="10972" marB="10972" anchor="ctr"/>
+                </a:tc>
+                <a:tc>
+                  <a:txBody>
+                    <a:bodyPr/>
+                    <a:lstStyle/>
+                    <a:p>
+                      <a:pPr algn="ctr">
+                        <a:lnSpc>
+                          <a:spcPct val="107000"/>
+                        </a:lnSpc>
+                        <a:spcAft>
+                          <a:spcPts val="500"/>
+                        </a:spcAft>
+                        <a:buNone/>
+                      </a:pPr>
+                      <a:r>
+                        <a:rPr lang="ko-KR" sz="900" dirty="0">
+                          <a:effectLst/>
+                        </a:rPr>
+                        <a:t> </a:t>
+                      </a:r>
+                      <a:endParaRPr lang="ko-KR" sz="1000" dirty="0">
+                        <a:solidFill>
+                          <a:srgbClr val="222222"/>
+                        </a:solidFill>
+                        <a:effectLst/>
+                        <a:latin typeface="Aptos" panose="020B0004020202020204" pitchFamily="34" charset="0"/>
+                        <a:ea typeface="Aptos" panose="020B0004020202020204" pitchFamily="34" charset="0"/>
+                        <a:cs typeface="Aptos" panose="020B0004020202020204" pitchFamily="34" charset="0"/>
+                      </a:endParaRPr>
+                    </a:p>
+                  </a:txBody>
+                  <a:tcPr marL="34586" marR="34586" marT="10972" marB="10972"/>
+                </a:tc>
+                <a:tc>
+                  <a:txBody>
+                    <a:bodyPr/>
+                    <a:lstStyle/>
+                    <a:p>
+                      <a:pPr algn="ctr">
+                        <a:lnSpc>
+                          <a:spcPct val="107000"/>
+                        </a:lnSpc>
+                        <a:spcAft>
+                          <a:spcPts val="500"/>
+                        </a:spcAft>
+                        <a:buNone/>
+                      </a:pPr>
+                      <a:r>
+                        <a:rPr lang="ko-KR" sz="900" dirty="0">
+                          <a:effectLst/>
+                        </a:rPr>
+                        <a:t> </a:t>
+                      </a:r>
+                      <a:endParaRPr lang="ko-KR" sz="1000" dirty="0">
+                        <a:solidFill>
+                          <a:srgbClr val="222222"/>
+                        </a:solidFill>
+                        <a:effectLst/>
+                        <a:latin typeface="Aptos" panose="020B0004020202020204" pitchFamily="34" charset="0"/>
+                        <a:ea typeface="Aptos" panose="020B0004020202020204" pitchFamily="34" charset="0"/>
+                        <a:cs typeface="Aptos" panose="020B0004020202020204" pitchFamily="34" charset="0"/>
+                      </a:endParaRPr>
+                    </a:p>
+                  </a:txBody>
+                  <a:tcPr marL="34586" marR="34586" marT="10972" marB="10972"/>
+                </a:tc>
+                <a:tc>
+                  <a:txBody>
+                    <a:bodyPr/>
+                    <a:lstStyle/>
+                    <a:p>
+                      <a:pPr algn="ctr">
+                        <a:lnSpc>
+                          <a:spcPct val="107000"/>
+                        </a:lnSpc>
+                        <a:spcAft>
+                          <a:spcPts val="500"/>
+                        </a:spcAft>
+                        <a:buNone/>
+                      </a:pPr>
+                      <a:r>
+                        <a:rPr lang="ko-KR" sz="900" dirty="0">
+                          <a:effectLst/>
+                        </a:rPr>
+                        <a:t> </a:t>
+                      </a:r>
+                      <a:endParaRPr lang="ko-KR" sz="1000" dirty="0">
+                        <a:solidFill>
+                          <a:srgbClr val="222222"/>
+                        </a:solidFill>
+                        <a:effectLst/>
+                        <a:latin typeface="Aptos" panose="020B0004020202020204" pitchFamily="34" charset="0"/>
+                        <a:ea typeface="Aptos" panose="020B0004020202020204" pitchFamily="34" charset="0"/>
+                        <a:cs typeface="Aptos" panose="020B0004020202020204" pitchFamily="34" charset="0"/>
+                      </a:endParaRPr>
+                    </a:p>
+                  </a:txBody>
+                  <a:tcPr marL="34586" marR="34586" marT="10972" marB="10972"/>
+                </a:tc>
+                <a:extLst>
+                  <a:ext uri="{0D108BD9-81ED-4DB2-BD59-A6C34878D82A}">
+                    <a16:rowId xmlns:a16="http://schemas.microsoft.com/office/drawing/2014/main" val="3653367983"/>
+                  </a:ext>
+                </a:extLst>
+              </a:tr>
+              <a:tr h="187452">
+                <a:tc>
+                  <a:txBody>
+                    <a:bodyPr/>
+                    <a:lstStyle/>
+                    <a:p>
+                      <a:pPr algn="just">
+                        <a:lnSpc>
+                          <a:spcPct val="107000"/>
+                        </a:lnSpc>
+                        <a:spcAft>
+                          <a:spcPts val="500"/>
+                        </a:spcAft>
+                        <a:buNone/>
+                      </a:pPr>
+                      <a:r>
+                        <a:rPr lang="ko-KR" sz="900" dirty="0" err="1">
+                          <a:effectLst/>
+                        </a:rPr>
+                        <a:t>Intercept</a:t>
+                      </a:r>
+                      <a:endParaRPr lang="ko-KR" sz="1000" dirty="0">
+                        <a:solidFill>
+                          <a:srgbClr val="222222"/>
+                        </a:solidFill>
+                        <a:effectLst/>
+                        <a:latin typeface="Aptos" panose="020B0004020202020204" pitchFamily="34" charset="0"/>
+                        <a:ea typeface="Aptos" panose="020B0004020202020204" pitchFamily="34" charset="0"/>
+                        <a:cs typeface="Aptos" panose="020B0004020202020204" pitchFamily="34" charset="0"/>
+                      </a:endParaRPr>
+                    </a:p>
+                  </a:txBody>
+                  <a:tcPr marL="34586" marR="34586" marT="10972" marB="10972" anchor="ctr"/>
+                </a:tc>
+                <a:tc>
+                  <a:txBody>
+                    <a:bodyPr/>
+                    <a:lstStyle/>
+                    <a:p>
+                      <a:pPr algn="ctr">
+                        <a:lnSpc>
+                          <a:spcPct val="107000"/>
+                        </a:lnSpc>
+                        <a:spcAft>
+                          <a:spcPts val="500"/>
+                        </a:spcAft>
+                        <a:buNone/>
+                      </a:pPr>
+                      <a:r>
+                        <a:rPr lang="ko-KR" sz="900">
+                          <a:effectLst/>
+                        </a:rPr>
+                        <a:t>63.204*** (0.416)</a:t>
+                      </a:r>
+                      <a:endParaRPr lang="ko-KR" sz="1000">
+                        <a:solidFill>
+                          <a:srgbClr val="222222"/>
+                        </a:solidFill>
+                        <a:effectLst/>
+                        <a:latin typeface="Aptos" panose="020B0004020202020204" pitchFamily="34" charset="0"/>
+                        <a:ea typeface="Aptos" panose="020B0004020202020204" pitchFamily="34" charset="0"/>
+                        <a:cs typeface="Aptos" panose="020B0004020202020204" pitchFamily="34" charset="0"/>
+                      </a:endParaRPr>
+                    </a:p>
+                  </a:txBody>
+                  <a:tcPr marL="34586" marR="34586" marT="10972" marB="10972"/>
+                </a:tc>
+                <a:tc>
+                  <a:txBody>
+                    <a:bodyPr/>
+                    <a:lstStyle/>
+                    <a:p>
+                      <a:pPr algn="ctr">
+                        <a:lnSpc>
+                          <a:spcPct val="107000"/>
+                        </a:lnSpc>
+                        <a:spcAft>
+                          <a:spcPts val="500"/>
+                        </a:spcAft>
+                        <a:buNone/>
+                      </a:pPr>
+                      <a:r>
+                        <a:rPr lang="ko-KR" sz="900">
+                          <a:effectLst/>
+                        </a:rPr>
+                        <a:t>64.282*** (0.764)</a:t>
+                      </a:r>
+                      <a:endParaRPr lang="ko-KR" sz="1000">
+                        <a:solidFill>
+                          <a:srgbClr val="222222"/>
+                        </a:solidFill>
+                        <a:effectLst/>
+                        <a:latin typeface="Aptos" panose="020B0004020202020204" pitchFamily="34" charset="0"/>
+                        <a:ea typeface="Aptos" panose="020B0004020202020204" pitchFamily="34" charset="0"/>
+                        <a:cs typeface="Aptos" panose="020B0004020202020204" pitchFamily="34" charset="0"/>
+                      </a:endParaRPr>
+                    </a:p>
+                  </a:txBody>
+                  <a:tcPr marL="34586" marR="34586" marT="10972" marB="10972"/>
+                </a:tc>
+                <a:tc>
+                  <a:txBody>
+                    <a:bodyPr/>
+                    <a:lstStyle/>
+                    <a:p>
+                      <a:pPr algn="ctr">
+                        <a:lnSpc>
+                          <a:spcPct val="107000"/>
+                        </a:lnSpc>
+                        <a:spcAft>
+                          <a:spcPts val="500"/>
+                        </a:spcAft>
+                        <a:buNone/>
+                      </a:pPr>
+                      <a:r>
+                        <a:rPr lang="ko-KR" sz="900">
+                          <a:effectLst/>
+                        </a:rPr>
+                        <a:t>64.431*** (0.759)</a:t>
+                      </a:r>
+                      <a:endParaRPr lang="ko-KR" sz="1000">
+                        <a:solidFill>
+                          <a:srgbClr val="222222"/>
+                        </a:solidFill>
+                        <a:effectLst/>
+                        <a:latin typeface="Aptos" panose="020B0004020202020204" pitchFamily="34" charset="0"/>
+                        <a:ea typeface="Aptos" panose="020B0004020202020204" pitchFamily="34" charset="0"/>
+                        <a:cs typeface="Aptos" panose="020B0004020202020204" pitchFamily="34" charset="0"/>
+                      </a:endParaRPr>
+                    </a:p>
+                  </a:txBody>
+                  <a:tcPr marL="34586" marR="34586" marT="10972" marB="10972"/>
+                </a:tc>
+                <a:extLst>
+                  <a:ext uri="{0D108BD9-81ED-4DB2-BD59-A6C34878D82A}">
+                    <a16:rowId xmlns:a16="http://schemas.microsoft.com/office/drawing/2014/main" val="2861784482"/>
+                  </a:ext>
+                </a:extLst>
+              </a:tr>
+              <a:tr h="187452">
+                <a:tc>
+                  <a:txBody>
+                    <a:bodyPr/>
+                    <a:lstStyle/>
+                    <a:p>
+                      <a:pPr algn="just">
+                        <a:lnSpc>
+                          <a:spcPct val="107000"/>
+                        </a:lnSpc>
+                        <a:spcAft>
+                          <a:spcPts val="500"/>
+                        </a:spcAft>
+                        <a:buNone/>
+                      </a:pPr>
+                      <a:r>
+                        <a:rPr lang="ko-KR" sz="900" dirty="0" err="1">
+                          <a:effectLst/>
+                        </a:rPr>
+                        <a:t>Age</a:t>
+                      </a:r>
+                      <a:r>
+                        <a:rPr lang="ko-KR" sz="900" dirty="0">
+                          <a:effectLst/>
+                        </a:rPr>
+                        <a:t> (</a:t>
+                      </a:r>
+                      <a:r>
+                        <a:rPr lang="ko-KR" sz="900" dirty="0" err="1">
+                          <a:effectLst/>
+                        </a:rPr>
+                        <a:t>centered</a:t>
+                      </a:r>
+                      <a:r>
+                        <a:rPr lang="ko-KR" sz="900" dirty="0">
+                          <a:effectLst/>
+                        </a:rPr>
+                        <a:t>)</a:t>
+                      </a:r>
+                      <a:endParaRPr lang="ko-KR" sz="1000" dirty="0">
+                        <a:solidFill>
+                          <a:srgbClr val="222222"/>
+                        </a:solidFill>
+                        <a:effectLst/>
+                        <a:latin typeface="Aptos" panose="020B0004020202020204" pitchFamily="34" charset="0"/>
+                        <a:ea typeface="Aptos" panose="020B0004020202020204" pitchFamily="34" charset="0"/>
+                        <a:cs typeface="Aptos" panose="020B0004020202020204" pitchFamily="34" charset="0"/>
+                      </a:endParaRPr>
+                    </a:p>
+                  </a:txBody>
+                  <a:tcPr marL="34586" marR="34586" marT="10972" marB="10972" anchor="ctr"/>
+                </a:tc>
+                <a:tc>
+                  <a:txBody>
+                    <a:bodyPr/>
+                    <a:lstStyle/>
+                    <a:p>
+                      <a:pPr algn="ctr">
+                        <a:lnSpc>
+                          <a:spcPct val="107000"/>
+                        </a:lnSpc>
+                        <a:spcAft>
+                          <a:spcPts val="500"/>
+                        </a:spcAft>
+                        <a:buNone/>
+                      </a:pPr>
+                      <a:r>
+                        <a:rPr lang="ko-KR" sz="900">
+                          <a:effectLst/>
+                        </a:rPr>
+                        <a:t>-0.347*** (0.012)</a:t>
+                      </a:r>
+                      <a:endParaRPr lang="ko-KR" sz="1000">
+                        <a:solidFill>
+                          <a:srgbClr val="222222"/>
+                        </a:solidFill>
+                        <a:effectLst/>
+                        <a:latin typeface="Aptos" panose="020B0004020202020204" pitchFamily="34" charset="0"/>
+                        <a:ea typeface="Aptos" panose="020B0004020202020204" pitchFamily="34" charset="0"/>
+                        <a:cs typeface="Aptos" panose="020B0004020202020204" pitchFamily="34" charset="0"/>
+                      </a:endParaRPr>
+                    </a:p>
+                  </a:txBody>
+                  <a:tcPr marL="34586" marR="34586" marT="10972" marB="10972"/>
+                </a:tc>
+                <a:tc>
+                  <a:txBody>
+                    <a:bodyPr/>
+                    <a:lstStyle/>
+                    <a:p>
+                      <a:pPr algn="ctr">
+                        <a:lnSpc>
+                          <a:spcPct val="107000"/>
+                        </a:lnSpc>
+                        <a:spcAft>
+                          <a:spcPts val="500"/>
+                        </a:spcAft>
+                        <a:buNone/>
+                      </a:pPr>
+                      <a:r>
+                        <a:rPr lang="ko-KR" sz="900">
+                          <a:effectLst/>
+                        </a:rPr>
+                        <a:t>-0.347*** (0.012)</a:t>
+                      </a:r>
+                      <a:endParaRPr lang="ko-KR" sz="1000">
+                        <a:solidFill>
+                          <a:srgbClr val="222222"/>
+                        </a:solidFill>
+                        <a:effectLst/>
+                        <a:latin typeface="Aptos" panose="020B0004020202020204" pitchFamily="34" charset="0"/>
+                        <a:ea typeface="Aptos" panose="020B0004020202020204" pitchFamily="34" charset="0"/>
+                        <a:cs typeface="Aptos" panose="020B0004020202020204" pitchFamily="34" charset="0"/>
+                      </a:endParaRPr>
+                    </a:p>
+                  </a:txBody>
+                  <a:tcPr marL="34586" marR="34586" marT="10972" marB="10972"/>
+                </a:tc>
+                <a:tc>
+                  <a:txBody>
+                    <a:bodyPr/>
+                    <a:lstStyle/>
+                    <a:p>
+                      <a:pPr algn="ctr">
+                        <a:lnSpc>
+                          <a:spcPct val="107000"/>
+                        </a:lnSpc>
+                        <a:spcAft>
+                          <a:spcPts val="500"/>
+                        </a:spcAft>
+                        <a:buNone/>
+                      </a:pPr>
+                      <a:r>
+                        <a:rPr lang="ko-KR" sz="900">
+                          <a:effectLst/>
+                        </a:rPr>
+                        <a:t>-0.337*** (0.012)</a:t>
+                      </a:r>
+                      <a:endParaRPr lang="ko-KR" sz="1000">
+                        <a:solidFill>
+                          <a:srgbClr val="222222"/>
+                        </a:solidFill>
+                        <a:effectLst/>
+                        <a:latin typeface="Aptos" panose="020B0004020202020204" pitchFamily="34" charset="0"/>
+                        <a:ea typeface="Aptos" panose="020B0004020202020204" pitchFamily="34" charset="0"/>
+                        <a:cs typeface="Aptos" panose="020B0004020202020204" pitchFamily="34" charset="0"/>
+                      </a:endParaRPr>
+                    </a:p>
+                  </a:txBody>
+                  <a:tcPr marL="34586" marR="34586" marT="10972" marB="10972"/>
+                </a:tc>
+                <a:extLst>
+                  <a:ext uri="{0D108BD9-81ED-4DB2-BD59-A6C34878D82A}">
+                    <a16:rowId xmlns:a16="http://schemas.microsoft.com/office/drawing/2014/main" val="2077787482"/>
+                  </a:ext>
+                </a:extLst>
+              </a:tr>
+              <a:tr h="187452">
+                <a:tc>
+                  <a:txBody>
+                    <a:bodyPr/>
+                    <a:lstStyle/>
+                    <a:p>
+                      <a:pPr algn="just">
+                        <a:lnSpc>
+                          <a:spcPct val="107000"/>
+                        </a:lnSpc>
+                        <a:spcAft>
+                          <a:spcPts val="500"/>
+                        </a:spcAft>
+                        <a:buNone/>
+                      </a:pPr>
+                      <a:r>
+                        <a:rPr lang="ko-KR" sz="900" dirty="0" err="1">
+                          <a:effectLst/>
+                        </a:rPr>
+                        <a:t>Female</a:t>
+                      </a:r>
+                      <a:endParaRPr lang="ko-KR" sz="1000" dirty="0">
+                        <a:solidFill>
+                          <a:srgbClr val="222222"/>
+                        </a:solidFill>
+                        <a:effectLst/>
+                        <a:latin typeface="Aptos" panose="020B0004020202020204" pitchFamily="34" charset="0"/>
+                        <a:ea typeface="Aptos" panose="020B0004020202020204" pitchFamily="34" charset="0"/>
+                        <a:cs typeface="Aptos" panose="020B0004020202020204" pitchFamily="34" charset="0"/>
+                      </a:endParaRPr>
+                    </a:p>
+                  </a:txBody>
+                  <a:tcPr marL="34586" marR="34586" marT="10972" marB="10972" anchor="ctr"/>
+                </a:tc>
+                <a:tc>
+                  <a:txBody>
+                    <a:bodyPr/>
+                    <a:lstStyle/>
+                    <a:p>
+                      <a:pPr algn="ctr">
+                        <a:lnSpc>
+                          <a:spcPct val="107000"/>
+                        </a:lnSpc>
+                        <a:spcAft>
+                          <a:spcPts val="500"/>
+                        </a:spcAft>
+                        <a:buNone/>
+                      </a:pPr>
+                      <a:r>
+                        <a:rPr lang="ko-KR" sz="900">
+                          <a:effectLst/>
+                        </a:rPr>
+                        <a:t>2.636*** (0.305)</a:t>
+                      </a:r>
+                      <a:endParaRPr lang="ko-KR" sz="1000">
+                        <a:solidFill>
+                          <a:srgbClr val="222222"/>
+                        </a:solidFill>
+                        <a:effectLst/>
+                        <a:latin typeface="Aptos" panose="020B0004020202020204" pitchFamily="34" charset="0"/>
+                        <a:ea typeface="Aptos" panose="020B0004020202020204" pitchFamily="34" charset="0"/>
+                        <a:cs typeface="Aptos" panose="020B0004020202020204" pitchFamily="34" charset="0"/>
+                      </a:endParaRPr>
+                    </a:p>
+                  </a:txBody>
+                  <a:tcPr marL="34586" marR="34586" marT="10972" marB="10972"/>
+                </a:tc>
+                <a:tc>
+                  <a:txBody>
+                    <a:bodyPr/>
+                    <a:lstStyle/>
+                    <a:p>
+                      <a:pPr algn="ctr">
+                        <a:lnSpc>
+                          <a:spcPct val="107000"/>
+                        </a:lnSpc>
+                        <a:spcAft>
+                          <a:spcPts val="500"/>
+                        </a:spcAft>
+                        <a:buNone/>
+                      </a:pPr>
+                      <a:r>
+                        <a:rPr lang="ko-KR" sz="900">
+                          <a:effectLst/>
+                        </a:rPr>
+                        <a:t>2.659*** (0.305)</a:t>
+                      </a:r>
+                      <a:endParaRPr lang="ko-KR" sz="1000">
+                        <a:solidFill>
+                          <a:srgbClr val="222222"/>
+                        </a:solidFill>
+                        <a:effectLst/>
+                        <a:latin typeface="Aptos" panose="020B0004020202020204" pitchFamily="34" charset="0"/>
+                        <a:ea typeface="Aptos" panose="020B0004020202020204" pitchFamily="34" charset="0"/>
+                        <a:cs typeface="Aptos" panose="020B0004020202020204" pitchFamily="34" charset="0"/>
+                      </a:endParaRPr>
+                    </a:p>
+                  </a:txBody>
+                  <a:tcPr marL="34586" marR="34586" marT="10972" marB="10972"/>
+                </a:tc>
+                <a:tc>
+                  <a:txBody>
+                    <a:bodyPr/>
+                    <a:lstStyle/>
+                    <a:p>
+                      <a:pPr algn="ctr">
+                        <a:lnSpc>
+                          <a:spcPct val="107000"/>
+                        </a:lnSpc>
+                        <a:spcAft>
+                          <a:spcPts val="500"/>
+                        </a:spcAft>
+                        <a:buNone/>
+                      </a:pPr>
+                      <a:r>
+                        <a:rPr lang="ko-KR" sz="900" dirty="0">
+                          <a:effectLst/>
+                        </a:rPr>
+                        <a:t>2.690*** (0.305)</a:t>
+                      </a:r>
+                      <a:endParaRPr lang="ko-KR" sz="1000" dirty="0">
+                        <a:solidFill>
+                          <a:srgbClr val="222222"/>
+                        </a:solidFill>
+                        <a:effectLst/>
+                        <a:latin typeface="Aptos" panose="020B0004020202020204" pitchFamily="34" charset="0"/>
+                        <a:ea typeface="Aptos" panose="020B0004020202020204" pitchFamily="34" charset="0"/>
+                        <a:cs typeface="Aptos" panose="020B0004020202020204" pitchFamily="34" charset="0"/>
+                      </a:endParaRPr>
+                    </a:p>
+                  </a:txBody>
+                  <a:tcPr marL="34586" marR="34586" marT="10972" marB="10972"/>
+                </a:tc>
+                <a:extLst>
+                  <a:ext uri="{0D108BD9-81ED-4DB2-BD59-A6C34878D82A}">
+                    <a16:rowId xmlns:a16="http://schemas.microsoft.com/office/drawing/2014/main" val="4148763290"/>
+                  </a:ext>
+                </a:extLst>
+              </a:tr>
+              <a:tr h="187452">
+                <a:tc>
+                  <a:txBody>
+                    <a:bodyPr/>
+                    <a:lstStyle/>
+                    <a:p>
+                      <a:pPr algn="just">
+                        <a:lnSpc>
+                          <a:spcPct val="107000"/>
+                        </a:lnSpc>
+                        <a:spcAft>
+                          <a:spcPts val="500"/>
+                        </a:spcAft>
+                        <a:buNone/>
+                      </a:pPr>
+                      <a:r>
+                        <a:rPr lang="ko-KR" sz="900">
+                          <a:effectLst/>
+                        </a:rPr>
+                        <a:t>Education: middle school or below</a:t>
+                      </a:r>
+                      <a:endParaRPr lang="ko-KR" sz="1000">
+                        <a:solidFill>
+                          <a:srgbClr val="222222"/>
+                        </a:solidFill>
+                        <a:effectLst/>
+                        <a:latin typeface="Aptos" panose="020B0004020202020204" pitchFamily="34" charset="0"/>
+                        <a:ea typeface="Aptos" panose="020B0004020202020204" pitchFamily="34" charset="0"/>
+                        <a:cs typeface="Aptos" panose="020B0004020202020204" pitchFamily="34" charset="0"/>
+                      </a:endParaRPr>
+                    </a:p>
+                  </a:txBody>
+                  <a:tcPr marL="34586" marR="34586" marT="10972" marB="10972" anchor="ctr"/>
+                </a:tc>
+                <a:tc>
+                  <a:txBody>
+                    <a:bodyPr/>
+                    <a:lstStyle/>
+                    <a:p>
+                      <a:pPr algn="ctr">
+                        <a:lnSpc>
+                          <a:spcPct val="107000"/>
+                        </a:lnSpc>
+                        <a:spcAft>
+                          <a:spcPts val="500"/>
+                        </a:spcAft>
+                        <a:buNone/>
+                      </a:pPr>
+                      <a:r>
+                        <a:rPr lang="ko-KR" sz="900" dirty="0">
+                          <a:effectLst/>
+                        </a:rPr>
+                        <a:t>-22.618*** (0.770)</a:t>
+                      </a:r>
+                      <a:endParaRPr lang="ko-KR" sz="1000" dirty="0">
+                        <a:solidFill>
+                          <a:srgbClr val="222222"/>
+                        </a:solidFill>
+                        <a:effectLst/>
+                        <a:latin typeface="Aptos" panose="020B0004020202020204" pitchFamily="34" charset="0"/>
+                        <a:ea typeface="Aptos" panose="020B0004020202020204" pitchFamily="34" charset="0"/>
+                        <a:cs typeface="Aptos" panose="020B0004020202020204" pitchFamily="34" charset="0"/>
+                      </a:endParaRPr>
+                    </a:p>
+                  </a:txBody>
+                  <a:tcPr marL="34586" marR="34586" marT="10972" marB="10972"/>
+                </a:tc>
+                <a:tc>
+                  <a:txBody>
+                    <a:bodyPr/>
+                    <a:lstStyle/>
+                    <a:p>
+                      <a:pPr algn="ctr">
+                        <a:lnSpc>
+                          <a:spcPct val="107000"/>
+                        </a:lnSpc>
+                        <a:spcAft>
+                          <a:spcPts val="500"/>
+                        </a:spcAft>
+                        <a:buNone/>
+                      </a:pPr>
+                      <a:r>
+                        <a:rPr lang="ko-KR" sz="900">
+                          <a:effectLst/>
+                        </a:rPr>
+                        <a:t>-22.674*** (0.770)</a:t>
+                      </a:r>
+                      <a:endParaRPr lang="ko-KR" sz="1000">
+                        <a:solidFill>
+                          <a:srgbClr val="222222"/>
+                        </a:solidFill>
+                        <a:effectLst/>
+                        <a:latin typeface="Aptos" panose="020B0004020202020204" pitchFamily="34" charset="0"/>
+                        <a:ea typeface="Aptos" panose="020B0004020202020204" pitchFamily="34" charset="0"/>
+                        <a:cs typeface="Aptos" panose="020B0004020202020204" pitchFamily="34" charset="0"/>
+                      </a:endParaRPr>
+                    </a:p>
+                  </a:txBody>
+                  <a:tcPr marL="34586" marR="34586" marT="10972" marB="10972"/>
+                </a:tc>
+                <a:tc>
+                  <a:txBody>
+                    <a:bodyPr/>
+                    <a:lstStyle/>
+                    <a:p>
+                      <a:pPr algn="ctr">
+                        <a:lnSpc>
+                          <a:spcPct val="107000"/>
+                        </a:lnSpc>
+                        <a:spcAft>
+                          <a:spcPts val="500"/>
+                        </a:spcAft>
+                        <a:buNone/>
+                      </a:pPr>
+                      <a:r>
+                        <a:rPr lang="ko-KR" sz="900" dirty="0">
+                          <a:effectLst/>
+                        </a:rPr>
+                        <a:t>-18.353*** (2.345)</a:t>
+                      </a:r>
+                      <a:endParaRPr lang="ko-KR" sz="1000" dirty="0">
+                        <a:solidFill>
+                          <a:srgbClr val="222222"/>
+                        </a:solidFill>
+                        <a:effectLst/>
+                        <a:highlight>
+                          <a:srgbClr val="FFFF00"/>
+                        </a:highlight>
+                        <a:latin typeface="Aptos" panose="020B0004020202020204" pitchFamily="34" charset="0"/>
+                        <a:ea typeface="Aptos" panose="020B0004020202020204" pitchFamily="34" charset="0"/>
+                        <a:cs typeface="Aptos" panose="020B0004020202020204" pitchFamily="34" charset="0"/>
+                      </a:endParaRPr>
+                    </a:p>
+                  </a:txBody>
+                  <a:tcPr marL="34586" marR="34586" marT="10972" marB="10972"/>
+                </a:tc>
+                <a:extLst>
+                  <a:ext uri="{0D108BD9-81ED-4DB2-BD59-A6C34878D82A}">
+                    <a16:rowId xmlns:a16="http://schemas.microsoft.com/office/drawing/2014/main" val="1723650672"/>
+                  </a:ext>
+                </a:extLst>
+              </a:tr>
+              <a:tr h="187452">
+                <a:tc>
+                  <a:txBody>
+                    <a:bodyPr/>
+                    <a:lstStyle/>
+                    <a:p>
+                      <a:pPr algn="just">
+                        <a:lnSpc>
+                          <a:spcPct val="107000"/>
+                        </a:lnSpc>
+                        <a:spcAft>
+                          <a:spcPts val="500"/>
+                        </a:spcAft>
+                        <a:buNone/>
+                      </a:pPr>
+                      <a:r>
+                        <a:rPr lang="ko-KR" sz="900">
+                          <a:effectLst/>
+                        </a:rPr>
+                        <a:t>Education: high school</a:t>
+                      </a:r>
+                      <a:endParaRPr lang="ko-KR" sz="1000">
+                        <a:solidFill>
+                          <a:srgbClr val="222222"/>
+                        </a:solidFill>
+                        <a:effectLst/>
+                        <a:latin typeface="Aptos" panose="020B0004020202020204" pitchFamily="34" charset="0"/>
+                        <a:ea typeface="Aptos" panose="020B0004020202020204" pitchFamily="34" charset="0"/>
+                        <a:cs typeface="Aptos" panose="020B0004020202020204" pitchFamily="34" charset="0"/>
+                      </a:endParaRPr>
+                    </a:p>
+                  </a:txBody>
+                  <a:tcPr marL="34586" marR="34586" marT="10972" marB="10972" anchor="ctr"/>
+                </a:tc>
+                <a:tc>
+                  <a:txBody>
+                    <a:bodyPr/>
+                    <a:lstStyle/>
+                    <a:p>
+                      <a:pPr algn="ctr">
+                        <a:lnSpc>
+                          <a:spcPct val="107000"/>
+                        </a:lnSpc>
+                        <a:spcAft>
+                          <a:spcPts val="500"/>
+                        </a:spcAft>
+                        <a:buNone/>
+                      </a:pPr>
+                      <a:r>
+                        <a:rPr lang="ko-KR" sz="900">
+                          <a:effectLst/>
+                        </a:rPr>
+                        <a:t>-7.289*** (0.380)</a:t>
+                      </a:r>
+                      <a:endParaRPr lang="ko-KR" sz="1000">
+                        <a:solidFill>
+                          <a:srgbClr val="222222"/>
+                        </a:solidFill>
+                        <a:effectLst/>
+                        <a:latin typeface="Aptos" panose="020B0004020202020204" pitchFamily="34" charset="0"/>
+                        <a:ea typeface="Aptos" panose="020B0004020202020204" pitchFamily="34" charset="0"/>
+                        <a:cs typeface="Aptos" panose="020B0004020202020204" pitchFamily="34" charset="0"/>
+                      </a:endParaRPr>
+                    </a:p>
+                  </a:txBody>
+                  <a:tcPr marL="34586" marR="34586" marT="10972" marB="10972"/>
+                </a:tc>
+                <a:tc>
+                  <a:txBody>
+                    <a:bodyPr/>
+                    <a:lstStyle/>
+                    <a:p>
+                      <a:pPr algn="ctr">
+                        <a:lnSpc>
+                          <a:spcPct val="107000"/>
+                        </a:lnSpc>
+                        <a:spcAft>
+                          <a:spcPts val="500"/>
+                        </a:spcAft>
+                        <a:buNone/>
+                      </a:pPr>
+                      <a:r>
+                        <a:rPr lang="ko-KR" sz="900">
+                          <a:effectLst/>
+                        </a:rPr>
+                        <a:t>-7.330*** (0.381)</a:t>
+                      </a:r>
+                      <a:endParaRPr lang="ko-KR" sz="1000">
+                        <a:solidFill>
+                          <a:srgbClr val="222222"/>
+                        </a:solidFill>
+                        <a:effectLst/>
+                        <a:latin typeface="Aptos" panose="020B0004020202020204" pitchFamily="34" charset="0"/>
+                        <a:ea typeface="Aptos" panose="020B0004020202020204" pitchFamily="34" charset="0"/>
+                        <a:cs typeface="Aptos" panose="020B0004020202020204" pitchFamily="34" charset="0"/>
+                      </a:endParaRPr>
+                    </a:p>
+                  </a:txBody>
+                  <a:tcPr marL="34586" marR="34586" marT="10972" marB="10972"/>
+                </a:tc>
+                <a:tc>
+                  <a:txBody>
+                    <a:bodyPr/>
+                    <a:lstStyle/>
+                    <a:p>
+                      <a:pPr algn="ctr">
+                        <a:lnSpc>
+                          <a:spcPct val="107000"/>
+                        </a:lnSpc>
+                        <a:spcAft>
+                          <a:spcPts val="500"/>
+                        </a:spcAft>
+                        <a:buNone/>
+                      </a:pPr>
+                      <a:r>
+                        <a:rPr lang="ko-KR" sz="900" dirty="0">
+                          <a:effectLst/>
+                        </a:rPr>
+                        <a:t>-7.432*** (0.381)</a:t>
+                      </a:r>
+                      <a:endParaRPr lang="ko-KR" sz="1000" dirty="0">
+                        <a:solidFill>
+                          <a:srgbClr val="222222"/>
+                        </a:solidFill>
+                        <a:effectLst/>
+                        <a:latin typeface="Aptos" panose="020B0004020202020204" pitchFamily="34" charset="0"/>
+                        <a:ea typeface="Aptos" panose="020B0004020202020204" pitchFamily="34" charset="0"/>
+                        <a:cs typeface="Aptos" panose="020B0004020202020204" pitchFamily="34" charset="0"/>
+                      </a:endParaRPr>
+                    </a:p>
+                  </a:txBody>
+                  <a:tcPr marL="34586" marR="34586" marT="10972" marB="10972"/>
+                </a:tc>
+                <a:extLst>
+                  <a:ext uri="{0D108BD9-81ED-4DB2-BD59-A6C34878D82A}">
+                    <a16:rowId xmlns:a16="http://schemas.microsoft.com/office/drawing/2014/main" val="3988583600"/>
+                  </a:ext>
+                </a:extLst>
+              </a:tr>
+              <a:tr h="187452">
+                <a:tc>
+                  <a:txBody>
+                    <a:bodyPr/>
+                    <a:lstStyle/>
+                    <a:p>
+                      <a:pPr algn="just">
+                        <a:lnSpc>
+                          <a:spcPct val="107000"/>
+                        </a:lnSpc>
+                        <a:spcAft>
+                          <a:spcPts val="500"/>
+                        </a:spcAft>
+                        <a:buNone/>
+                      </a:pPr>
+                      <a:r>
+                        <a:rPr lang="ko-KR" sz="900">
+                          <a:effectLst/>
+                        </a:rPr>
+                        <a:t>Education: graduate school or higher</a:t>
+                      </a:r>
+                      <a:endParaRPr lang="ko-KR" sz="1000">
+                        <a:solidFill>
+                          <a:srgbClr val="222222"/>
+                        </a:solidFill>
+                        <a:effectLst/>
+                        <a:latin typeface="Aptos" panose="020B0004020202020204" pitchFamily="34" charset="0"/>
+                        <a:ea typeface="Aptos" panose="020B0004020202020204" pitchFamily="34" charset="0"/>
+                        <a:cs typeface="Aptos" panose="020B0004020202020204" pitchFamily="34" charset="0"/>
+                      </a:endParaRPr>
+                    </a:p>
+                  </a:txBody>
+                  <a:tcPr marL="34586" marR="34586" marT="10972" marB="10972" anchor="ctr"/>
+                </a:tc>
+                <a:tc>
+                  <a:txBody>
+                    <a:bodyPr/>
+                    <a:lstStyle/>
+                    <a:p>
+                      <a:pPr algn="ctr">
+                        <a:lnSpc>
+                          <a:spcPct val="107000"/>
+                        </a:lnSpc>
+                        <a:spcAft>
+                          <a:spcPts val="500"/>
+                        </a:spcAft>
+                        <a:buNone/>
+                      </a:pPr>
+                      <a:r>
+                        <a:rPr lang="ko-KR" sz="900" dirty="0">
+                          <a:effectLst/>
+                        </a:rPr>
+                        <a:t>2.906*** (0.483)</a:t>
+                      </a:r>
+                      <a:endParaRPr lang="ko-KR" sz="1000" dirty="0">
+                        <a:solidFill>
+                          <a:srgbClr val="222222"/>
+                        </a:solidFill>
+                        <a:effectLst/>
+                        <a:latin typeface="Aptos" panose="020B0004020202020204" pitchFamily="34" charset="0"/>
+                        <a:ea typeface="Aptos" panose="020B0004020202020204" pitchFamily="34" charset="0"/>
+                        <a:cs typeface="Aptos" panose="020B0004020202020204" pitchFamily="34" charset="0"/>
+                      </a:endParaRPr>
+                    </a:p>
+                  </a:txBody>
+                  <a:tcPr marL="34586" marR="34586" marT="10972" marB="10972"/>
+                </a:tc>
+                <a:tc>
+                  <a:txBody>
+                    <a:bodyPr/>
+                    <a:lstStyle/>
+                    <a:p>
+                      <a:pPr algn="ctr">
+                        <a:lnSpc>
+                          <a:spcPct val="107000"/>
+                        </a:lnSpc>
+                        <a:spcAft>
+                          <a:spcPts val="500"/>
+                        </a:spcAft>
+                        <a:buNone/>
+                      </a:pPr>
+                      <a:r>
+                        <a:rPr lang="ko-KR" sz="900" dirty="0">
+                          <a:effectLst/>
+                        </a:rPr>
+                        <a:t>2.952*** (0.483)</a:t>
+                      </a:r>
+                      <a:endParaRPr lang="ko-KR" sz="1000" dirty="0">
+                        <a:solidFill>
+                          <a:srgbClr val="222222"/>
+                        </a:solidFill>
+                        <a:effectLst/>
+                        <a:latin typeface="Aptos" panose="020B0004020202020204" pitchFamily="34" charset="0"/>
+                        <a:ea typeface="Aptos" panose="020B0004020202020204" pitchFamily="34" charset="0"/>
+                        <a:cs typeface="Aptos" panose="020B0004020202020204" pitchFamily="34" charset="0"/>
+                      </a:endParaRPr>
+                    </a:p>
+                  </a:txBody>
+                  <a:tcPr marL="34586" marR="34586" marT="10972" marB="10972"/>
+                </a:tc>
+                <a:tc>
+                  <a:txBody>
+                    <a:bodyPr/>
+                    <a:lstStyle/>
+                    <a:p>
+                      <a:pPr algn="ctr">
+                        <a:lnSpc>
+                          <a:spcPct val="107000"/>
+                        </a:lnSpc>
+                        <a:spcAft>
+                          <a:spcPts val="500"/>
+                        </a:spcAft>
+                        <a:buNone/>
+                      </a:pPr>
+                      <a:r>
+                        <a:rPr lang="ko-KR" sz="900">
+                          <a:effectLst/>
+                        </a:rPr>
+                        <a:t>2.938*** (0.482)</a:t>
+                      </a:r>
+                      <a:endParaRPr lang="ko-KR" sz="1000">
+                        <a:solidFill>
+                          <a:srgbClr val="222222"/>
+                        </a:solidFill>
+                        <a:effectLst/>
+                        <a:latin typeface="Aptos" panose="020B0004020202020204" pitchFamily="34" charset="0"/>
+                        <a:ea typeface="Aptos" panose="020B0004020202020204" pitchFamily="34" charset="0"/>
+                        <a:cs typeface="Aptos" panose="020B0004020202020204" pitchFamily="34" charset="0"/>
+                      </a:endParaRPr>
+                    </a:p>
+                  </a:txBody>
+                  <a:tcPr marL="34586" marR="34586" marT="10972" marB="10972"/>
+                </a:tc>
+                <a:extLst>
+                  <a:ext uri="{0D108BD9-81ED-4DB2-BD59-A6C34878D82A}">
+                    <a16:rowId xmlns:a16="http://schemas.microsoft.com/office/drawing/2014/main" val="540344374"/>
+                  </a:ext>
+                </a:extLst>
+              </a:tr>
+              <a:tr h="187452">
+                <a:tc>
+                  <a:txBody>
+                    <a:bodyPr/>
+                    <a:lstStyle/>
+                    <a:p>
+                      <a:pPr algn="just">
+                        <a:lnSpc>
+                          <a:spcPct val="107000"/>
+                        </a:lnSpc>
+                        <a:spcAft>
+                          <a:spcPts val="500"/>
+                        </a:spcAft>
+                        <a:buNone/>
+                      </a:pPr>
+                      <a:r>
+                        <a:rPr lang="ko-KR" sz="900">
+                          <a:effectLst/>
+                        </a:rPr>
+                        <a:t>Disability</a:t>
+                      </a:r>
+                      <a:endParaRPr lang="ko-KR" sz="1000">
+                        <a:solidFill>
+                          <a:srgbClr val="222222"/>
+                        </a:solidFill>
+                        <a:effectLst/>
+                        <a:latin typeface="Aptos" panose="020B0004020202020204" pitchFamily="34" charset="0"/>
+                        <a:ea typeface="Aptos" panose="020B0004020202020204" pitchFamily="34" charset="0"/>
+                        <a:cs typeface="Aptos" panose="020B0004020202020204" pitchFamily="34" charset="0"/>
+                      </a:endParaRPr>
+                    </a:p>
+                  </a:txBody>
+                  <a:tcPr marL="34586" marR="34586" marT="10972" marB="10972" anchor="ctr"/>
+                </a:tc>
+                <a:tc>
+                  <a:txBody>
+                    <a:bodyPr/>
+                    <a:lstStyle/>
+                    <a:p>
+                      <a:pPr algn="ctr">
+                        <a:lnSpc>
+                          <a:spcPct val="107000"/>
+                        </a:lnSpc>
+                        <a:spcAft>
+                          <a:spcPts val="500"/>
+                        </a:spcAft>
+                        <a:buNone/>
+                      </a:pPr>
+                      <a:r>
+                        <a:rPr lang="ko-KR" sz="900">
+                          <a:effectLst/>
+                        </a:rPr>
+                        <a:t>3.084*** (0.888)</a:t>
+                      </a:r>
+                      <a:endParaRPr lang="ko-KR" sz="1000">
+                        <a:solidFill>
+                          <a:srgbClr val="222222"/>
+                        </a:solidFill>
+                        <a:effectLst/>
+                        <a:latin typeface="Aptos" panose="020B0004020202020204" pitchFamily="34" charset="0"/>
+                        <a:ea typeface="Aptos" panose="020B0004020202020204" pitchFamily="34" charset="0"/>
+                        <a:cs typeface="Aptos" panose="020B0004020202020204" pitchFamily="34" charset="0"/>
+                      </a:endParaRPr>
+                    </a:p>
+                  </a:txBody>
+                  <a:tcPr marL="34586" marR="34586" marT="10972" marB="10972"/>
+                </a:tc>
+                <a:tc>
+                  <a:txBody>
+                    <a:bodyPr/>
+                    <a:lstStyle/>
+                    <a:p>
+                      <a:pPr algn="ctr">
+                        <a:lnSpc>
+                          <a:spcPct val="107000"/>
+                        </a:lnSpc>
+                        <a:spcAft>
+                          <a:spcPts val="500"/>
+                        </a:spcAft>
+                        <a:buNone/>
+                      </a:pPr>
+                      <a:r>
+                        <a:rPr lang="ko-KR" sz="900">
+                          <a:effectLst/>
+                        </a:rPr>
+                        <a:t>3.040*** (0.888)</a:t>
+                      </a:r>
+                      <a:endParaRPr lang="ko-KR" sz="1000">
+                        <a:solidFill>
+                          <a:srgbClr val="222222"/>
+                        </a:solidFill>
+                        <a:effectLst/>
+                        <a:latin typeface="Aptos" panose="020B0004020202020204" pitchFamily="34" charset="0"/>
+                        <a:ea typeface="Aptos" panose="020B0004020202020204" pitchFamily="34" charset="0"/>
+                        <a:cs typeface="Aptos" panose="020B0004020202020204" pitchFamily="34" charset="0"/>
+                      </a:endParaRPr>
+                    </a:p>
+                  </a:txBody>
+                  <a:tcPr marL="34586" marR="34586" marT="10972" marB="10972"/>
+                </a:tc>
+                <a:tc>
+                  <a:txBody>
+                    <a:bodyPr/>
+                    <a:lstStyle/>
+                    <a:p>
+                      <a:pPr algn="ctr">
+                        <a:lnSpc>
+                          <a:spcPct val="107000"/>
+                        </a:lnSpc>
+                        <a:spcAft>
+                          <a:spcPts val="500"/>
+                        </a:spcAft>
+                        <a:buNone/>
+                      </a:pPr>
+                      <a:r>
+                        <a:rPr lang="ko-KR" sz="900">
+                          <a:effectLst/>
+                        </a:rPr>
+                        <a:t>3.073*** (0.887)</a:t>
+                      </a:r>
+                      <a:endParaRPr lang="ko-KR" sz="1000">
+                        <a:solidFill>
+                          <a:srgbClr val="222222"/>
+                        </a:solidFill>
+                        <a:effectLst/>
+                        <a:latin typeface="Aptos" panose="020B0004020202020204" pitchFamily="34" charset="0"/>
+                        <a:ea typeface="Aptos" panose="020B0004020202020204" pitchFamily="34" charset="0"/>
+                        <a:cs typeface="Aptos" panose="020B0004020202020204" pitchFamily="34" charset="0"/>
+                      </a:endParaRPr>
+                    </a:p>
+                  </a:txBody>
+                  <a:tcPr marL="34586" marR="34586" marT="10972" marB="10972"/>
+                </a:tc>
+                <a:extLst>
+                  <a:ext uri="{0D108BD9-81ED-4DB2-BD59-A6C34878D82A}">
+                    <a16:rowId xmlns:a16="http://schemas.microsoft.com/office/drawing/2014/main" val="3426697628"/>
+                  </a:ext>
+                </a:extLst>
+              </a:tr>
+              <a:tr h="187452">
+                <a:tc>
+                  <a:txBody>
+                    <a:bodyPr/>
+                    <a:lstStyle/>
+                    <a:p>
+                      <a:pPr algn="just">
+                        <a:lnSpc>
+                          <a:spcPct val="107000"/>
+                        </a:lnSpc>
+                        <a:spcAft>
+                          <a:spcPts val="500"/>
+                        </a:spcAft>
+                        <a:buNone/>
+                      </a:pPr>
+                      <a:r>
+                        <a:rPr lang="ko-KR" sz="900">
+                          <a:effectLst/>
+                        </a:rPr>
+                        <a:t>Income (centered)</a:t>
+                      </a:r>
+                      <a:endParaRPr lang="ko-KR" sz="1000">
+                        <a:solidFill>
+                          <a:srgbClr val="222222"/>
+                        </a:solidFill>
+                        <a:effectLst/>
+                        <a:latin typeface="Aptos" panose="020B0004020202020204" pitchFamily="34" charset="0"/>
+                        <a:ea typeface="Aptos" panose="020B0004020202020204" pitchFamily="34" charset="0"/>
+                        <a:cs typeface="Aptos" panose="020B0004020202020204" pitchFamily="34" charset="0"/>
+                      </a:endParaRPr>
+                    </a:p>
+                  </a:txBody>
+                  <a:tcPr marL="34586" marR="34586" marT="10972" marB="10972" anchor="ctr"/>
+                </a:tc>
+                <a:tc>
+                  <a:txBody>
+                    <a:bodyPr/>
+                    <a:lstStyle/>
+                    <a:p>
+                      <a:pPr algn="ctr">
+                        <a:lnSpc>
+                          <a:spcPct val="107000"/>
+                        </a:lnSpc>
+                        <a:spcAft>
+                          <a:spcPts val="500"/>
+                        </a:spcAft>
+                        <a:buNone/>
+                      </a:pPr>
+                      <a:r>
+                        <a:rPr lang="ko-KR" sz="900" dirty="0">
+                          <a:effectLst/>
+                        </a:rPr>
+                        <a:t>0.003*** (0.001)</a:t>
+                      </a:r>
+                      <a:endParaRPr lang="ko-KR" sz="1000" dirty="0">
+                        <a:solidFill>
+                          <a:srgbClr val="222222"/>
+                        </a:solidFill>
+                        <a:effectLst/>
+                        <a:latin typeface="Aptos" panose="020B0004020202020204" pitchFamily="34" charset="0"/>
+                        <a:ea typeface="Aptos" panose="020B0004020202020204" pitchFamily="34" charset="0"/>
+                        <a:cs typeface="Aptos" panose="020B0004020202020204" pitchFamily="34" charset="0"/>
+                      </a:endParaRPr>
+                    </a:p>
+                  </a:txBody>
+                  <a:tcPr marL="34586" marR="34586" marT="10972" marB="10972"/>
+                </a:tc>
+                <a:tc>
+                  <a:txBody>
+                    <a:bodyPr/>
+                    <a:lstStyle/>
+                    <a:p>
+                      <a:pPr algn="ctr">
+                        <a:lnSpc>
+                          <a:spcPct val="107000"/>
+                        </a:lnSpc>
+                        <a:spcAft>
+                          <a:spcPts val="500"/>
+                        </a:spcAft>
+                        <a:buNone/>
+                      </a:pPr>
+                      <a:r>
+                        <a:rPr lang="ko-KR" sz="900">
+                          <a:effectLst/>
+                        </a:rPr>
+                        <a:t>0.003*** (0.001)</a:t>
+                      </a:r>
+                      <a:endParaRPr lang="ko-KR" sz="1000">
+                        <a:solidFill>
+                          <a:srgbClr val="222222"/>
+                        </a:solidFill>
+                        <a:effectLst/>
+                        <a:latin typeface="Aptos" panose="020B0004020202020204" pitchFamily="34" charset="0"/>
+                        <a:ea typeface="Aptos" panose="020B0004020202020204" pitchFamily="34" charset="0"/>
+                        <a:cs typeface="Aptos" panose="020B0004020202020204" pitchFamily="34" charset="0"/>
+                      </a:endParaRPr>
+                    </a:p>
+                  </a:txBody>
+                  <a:tcPr marL="34586" marR="34586" marT="10972" marB="10972"/>
+                </a:tc>
+                <a:tc>
+                  <a:txBody>
+                    <a:bodyPr/>
+                    <a:lstStyle/>
+                    <a:p>
+                      <a:pPr algn="ctr">
+                        <a:lnSpc>
+                          <a:spcPct val="107000"/>
+                        </a:lnSpc>
+                        <a:spcAft>
+                          <a:spcPts val="500"/>
+                        </a:spcAft>
+                        <a:buNone/>
+                      </a:pPr>
+                      <a:r>
+                        <a:rPr lang="ko-KR" sz="900">
+                          <a:effectLst/>
+                        </a:rPr>
+                        <a:t>0.003*** (0.001)</a:t>
+                      </a:r>
+                      <a:endParaRPr lang="ko-KR" sz="1000">
+                        <a:solidFill>
+                          <a:srgbClr val="222222"/>
+                        </a:solidFill>
+                        <a:effectLst/>
+                        <a:latin typeface="Aptos" panose="020B0004020202020204" pitchFamily="34" charset="0"/>
+                        <a:ea typeface="Aptos" panose="020B0004020202020204" pitchFamily="34" charset="0"/>
+                        <a:cs typeface="Aptos" panose="020B0004020202020204" pitchFamily="34" charset="0"/>
+                      </a:endParaRPr>
+                    </a:p>
+                  </a:txBody>
+                  <a:tcPr marL="34586" marR="34586" marT="10972" marB="10972"/>
+                </a:tc>
+                <a:extLst>
+                  <a:ext uri="{0D108BD9-81ED-4DB2-BD59-A6C34878D82A}">
+                    <a16:rowId xmlns:a16="http://schemas.microsoft.com/office/drawing/2014/main" val="2371346791"/>
+                  </a:ext>
+                </a:extLst>
+              </a:tr>
+              <a:tr h="187452">
+                <a:tc>
+                  <a:txBody>
+                    <a:bodyPr/>
+                    <a:lstStyle/>
+                    <a:p>
+                      <a:pPr algn="just">
+                        <a:lnSpc>
+                          <a:spcPct val="107000"/>
+                        </a:lnSpc>
+                        <a:spcAft>
+                          <a:spcPts val="500"/>
+                        </a:spcAft>
+                        <a:buNone/>
+                      </a:pPr>
+                      <a:r>
+                        <a:rPr lang="ko-KR" sz="900" dirty="0" err="1">
+                          <a:effectLst/>
+                        </a:rPr>
+                        <a:t>Job</a:t>
+                      </a:r>
+                      <a:r>
+                        <a:rPr lang="ko-KR" sz="900" dirty="0">
+                          <a:effectLst/>
+                        </a:rPr>
+                        <a:t>: </a:t>
+                      </a:r>
+                      <a:r>
+                        <a:rPr lang="ko-KR" sz="900" dirty="0" err="1">
+                          <a:effectLst/>
+                        </a:rPr>
+                        <a:t>professional</a:t>
+                      </a:r>
+                      <a:endParaRPr lang="ko-KR" sz="1000" dirty="0">
+                        <a:solidFill>
+                          <a:srgbClr val="222222"/>
+                        </a:solidFill>
+                        <a:effectLst/>
+                        <a:latin typeface="Aptos" panose="020B0004020202020204" pitchFamily="34" charset="0"/>
+                        <a:ea typeface="Aptos" panose="020B0004020202020204" pitchFamily="34" charset="0"/>
+                        <a:cs typeface="Aptos" panose="020B0004020202020204" pitchFamily="34" charset="0"/>
+                      </a:endParaRPr>
+                    </a:p>
+                  </a:txBody>
+                  <a:tcPr marL="34586" marR="34586" marT="10972" marB="10972" anchor="ctr"/>
+                </a:tc>
+                <a:tc>
+                  <a:txBody>
+                    <a:bodyPr/>
+                    <a:lstStyle/>
+                    <a:p>
+                      <a:pPr algn="ctr">
+                        <a:lnSpc>
+                          <a:spcPct val="107000"/>
+                        </a:lnSpc>
+                        <a:spcAft>
+                          <a:spcPts val="500"/>
+                        </a:spcAft>
+                        <a:buNone/>
+                      </a:pPr>
+                      <a:r>
+                        <a:rPr lang="ko-KR" sz="900">
+                          <a:effectLst/>
+                        </a:rPr>
+                        <a:t>2.329*** (0.451)</a:t>
+                      </a:r>
+                      <a:endParaRPr lang="ko-KR" sz="1000">
+                        <a:solidFill>
+                          <a:srgbClr val="222222"/>
+                        </a:solidFill>
+                        <a:effectLst/>
+                        <a:latin typeface="Aptos" panose="020B0004020202020204" pitchFamily="34" charset="0"/>
+                        <a:ea typeface="Aptos" panose="020B0004020202020204" pitchFamily="34" charset="0"/>
+                        <a:cs typeface="Aptos" panose="020B0004020202020204" pitchFamily="34" charset="0"/>
+                      </a:endParaRPr>
+                    </a:p>
+                  </a:txBody>
+                  <a:tcPr marL="34586" marR="34586" marT="10972" marB="10972"/>
+                </a:tc>
+                <a:tc>
+                  <a:txBody>
+                    <a:bodyPr/>
+                    <a:lstStyle/>
+                    <a:p>
+                      <a:pPr algn="ctr">
+                        <a:lnSpc>
+                          <a:spcPct val="107000"/>
+                        </a:lnSpc>
+                        <a:spcAft>
+                          <a:spcPts val="500"/>
+                        </a:spcAft>
+                        <a:buNone/>
+                      </a:pPr>
+                      <a:r>
+                        <a:rPr lang="ko-KR" sz="900" dirty="0">
+                          <a:effectLst/>
+                        </a:rPr>
+                        <a:t>2.331*** (0.451)</a:t>
+                      </a:r>
+                      <a:endParaRPr lang="ko-KR" sz="1000" dirty="0">
+                        <a:solidFill>
+                          <a:srgbClr val="222222"/>
+                        </a:solidFill>
+                        <a:effectLst/>
+                        <a:latin typeface="Aptos" panose="020B0004020202020204" pitchFamily="34" charset="0"/>
+                        <a:ea typeface="Aptos" panose="020B0004020202020204" pitchFamily="34" charset="0"/>
+                        <a:cs typeface="Aptos" panose="020B0004020202020204" pitchFamily="34" charset="0"/>
+                      </a:endParaRPr>
+                    </a:p>
+                  </a:txBody>
+                  <a:tcPr marL="34586" marR="34586" marT="10972" marB="10972"/>
+                </a:tc>
+                <a:tc>
+                  <a:txBody>
+                    <a:bodyPr/>
+                    <a:lstStyle/>
+                    <a:p>
+                      <a:pPr algn="ctr">
+                        <a:lnSpc>
+                          <a:spcPct val="107000"/>
+                        </a:lnSpc>
+                        <a:spcAft>
+                          <a:spcPts val="500"/>
+                        </a:spcAft>
+                        <a:buNone/>
+                      </a:pPr>
+                      <a:r>
+                        <a:rPr lang="ko-KR" sz="900">
+                          <a:effectLst/>
+                        </a:rPr>
+                        <a:t>2.270*** (0.450)</a:t>
+                      </a:r>
+                      <a:endParaRPr lang="ko-KR" sz="1000">
+                        <a:solidFill>
+                          <a:srgbClr val="222222"/>
+                        </a:solidFill>
+                        <a:effectLst/>
+                        <a:latin typeface="Aptos" panose="020B0004020202020204" pitchFamily="34" charset="0"/>
+                        <a:ea typeface="Aptos" panose="020B0004020202020204" pitchFamily="34" charset="0"/>
+                        <a:cs typeface="Aptos" panose="020B0004020202020204" pitchFamily="34" charset="0"/>
+                      </a:endParaRPr>
+                    </a:p>
+                  </a:txBody>
+                  <a:tcPr marL="34586" marR="34586" marT="10972" marB="10972"/>
+                </a:tc>
+                <a:extLst>
+                  <a:ext uri="{0D108BD9-81ED-4DB2-BD59-A6C34878D82A}">
+                    <a16:rowId xmlns:a16="http://schemas.microsoft.com/office/drawing/2014/main" val="1201992712"/>
+                  </a:ext>
+                </a:extLst>
+              </a:tr>
+              <a:tr h="187452">
+                <a:tc>
+                  <a:txBody>
+                    <a:bodyPr/>
+                    <a:lstStyle/>
+                    <a:p>
+                      <a:pPr algn="just">
+                        <a:lnSpc>
+                          <a:spcPct val="107000"/>
+                        </a:lnSpc>
+                        <a:spcAft>
+                          <a:spcPts val="500"/>
+                        </a:spcAft>
+                        <a:buNone/>
+                      </a:pPr>
+                      <a:r>
+                        <a:rPr lang="ko-KR" sz="900">
+                          <a:effectLst/>
+                        </a:rPr>
+                        <a:t>Job: blue-collar</a:t>
+                      </a:r>
+                      <a:endParaRPr lang="ko-KR" sz="1000">
+                        <a:solidFill>
+                          <a:srgbClr val="222222"/>
+                        </a:solidFill>
+                        <a:effectLst/>
+                        <a:latin typeface="Aptos" panose="020B0004020202020204" pitchFamily="34" charset="0"/>
+                        <a:ea typeface="Aptos" panose="020B0004020202020204" pitchFamily="34" charset="0"/>
+                        <a:cs typeface="Aptos" panose="020B0004020202020204" pitchFamily="34" charset="0"/>
+                      </a:endParaRPr>
+                    </a:p>
+                  </a:txBody>
+                  <a:tcPr marL="34586" marR="34586" marT="10972" marB="10972" anchor="ctr"/>
+                </a:tc>
+                <a:tc>
+                  <a:txBody>
+                    <a:bodyPr/>
+                    <a:lstStyle/>
+                    <a:p>
+                      <a:pPr algn="ctr">
+                        <a:lnSpc>
+                          <a:spcPct val="107000"/>
+                        </a:lnSpc>
+                        <a:spcAft>
+                          <a:spcPts val="500"/>
+                        </a:spcAft>
+                        <a:buNone/>
+                      </a:pPr>
+                      <a:r>
+                        <a:rPr lang="ko-KR" sz="900">
+                          <a:effectLst/>
+                        </a:rPr>
+                        <a:t>-0.373 (0.424)</a:t>
+                      </a:r>
+                      <a:endParaRPr lang="ko-KR" sz="1000">
+                        <a:solidFill>
+                          <a:srgbClr val="222222"/>
+                        </a:solidFill>
+                        <a:effectLst/>
+                        <a:latin typeface="Aptos" panose="020B0004020202020204" pitchFamily="34" charset="0"/>
+                        <a:ea typeface="Aptos" panose="020B0004020202020204" pitchFamily="34" charset="0"/>
+                        <a:cs typeface="Aptos" panose="020B0004020202020204" pitchFamily="34" charset="0"/>
+                      </a:endParaRPr>
+                    </a:p>
+                  </a:txBody>
+                  <a:tcPr marL="34586" marR="34586" marT="10972" marB="10972"/>
+                </a:tc>
+                <a:tc>
+                  <a:txBody>
+                    <a:bodyPr/>
+                    <a:lstStyle/>
+                    <a:p>
+                      <a:pPr algn="ctr">
+                        <a:lnSpc>
+                          <a:spcPct val="107000"/>
+                        </a:lnSpc>
+                        <a:spcAft>
+                          <a:spcPts val="500"/>
+                        </a:spcAft>
+                        <a:buNone/>
+                      </a:pPr>
+                      <a:r>
+                        <a:rPr lang="ko-KR" sz="900">
+                          <a:effectLst/>
+                        </a:rPr>
+                        <a:t>-0.378 (0.424)</a:t>
+                      </a:r>
+                      <a:endParaRPr lang="ko-KR" sz="1000">
+                        <a:solidFill>
+                          <a:srgbClr val="222222"/>
+                        </a:solidFill>
+                        <a:effectLst/>
+                        <a:latin typeface="Aptos" panose="020B0004020202020204" pitchFamily="34" charset="0"/>
+                        <a:ea typeface="Aptos" panose="020B0004020202020204" pitchFamily="34" charset="0"/>
+                        <a:cs typeface="Aptos" panose="020B0004020202020204" pitchFamily="34" charset="0"/>
+                      </a:endParaRPr>
+                    </a:p>
+                  </a:txBody>
+                  <a:tcPr marL="34586" marR="34586" marT="10972" marB="10972"/>
+                </a:tc>
+                <a:tc>
+                  <a:txBody>
+                    <a:bodyPr/>
+                    <a:lstStyle/>
+                    <a:p>
+                      <a:pPr algn="ctr">
+                        <a:lnSpc>
+                          <a:spcPct val="107000"/>
+                        </a:lnSpc>
+                        <a:spcAft>
+                          <a:spcPts val="500"/>
+                        </a:spcAft>
+                        <a:buNone/>
+                      </a:pPr>
+                      <a:r>
+                        <a:rPr lang="ko-KR" sz="900">
+                          <a:effectLst/>
+                        </a:rPr>
+                        <a:t>-0.497 (0.424)</a:t>
+                      </a:r>
+                      <a:endParaRPr lang="ko-KR" sz="1000">
+                        <a:solidFill>
+                          <a:srgbClr val="222222"/>
+                        </a:solidFill>
+                        <a:effectLst/>
+                        <a:latin typeface="Aptos" panose="020B0004020202020204" pitchFamily="34" charset="0"/>
+                        <a:ea typeface="Aptos" panose="020B0004020202020204" pitchFamily="34" charset="0"/>
+                        <a:cs typeface="Aptos" panose="020B0004020202020204" pitchFamily="34" charset="0"/>
+                      </a:endParaRPr>
+                    </a:p>
+                  </a:txBody>
+                  <a:tcPr marL="34586" marR="34586" marT="10972" marB="10972"/>
+                </a:tc>
+                <a:extLst>
+                  <a:ext uri="{0D108BD9-81ED-4DB2-BD59-A6C34878D82A}">
+                    <a16:rowId xmlns:a16="http://schemas.microsoft.com/office/drawing/2014/main" val="3996773199"/>
+                  </a:ext>
+                </a:extLst>
+              </a:tr>
+              <a:tr h="187452">
+                <a:tc>
+                  <a:txBody>
+                    <a:bodyPr/>
+                    <a:lstStyle/>
+                    <a:p>
+                      <a:pPr algn="just">
+                        <a:lnSpc>
+                          <a:spcPct val="107000"/>
+                        </a:lnSpc>
+                        <a:spcAft>
+                          <a:spcPts val="500"/>
+                        </a:spcAft>
+                        <a:buNone/>
+                      </a:pPr>
+                      <a:r>
+                        <a:rPr lang="ko-KR" sz="900">
+                          <a:effectLst/>
+                        </a:rPr>
+                        <a:t>Job: other</a:t>
+                      </a:r>
+                      <a:endParaRPr lang="ko-KR" sz="1000">
+                        <a:solidFill>
+                          <a:srgbClr val="222222"/>
+                        </a:solidFill>
+                        <a:effectLst/>
+                        <a:latin typeface="Aptos" panose="020B0004020202020204" pitchFamily="34" charset="0"/>
+                        <a:ea typeface="Aptos" panose="020B0004020202020204" pitchFamily="34" charset="0"/>
+                        <a:cs typeface="Aptos" panose="020B0004020202020204" pitchFamily="34" charset="0"/>
+                      </a:endParaRPr>
+                    </a:p>
+                  </a:txBody>
+                  <a:tcPr marL="34586" marR="34586" marT="10972" marB="10972" anchor="ctr"/>
+                </a:tc>
+                <a:tc>
+                  <a:txBody>
+                    <a:bodyPr/>
+                    <a:lstStyle/>
+                    <a:p>
+                      <a:pPr algn="ctr">
+                        <a:lnSpc>
+                          <a:spcPct val="107000"/>
+                        </a:lnSpc>
+                        <a:spcAft>
+                          <a:spcPts val="500"/>
+                        </a:spcAft>
+                        <a:buNone/>
+                      </a:pPr>
+                      <a:r>
+                        <a:rPr lang="ko-KR" sz="900">
+                          <a:effectLst/>
+                        </a:rPr>
+                        <a:t>-1.233** (0.456)</a:t>
+                      </a:r>
+                      <a:endParaRPr lang="ko-KR" sz="1000">
+                        <a:solidFill>
+                          <a:srgbClr val="222222"/>
+                        </a:solidFill>
+                        <a:effectLst/>
+                        <a:latin typeface="Aptos" panose="020B0004020202020204" pitchFamily="34" charset="0"/>
+                        <a:ea typeface="Aptos" panose="020B0004020202020204" pitchFamily="34" charset="0"/>
+                        <a:cs typeface="Aptos" panose="020B0004020202020204" pitchFamily="34" charset="0"/>
+                      </a:endParaRPr>
+                    </a:p>
+                  </a:txBody>
+                  <a:tcPr marL="34586" marR="34586" marT="10972" marB="10972"/>
+                </a:tc>
+                <a:tc>
+                  <a:txBody>
+                    <a:bodyPr/>
+                    <a:lstStyle/>
+                    <a:p>
+                      <a:pPr algn="ctr">
+                        <a:lnSpc>
+                          <a:spcPct val="107000"/>
+                        </a:lnSpc>
+                        <a:spcAft>
+                          <a:spcPts val="500"/>
+                        </a:spcAft>
+                        <a:buNone/>
+                      </a:pPr>
+                      <a:r>
+                        <a:rPr lang="ko-KR" sz="900" dirty="0">
+                          <a:effectLst/>
+                        </a:rPr>
+                        <a:t>-1.213** (0.456)</a:t>
+                      </a:r>
+                      <a:endParaRPr lang="ko-KR" sz="1000" dirty="0">
+                        <a:solidFill>
+                          <a:srgbClr val="222222"/>
+                        </a:solidFill>
+                        <a:effectLst/>
+                        <a:latin typeface="Aptos" panose="020B0004020202020204" pitchFamily="34" charset="0"/>
+                        <a:ea typeface="Aptos" panose="020B0004020202020204" pitchFamily="34" charset="0"/>
+                        <a:cs typeface="Aptos" panose="020B0004020202020204" pitchFamily="34" charset="0"/>
+                      </a:endParaRPr>
+                    </a:p>
+                  </a:txBody>
+                  <a:tcPr marL="34586" marR="34586" marT="10972" marB="10972"/>
+                </a:tc>
+                <a:tc>
+                  <a:txBody>
+                    <a:bodyPr/>
+                    <a:lstStyle/>
+                    <a:p>
+                      <a:pPr algn="ctr">
+                        <a:lnSpc>
+                          <a:spcPct val="107000"/>
+                        </a:lnSpc>
+                        <a:spcAft>
+                          <a:spcPts val="500"/>
+                        </a:spcAft>
+                        <a:buNone/>
+                      </a:pPr>
+                      <a:r>
+                        <a:rPr lang="ko-KR" sz="900">
+                          <a:effectLst/>
+                        </a:rPr>
+                        <a:t>-1.204** (0.455)</a:t>
+                      </a:r>
+                      <a:endParaRPr lang="ko-KR" sz="1000">
+                        <a:solidFill>
+                          <a:srgbClr val="222222"/>
+                        </a:solidFill>
+                        <a:effectLst/>
+                        <a:latin typeface="Aptos" panose="020B0004020202020204" pitchFamily="34" charset="0"/>
+                        <a:ea typeface="Aptos" panose="020B0004020202020204" pitchFamily="34" charset="0"/>
+                        <a:cs typeface="Aptos" panose="020B0004020202020204" pitchFamily="34" charset="0"/>
+                      </a:endParaRPr>
+                    </a:p>
+                  </a:txBody>
+                  <a:tcPr marL="34586" marR="34586" marT="10972" marB="10972"/>
+                </a:tc>
+                <a:extLst>
+                  <a:ext uri="{0D108BD9-81ED-4DB2-BD59-A6C34878D82A}">
+                    <a16:rowId xmlns:a16="http://schemas.microsoft.com/office/drawing/2014/main" val="612919974"/>
+                  </a:ext>
+                </a:extLst>
+              </a:tr>
+              <a:tr h="187452">
+                <a:tc>
+                  <a:txBody>
+                    <a:bodyPr/>
+                    <a:lstStyle/>
+                    <a:p>
+                      <a:pPr algn="just">
+                        <a:lnSpc>
+                          <a:spcPct val="107000"/>
+                        </a:lnSpc>
+                        <a:spcAft>
+                          <a:spcPts val="500"/>
+                        </a:spcAft>
+                        <a:buNone/>
+                      </a:pPr>
+                      <a:r>
+                        <a:rPr lang="ko-KR" sz="900">
+                          <a:effectLst/>
+                        </a:rPr>
+                        <a:t>Single-person household</a:t>
+                      </a:r>
+                      <a:endParaRPr lang="ko-KR" sz="1000">
+                        <a:solidFill>
+                          <a:srgbClr val="222222"/>
+                        </a:solidFill>
+                        <a:effectLst/>
+                        <a:latin typeface="Aptos" panose="020B0004020202020204" pitchFamily="34" charset="0"/>
+                        <a:ea typeface="Aptos" panose="020B0004020202020204" pitchFamily="34" charset="0"/>
+                        <a:cs typeface="Aptos" panose="020B0004020202020204" pitchFamily="34" charset="0"/>
+                      </a:endParaRPr>
+                    </a:p>
+                  </a:txBody>
+                  <a:tcPr marL="34586" marR="34586" marT="10972" marB="10972" anchor="ctr"/>
+                </a:tc>
+                <a:tc>
+                  <a:txBody>
+                    <a:bodyPr/>
+                    <a:lstStyle/>
+                    <a:p>
+                      <a:pPr algn="ctr">
+                        <a:lnSpc>
+                          <a:spcPct val="107000"/>
+                        </a:lnSpc>
+                        <a:spcAft>
+                          <a:spcPts val="500"/>
+                        </a:spcAft>
+                        <a:buNone/>
+                      </a:pPr>
+                      <a:r>
+                        <a:rPr lang="ko-KR" sz="900">
+                          <a:effectLst/>
+                        </a:rPr>
+                        <a:t>-1.775*** (0.338)</a:t>
+                      </a:r>
+                      <a:endParaRPr lang="ko-KR" sz="1000">
+                        <a:solidFill>
+                          <a:srgbClr val="222222"/>
+                        </a:solidFill>
+                        <a:effectLst/>
+                        <a:latin typeface="Aptos" panose="020B0004020202020204" pitchFamily="34" charset="0"/>
+                        <a:ea typeface="Aptos" panose="020B0004020202020204" pitchFamily="34" charset="0"/>
+                        <a:cs typeface="Aptos" panose="020B0004020202020204" pitchFamily="34" charset="0"/>
+                      </a:endParaRPr>
+                    </a:p>
+                  </a:txBody>
+                  <a:tcPr marL="34586" marR="34586" marT="10972" marB="10972"/>
+                </a:tc>
+                <a:tc>
+                  <a:txBody>
+                    <a:bodyPr/>
+                    <a:lstStyle/>
+                    <a:p>
+                      <a:pPr algn="ctr">
+                        <a:lnSpc>
+                          <a:spcPct val="107000"/>
+                        </a:lnSpc>
+                        <a:spcAft>
+                          <a:spcPts val="500"/>
+                        </a:spcAft>
+                        <a:buNone/>
+                      </a:pPr>
+                      <a:r>
+                        <a:rPr lang="ko-KR" sz="900">
+                          <a:effectLst/>
+                        </a:rPr>
+                        <a:t>-1.789*** (0.338)</a:t>
+                      </a:r>
+                      <a:endParaRPr lang="ko-KR" sz="1000">
+                        <a:solidFill>
+                          <a:srgbClr val="222222"/>
+                        </a:solidFill>
+                        <a:effectLst/>
+                        <a:latin typeface="Aptos" panose="020B0004020202020204" pitchFamily="34" charset="0"/>
+                        <a:ea typeface="Aptos" panose="020B0004020202020204" pitchFamily="34" charset="0"/>
+                        <a:cs typeface="Aptos" panose="020B0004020202020204" pitchFamily="34" charset="0"/>
+                      </a:endParaRPr>
+                    </a:p>
+                  </a:txBody>
+                  <a:tcPr marL="34586" marR="34586" marT="10972" marB="10972"/>
+                </a:tc>
+                <a:tc>
+                  <a:txBody>
+                    <a:bodyPr/>
+                    <a:lstStyle/>
+                    <a:p>
+                      <a:pPr algn="ctr">
+                        <a:lnSpc>
+                          <a:spcPct val="107000"/>
+                        </a:lnSpc>
+                        <a:spcAft>
+                          <a:spcPts val="500"/>
+                        </a:spcAft>
+                        <a:buNone/>
+                      </a:pPr>
+                      <a:r>
+                        <a:rPr lang="ko-KR" sz="900">
+                          <a:effectLst/>
+                        </a:rPr>
+                        <a:t>-1.714*** (0.338)</a:t>
+                      </a:r>
+                      <a:endParaRPr lang="ko-KR" sz="1000">
+                        <a:solidFill>
+                          <a:srgbClr val="222222"/>
+                        </a:solidFill>
+                        <a:effectLst/>
+                        <a:latin typeface="Aptos" panose="020B0004020202020204" pitchFamily="34" charset="0"/>
+                        <a:ea typeface="Aptos" panose="020B0004020202020204" pitchFamily="34" charset="0"/>
+                        <a:cs typeface="Aptos" panose="020B0004020202020204" pitchFamily="34" charset="0"/>
+                      </a:endParaRPr>
+                    </a:p>
+                  </a:txBody>
+                  <a:tcPr marL="34586" marR="34586" marT="10972" marB="10972"/>
+                </a:tc>
+                <a:extLst>
+                  <a:ext uri="{0D108BD9-81ED-4DB2-BD59-A6C34878D82A}">
+                    <a16:rowId xmlns:a16="http://schemas.microsoft.com/office/drawing/2014/main" val="4144213980"/>
+                  </a:ext>
+                </a:extLst>
+              </a:tr>
+              <a:tr h="187452">
+                <a:tc>
+                  <a:txBody>
+                    <a:bodyPr/>
+                    <a:lstStyle/>
+                    <a:p>
+                      <a:pPr algn="just">
+                        <a:lnSpc>
+                          <a:spcPct val="107000"/>
+                        </a:lnSpc>
+                        <a:spcAft>
+                          <a:spcPts val="500"/>
+                        </a:spcAft>
+                        <a:buNone/>
+                      </a:pPr>
+                      <a:r>
+                        <a:rPr lang="ko-KR" sz="900">
+                          <a:effectLst/>
+                        </a:rPr>
+                        <a:t>Detached house</a:t>
+                      </a:r>
+                      <a:endParaRPr lang="ko-KR" sz="1000">
+                        <a:solidFill>
+                          <a:srgbClr val="222222"/>
+                        </a:solidFill>
+                        <a:effectLst/>
+                        <a:latin typeface="Aptos" panose="020B0004020202020204" pitchFamily="34" charset="0"/>
+                        <a:ea typeface="Aptos" panose="020B0004020202020204" pitchFamily="34" charset="0"/>
+                        <a:cs typeface="Aptos" panose="020B0004020202020204" pitchFamily="34" charset="0"/>
+                      </a:endParaRPr>
+                    </a:p>
+                  </a:txBody>
+                  <a:tcPr marL="34586" marR="34586" marT="10972" marB="10972" anchor="ctr"/>
+                </a:tc>
+                <a:tc>
+                  <a:txBody>
+                    <a:bodyPr/>
+                    <a:lstStyle/>
+                    <a:p>
+                      <a:pPr algn="ctr">
+                        <a:lnSpc>
+                          <a:spcPct val="107000"/>
+                        </a:lnSpc>
+                        <a:spcAft>
+                          <a:spcPts val="500"/>
+                        </a:spcAft>
+                        <a:buNone/>
+                      </a:pPr>
+                      <a:r>
+                        <a:rPr lang="ko-KR" sz="900">
+                          <a:effectLst/>
+                        </a:rPr>
+                        <a:t>-2.478*** (0.377)</a:t>
+                      </a:r>
+                      <a:endParaRPr lang="ko-KR" sz="1000">
+                        <a:solidFill>
+                          <a:srgbClr val="222222"/>
+                        </a:solidFill>
+                        <a:effectLst/>
+                        <a:latin typeface="Aptos" panose="020B0004020202020204" pitchFamily="34" charset="0"/>
+                        <a:ea typeface="Aptos" panose="020B0004020202020204" pitchFamily="34" charset="0"/>
+                        <a:cs typeface="Aptos" panose="020B0004020202020204" pitchFamily="34" charset="0"/>
+                      </a:endParaRPr>
+                    </a:p>
+                  </a:txBody>
+                  <a:tcPr marL="34586" marR="34586" marT="10972" marB="10972"/>
+                </a:tc>
+                <a:tc>
+                  <a:txBody>
+                    <a:bodyPr/>
+                    <a:lstStyle/>
+                    <a:p>
+                      <a:pPr algn="ctr">
+                        <a:lnSpc>
+                          <a:spcPct val="107000"/>
+                        </a:lnSpc>
+                        <a:spcAft>
+                          <a:spcPts val="500"/>
+                        </a:spcAft>
+                        <a:buNone/>
+                      </a:pPr>
+                      <a:r>
+                        <a:rPr lang="ko-KR" sz="900" dirty="0">
+                          <a:effectLst/>
+                        </a:rPr>
+                        <a:t>-2.486*** (0.379)</a:t>
+                      </a:r>
+                      <a:endParaRPr lang="ko-KR" sz="1000" dirty="0">
+                        <a:solidFill>
+                          <a:srgbClr val="222222"/>
+                        </a:solidFill>
+                        <a:effectLst/>
+                        <a:latin typeface="Aptos" panose="020B0004020202020204" pitchFamily="34" charset="0"/>
+                        <a:ea typeface="Aptos" panose="020B0004020202020204" pitchFamily="34" charset="0"/>
+                        <a:cs typeface="Aptos" panose="020B0004020202020204" pitchFamily="34" charset="0"/>
+                      </a:endParaRPr>
+                    </a:p>
+                  </a:txBody>
+                  <a:tcPr marL="34586" marR="34586" marT="10972" marB="10972"/>
+                </a:tc>
+                <a:tc>
+                  <a:txBody>
+                    <a:bodyPr/>
+                    <a:lstStyle/>
+                    <a:p>
+                      <a:pPr algn="ctr">
+                        <a:lnSpc>
+                          <a:spcPct val="107000"/>
+                        </a:lnSpc>
+                        <a:spcAft>
+                          <a:spcPts val="500"/>
+                        </a:spcAft>
+                        <a:buNone/>
+                      </a:pPr>
+                      <a:r>
+                        <a:rPr lang="ko-KR" sz="900">
+                          <a:effectLst/>
+                        </a:rPr>
+                        <a:t>-2.449*** (0.379)</a:t>
+                      </a:r>
+                      <a:endParaRPr lang="ko-KR" sz="1000">
+                        <a:solidFill>
+                          <a:srgbClr val="222222"/>
+                        </a:solidFill>
+                        <a:effectLst/>
+                        <a:latin typeface="Aptos" panose="020B0004020202020204" pitchFamily="34" charset="0"/>
+                        <a:ea typeface="Aptos" panose="020B0004020202020204" pitchFamily="34" charset="0"/>
+                        <a:cs typeface="Aptos" panose="020B0004020202020204" pitchFamily="34" charset="0"/>
+                      </a:endParaRPr>
+                    </a:p>
+                  </a:txBody>
+                  <a:tcPr marL="34586" marR="34586" marT="10972" marB="10972"/>
+                </a:tc>
+                <a:extLst>
+                  <a:ext uri="{0D108BD9-81ED-4DB2-BD59-A6C34878D82A}">
+                    <a16:rowId xmlns:a16="http://schemas.microsoft.com/office/drawing/2014/main" val="3476612564"/>
+                  </a:ext>
+                </a:extLst>
+              </a:tr>
+              <a:tr h="187452">
+                <a:tc>
+                  <a:txBody>
+                    <a:bodyPr/>
+                    <a:lstStyle/>
+                    <a:p>
+                      <a:pPr algn="just">
+                        <a:lnSpc>
+                          <a:spcPct val="107000"/>
+                        </a:lnSpc>
+                        <a:spcAft>
+                          <a:spcPts val="500"/>
+                        </a:spcAft>
+                        <a:buNone/>
+                      </a:pPr>
+                      <a:r>
+                        <a:rPr lang="ko-KR" sz="900">
+                          <a:effectLst/>
+                        </a:rPr>
+                        <a:t>Multi-family housing</a:t>
+                      </a:r>
+                      <a:endParaRPr lang="ko-KR" sz="1000">
+                        <a:solidFill>
+                          <a:srgbClr val="222222"/>
+                        </a:solidFill>
+                        <a:effectLst/>
+                        <a:latin typeface="Aptos" panose="020B0004020202020204" pitchFamily="34" charset="0"/>
+                        <a:ea typeface="Aptos" panose="020B0004020202020204" pitchFamily="34" charset="0"/>
+                        <a:cs typeface="Aptos" panose="020B0004020202020204" pitchFamily="34" charset="0"/>
+                      </a:endParaRPr>
+                    </a:p>
+                  </a:txBody>
+                  <a:tcPr marL="34586" marR="34586" marT="10972" marB="10972" anchor="ctr"/>
+                </a:tc>
+                <a:tc>
+                  <a:txBody>
+                    <a:bodyPr/>
+                    <a:lstStyle/>
+                    <a:p>
+                      <a:pPr algn="ctr">
+                        <a:lnSpc>
+                          <a:spcPct val="107000"/>
+                        </a:lnSpc>
+                        <a:spcAft>
+                          <a:spcPts val="500"/>
+                        </a:spcAft>
+                        <a:buNone/>
+                      </a:pPr>
+                      <a:r>
+                        <a:rPr lang="ko-KR" sz="900">
+                          <a:effectLst/>
+                        </a:rPr>
+                        <a:t>-1.798*** (0.408)</a:t>
+                      </a:r>
+                      <a:endParaRPr lang="ko-KR" sz="1000">
+                        <a:solidFill>
+                          <a:srgbClr val="222222"/>
+                        </a:solidFill>
+                        <a:effectLst/>
+                        <a:latin typeface="Aptos" panose="020B0004020202020204" pitchFamily="34" charset="0"/>
+                        <a:ea typeface="Aptos" panose="020B0004020202020204" pitchFamily="34" charset="0"/>
+                        <a:cs typeface="Aptos" panose="020B0004020202020204" pitchFamily="34" charset="0"/>
+                      </a:endParaRPr>
+                    </a:p>
+                  </a:txBody>
+                  <a:tcPr marL="34586" marR="34586" marT="10972" marB="10972"/>
+                </a:tc>
+                <a:tc>
+                  <a:txBody>
+                    <a:bodyPr/>
+                    <a:lstStyle/>
+                    <a:p>
+                      <a:pPr algn="ctr">
+                        <a:lnSpc>
+                          <a:spcPct val="107000"/>
+                        </a:lnSpc>
+                        <a:spcAft>
+                          <a:spcPts val="500"/>
+                        </a:spcAft>
+                        <a:buNone/>
+                      </a:pPr>
+                      <a:r>
+                        <a:rPr lang="ko-KR" sz="900">
+                          <a:effectLst/>
+                        </a:rPr>
+                        <a:t>-1.797*** (0.409)</a:t>
+                      </a:r>
+                      <a:endParaRPr lang="ko-KR" sz="1000">
+                        <a:solidFill>
+                          <a:srgbClr val="222222"/>
+                        </a:solidFill>
+                        <a:effectLst/>
+                        <a:latin typeface="Aptos" panose="020B0004020202020204" pitchFamily="34" charset="0"/>
+                        <a:ea typeface="Aptos" panose="020B0004020202020204" pitchFamily="34" charset="0"/>
+                        <a:cs typeface="Aptos" panose="020B0004020202020204" pitchFamily="34" charset="0"/>
+                      </a:endParaRPr>
+                    </a:p>
+                  </a:txBody>
+                  <a:tcPr marL="34586" marR="34586" marT="10972" marB="10972"/>
+                </a:tc>
+                <a:tc>
+                  <a:txBody>
+                    <a:bodyPr/>
+                    <a:lstStyle/>
+                    <a:p>
+                      <a:pPr algn="ctr">
+                        <a:lnSpc>
+                          <a:spcPct val="107000"/>
+                        </a:lnSpc>
+                        <a:spcAft>
+                          <a:spcPts val="500"/>
+                        </a:spcAft>
+                        <a:buNone/>
+                      </a:pPr>
+                      <a:r>
+                        <a:rPr lang="ko-KR" sz="900">
+                          <a:effectLst/>
+                        </a:rPr>
+                        <a:t>-1.767*** (0.408)</a:t>
+                      </a:r>
+                      <a:endParaRPr lang="ko-KR" sz="1000">
+                        <a:solidFill>
+                          <a:srgbClr val="222222"/>
+                        </a:solidFill>
+                        <a:effectLst/>
+                        <a:latin typeface="Aptos" panose="020B0004020202020204" pitchFamily="34" charset="0"/>
+                        <a:ea typeface="Aptos" panose="020B0004020202020204" pitchFamily="34" charset="0"/>
+                        <a:cs typeface="Aptos" panose="020B0004020202020204" pitchFamily="34" charset="0"/>
+                      </a:endParaRPr>
+                    </a:p>
+                  </a:txBody>
+                  <a:tcPr marL="34586" marR="34586" marT="10972" marB="10972"/>
+                </a:tc>
+                <a:extLst>
+                  <a:ext uri="{0D108BD9-81ED-4DB2-BD59-A6C34878D82A}">
+                    <a16:rowId xmlns:a16="http://schemas.microsoft.com/office/drawing/2014/main" val="2469003859"/>
+                  </a:ext>
+                </a:extLst>
+              </a:tr>
+              <a:tr h="187452">
+                <a:tc>
+                  <a:txBody>
+                    <a:bodyPr/>
+                    <a:lstStyle/>
+                    <a:p>
+                      <a:pPr algn="just">
+                        <a:lnSpc>
+                          <a:spcPct val="107000"/>
+                        </a:lnSpc>
+                        <a:spcAft>
+                          <a:spcPts val="500"/>
+                        </a:spcAft>
+                        <a:buNone/>
+                      </a:pPr>
+                      <a:r>
+                        <a:rPr lang="ko-KR" sz="900">
+                          <a:effectLst/>
+                        </a:rPr>
+                        <a:t>Housing: other</a:t>
+                      </a:r>
+                      <a:endParaRPr lang="ko-KR" sz="1000">
+                        <a:solidFill>
+                          <a:srgbClr val="222222"/>
+                        </a:solidFill>
+                        <a:effectLst/>
+                        <a:latin typeface="Aptos" panose="020B0004020202020204" pitchFamily="34" charset="0"/>
+                        <a:ea typeface="Aptos" panose="020B0004020202020204" pitchFamily="34" charset="0"/>
+                        <a:cs typeface="Aptos" panose="020B0004020202020204" pitchFamily="34" charset="0"/>
+                      </a:endParaRPr>
+                    </a:p>
+                  </a:txBody>
+                  <a:tcPr marL="34586" marR="34586" marT="10972" marB="10972" anchor="ctr"/>
+                </a:tc>
+                <a:tc>
+                  <a:txBody>
+                    <a:bodyPr/>
+                    <a:lstStyle/>
+                    <a:p>
+                      <a:pPr algn="ctr">
+                        <a:lnSpc>
+                          <a:spcPct val="107000"/>
+                        </a:lnSpc>
+                        <a:spcAft>
+                          <a:spcPts val="500"/>
+                        </a:spcAft>
+                        <a:buNone/>
+                      </a:pPr>
+                      <a:r>
+                        <a:rPr lang="ko-KR" sz="900">
+                          <a:effectLst/>
+                        </a:rPr>
+                        <a:t>-0.572 (0.455)</a:t>
+                      </a:r>
+                      <a:endParaRPr lang="ko-KR" sz="1000">
+                        <a:solidFill>
+                          <a:srgbClr val="222222"/>
+                        </a:solidFill>
+                        <a:effectLst/>
+                        <a:latin typeface="Aptos" panose="020B0004020202020204" pitchFamily="34" charset="0"/>
+                        <a:ea typeface="Aptos" panose="020B0004020202020204" pitchFamily="34" charset="0"/>
+                        <a:cs typeface="Aptos" panose="020B0004020202020204" pitchFamily="34" charset="0"/>
+                      </a:endParaRPr>
+                    </a:p>
+                  </a:txBody>
+                  <a:tcPr marL="34586" marR="34586" marT="10972" marB="10972"/>
+                </a:tc>
+                <a:tc>
+                  <a:txBody>
+                    <a:bodyPr/>
+                    <a:lstStyle/>
+                    <a:p>
+                      <a:pPr algn="ctr">
+                        <a:lnSpc>
+                          <a:spcPct val="107000"/>
+                        </a:lnSpc>
+                        <a:spcAft>
+                          <a:spcPts val="500"/>
+                        </a:spcAft>
+                        <a:buNone/>
+                      </a:pPr>
+                      <a:r>
+                        <a:rPr lang="ko-KR" sz="900">
+                          <a:effectLst/>
+                        </a:rPr>
+                        <a:t>-0.550 (0.456)</a:t>
+                      </a:r>
+                      <a:endParaRPr lang="ko-KR" sz="1000">
+                        <a:solidFill>
+                          <a:srgbClr val="222222"/>
+                        </a:solidFill>
+                        <a:effectLst/>
+                        <a:latin typeface="Aptos" panose="020B0004020202020204" pitchFamily="34" charset="0"/>
+                        <a:ea typeface="Aptos" panose="020B0004020202020204" pitchFamily="34" charset="0"/>
+                        <a:cs typeface="Aptos" panose="020B0004020202020204" pitchFamily="34" charset="0"/>
+                      </a:endParaRPr>
+                    </a:p>
+                  </a:txBody>
+                  <a:tcPr marL="34586" marR="34586" marT="10972" marB="10972"/>
+                </a:tc>
+                <a:tc>
+                  <a:txBody>
+                    <a:bodyPr/>
+                    <a:lstStyle/>
+                    <a:p>
+                      <a:pPr algn="ctr">
+                        <a:lnSpc>
+                          <a:spcPct val="107000"/>
+                        </a:lnSpc>
+                        <a:spcAft>
+                          <a:spcPts val="500"/>
+                        </a:spcAft>
+                        <a:buNone/>
+                      </a:pPr>
+                      <a:r>
+                        <a:rPr lang="ko-KR" sz="900">
+                          <a:effectLst/>
+                        </a:rPr>
+                        <a:t>-0.507 (0.456)</a:t>
+                      </a:r>
+                      <a:endParaRPr lang="ko-KR" sz="1000">
+                        <a:solidFill>
+                          <a:srgbClr val="222222"/>
+                        </a:solidFill>
+                        <a:effectLst/>
+                        <a:latin typeface="Aptos" panose="020B0004020202020204" pitchFamily="34" charset="0"/>
+                        <a:ea typeface="Aptos" panose="020B0004020202020204" pitchFamily="34" charset="0"/>
+                        <a:cs typeface="Aptos" panose="020B0004020202020204" pitchFamily="34" charset="0"/>
+                      </a:endParaRPr>
+                    </a:p>
+                  </a:txBody>
+                  <a:tcPr marL="34586" marR="34586" marT="10972" marB="10972"/>
+                </a:tc>
+                <a:extLst>
+                  <a:ext uri="{0D108BD9-81ED-4DB2-BD59-A6C34878D82A}">
+                    <a16:rowId xmlns:a16="http://schemas.microsoft.com/office/drawing/2014/main" val="1406503180"/>
+                  </a:ext>
+                </a:extLst>
+              </a:tr>
+              <a:tr h="187452">
+                <a:tc>
+                  <a:txBody>
+                    <a:bodyPr/>
+                    <a:lstStyle/>
+                    <a:p>
+                      <a:pPr algn="just">
+                        <a:lnSpc>
+                          <a:spcPct val="107000"/>
+                        </a:lnSpc>
+                        <a:spcAft>
+                          <a:spcPts val="500"/>
+                        </a:spcAft>
+                        <a:buNone/>
+                      </a:pPr>
+                      <a:r>
+                        <a:rPr lang="ko-KR" sz="900">
+                          <a:effectLst/>
+                        </a:rPr>
+                        <a:t>Year (2024)</a:t>
+                      </a:r>
+                      <a:endParaRPr lang="ko-KR" sz="1000">
+                        <a:solidFill>
+                          <a:srgbClr val="222222"/>
+                        </a:solidFill>
+                        <a:effectLst/>
+                        <a:latin typeface="Aptos" panose="020B0004020202020204" pitchFamily="34" charset="0"/>
+                        <a:ea typeface="Aptos" panose="020B0004020202020204" pitchFamily="34" charset="0"/>
+                        <a:cs typeface="Aptos" panose="020B0004020202020204" pitchFamily="34" charset="0"/>
+                      </a:endParaRPr>
+                    </a:p>
+                  </a:txBody>
+                  <a:tcPr marL="34586" marR="34586" marT="10972" marB="10972" anchor="ctr"/>
+                </a:tc>
+                <a:tc>
+                  <a:txBody>
+                    <a:bodyPr/>
+                    <a:lstStyle/>
+                    <a:p>
+                      <a:pPr algn="ctr">
+                        <a:lnSpc>
+                          <a:spcPct val="107000"/>
+                        </a:lnSpc>
+                        <a:spcAft>
+                          <a:spcPts val="500"/>
+                        </a:spcAft>
+                        <a:buNone/>
+                      </a:pPr>
+                      <a:r>
+                        <a:rPr lang="ko-KR" sz="900">
+                          <a:effectLst/>
+                        </a:rPr>
+                        <a:t>0.294 (0.283)</a:t>
+                      </a:r>
+                      <a:endParaRPr lang="ko-KR" sz="1000">
+                        <a:solidFill>
+                          <a:srgbClr val="222222"/>
+                        </a:solidFill>
+                        <a:effectLst/>
+                        <a:latin typeface="Aptos" panose="020B0004020202020204" pitchFamily="34" charset="0"/>
+                        <a:ea typeface="Aptos" panose="020B0004020202020204" pitchFamily="34" charset="0"/>
+                        <a:cs typeface="Aptos" panose="020B0004020202020204" pitchFamily="34" charset="0"/>
+                      </a:endParaRPr>
+                    </a:p>
+                  </a:txBody>
+                  <a:tcPr marL="34586" marR="34586" marT="10972" marB="10972"/>
+                </a:tc>
+                <a:tc>
+                  <a:txBody>
+                    <a:bodyPr/>
+                    <a:lstStyle/>
+                    <a:p>
+                      <a:pPr algn="ctr">
+                        <a:lnSpc>
+                          <a:spcPct val="107000"/>
+                        </a:lnSpc>
+                        <a:spcAft>
+                          <a:spcPts val="500"/>
+                        </a:spcAft>
+                        <a:buNone/>
+                      </a:pPr>
+                      <a:r>
+                        <a:rPr lang="ko-KR" sz="900" dirty="0">
+                          <a:effectLst/>
+                        </a:rPr>
+                        <a:t>0.257 (0.286)</a:t>
+                      </a:r>
+                      <a:endParaRPr lang="ko-KR" sz="1000" dirty="0">
+                        <a:solidFill>
+                          <a:srgbClr val="222222"/>
+                        </a:solidFill>
+                        <a:effectLst/>
+                        <a:latin typeface="Aptos" panose="020B0004020202020204" pitchFamily="34" charset="0"/>
+                        <a:ea typeface="Aptos" panose="020B0004020202020204" pitchFamily="34" charset="0"/>
+                        <a:cs typeface="Aptos" panose="020B0004020202020204" pitchFamily="34" charset="0"/>
+                      </a:endParaRPr>
+                    </a:p>
+                  </a:txBody>
+                  <a:tcPr marL="34586" marR="34586" marT="10972" marB="10972"/>
+                </a:tc>
+                <a:tc>
+                  <a:txBody>
+                    <a:bodyPr/>
+                    <a:lstStyle/>
+                    <a:p>
+                      <a:pPr algn="ctr">
+                        <a:lnSpc>
+                          <a:spcPct val="107000"/>
+                        </a:lnSpc>
+                        <a:spcAft>
+                          <a:spcPts val="500"/>
+                        </a:spcAft>
+                        <a:buNone/>
+                      </a:pPr>
+                      <a:r>
+                        <a:rPr lang="ko-KR" sz="900">
+                          <a:effectLst/>
+                        </a:rPr>
+                        <a:t>0.252 (0.285)</a:t>
+                      </a:r>
+                      <a:endParaRPr lang="ko-KR" sz="1000">
+                        <a:solidFill>
+                          <a:srgbClr val="222222"/>
+                        </a:solidFill>
+                        <a:effectLst/>
+                        <a:latin typeface="Aptos" panose="020B0004020202020204" pitchFamily="34" charset="0"/>
+                        <a:ea typeface="Aptos" panose="020B0004020202020204" pitchFamily="34" charset="0"/>
+                        <a:cs typeface="Aptos" panose="020B0004020202020204" pitchFamily="34" charset="0"/>
+                      </a:endParaRPr>
+                    </a:p>
+                  </a:txBody>
+                  <a:tcPr marL="34586" marR="34586" marT="10972" marB="10972"/>
+                </a:tc>
+                <a:extLst>
+                  <a:ext uri="{0D108BD9-81ED-4DB2-BD59-A6C34878D82A}">
+                    <a16:rowId xmlns:a16="http://schemas.microsoft.com/office/drawing/2014/main" val="161741346"/>
+                  </a:ext>
+                </a:extLst>
+              </a:tr>
+              <a:tr h="187452">
+                <a:tc>
+                  <a:txBody>
+                    <a:bodyPr/>
+                    <a:lstStyle/>
+                    <a:p>
+                      <a:pPr algn="ctr">
+                        <a:lnSpc>
+                          <a:spcPct val="107000"/>
+                        </a:lnSpc>
+                        <a:spcAft>
+                          <a:spcPts val="500"/>
+                        </a:spcAft>
+                        <a:buNone/>
+                      </a:pPr>
+                      <a:r>
+                        <a:rPr lang="ko-KR" sz="900">
+                          <a:effectLst/>
+                        </a:rPr>
+                        <a:t>Level 2: District characteristics</a:t>
+                      </a:r>
+                      <a:endParaRPr lang="ko-KR" sz="1000">
+                        <a:solidFill>
+                          <a:srgbClr val="222222"/>
+                        </a:solidFill>
+                        <a:effectLst/>
+                        <a:latin typeface="Aptos" panose="020B0004020202020204" pitchFamily="34" charset="0"/>
+                        <a:ea typeface="Aptos" panose="020B0004020202020204" pitchFamily="34" charset="0"/>
+                        <a:cs typeface="Aptos" panose="020B0004020202020204" pitchFamily="34" charset="0"/>
+                      </a:endParaRPr>
+                    </a:p>
+                  </a:txBody>
+                  <a:tcPr marL="34586" marR="34586" marT="10972" marB="10972" anchor="ctr"/>
+                </a:tc>
+                <a:tc>
+                  <a:txBody>
+                    <a:bodyPr/>
+                    <a:lstStyle/>
+                    <a:p>
+                      <a:pPr algn="ctr">
+                        <a:lnSpc>
+                          <a:spcPct val="107000"/>
+                        </a:lnSpc>
+                        <a:spcAft>
+                          <a:spcPts val="500"/>
+                        </a:spcAft>
+                        <a:buNone/>
+                      </a:pPr>
+                      <a:r>
+                        <a:rPr lang="ko-KR" sz="900">
+                          <a:effectLst/>
+                        </a:rPr>
+                        <a:t> </a:t>
+                      </a:r>
+                      <a:endParaRPr lang="ko-KR" sz="1000">
+                        <a:solidFill>
+                          <a:srgbClr val="222222"/>
+                        </a:solidFill>
+                        <a:effectLst/>
+                        <a:latin typeface="Aptos" panose="020B0004020202020204" pitchFamily="34" charset="0"/>
+                        <a:ea typeface="Aptos" panose="020B0004020202020204" pitchFamily="34" charset="0"/>
+                        <a:cs typeface="Aptos" panose="020B0004020202020204" pitchFamily="34" charset="0"/>
+                      </a:endParaRPr>
+                    </a:p>
+                  </a:txBody>
+                  <a:tcPr marL="34586" marR="34586" marT="10972" marB="10972"/>
+                </a:tc>
+                <a:tc>
+                  <a:txBody>
+                    <a:bodyPr/>
+                    <a:lstStyle/>
+                    <a:p>
+                      <a:pPr algn="ctr">
+                        <a:lnSpc>
+                          <a:spcPct val="107000"/>
+                        </a:lnSpc>
+                        <a:spcAft>
+                          <a:spcPts val="500"/>
+                        </a:spcAft>
+                        <a:buNone/>
+                      </a:pPr>
+                      <a:r>
+                        <a:rPr lang="ko-KR" sz="900">
+                          <a:effectLst/>
+                        </a:rPr>
+                        <a:t> </a:t>
+                      </a:r>
+                      <a:endParaRPr lang="ko-KR" sz="1000">
+                        <a:solidFill>
+                          <a:srgbClr val="222222"/>
+                        </a:solidFill>
+                        <a:effectLst/>
+                        <a:latin typeface="Aptos" panose="020B0004020202020204" pitchFamily="34" charset="0"/>
+                        <a:ea typeface="Aptos" panose="020B0004020202020204" pitchFamily="34" charset="0"/>
+                        <a:cs typeface="Aptos" panose="020B0004020202020204" pitchFamily="34" charset="0"/>
+                      </a:endParaRPr>
+                    </a:p>
+                  </a:txBody>
+                  <a:tcPr marL="34586" marR="34586" marT="10972" marB="10972"/>
+                </a:tc>
+                <a:tc>
+                  <a:txBody>
+                    <a:bodyPr/>
+                    <a:lstStyle/>
+                    <a:p>
+                      <a:pPr algn="ctr">
+                        <a:lnSpc>
+                          <a:spcPct val="107000"/>
+                        </a:lnSpc>
+                        <a:spcAft>
+                          <a:spcPts val="500"/>
+                        </a:spcAft>
+                        <a:buNone/>
+                      </a:pPr>
+                      <a:r>
+                        <a:rPr lang="ko-KR" sz="900" dirty="0">
+                          <a:effectLst/>
+                        </a:rPr>
+                        <a:t> </a:t>
+                      </a:r>
+                      <a:endParaRPr lang="ko-KR" sz="1000" dirty="0">
+                        <a:solidFill>
+                          <a:srgbClr val="222222"/>
+                        </a:solidFill>
+                        <a:effectLst/>
+                        <a:latin typeface="Aptos" panose="020B0004020202020204" pitchFamily="34" charset="0"/>
+                        <a:ea typeface="Aptos" panose="020B0004020202020204" pitchFamily="34" charset="0"/>
+                        <a:cs typeface="Aptos" panose="020B0004020202020204" pitchFamily="34" charset="0"/>
+                      </a:endParaRPr>
+                    </a:p>
+                  </a:txBody>
+                  <a:tcPr marL="34586" marR="34586" marT="10972" marB="10972"/>
+                </a:tc>
+                <a:extLst>
+                  <a:ext uri="{0D108BD9-81ED-4DB2-BD59-A6C34878D82A}">
+                    <a16:rowId xmlns:a16="http://schemas.microsoft.com/office/drawing/2014/main" val="2696144726"/>
+                  </a:ext>
+                </a:extLst>
+              </a:tr>
+              <a:tr h="187452">
+                <a:tc>
+                  <a:txBody>
+                    <a:bodyPr/>
+                    <a:lstStyle/>
+                    <a:p>
+                      <a:pPr algn="just">
+                        <a:lnSpc>
+                          <a:spcPct val="107000"/>
+                        </a:lnSpc>
+                        <a:spcAft>
+                          <a:spcPts val="500"/>
+                        </a:spcAft>
+                        <a:buNone/>
+                      </a:pPr>
+                      <a:r>
+                        <a:rPr lang="ko-KR" sz="900">
+                          <a:effectLst/>
+                        </a:rPr>
+                        <a:t>Connectivity</a:t>
+                      </a:r>
+                      <a:endParaRPr lang="ko-KR" sz="1000">
+                        <a:solidFill>
+                          <a:srgbClr val="222222"/>
+                        </a:solidFill>
+                        <a:effectLst/>
+                        <a:latin typeface="Aptos" panose="020B0004020202020204" pitchFamily="34" charset="0"/>
+                        <a:ea typeface="Aptos" panose="020B0004020202020204" pitchFamily="34" charset="0"/>
+                        <a:cs typeface="Aptos" panose="020B0004020202020204" pitchFamily="34" charset="0"/>
+                      </a:endParaRPr>
+                    </a:p>
+                  </a:txBody>
+                  <a:tcPr marL="34586" marR="34586" marT="10972" marB="10972" anchor="ctr"/>
+                </a:tc>
+                <a:tc>
+                  <a:txBody>
+                    <a:bodyPr/>
+                    <a:lstStyle/>
+                    <a:p>
+                      <a:pPr algn="ctr">
+                        <a:lnSpc>
+                          <a:spcPct val="107000"/>
+                        </a:lnSpc>
+                        <a:spcAft>
+                          <a:spcPts val="500"/>
+                        </a:spcAft>
+                        <a:buNone/>
+                      </a:pPr>
+                      <a:r>
+                        <a:rPr lang="ko-KR" sz="900">
+                          <a:effectLst/>
+                        </a:rPr>
+                        <a:t> </a:t>
+                      </a:r>
+                      <a:endParaRPr lang="ko-KR" sz="1000">
+                        <a:solidFill>
+                          <a:srgbClr val="222222"/>
+                        </a:solidFill>
+                        <a:effectLst/>
+                        <a:latin typeface="Aptos" panose="020B0004020202020204" pitchFamily="34" charset="0"/>
+                        <a:ea typeface="Aptos" panose="020B0004020202020204" pitchFamily="34" charset="0"/>
+                        <a:cs typeface="Aptos" panose="020B0004020202020204" pitchFamily="34" charset="0"/>
+                      </a:endParaRPr>
+                    </a:p>
+                  </a:txBody>
+                  <a:tcPr marL="34586" marR="34586" marT="10972" marB="10972"/>
+                </a:tc>
+                <a:tc>
+                  <a:txBody>
+                    <a:bodyPr/>
+                    <a:lstStyle/>
+                    <a:p>
+                      <a:pPr algn="ctr">
+                        <a:lnSpc>
+                          <a:spcPct val="107000"/>
+                        </a:lnSpc>
+                        <a:spcAft>
+                          <a:spcPts val="500"/>
+                        </a:spcAft>
+                        <a:buNone/>
+                      </a:pPr>
+                      <a:r>
+                        <a:rPr lang="ko-KR" sz="900">
+                          <a:effectLst/>
+                        </a:rPr>
+                        <a:t>-1.068 (0.714)</a:t>
+                      </a:r>
+                      <a:endParaRPr lang="ko-KR" sz="1000">
+                        <a:solidFill>
+                          <a:srgbClr val="222222"/>
+                        </a:solidFill>
+                        <a:effectLst/>
+                        <a:latin typeface="Aptos" panose="020B0004020202020204" pitchFamily="34" charset="0"/>
+                        <a:ea typeface="Aptos" panose="020B0004020202020204" pitchFamily="34" charset="0"/>
+                        <a:cs typeface="Aptos" panose="020B0004020202020204" pitchFamily="34" charset="0"/>
+                      </a:endParaRPr>
+                    </a:p>
+                  </a:txBody>
+                  <a:tcPr marL="34586" marR="34586" marT="10972" marB="10972"/>
+                </a:tc>
+                <a:tc>
+                  <a:txBody>
+                    <a:bodyPr/>
+                    <a:lstStyle/>
+                    <a:p>
+                      <a:pPr algn="ctr">
+                        <a:lnSpc>
+                          <a:spcPct val="107000"/>
+                        </a:lnSpc>
+                        <a:spcAft>
+                          <a:spcPts val="500"/>
+                        </a:spcAft>
+                        <a:buNone/>
+                      </a:pPr>
+                      <a:r>
+                        <a:rPr lang="ko-KR" sz="900">
+                          <a:effectLst/>
+                        </a:rPr>
+                        <a:t>-1.340† (0.717)</a:t>
+                      </a:r>
+                      <a:endParaRPr lang="ko-KR" sz="1000">
+                        <a:solidFill>
+                          <a:srgbClr val="222222"/>
+                        </a:solidFill>
+                        <a:effectLst/>
+                        <a:latin typeface="Aptos" panose="020B0004020202020204" pitchFamily="34" charset="0"/>
+                        <a:ea typeface="Aptos" panose="020B0004020202020204" pitchFamily="34" charset="0"/>
+                        <a:cs typeface="Aptos" panose="020B0004020202020204" pitchFamily="34" charset="0"/>
+                      </a:endParaRPr>
+                    </a:p>
+                  </a:txBody>
+                  <a:tcPr marL="34586" marR="34586" marT="10972" marB="10972"/>
+                </a:tc>
+                <a:extLst>
+                  <a:ext uri="{0D108BD9-81ED-4DB2-BD59-A6C34878D82A}">
+                    <a16:rowId xmlns:a16="http://schemas.microsoft.com/office/drawing/2014/main" val="813998064"/>
+                  </a:ext>
+                </a:extLst>
+              </a:tr>
+              <a:tr h="187452">
+                <a:tc>
+                  <a:txBody>
+                    <a:bodyPr/>
+                    <a:lstStyle/>
+                    <a:p>
+                      <a:pPr algn="just">
+                        <a:lnSpc>
+                          <a:spcPct val="107000"/>
+                        </a:lnSpc>
+                        <a:spcAft>
+                          <a:spcPts val="500"/>
+                        </a:spcAft>
+                        <a:buNone/>
+                      </a:pPr>
+                      <a:r>
+                        <a:rPr lang="ko-KR" sz="900">
+                          <a:effectLst/>
+                        </a:rPr>
+                        <a:t>Available for Use</a:t>
+                      </a:r>
+                      <a:endParaRPr lang="ko-KR" sz="1000">
+                        <a:solidFill>
+                          <a:srgbClr val="222222"/>
+                        </a:solidFill>
+                        <a:effectLst/>
+                        <a:latin typeface="Aptos" panose="020B0004020202020204" pitchFamily="34" charset="0"/>
+                        <a:ea typeface="Aptos" panose="020B0004020202020204" pitchFamily="34" charset="0"/>
+                        <a:cs typeface="Aptos" panose="020B0004020202020204" pitchFamily="34" charset="0"/>
+                      </a:endParaRPr>
+                    </a:p>
+                  </a:txBody>
+                  <a:tcPr marL="34586" marR="34586" marT="10972" marB="10972" anchor="ctr"/>
+                </a:tc>
+                <a:tc>
+                  <a:txBody>
+                    <a:bodyPr/>
+                    <a:lstStyle/>
+                    <a:p>
+                      <a:pPr algn="ctr">
+                        <a:lnSpc>
+                          <a:spcPct val="107000"/>
+                        </a:lnSpc>
+                        <a:spcAft>
+                          <a:spcPts val="500"/>
+                        </a:spcAft>
+                        <a:buNone/>
+                      </a:pPr>
+                      <a:r>
+                        <a:rPr lang="ko-KR" sz="900">
+                          <a:effectLst/>
+                        </a:rPr>
+                        <a:t> </a:t>
+                      </a:r>
+                      <a:endParaRPr lang="ko-KR" sz="1000">
+                        <a:solidFill>
+                          <a:srgbClr val="222222"/>
+                        </a:solidFill>
+                        <a:effectLst/>
+                        <a:latin typeface="Aptos" panose="020B0004020202020204" pitchFamily="34" charset="0"/>
+                        <a:ea typeface="Aptos" panose="020B0004020202020204" pitchFamily="34" charset="0"/>
+                        <a:cs typeface="Aptos" panose="020B0004020202020204" pitchFamily="34" charset="0"/>
+                      </a:endParaRPr>
+                    </a:p>
+                  </a:txBody>
+                  <a:tcPr marL="34586" marR="34586" marT="10972" marB="10972"/>
+                </a:tc>
+                <a:tc>
+                  <a:txBody>
+                    <a:bodyPr/>
+                    <a:lstStyle/>
+                    <a:p>
+                      <a:pPr algn="ctr">
+                        <a:lnSpc>
+                          <a:spcPct val="107000"/>
+                        </a:lnSpc>
+                        <a:spcAft>
+                          <a:spcPts val="500"/>
+                        </a:spcAft>
+                        <a:buNone/>
+                      </a:pPr>
+                      <a:r>
+                        <a:rPr lang="ko-KR" sz="900" dirty="0">
+                          <a:effectLst/>
+                        </a:rPr>
+                        <a:t>0.210 (0.628)</a:t>
+                      </a:r>
+                      <a:endParaRPr lang="ko-KR" sz="1000" dirty="0">
+                        <a:solidFill>
+                          <a:srgbClr val="222222"/>
+                        </a:solidFill>
+                        <a:effectLst/>
+                        <a:latin typeface="Aptos" panose="020B0004020202020204" pitchFamily="34" charset="0"/>
+                        <a:ea typeface="Aptos" panose="020B0004020202020204" pitchFamily="34" charset="0"/>
+                        <a:cs typeface="Aptos" panose="020B0004020202020204" pitchFamily="34" charset="0"/>
+                      </a:endParaRPr>
+                    </a:p>
+                  </a:txBody>
+                  <a:tcPr marL="34586" marR="34586" marT="10972" marB="10972"/>
+                </a:tc>
+                <a:tc>
+                  <a:txBody>
+                    <a:bodyPr/>
+                    <a:lstStyle/>
+                    <a:p>
+                      <a:pPr algn="ctr">
+                        <a:lnSpc>
+                          <a:spcPct val="107000"/>
+                        </a:lnSpc>
+                        <a:spcAft>
+                          <a:spcPts val="500"/>
+                        </a:spcAft>
+                        <a:buNone/>
+                      </a:pPr>
+                      <a:r>
+                        <a:rPr lang="ko-KR" sz="900" dirty="0">
+                          <a:effectLst/>
+                        </a:rPr>
+                        <a:t>0.199 (0.622)</a:t>
+                      </a:r>
+                      <a:endParaRPr lang="ko-KR" sz="1000" dirty="0">
+                        <a:solidFill>
+                          <a:srgbClr val="222222"/>
+                        </a:solidFill>
+                        <a:effectLst/>
+                        <a:latin typeface="Aptos" panose="020B0004020202020204" pitchFamily="34" charset="0"/>
+                        <a:ea typeface="Aptos" panose="020B0004020202020204" pitchFamily="34" charset="0"/>
+                        <a:cs typeface="Aptos" panose="020B0004020202020204" pitchFamily="34" charset="0"/>
+                      </a:endParaRPr>
+                    </a:p>
+                  </a:txBody>
+                  <a:tcPr marL="34586" marR="34586" marT="10972" marB="10972"/>
+                </a:tc>
+                <a:extLst>
+                  <a:ext uri="{0D108BD9-81ED-4DB2-BD59-A6C34878D82A}">
+                    <a16:rowId xmlns:a16="http://schemas.microsoft.com/office/drawing/2014/main" val="4009334149"/>
+                  </a:ext>
+                </a:extLst>
+              </a:tr>
+              <a:tr h="187452">
+                <a:tc>
+                  <a:txBody>
+                    <a:bodyPr/>
+                    <a:lstStyle/>
+                    <a:p>
+                      <a:pPr algn="just">
+                        <a:lnSpc>
+                          <a:spcPct val="107000"/>
+                        </a:lnSpc>
+                        <a:spcAft>
+                          <a:spcPts val="500"/>
+                        </a:spcAft>
+                        <a:buNone/>
+                      </a:pPr>
+                      <a:r>
+                        <a:rPr lang="ko-KR" sz="900">
+                          <a:effectLst/>
+                        </a:rPr>
+                        <a:t>Affordability</a:t>
+                      </a:r>
+                      <a:endParaRPr lang="ko-KR" sz="1000">
+                        <a:solidFill>
+                          <a:srgbClr val="222222"/>
+                        </a:solidFill>
+                        <a:effectLst/>
+                        <a:latin typeface="Aptos" panose="020B0004020202020204" pitchFamily="34" charset="0"/>
+                        <a:ea typeface="Aptos" panose="020B0004020202020204" pitchFamily="34" charset="0"/>
+                        <a:cs typeface="Aptos" panose="020B0004020202020204" pitchFamily="34" charset="0"/>
+                      </a:endParaRPr>
+                    </a:p>
+                  </a:txBody>
+                  <a:tcPr marL="34586" marR="34586" marT="10972" marB="10972" anchor="ctr"/>
+                </a:tc>
+                <a:tc>
+                  <a:txBody>
+                    <a:bodyPr/>
+                    <a:lstStyle/>
+                    <a:p>
+                      <a:pPr algn="ctr">
+                        <a:lnSpc>
+                          <a:spcPct val="107000"/>
+                        </a:lnSpc>
+                        <a:spcAft>
+                          <a:spcPts val="500"/>
+                        </a:spcAft>
+                        <a:buNone/>
+                      </a:pPr>
+                      <a:r>
+                        <a:rPr lang="ko-KR" sz="900">
+                          <a:effectLst/>
+                        </a:rPr>
+                        <a:t> </a:t>
+                      </a:r>
+                      <a:endParaRPr lang="ko-KR" sz="1000">
+                        <a:solidFill>
+                          <a:srgbClr val="222222"/>
+                        </a:solidFill>
+                        <a:effectLst/>
+                        <a:latin typeface="Aptos" panose="020B0004020202020204" pitchFamily="34" charset="0"/>
+                        <a:ea typeface="Aptos" panose="020B0004020202020204" pitchFamily="34" charset="0"/>
+                        <a:cs typeface="Aptos" panose="020B0004020202020204" pitchFamily="34" charset="0"/>
+                      </a:endParaRPr>
+                    </a:p>
+                  </a:txBody>
+                  <a:tcPr marL="34586" marR="34586" marT="10972" marB="10972"/>
+                </a:tc>
+                <a:tc>
+                  <a:txBody>
+                    <a:bodyPr/>
+                    <a:lstStyle/>
+                    <a:p>
+                      <a:pPr algn="ctr">
+                        <a:lnSpc>
+                          <a:spcPct val="107000"/>
+                        </a:lnSpc>
+                        <a:spcAft>
+                          <a:spcPts val="500"/>
+                        </a:spcAft>
+                        <a:buNone/>
+                      </a:pPr>
+                      <a:r>
+                        <a:rPr lang="ko-KR" sz="900" dirty="0">
+                          <a:effectLst/>
+                        </a:rPr>
+                        <a:t>-1.343† (0.734)</a:t>
+                      </a:r>
+                      <a:endParaRPr lang="ko-KR" sz="1000" dirty="0">
+                        <a:solidFill>
+                          <a:srgbClr val="222222"/>
+                        </a:solidFill>
+                        <a:effectLst/>
+                        <a:latin typeface="Aptos" panose="020B0004020202020204" pitchFamily="34" charset="0"/>
+                        <a:ea typeface="Aptos" panose="020B0004020202020204" pitchFamily="34" charset="0"/>
+                        <a:cs typeface="Aptos" panose="020B0004020202020204" pitchFamily="34" charset="0"/>
+                      </a:endParaRPr>
+                    </a:p>
+                  </a:txBody>
+                  <a:tcPr marL="34586" marR="34586" marT="10972" marB="10972"/>
+                </a:tc>
+                <a:tc>
+                  <a:txBody>
+                    <a:bodyPr/>
+                    <a:lstStyle/>
+                    <a:p>
+                      <a:pPr algn="ctr">
+                        <a:lnSpc>
+                          <a:spcPct val="107000"/>
+                        </a:lnSpc>
+                        <a:spcAft>
+                          <a:spcPts val="500"/>
+                        </a:spcAft>
+                        <a:buNone/>
+                      </a:pPr>
+                      <a:r>
+                        <a:rPr lang="ko-KR" sz="900">
+                          <a:effectLst/>
+                        </a:rPr>
+                        <a:t>-1.345† (0.727)</a:t>
+                      </a:r>
+                      <a:endParaRPr lang="ko-KR" sz="1000">
+                        <a:solidFill>
+                          <a:srgbClr val="222222"/>
+                        </a:solidFill>
+                        <a:effectLst/>
+                        <a:latin typeface="Aptos" panose="020B0004020202020204" pitchFamily="34" charset="0"/>
+                        <a:ea typeface="Aptos" panose="020B0004020202020204" pitchFamily="34" charset="0"/>
+                        <a:cs typeface="Aptos" panose="020B0004020202020204" pitchFamily="34" charset="0"/>
+                      </a:endParaRPr>
+                    </a:p>
+                  </a:txBody>
+                  <a:tcPr marL="34586" marR="34586" marT="10972" marB="10972"/>
+                </a:tc>
+                <a:extLst>
+                  <a:ext uri="{0D108BD9-81ED-4DB2-BD59-A6C34878D82A}">
+                    <a16:rowId xmlns:a16="http://schemas.microsoft.com/office/drawing/2014/main" val="1041321588"/>
+                  </a:ext>
+                </a:extLst>
+              </a:tr>
+              <a:tr h="187452">
+                <a:tc>
+                  <a:txBody>
+                    <a:bodyPr/>
+                    <a:lstStyle/>
+                    <a:p>
+                      <a:pPr algn="ctr">
+                        <a:lnSpc>
+                          <a:spcPct val="107000"/>
+                        </a:lnSpc>
+                        <a:spcAft>
+                          <a:spcPts val="500"/>
+                        </a:spcAft>
+                        <a:buNone/>
+                      </a:pPr>
+                      <a:r>
+                        <a:rPr lang="ko-KR" sz="900">
+                          <a:effectLst/>
+                        </a:rPr>
+                        <a:t>Retained interactions</a:t>
+                      </a:r>
+                      <a:endParaRPr lang="ko-KR" sz="1000">
+                        <a:solidFill>
+                          <a:srgbClr val="222222"/>
+                        </a:solidFill>
+                        <a:effectLst/>
+                        <a:latin typeface="Aptos" panose="020B0004020202020204" pitchFamily="34" charset="0"/>
+                        <a:ea typeface="Aptos" panose="020B0004020202020204" pitchFamily="34" charset="0"/>
+                        <a:cs typeface="Aptos" panose="020B0004020202020204" pitchFamily="34" charset="0"/>
+                      </a:endParaRPr>
+                    </a:p>
+                  </a:txBody>
+                  <a:tcPr marL="34586" marR="34586" marT="10972" marB="10972" anchor="ctr"/>
+                </a:tc>
+                <a:tc>
+                  <a:txBody>
+                    <a:bodyPr/>
+                    <a:lstStyle/>
+                    <a:p>
+                      <a:pPr algn="ctr">
+                        <a:lnSpc>
+                          <a:spcPct val="107000"/>
+                        </a:lnSpc>
+                        <a:spcAft>
+                          <a:spcPts val="500"/>
+                        </a:spcAft>
+                        <a:buNone/>
+                      </a:pPr>
+                      <a:r>
+                        <a:rPr lang="ko-KR" sz="900">
+                          <a:effectLst/>
+                        </a:rPr>
+                        <a:t> </a:t>
+                      </a:r>
+                      <a:endParaRPr lang="ko-KR" sz="1000">
+                        <a:solidFill>
+                          <a:srgbClr val="222222"/>
+                        </a:solidFill>
+                        <a:effectLst/>
+                        <a:latin typeface="Aptos" panose="020B0004020202020204" pitchFamily="34" charset="0"/>
+                        <a:ea typeface="Aptos" panose="020B0004020202020204" pitchFamily="34" charset="0"/>
+                        <a:cs typeface="Aptos" panose="020B0004020202020204" pitchFamily="34" charset="0"/>
+                      </a:endParaRPr>
+                    </a:p>
+                  </a:txBody>
+                  <a:tcPr marL="34586" marR="34586" marT="10972" marB="10972"/>
+                </a:tc>
+                <a:tc>
+                  <a:txBody>
+                    <a:bodyPr/>
+                    <a:lstStyle/>
+                    <a:p>
+                      <a:pPr algn="ctr">
+                        <a:lnSpc>
+                          <a:spcPct val="107000"/>
+                        </a:lnSpc>
+                        <a:spcAft>
+                          <a:spcPts val="500"/>
+                        </a:spcAft>
+                        <a:buNone/>
+                      </a:pPr>
+                      <a:r>
+                        <a:rPr lang="ko-KR" sz="900" dirty="0">
+                          <a:effectLst/>
+                        </a:rPr>
+                        <a:t> </a:t>
+                      </a:r>
+                      <a:endParaRPr lang="ko-KR" sz="1000" dirty="0">
+                        <a:solidFill>
+                          <a:srgbClr val="222222"/>
+                        </a:solidFill>
+                        <a:effectLst/>
+                        <a:latin typeface="Aptos" panose="020B0004020202020204" pitchFamily="34" charset="0"/>
+                        <a:ea typeface="Aptos" panose="020B0004020202020204" pitchFamily="34" charset="0"/>
+                        <a:cs typeface="Aptos" panose="020B0004020202020204" pitchFamily="34" charset="0"/>
+                      </a:endParaRPr>
+                    </a:p>
+                  </a:txBody>
+                  <a:tcPr marL="34586" marR="34586" marT="10972" marB="10972"/>
+                </a:tc>
+                <a:tc>
+                  <a:txBody>
+                    <a:bodyPr/>
+                    <a:lstStyle/>
+                    <a:p>
+                      <a:pPr algn="ctr">
+                        <a:lnSpc>
+                          <a:spcPct val="107000"/>
+                        </a:lnSpc>
+                        <a:spcAft>
+                          <a:spcPts val="500"/>
+                        </a:spcAft>
+                        <a:buNone/>
+                      </a:pPr>
+                      <a:r>
+                        <a:rPr lang="ko-KR" sz="900" dirty="0">
+                          <a:effectLst/>
+                        </a:rPr>
+                        <a:t> </a:t>
+                      </a:r>
+                      <a:endParaRPr lang="ko-KR" sz="1000" dirty="0">
+                        <a:solidFill>
+                          <a:srgbClr val="222222"/>
+                        </a:solidFill>
+                        <a:effectLst/>
+                        <a:latin typeface="Aptos" panose="020B0004020202020204" pitchFamily="34" charset="0"/>
+                        <a:ea typeface="Aptos" panose="020B0004020202020204" pitchFamily="34" charset="0"/>
+                        <a:cs typeface="Aptos" panose="020B0004020202020204" pitchFamily="34" charset="0"/>
+                      </a:endParaRPr>
+                    </a:p>
+                  </a:txBody>
+                  <a:tcPr marL="34586" marR="34586" marT="10972" marB="10972"/>
+                </a:tc>
+                <a:extLst>
+                  <a:ext uri="{0D108BD9-81ED-4DB2-BD59-A6C34878D82A}">
+                    <a16:rowId xmlns:a16="http://schemas.microsoft.com/office/drawing/2014/main" val="1618182285"/>
+                  </a:ext>
+                </a:extLst>
+              </a:tr>
+              <a:tr h="187452">
+                <a:tc>
+                  <a:txBody>
+                    <a:bodyPr/>
+                    <a:lstStyle/>
+                    <a:p>
+                      <a:pPr algn="just">
+                        <a:lnSpc>
+                          <a:spcPct val="107000"/>
+                        </a:lnSpc>
+                        <a:spcAft>
+                          <a:spcPts val="500"/>
+                        </a:spcAft>
+                        <a:buNone/>
+                      </a:pPr>
+                      <a:r>
+                        <a:rPr lang="ko-KR" sz="900">
+                          <a:effectLst/>
+                        </a:rPr>
+                        <a:t>Connectivity x lower educational attainment</a:t>
+                      </a:r>
+                      <a:endParaRPr lang="ko-KR" sz="1000">
+                        <a:solidFill>
+                          <a:srgbClr val="222222"/>
+                        </a:solidFill>
+                        <a:effectLst/>
+                        <a:latin typeface="Aptos" panose="020B0004020202020204" pitchFamily="34" charset="0"/>
+                        <a:ea typeface="Aptos" panose="020B0004020202020204" pitchFamily="34" charset="0"/>
+                        <a:cs typeface="Aptos" panose="020B0004020202020204" pitchFamily="34" charset="0"/>
+                      </a:endParaRPr>
+                    </a:p>
+                  </a:txBody>
+                  <a:tcPr marL="34586" marR="34586" marT="10972" marB="10972" anchor="ctr"/>
+                </a:tc>
+                <a:tc>
+                  <a:txBody>
+                    <a:bodyPr/>
+                    <a:lstStyle/>
+                    <a:p>
+                      <a:pPr algn="ctr">
+                        <a:lnSpc>
+                          <a:spcPct val="107000"/>
+                        </a:lnSpc>
+                        <a:spcAft>
+                          <a:spcPts val="500"/>
+                        </a:spcAft>
+                        <a:buNone/>
+                      </a:pPr>
+                      <a:r>
+                        <a:rPr lang="ko-KR" sz="900">
+                          <a:effectLst/>
+                        </a:rPr>
+                        <a:t> </a:t>
+                      </a:r>
+                      <a:endParaRPr lang="ko-KR" sz="1000">
+                        <a:solidFill>
+                          <a:srgbClr val="222222"/>
+                        </a:solidFill>
+                        <a:effectLst/>
+                        <a:latin typeface="Aptos" panose="020B0004020202020204" pitchFamily="34" charset="0"/>
+                        <a:ea typeface="Aptos" panose="020B0004020202020204" pitchFamily="34" charset="0"/>
+                        <a:cs typeface="Aptos" panose="020B0004020202020204" pitchFamily="34" charset="0"/>
+                      </a:endParaRPr>
+                    </a:p>
+                  </a:txBody>
+                  <a:tcPr marL="34586" marR="34586" marT="10972" marB="10972"/>
+                </a:tc>
+                <a:tc>
+                  <a:txBody>
+                    <a:bodyPr/>
+                    <a:lstStyle/>
+                    <a:p>
+                      <a:pPr algn="ctr">
+                        <a:lnSpc>
+                          <a:spcPct val="107000"/>
+                        </a:lnSpc>
+                        <a:spcAft>
+                          <a:spcPts val="500"/>
+                        </a:spcAft>
+                        <a:buNone/>
+                      </a:pPr>
+                      <a:r>
+                        <a:rPr lang="ko-KR" sz="900">
+                          <a:effectLst/>
+                        </a:rPr>
+                        <a:t> </a:t>
+                      </a:r>
+                      <a:endParaRPr lang="ko-KR" sz="1000">
+                        <a:solidFill>
+                          <a:srgbClr val="222222"/>
+                        </a:solidFill>
+                        <a:effectLst/>
+                        <a:latin typeface="Aptos" panose="020B0004020202020204" pitchFamily="34" charset="0"/>
+                        <a:ea typeface="Aptos" panose="020B0004020202020204" pitchFamily="34" charset="0"/>
+                        <a:cs typeface="Aptos" panose="020B0004020202020204" pitchFamily="34" charset="0"/>
+                      </a:endParaRPr>
+                    </a:p>
+                  </a:txBody>
+                  <a:tcPr marL="34586" marR="34586" marT="10972" marB="10972"/>
+                </a:tc>
+                <a:tc>
+                  <a:txBody>
+                    <a:bodyPr/>
+                    <a:lstStyle/>
+                    <a:p>
+                      <a:pPr algn="ctr">
+                        <a:lnSpc>
+                          <a:spcPct val="107000"/>
+                        </a:lnSpc>
+                        <a:spcAft>
+                          <a:spcPts val="500"/>
+                        </a:spcAft>
+                        <a:buNone/>
+                      </a:pPr>
+                      <a:r>
+                        <a:rPr lang="ko-KR" sz="900" dirty="0">
+                          <a:effectLst/>
+                        </a:rPr>
+                        <a:t>4.660 (3.278)</a:t>
+                      </a:r>
+                      <a:endParaRPr lang="ko-KR" sz="1000" dirty="0">
+                        <a:solidFill>
+                          <a:srgbClr val="222222"/>
+                        </a:solidFill>
+                        <a:effectLst/>
+                        <a:latin typeface="Aptos" panose="020B0004020202020204" pitchFamily="34" charset="0"/>
+                        <a:ea typeface="Aptos" panose="020B0004020202020204" pitchFamily="34" charset="0"/>
+                        <a:cs typeface="Aptos" panose="020B0004020202020204" pitchFamily="34" charset="0"/>
+                      </a:endParaRPr>
+                    </a:p>
+                  </a:txBody>
+                  <a:tcPr marL="34586" marR="34586" marT="10972" marB="10972"/>
+                </a:tc>
+                <a:extLst>
+                  <a:ext uri="{0D108BD9-81ED-4DB2-BD59-A6C34878D82A}">
+                    <a16:rowId xmlns:a16="http://schemas.microsoft.com/office/drawing/2014/main" val="1537057410"/>
+                  </a:ext>
+                </a:extLst>
+              </a:tr>
+              <a:tr h="187452">
+                <a:tc>
+                  <a:txBody>
+                    <a:bodyPr/>
+                    <a:lstStyle/>
+                    <a:p>
+                      <a:pPr algn="just">
+                        <a:lnSpc>
+                          <a:spcPct val="107000"/>
+                        </a:lnSpc>
+                        <a:spcAft>
+                          <a:spcPts val="500"/>
+                        </a:spcAft>
+                        <a:buNone/>
+                      </a:pPr>
+                      <a:r>
+                        <a:rPr lang="ko-KR" sz="900">
+                          <a:effectLst/>
+                        </a:rPr>
+                        <a:t>Age x lower educational attainment</a:t>
+                      </a:r>
+                      <a:endParaRPr lang="ko-KR" sz="1000">
+                        <a:solidFill>
+                          <a:srgbClr val="222222"/>
+                        </a:solidFill>
+                        <a:effectLst/>
+                        <a:latin typeface="Aptos" panose="020B0004020202020204" pitchFamily="34" charset="0"/>
+                        <a:ea typeface="Aptos" panose="020B0004020202020204" pitchFamily="34" charset="0"/>
+                        <a:cs typeface="Aptos" panose="020B0004020202020204" pitchFamily="34" charset="0"/>
+                      </a:endParaRPr>
+                    </a:p>
+                  </a:txBody>
+                  <a:tcPr marL="34586" marR="34586" marT="10972" marB="10972" anchor="ctr"/>
+                </a:tc>
+                <a:tc>
+                  <a:txBody>
+                    <a:bodyPr/>
+                    <a:lstStyle/>
+                    <a:p>
+                      <a:pPr algn="ctr">
+                        <a:lnSpc>
+                          <a:spcPct val="107000"/>
+                        </a:lnSpc>
+                        <a:spcAft>
+                          <a:spcPts val="500"/>
+                        </a:spcAft>
+                        <a:buNone/>
+                      </a:pPr>
+                      <a:r>
+                        <a:rPr lang="ko-KR" sz="900">
+                          <a:effectLst/>
+                        </a:rPr>
+                        <a:t> </a:t>
+                      </a:r>
+                      <a:endParaRPr lang="ko-KR" sz="1000">
+                        <a:solidFill>
+                          <a:srgbClr val="222222"/>
+                        </a:solidFill>
+                        <a:effectLst/>
+                        <a:latin typeface="Aptos" panose="020B0004020202020204" pitchFamily="34" charset="0"/>
+                        <a:ea typeface="Aptos" panose="020B0004020202020204" pitchFamily="34" charset="0"/>
+                        <a:cs typeface="Aptos" panose="020B0004020202020204" pitchFamily="34" charset="0"/>
+                      </a:endParaRPr>
+                    </a:p>
+                  </a:txBody>
+                  <a:tcPr marL="34586" marR="34586" marT="10972" marB="10972"/>
+                </a:tc>
+                <a:tc>
+                  <a:txBody>
+                    <a:bodyPr/>
+                    <a:lstStyle/>
+                    <a:p>
+                      <a:pPr algn="ctr">
+                        <a:lnSpc>
+                          <a:spcPct val="107000"/>
+                        </a:lnSpc>
+                        <a:spcAft>
+                          <a:spcPts val="500"/>
+                        </a:spcAft>
+                        <a:buNone/>
+                      </a:pPr>
+                      <a:r>
+                        <a:rPr lang="ko-KR" sz="900">
+                          <a:effectLst/>
+                        </a:rPr>
+                        <a:t> </a:t>
+                      </a:r>
+                      <a:endParaRPr lang="ko-KR" sz="1000">
+                        <a:solidFill>
+                          <a:srgbClr val="222222"/>
+                        </a:solidFill>
+                        <a:effectLst/>
+                        <a:latin typeface="Aptos" panose="020B0004020202020204" pitchFamily="34" charset="0"/>
+                        <a:ea typeface="Aptos" panose="020B0004020202020204" pitchFamily="34" charset="0"/>
+                        <a:cs typeface="Aptos" panose="020B0004020202020204" pitchFamily="34" charset="0"/>
+                      </a:endParaRPr>
+                    </a:p>
+                  </a:txBody>
+                  <a:tcPr marL="34586" marR="34586" marT="10972" marB="10972"/>
+                </a:tc>
+                <a:tc>
+                  <a:txBody>
+                    <a:bodyPr/>
+                    <a:lstStyle/>
+                    <a:p>
+                      <a:pPr algn="ctr">
+                        <a:lnSpc>
+                          <a:spcPct val="107000"/>
+                        </a:lnSpc>
+                        <a:spcAft>
+                          <a:spcPts val="500"/>
+                        </a:spcAft>
+                        <a:buNone/>
+                      </a:pPr>
+                      <a:r>
+                        <a:rPr lang="ko-KR" sz="900" dirty="0">
+                          <a:effectLst/>
+                        </a:rPr>
+                        <a:t>-0.395*** (0.079)</a:t>
+                      </a:r>
+                      <a:endParaRPr lang="ko-KR" sz="1000" dirty="0">
+                        <a:solidFill>
+                          <a:srgbClr val="222222"/>
+                        </a:solidFill>
+                        <a:effectLst/>
+                        <a:highlight>
+                          <a:srgbClr val="FFFF00"/>
+                        </a:highlight>
+                        <a:latin typeface="Aptos" panose="020B0004020202020204" pitchFamily="34" charset="0"/>
+                        <a:ea typeface="Aptos" panose="020B0004020202020204" pitchFamily="34" charset="0"/>
+                        <a:cs typeface="Aptos" panose="020B0004020202020204" pitchFamily="34" charset="0"/>
+                      </a:endParaRPr>
+                    </a:p>
+                  </a:txBody>
+                  <a:tcPr marL="34586" marR="34586" marT="10972" marB="10972"/>
+                </a:tc>
+                <a:extLst>
+                  <a:ext uri="{0D108BD9-81ED-4DB2-BD59-A6C34878D82A}">
+                    <a16:rowId xmlns:a16="http://schemas.microsoft.com/office/drawing/2014/main" val="117395619"/>
+                  </a:ext>
+                </a:extLst>
+              </a:tr>
+            </a:tbl>
+          </a:graphicData>
+        </a:graphic>
+      </p:graphicFrame>
+    </p:spTree>
+    <p:extLst>
+      <p:ext uri="{BB962C8B-B14F-4D97-AF65-F5344CB8AC3E}">
+        <p14:creationId xmlns:p14="http://schemas.microsoft.com/office/powerpoint/2010/main" val="2361898664"/>
+      </p:ext>
+    </p:extLst>
+  </p:cSld>
+  <p:clrMapOvr>
+    <a:masterClrMapping/>
+  </p:clrMapOvr>
+</p:sld>
+</file>
+
+<file path=ppt/slides/slide9.xml><?xml version="1.0" encoding="utf-8"?>
+<p:sld xmlns:a="http://schemas.openxmlformats.org/drawingml/2006/main" xmlns:r="http://schemas.openxmlformats.org/officeDocument/2006/relationships" xmlns:p="http://schemas.openxmlformats.org/presentationml/2006/main">
+  <p:cSld>
+    <p:spTree>
+      <p:nvGrpSpPr>
         <p:cNvPr id="1" name=""/>
         <p:cNvGrpSpPr/>
         <p:nvPr/>
@@ -20107,7 +25210,7 @@
                 <a:ea typeface="Calibri" pitchFamily="34" charset="-122"/>
                 <a:cs typeface="Calibri" pitchFamily="34" charset="-120"/>
               </a:rPr>
-              <a:t>p&lt;0.05</a:t>
+              <a:t>p&lt;0.001</a:t>
             </a:r>
             <a:endParaRPr lang="en-US" sz="1000" dirty="0"/>
           </a:p>
@@ -20224,7 +25327,7 @@
                 <a:ea typeface="Calibri" pitchFamily="34" charset="-122"/>
                 <a:cs typeface="Calibri" pitchFamily="34" charset="-120"/>
               </a:rPr>
-              <a:t>p&lt;0.05</a:t>
+              <a:t>p&lt;0.001</a:t>
             </a:r>
             <a:endParaRPr lang="en-US" sz="1000" dirty="0"/>
           </a:p>
@@ -20504,7 +25607,7 @@
                 <a:ea typeface="Calibri" pitchFamily="34" charset="-122"/>
                 <a:cs typeface="Calibri" pitchFamily="34" charset="-120"/>
               </a:rPr>
-              <a:t>8 / 13</a:t>
+              <a:t>9 / 13</a:t>
             </a:r>
             <a:endParaRPr lang="en-US" sz="900" dirty="0"/>
           </a:p>
@@ -20552,1056 +25655,6 @@
               <a:t>Model 3 key fixed effects (95% CI).</a:t>
             </a:r>
             <a:endParaRPr lang="en-US" sz="1200" dirty="0"/>
-          </a:p>
-        </p:txBody>
-      </p:sp>
-    </p:spTree>
-  </p:cSld>
-  <p:clrMapOvr>
-    <a:masterClrMapping/>
-  </p:clrMapOvr>
-</p:sld>
-</file>
-
-<file path=ppt/slides/slide9.xml><?xml version="1.0" encoding="utf-8"?>
-<p:sld xmlns:a="http://schemas.openxmlformats.org/drawingml/2006/main" xmlns:r="http://schemas.openxmlformats.org/officeDocument/2006/relationships" xmlns:p="http://schemas.openxmlformats.org/presentationml/2006/main">
-  <p:cSld>
-    <p:spTree>
-      <p:nvGrpSpPr>
-        <p:cNvPr id="1" name=""/>
-        <p:cNvGrpSpPr/>
-        <p:nvPr/>
-      </p:nvGrpSpPr>
-      <p:grpSpPr>
-        <a:xfrm>
-          <a:off x="0" y="0"/>
-          <a:ext cx="0" cy="0"/>
-          <a:chOff x="0" y="0"/>
-          <a:chExt cx="0" cy="0"/>
-        </a:xfrm>
-      </p:grpSpPr>
-      <p:sp>
-        <p:nvSpPr>
-          <p:cNvPr id="2" name="Text 0"/>
-          <p:cNvSpPr/>
-          <p:nvPr/>
-        </p:nvSpPr>
-        <p:spPr>
-          <a:xfrm>
-            <a:off x="548640" y="182880"/>
-            <a:ext cx="7315200" cy="201168"/>
-          </a:xfrm>
-          <a:prstGeom prst="rect">
-            <a:avLst/>
-          </a:prstGeom>
-          <a:noFill/>
-          <a:ln/>
-        </p:spPr>
-        <p:txBody>
-          <a:bodyPr wrap="square" lIns="0" tIns="0" rIns="0" bIns="0" rtlCol="0" anchor="ctr"/>
-          <a:lstStyle/>
-          <a:p>
-            <a:pPr marL="0" indent="0" algn="l">
-              <a:buNone/>
-            </a:pPr>
-            <a:r>
-              <a:rPr lang="en-US" sz="900" b="1" kern="0" spc="300" dirty="0">
-                <a:solidFill>
-                  <a:srgbClr val="2E869B"/>
-                </a:solidFill>
-                <a:latin typeface="Calibri" pitchFamily="34" charset="0"/>
-                <a:ea typeface="Calibri" pitchFamily="34" charset="-122"/>
-                <a:cs typeface="Calibri" pitchFamily="34" charset="-120"/>
-              </a:rPr>
-              <a:t>SECTION III  ·  PRELIMINARY RESULTS  ·  4 / 6</a:t>
-            </a:r>
-            <a:endParaRPr lang="en-US" sz="900" dirty="0"/>
-          </a:p>
-        </p:txBody>
-      </p:sp>
-      <p:sp>
-        <p:nvSpPr>
-          <p:cNvPr id="3" name="Text 1"/>
-          <p:cNvSpPr/>
-          <p:nvPr/>
-        </p:nvSpPr>
-        <p:spPr>
-          <a:xfrm>
-            <a:off x="548640" y="365760"/>
-            <a:ext cx="10058400" cy="594360"/>
-          </a:xfrm>
-          <a:prstGeom prst="rect">
-            <a:avLst/>
-          </a:prstGeom>
-          <a:noFill/>
-          <a:ln/>
-        </p:spPr>
-        <p:txBody>
-          <a:bodyPr wrap="square" lIns="0" tIns="0" rIns="0" bIns="0" rtlCol="0" anchor="b"/>
-          <a:lstStyle/>
-          <a:p>
-            <a:pPr marL="0" indent="0" algn="l">
-              <a:buNone/>
-            </a:pPr>
-            <a:r>
-              <a:rPr lang="en-US" sz="3000" b="1" dirty="0">
-                <a:solidFill>
-                  <a:srgbClr val="14263D"/>
-                </a:solidFill>
-                <a:latin typeface="Calibri" pitchFamily="34" charset="0"/>
-                <a:ea typeface="Calibri" pitchFamily="34" charset="-122"/>
-                <a:cs typeface="Calibri" pitchFamily="34" charset="-120"/>
-              </a:rPr>
-              <a:t>Does infrastructure offset individual vulnerability?</a:t>
-            </a:r>
-            <a:endParaRPr lang="en-US" sz="3000" dirty="0"/>
-          </a:p>
-        </p:txBody>
-      </p:sp>
-      <p:sp>
-        <p:nvSpPr>
-          <p:cNvPr id="6" name="Shape 4"/>
-          <p:cNvSpPr/>
-          <p:nvPr/>
-        </p:nvSpPr>
-        <p:spPr>
-          <a:xfrm>
-            <a:off x="548640" y="978408"/>
-            <a:ext cx="594360" cy="41148"/>
-          </a:xfrm>
-          <a:prstGeom prst="rect">
-            <a:avLst/>
-          </a:prstGeom>
-          <a:solidFill>
-            <a:srgbClr val="2E869B"/>
-          </a:solidFill>
-          <a:ln/>
-        </p:spPr>
-        <p:txBody>
-          <a:bodyPr/>
-          <a:lstStyle/>
-          <a:p>
-            <a:endParaRPr lang="ko-KR" altLang="en-US"/>
-          </a:p>
-        </p:txBody>
-      </p:sp>
-      <p:sp>
-        <p:nvSpPr>
-          <p:cNvPr id="7" name="Text 5"/>
-          <p:cNvSpPr/>
-          <p:nvPr/>
-        </p:nvSpPr>
-        <p:spPr>
-          <a:xfrm>
-            <a:off x="548640" y="1069848"/>
-            <a:ext cx="11064240" cy="320040"/>
-          </a:xfrm>
-          <a:prstGeom prst="rect">
-            <a:avLst/>
-          </a:prstGeom>
-          <a:noFill/>
-          <a:ln/>
-        </p:spPr>
-        <p:txBody>
-          <a:bodyPr wrap="square" lIns="0" tIns="0" rIns="0" bIns="0" rtlCol="0" anchor="t"/>
-          <a:lstStyle/>
-          <a:p>
-            <a:pPr marL="0" indent="0" algn="l">
-              <a:buNone/>
-            </a:pPr>
-            <a:r>
-              <a:rPr lang="en-US" sz="1400" dirty="0">
-                <a:solidFill>
-                  <a:srgbClr val="6B6B6B"/>
-                </a:solidFill>
-                <a:latin typeface="Calibri" pitchFamily="34" charset="0"/>
-                <a:ea typeface="Calibri" pitchFamily="34" charset="-122"/>
-                <a:cs typeface="Calibri" pitchFamily="34" charset="-120"/>
-              </a:rPr>
-              <a:t>HLM: cross-level interactions</a:t>
-            </a:r>
-            <a:endParaRPr lang="en-US" sz="1400" dirty="0"/>
-          </a:p>
-        </p:txBody>
-      </p:sp>
-      <p:pic>
-        <p:nvPicPr>
-          <p:cNvPr id="8" name="Image 0" descr="/mnt/project/fig_interaction_cross.png"/>
-          <p:cNvPicPr>
-            <a:picLocks noChangeAspect="1"/>
-          </p:cNvPicPr>
-          <p:nvPr/>
-        </p:nvPicPr>
-        <p:blipFill>
-          <a:blip r:embed="rId3"/>
-          <a:stretch>
-            <a:fillRect/>
-          </a:stretch>
-        </p:blipFill>
-        <p:spPr>
-          <a:xfrm>
-            <a:off x="563472" y="1438326"/>
-            <a:ext cx="6900013" cy="4572000"/>
-          </a:xfrm>
-          <a:prstGeom prst="rect">
-            <a:avLst/>
-          </a:prstGeom>
-        </p:spPr>
-      </p:pic>
-      <p:sp>
-        <p:nvSpPr>
-          <p:cNvPr id="9" name="Text 6"/>
-          <p:cNvSpPr/>
-          <p:nvPr/>
-        </p:nvSpPr>
-        <p:spPr>
-          <a:xfrm>
-            <a:off x="365760" y="5917401"/>
-            <a:ext cx="7315200" cy="228600"/>
-          </a:xfrm>
-          <a:prstGeom prst="rect">
-            <a:avLst/>
-          </a:prstGeom>
-          <a:noFill/>
-          <a:ln/>
-        </p:spPr>
-        <p:txBody>
-          <a:bodyPr wrap="square" lIns="0" tIns="0" rIns="0" bIns="0" rtlCol="0" anchor="ctr"/>
-          <a:lstStyle/>
-          <a:p>
-            <a:pPr marL="0" indent="0" algn="ctr">
-              <a:buNone/>
-            </a:pPr>
-            <a:r>
-              <a:rPr lang="en-US" sz="1200" i="1" dirty="0">
-                <a:solidFill>
-                  <a:srgbClr val="6B6B6B"/>
-                </a:solidFill>
-                <a:latin typeface="Calibri" pitchFamily="34" charset="0"/>
-                <a:ea typeface="Calibri" pitchFamily="34" charset="-122"/>
-                <a:cs typeface="Calibri" pitchFamily="34" charset="-120"/>
-              </a:rPr>
-              <a:t>Cross-level interactions: how district-level UMC dimensions interact with vulnerable groups.</a:t>
-            </a:r>
-            <a:endParaRPr lang="en-US" sz="1200" dirty="0"/>
-          </a:p>
-        </p:txBody>
-      </p:sp>
-      <p:sp>
-        <p:nvSpPr>
-          <p:cNvPr id="10" name="Text 7"/>
-          <p:cNvSpPr/>
-          <p:nvPr/>
-        </p:nvSpPr>
-        <p:spPr>
-          <a:xfrm>
-            <a:off x="7794639" y="1538415"/>
-            <a:ext cx="4023360" cy="274320"/>
-          </a:xfrm>
-          <a:prstGeom prst="rect">
-            <a:avLst/>
-          </a:prstGeom>
-          <a:noFill/>
-          <a:ln/>
-        </p:spPr>
-        <p:txBody>
-          <a:bodyPr wrap="square" lIns="0" tIns="0" rIns="0" bIns="0" rtlCol="0" anchor="ctr"/>
-          <a:lstStyle/>
-          <a:p>
-            <a:pPr marL="0" indent="0" algn="l">
-              <a:buNone/>
-            </a:pPr>
-            <a:r>
-              <a:rPr lang="en-US" sz="1600" b="1" kern="0" spc="200" dirty="0">
-                <a:solidFill>
-                  <a:srgbClr val="2E869B"/>
-                </a:solidFill>
-                <a:latin typeface="Calibri" pitchFamily="34" charset="0"/>
-                <a:ea typeface="Calibri" pitchFamily="34" charset="-122"/>
-                <a:cs typeface="Calibri" pitchFamily="34" charset="-120"/>
-              </a:rPr>
-              <a:t>MAIN EFFECT</a:t>
-            </a:r>
-            <a:endParaRPr lang="en-US" sz="1600" dirty="0"/>
-          </a:p>
-        </p:txBody>
-      </p:sp>
-      <p:sp>
-        <p:nvSpPr>
-          <p:cNvPr id="11" name="Text 8"/>
-          <p:cNvSpPr/>
-          <p:nvPr/>
-        </p:nvSpPr>
-        <p:spPr>
-          <a:xfrm>
-            <a:off x="7794639" y="1862163"/>
-            <a:ext cx="4023360" cy="500000"/>
-          </a:xfrm>
-          <a:prstGeom prst="rect">
-            <a:avLst/>
-          </a:prstGeom>
-          <a:noFill/>
-          <a:ln/>
-        </p:spPr>
-        <p:txBody>
-          <a:bodyPr wrap="square" lIns="0" tIns="0" rIns="0" bIns="0" rtlCol="0" anchor="t"/>
-          <a:lstStyle/>
-          <a:p>
-            <a:pPr marL="0" indent="0" algn="l">
-              <a:lnSpc>
-                <a:spcPct val="110000"/>
-              </a:lnSpc>
-              <a:buNone/>
-            </a:pPr>
-            <a:r>
-              <a:rPr lang="en-US" sz="1300" dirty="0">
-                <a:solidFill>
-                  <a:srgbClr val="333333"/>
-                </a:solidFill>
-                <a:latin typeface="Calibri" pitchFamily="34" charset="0"/>
-                <a:ea typeface="Calibri" pitchFamily="34" charset="-122"/>
-                <a:cs typeface="Calibri" pitchFamily="34" charset="-120"/>
-              </a:rPr>
-              <a:t>District-level UMC dimensions show only weak, contextual associations with individual digital use.</a:t>
-            </a:r>
-            <a:endParaRPr lang="en-US" sz="1300" dirty="0"/>
-          </a:p>
-        </p:txBody>
-      </p:sp>
-      <p:sp>
-        <p:nvSpPr>
-          <p:cNvPr id="12" name="Shape 9"/>
-          <p:cNvSpPr/>
-          <p:nvPr/>
-        </p:nvSpPr>
-        <p:spPr>
-          <a:xfrm>
-            <a:off x="7794639" y="2407095"/>
-            <a:ext cx="4023360" cy="7315"/>
-          </a:xfrm>
-          <a:prstGeom prst="rect">
-            <a:avLst/>
-          </a:prstGeom>
-          <a:solidFill>
-            <a:srgbClr val="D0D0D0"/>
-          </a:solidFill>
-          <a:ln/>
-        </p:spPr>
-        <p:txBody>
-          <a:bodyPr/>
-          <a:lstStyle/>
-          <a:p>
-            <a:endParaRPr lang="ko-KR" altLang="en-US"/>
-          </a:p>
-        </p:txBody>
-      </p:sp>
-      <p:sp>
-        <p:nvSpPr>
-          <p:cNvPr id="13" name="Text 10"/>
-          <p:cNvSpPr/>
-          <p:nvPr/>
-        </p:nvSpPr>
-        <p:spPr>
-          <a:xfrm>
-            <a:off x="7794639" y="2544255"/>
-            <a:ext cx="4023360" cy="274320"/>
-          </a:xfrm>
-          <a:prstGeom prst="rect">
-            <a:avLst/>
-          </a:prstGeom>
-          <a:noFill/>
-          <a:ln/>
-        </p:spPr>
-        <p:txBody>
-          <a:bodyPr wrap="square" lIns="0" tIns="0" rIns="0" bIns="0" rtlCol="0" anchor="ctr"/>
-          <a:lstStyle/>
-          <a:p>
-            <a:pPr marL="0" indent="0" algn="l">
-              <a:buNone/>
-            </a:pPr>
-            <a:r>
-              <a:rPr lang="en-US" sz="1400" b="1" kern="0" spc="200" dirty="0">
-                <a:solidFill>
-                  <a:srgbClr val="2E869B"/>
-                </a:solidFill>
-                <a:latin typeface="Calibri" pitchFamily="34" charset="0"/>
-                <a:ea typeface="Calibri" pitchFamily="34" charset="-122"/>
-                <a:cs typeface="Calibri" pitchFamily="34" charset="-120"/>
-              </a:rPr>
-              <a:t>CROSS-LEVEL INTERACTIONS</a:t>
-            </a:r>
-            <a:endParaRPr lang="en-US" sz="1400" dirty="0"/>
-          </a:p>
-        </p:txBody>
-      </p:sp>
-      <p:sp>
-        <p:nvSpPr>
-          <p:cNvPr id="14" name="Text 11"/>
-          <p:cNvSpPr/>
-          <p:nvPr/>
-        </p:nvSpPr>
-        <p:spPr>
-          <a:xfrm>
-            <a:off x="7794639" y="2864295"/>
-            <a:ext cx="2200000" cy="300000"/>
-          </a:xfrm>
-          <a:prstGeom prst="rect">
-            <a:avLst/>
-          </a:prstGeom>
-          <a:noFill/>
-          <a:ln/>
-        </p:spPr>
-        <p:txBody>
-          <a:bodyPr wrap="square" lIns="0" tIns="0" rIns="0" bIns="0" rtlCol="0" anchor="ctr"/>
-          <a:lstStyle/>
-          <a:p>
-            <a:pPr marL="0" indent="0" algn="l">
-              <a:buNone/>
-            </a:pPr>
-            <a:r>
-              <a:rPr lang="en-US" sz="1300" dirty="0">
-                <a:solidFill>
-                  <a:srgbClr val="333333"/>
-                </a:solidFill>
-                <a:latin typeface="Calibri" pitchFamily="34" charset="0"/>
-                <a:ea typeface="Calibri" pitchFamily="34" charset="-122"/>
-                <a:cs typeface="Calibri" pitchFamily="34" charset="-120"/>
-              </a:rPr>
-              <a:t>Affordability × Elderly (65+)</a:t>
-            </a:r>
-            <a:endParaRPr lang="en-US" sz="1300" dirty="0"/>
-          </a:p>
-        </p:txBody>
-      </p:sp>
-      <p:sp>
-        <p:nvSpPr>
-          <p:cNvPr id="15" name="Text 12"/>
-          <p:cNvSpPr/>
-          <p:nvPr/>
-        </p:nvSpPr>
-        <p:spPr>
-          <a:xfrm>
-            <a:off x="9994639" y="2864295"/>
-            <a:ext cx="1823360" cy="300000"/>
-          </a:xfrm>
-          <a:prstGeom prst="rect">
-            <a:avLst/>
-          </a:prstGeom>
-          <a:noFill/>
-          <a:ln/>
-        </p:spPr>
-        <p:txBody>
-          <a:bodyPr wrap="square" lIns="0" tIns="0" rIns="0" bIns="0" rtlCol="0" anchor="ctr"/>
-          <a:lstStyle/>
-          <a:p>
-            <a:pPr marL="0" indent="0" algn="r">
-              <a:buNone/>
-            </a:pPr>
-            <a:r>
-              <a:rPr lang="en-US" sz="1400" b="1" dirty="0">
-                <a:solidFill>
-                  <a:srgbClr val="14263D"/>
-                </a:solidFill>
-                <a:latin typeface="Calibri" pitchFamily="34" charset="0"/>
-                <a:ea typeface="Calibri" pitchFamily="34" charset="-122"/>
-                <a:cs typeface="Calibri" pitchFamily="34" charset="-120"/>
-              </a:rPr>
-              <a:t>+3.23</a:t>
-            </a:r>
-            <a:r>
-              <a:rPr lang="en-US" sz="1000" i="1" dirty="0">
-                <a:solidFill>
-                  <a:srgbClr val="6B6B6B"/>
-                </a:solidFill>
-                <a:latin typeface="Calibri" pitchFamily="34" charset="0"/>
-                <a:ea typeface="Calibri" pitchFamily="34" charset="-122"/>
-                <a:cs typeface="Calibri" pitchFamily="34" charset="-120"/>
-              </a:rPr>
-              <a:t>  p=0.08 †</a:t>
-            </a:r>
-            <a:endParaRPr lang="en-US" sz="1400" dirty="0"/>
-          </a:p>
-        </p:txBody>
-      </p:sp>
-      <p:sp>
-        <p:nvSpPr>
-          <p:cNvPr id="16" name="Text 13"/>
-          <p:cNvSpPr/>
-          <p:nvPr/>
-        </p:nvSpPr>
-        <p:spPr>
-          <a:xfrm>
-            <a:off x="7794639" y="3164295"/>
-            <a:ext cx="2200000" cy="300000"/>
-          </a:xfrm>
-          <a:prstGeom prst="rect">
-            <a:avLst/>
-          </a:prstGeom>
-          <a:noFill/>
-          <a:ln/>
-        </p:spPr>
-        <p:txBody>
-          <a:bodyPr wrap="square" lIns="0" tIns="0" rIns="0" bIns="0" rtlCol="0" anchor="ctr"/>
-          <a:lstStyle/>
-          <a:p>
-            <a:pPr marL="0" indent="0" algn="l">
-              <a:buNone/>
-            </a:pPr>
-            <a:r>
-              <a:rPr lang="en-US" sz="1300" dirty="0">
-                <a:solidFill>
-                  <a:srgbClr val="6B6B6B"/>
-                </a:solidFill>
-                <a:latin typeface="Calibri" pitchFamily="34" charset="0"/>
-                <a:ea typeface="Calibri" pitchFamily="34" charset="-122"/>
-                <a:cs typeface="Calibri" pitchFamily="34" charset="-120"/>
-              </a:rPr>
-              <a:t>Connectivity × Elderly</a:t>
-            </a:r>
-            <a:endParaRPr lang="en-US" sz="1300" dirty="0"/>
-          </a:p>
-        </p:txBody>
-      </p:sp>
-      <p:sp>
-        <p:nvSpPr>
-          <p:cNvPr id="17" name="Text 14"/>
-          <p:cNvSpPr/>
-          <p:nvPr/>
-        </p:nvSpPr>
-        <p:spPr>
-          <a:xfrm>
-            <a:off x="9994639" y="3164295"/>
-            <a:ext cx="1823360" cy="300000"/>
-          </a:xfrm>
-          <a:prstGeom prst="rect">
-            <a:avLst/>
-          </a:prstGeom>
-          <a:noFill/>
-          <a:ln/>
-        </p:spPr>
-        <p:txBody>
-          <a:bodyPr wrap="square" lIns="0" tIns="0" rIns="0" bIns="0" rtlCol="0" anchor="ctr"/>
-          <a:lstStyle/>
-          <a:p>
-            <a:pPr marL="0" indent="0" algn="r">
-              <a:buNone/>
-            </a:pPr>
-            <a:r>
-              <a:rPr lang="en-US" sz="1400" b="1" dirty="0">
-                <a:solidFill>
-                  <a:srgbClr val="8A8A8A"/>
-                </a:solidFill>
-                <a:latin typeface="Calibri" pitchFamily="34" charset="0"/>
-                <a:ea typeface="Calibri" pitchFamily="34" charset="-122"/>
-                <a:cs typeface="Calibri" pitchFamily="34" charset="-120"/>
-              </a:rPr>
-              <a:t>+1.84</a:t>
-            </a:r>
-            <a:r>
-              <a:rPr lang="en-US" sz="1000" i="1" dirty="0">
-                <a:solidFill>
-                  <a:srgbClr val="8A8A8A"/>
-                </a:solidFill>
-                <a:latin typeface="Calibri" pitchFamily="34" charset="0"/>
-                <a:ea typeface="Calibri" pitchFamily="34" charset="-122"/>
-                <a:cs typeface="Calibri" pitchFamily="34" charset="-120"/>
-              </a:rPr>
-              <a:t>  n.s.</a:t>
-            </a:r>
-            <a:endParaRPr lang="en-US" sz="1400" dirty="0"/>
-          </a:p>
-        </p:txBody>
-      </p:sp>
-      <p:sp>
-        <p:nvSpPr>
-          <p:cNvPr id="18" name="Text 15"/>
-          <p:cNvSpPr/>
-          <p:nvPr/>
-        </p:nvSpPr>
-        <p:spPr>
-          <a:xfrm>
-            <a:off x="7794639" y="3464295"/>
-            <a:ext cx="2200000" cy="300000"/>
-          </a:xfrm>
-          <a:prstGeom prst="rect">
-            <a:avLst/>
-          </a:prstGeom>
-          <a:noFill/>
-          <a:ln/>
-        </p:spPr>
-        <p:txBody>
-          <a:bodyPr wrap="square" lIns="0" tIns="0" rIns="0" bIns="0" rtlCol="0" anchor="ctr"/>
-          <a:lstStyle/>
-          <a:p>
-            <a:pPr marL="0" indent="0" algn="l">
-              <a:buNone/>
-            </a:pPr>
-            <a:r>
-              <a:rPr lang="en-US" sz="1300" dirty="0">
-                <a:solidFill>
-                  <a:srgbClr val="6B6B6B"/>
-                </a:solidFill>
-                <a:latin typeface="Calibri" pitchFamily="34" charset="0"/>
-                <a:ea typeface="Calibri" pitchFamily="34" charset="-122"/>
-                <a:cs typeface="Calibri" pitchFamily="34" charset="-120"/>
-              </a:rPr>
-              <a:t>Available for Use × Elderly</a:t>
-            </a:r>
-            <a:endParaRPr lang="en-US" sz="1300" dirty="0"/>
-          </a:p>
-        </p:txBody>
-      </p:sp>
-      <p:sp>
-        <p:nvSpPr>
-          <p:cNvPr id="19" name="Text 16"/>
-          <p:cNvSpPr/>
-          <p:nvPr/>
-        </p:nvSpPr>
-        <p:spPr>
-          <a:xfrm>
-            <a:off x="9994639" y="3464295"/>
-            <a:ext cx="1823360" cy="300000"/>
-          </a:xfrm>
-          <a:prstGeom prst="rect">
-            <a:avLst/>
-          </a:prstGeom>
-          <a:noFill/>
-          <a:ln/>
-        </p:spPr>
-        <p:txBody>
-          <a:bodyPr wrap="square" lIns="0" tIns="0" rIns="0" bIns="0" rtlCol="0" anchor="ctr"/>
-          <a:lstStyle/>
-          <a:p>
-            <a:pPr marL="0" indent="0" algn="r">
-              <a:buNone/>
-            </a:pPr>
-            <a:r>
-              <a:rPr lang="en-US" sz="1400" b="1" dirty="0">
-                <a:solidFill>
-                  <a:srgbClr val="8A8A8A"/>
-                </a:solidFill>
-                <a:latin typeface="Calibri" pitchFamily="34" charset="0"/>
-                <a:ea typeface="Calibri" pitchFamily="34" charset="-122"/>
-                <a:cs typeface="Calibri" pitchFamily="34" charset="-120"/>
-              </a:rPr>
-              <a:t>+1.31</a:t>
-            </a:r>
-            <a:r>
-              <a:rPr lang="en-US" sz="1000" i="1" dirty="0">
-                <a:solidFill>
-                  <a:srgbClr val="8A8A8A"/>
-                </a:solidFill>
-                <a:latin typeface="Calibri" pitchFamily="34" charset="0"/>
-                <a:ea typeface="Calibri" pitchFamily="34" charset="-122"/>
-                <a:cs typeface="Calibri" pitchFamily="34" charset="-120"/>
-              </a:rPr>
-              <a:t>  n.s.</a:t>
-            </a:r>
-            <a:endParaRPr lang="en-US" sz="1400" dirty="0"/>
-          </a:p>
-        </p:txBody>
-      </p:sp>
-      <p:sp>
-        <p:nvSpPr>
-          <p:cNvPr id="50" name="Text Row 4 Label"/>
-          <p:cNvSpPr/>
-          <p:nvPr/>
-        </p:nvSpPr>
-        <p:spPr>
-          <a:xfrm>
-            <a:off x="7794639" y="3764295"/>
-            <a:ext cx="2200000" cy="300000"/>
-          </a:xfrm>
-          <a:prstGeom prst="rect">
-            <a:avLst/>
-          </a:prstGeom>
-          <a:noFill/>
-          <a:ln/>
-        </p:spPr>
-        <p:txBody>
-          <a:bodyPr wrap="square" lIns="0" tIns="0" rIns="0" bIns="0" rtlCol="0" anchor="ctr"/>
-          <a:lstStyle/>
-          <a:p>
-            <a:pPr marL="0" indent="0" algn="l">
-              <a:buNone/>
-            </a:pPr>
-            <a:r>
-              <a:rPr lang="en-US" sz="1300" dirty="0">
-                <a:solidFill>
-                  <a:srgbClr val="6B6B6B"/>
-                </a:solidFill>
-                <a:latin typeface="Calibri" pitchFamily="34" charset="0"/>
-                <a:ea typeface="Calibri" pitchFamily="34" charset="-122"/>
-                <a:cs typeface="Calibri" pitchFamily="34" charset="-120"/>
-              </a:rPr>
-              <a:t>Connectivity × Low education</a:t>
-            </a:r>
-            <a:endParaRPr lang="en-US" sz="1300" dirty="0"/>
-          </a:p>
-        </p:txBody>
-      </p:sp>
-      <p:sp>
-        <p:nvSpPr>
-          <p:cNvPr id="51" name="Text Row 4 Value"/>
-          <p:cNvSpPr/>
-          <p:nvPr/>
-        </p:nvSpPr>
-        <p:spPr>
-          <a:xfrm>
-            <a:off x="9994639" y="3764295"/>
-            <a:ext cx="1823360" cy="300000"/>
-          </a:xfrm>
-          <a:prstGeom prst="rect">
-            <a:avLst/>
-          </a:prstGeom>
-          <a:noFill/>
-          <a:ln/>
-        </p:spPr>
-        <p:txBody>
-          <a:bodyPr wrap="square" lIns="0" tIns="0" rIns="0" bIns="0" rtlCol="0" anchor="ctr"/>
-          <a:lstStyle/>
-          <a:p>
-            <a:pPr marL="0" indent="0" algn="r">
-              <a:buNone/>
-            </a:pPr>
-            <a:r>
-              <a:rPr lang="en-US" sz="1400" b="1" dirty="0">
-                <a:solidFill>
-                  <a:srgbClr val="8A8A8A"/>
-                </a:solidFill>
-                <a:latin typeface="Calibri" pitchFamily="34" charset="0"/>
-                <a:ea typeface="Calibri" pitchFamily="34" charset="-122"/>
-                <a:cs typeface="Calibri" pitchFamily="34" charset="-120"/>
-              </a:rPr>
-              <a:t>+4.18</a:t>
-            </a:r>
-            <a:r>
-              <a:rPr lang="en-US" sz="1000" i="1" dirty="0">
-                <a:solidFill>
-                  <a:srgbClr val="8A8A8A"/>
-                </a:solidFill>
-                <a:latin typeface="Calibri" pitchFamily="34" charset="0"/>
-                <a:ea typeface="Calibri" pitchFamily="34" charset="-122"/>
-                <a:cs typeface="Calibri" pitchFamily="34" charset="-120"/>
-              </a:rPr>
-              <a:t>  n.s.</a:t>
-            </a:r>
-            <a:endParaRPr lang="en-US" sz="1400" dirty="0"/>
-          </a:p>
-        </p:txBody>
-      </p:sp>
-      <p:sp>
-        <p:nvSpPr>
-          <p:cNvPr id="20" name="Shape 17"/>
-          <p:cNvSpPr/>
-          <p:nvPr/>
-        </p:nvSpPr>
-        <p:spPr>
-          <a:xfrm>
-            <a:off x="7794639" y="4291500"/>
-            <a:ext cx="4035717" cy="1763580"/>
-          </a:xfrm>
-          <a:prstGeom prst="roundRect">
-            <a:avLst>
-              <a:gd name="adj" fmla="val 2703"/>
-            </a:avLst>
-          </a:prstGeom>
-          <a:solidFill>
-            <a:srgbClr val="1F3864"/>
-          </a:solidFill>
-          <a:ln/>
-        </p:spPr>
-        <p:txBody>
-          <a:bodyPr/>
-          <a:lstStyle/>
-          <a:p>
-            <a:endParaRPr lang="ko-KR" altLang="en-US"/>
-          </a:p>
-        </p:txBody>
-      </p:sp>
-      <p:sp>
-        <p:nvSpPr>
-          <p:cNvPr id="21" name="Text 18"/>
-          <p:cNvSpPr/>
-          <p:nvPr/>
-        </p:nvSpPr>
-        <p:spPr>
-          <a:xfrm>
-            <a:off x="7989876" y="4401228"/>
-            <a:ext cx="3657600" cy="228600"/>
-          </a:xfrm>
-          <a:prstGeom prst="rect">
-            <a:avLst/>
-          </a:prstGeom>
-          <a:noFill/>
-          <a:ln/>
-        </p:spPr>
-        <p:txBody>
-          <a:bodyPr wrap="square" lIns="0" tIns="0" rIns="0" bIns="0" rtlCol="0" anchor="ctr"/>
-          <a:lstStyle/>
-          <a:p>
-            <a:pPr marL="0" indent="0" algn="l">
-              <a:buNone/>
-            </a:pPr>
-            <a:r>
-              <a:rPr lang="en-US" sz="1600" b="1" kern="0" spc="200" dirty="0">
-                <a:solidFill>
-                  <a:srgbClr val="7FE4C4"/>
-                </a:solidFill>
-                <a:latin typeface="Calibri" pitchFamily="34" charset="0"/>
-                <a:ea typeface="Calibri" pitchFamily="34" charset="-122"/>
-                <a:cs typeface="Calibri" pitchFamily="34" charset="-120"/>
-              </a:rPr>
-              <a:t>INTERPRETATION</a:t>
-            </a:r>
-            <a:endParaRPr lang="en-US" sz="1600" dirty="0"/>
-          </a:p>
-        </p:txBody>
-      </p:sp>
-      <p:sp>
-        <p:nvSpPr>
-          <p:cNvPr id="22" name="Text 19"/>
-          <p:cNvSpPr/>
-          <p:nvPr/>
-        </p:nvSpPr>
-        <p:spPr>
-          <a:xfrm>
-            <a:off x="7989876" y="4657260"/>
-            <a:ext cx="3586428" cy="1280160"/>
-          </a:xfrm>
-          <a:prstGeom prst="rect">
-            <a:avLst/>
-          </a:prstGeom>
-          <a:noFill/>
-          <a:ln/>
-        </p:spPr>
-        <p:txBody>
-          <a:bodyPr wrap="square" lIns="0" tIns="0" rIns="0" bIns="0" rtlCol="0" anchor="t"/>
-          <a:lstStyle/>
-          <a:p>
-            <a:pPr marL="0" indent="0" algn="l">
-              <a:lnSpc>
-                <a:spcPct val="115000"/>
-              </a:lnSpc>
-              <a:spcAft>
-                <a:spcPts val="400"/>
-              </a:spcAft>
-              <a:buNone/>
-            </a:pPr>
-            <a:r>
-              <a:rPr lang="en-US" sz="1200" dirty="0">
-                <a:solidFill>
-                  <a:srgbClr val="FFFFFF"/>
-                </a:solidFill>
-                <a:latin typeface="Calibri" pitchFamily="34" charset="0"/>
-                <a:ea typeface="Calibri" pitchFamily="34" charset="-122"/>
-                <a:cs typeface="Calibri" pitchFamily="34" charset="-120"/>
-              </a:rPr>
-              <a:t>Only the Affordability–Elderly interaction approaches significance. District infrastructure does not show a strong differential effect for vulnerable groups.</a:t>
-            </a:r>
-            <a:endParaRPr lang="en-US" sz="1200" dirty="0"/>
-          </a:p>
-          <a:p>
-            <a:pPr marL="0" indent="0" algn="l">
-              <a:lnSpc>
-                <a:spcPct val="115000"/>
-              </a:lnSpc>
-              <a:buNone/>
-            </a:pPr>
-            <a:r>
-              <a:rPr lang="en-US" sz="1200" dirty="0">
-                <a:solidFill>
-                  <a:srgbClr val="FFFFFF"/>
-                </a:solidFill>
-                <a:latin typeface="Calibri" pitchFamily="34" charset="0"/>
-                <a:ea typeface="Calibri" pitchFamily="34" charset="-122"/>
-                <a:cs typeface="Calibri" pitchFamily="34" charset="-120"/>
-              </a:rPr>
-              <a:t>District scores identify </a:t>
-            </a:r>
-            <a:r>
-              <a:rPr lang="en-US" sz="1200" b="1" dirty="0">
-                <a:solidFill>
-                  <a:srgbClr val="FFFFFF"/>
-                </a:solidFill>
-                <a:latin typeface="Calibri" pitchFamily="34" charset="0"/>
-                <a:ea typeface="Calibri" pitchFamily="34" charset="-122"/>
-                <a:cs typeface="Calibri" pitchFamily="34" charset="-120"/>
-              </a:rPr>
-              <a:t>where</a:t>
-            </a:r>
-            <a:r>
-              <a:rPr lang="en-US" sz="1200" dirty="0">
-                <a:solidFill>
-                  <a:srgbClr val="FFFFFF"/>
-                </a:solidFill>
-                <a:latin typeface="Calibri" pitchFamily="34" charset="0"/>
-                <a:ea typeface="Calibri" pitchFamily="34" charset="-122"/>
-                <a:cs typeface="Calibri" pitchFamily="34" charset="-120"/>
-              </a:rPr>
-              <a:t> vulnerable individuals are concentrated — supporting </a:t>
-            </a:r>
-            <a:r>
-              <a:rPr lang="en-US" sz="1200" b="1" i="1" dirty="0">
-                <a:solidFill>
-                  <a:srgbClr val="7FE4C4"/>
-                </a:solidFill>
-                <a:latin typeface="Calibri" pitchFamily="34" charset="0"/>
-                <a:ea typeface="Calibri" pitchFamily="34" charset="-122"/>
-                <a:cs typeface="Calibri" pitchFamily="34" charset="-120"/>
-              </a:rPr>
-              <a:t>place-sensitive</a:t>
-            </a:r>
-            <a:r>
-              <a:rPr lang="en-US" sz="1200" dirty="0">
-                <a:solidFill>
-                  <a:srgbClr val="FFFFFF"/>
-                </a:solidFill>
-                <a:latin typeface="Calibri" pitchFamily="34" charset="0"/>
-                <a:ea typeface="Calibri" pitchFamily="34" charset="-122"/>
-                <a:cs typeface="Calibri" pitchFamily="34" charset="-120"/>
-              </a:rPr>
-              <a:t> (not place-based) targeting.</a:t>
-            </a:r>
-            <a:endParaRPr lang="en-US" sz="1200" dirty="0"/>
-          </a:p>
-        </p:txBody>
-      </p:sp>
-      <p:sp>
-        <p:nvSpPr>
-          <p:cNvPr id="23" name="Shape 20"/>
-          <p:cNvSpPr/>
-          <p:nvPr/>
-        </p:nvSpPr>
-        <p:spPr>
-          <a:xfrm>
-            <a:off x="548640" y="6263640"/>
-            <a:ext cx="11064240" cy="7315"/>
-          </a:xfrm>
-          <a:prstGeom prst="rect">
-            <a:avLst/>
-          </a:prstGeom>
-          <a:solidFill>
-            <a:srgbClr val="D0D0D0"/>
-          </a:solidFill>
-          <a:ln/>
-        </p:spPr>
-        <p:txBody>
-          <a:bodyPr/>
-          <a:lstStyle/>
-          <a:p>
-            <a:endParaRPr lang="ko-KR" altLang="en-US"/>
-          </a:p>
-        </p:txBody>
-      </p:sp>
-      <p:pic>
-        <p:nvPicPr>
-          <p:cNvPr id="24" name="Image 1" descr="/home/claude/work/logo_gateway.jpeg"/>
-          <p:cNvPicPr>
-            <a:picLocks noChangeAspect="1"/>
-          </p:cNvPicPr>
-          <p:nvPr/>
-        </p:nvPicPr>
-        <p:blipFill>
-          <a:blip r:embed="rId4"/>
-          <a:stretch>
-            <a:fillRect/>
-          </a:stretch>
-        </p:blipFill>
-        <p:spPr>
-          <a:xfrm>
-            <a:off x="9555480" y="6355080"/>
-            <a:ext cx="640080" cy="411480"/>
-          </a:xfrm>
-          <a:prstGeom prst="rect">
-            <a:avLst/>
-          </a:prstGeom>
-        </p:spPr>
-      </p:pic>
-      <p:pic>
-        <p:nvPicPr>
-          <p:cNvPr id="25" name="Image 2" descr="/home/claude/work/logo_eu.jpeg"/>
-          <p:cNvPicPr>
-            <a:picLocks noChangeAspect="1"/>
-          </p:cNvPicPr>
-          <p:nvPr/>
-        </p:nvPicPr>
-        <p:blipFill>
-          <a:blip r:embed="rId5"/>
-          <a:stretch>
-            <a:fillRect/>
-          </a:stretch>
-        </p:blipFill>
-        <p:spPr>
-          <a:xfrm>
-            <a:off x="10296144" y="6400800"/>
-            <a:ext cx="1280160" cy="320040"/>
-          </a:xfrm>
-          <a:prstGeom prst="rect">
-            <a:avLst/>
-          </a:prstGeom>
-        </p:spPr>
-      </p:pic>
-      <p:pic>
-        <p:nvPicPr>
-          <p:cNvPr id="26" name="Image 3" descr="/home/claude/work/logo_itu.png"/>
-          <p:cNvPicPr>
-            <a:picLocks noChangeAspect="1"/>
-          </p:cNvPicPr>
-          <p:nvPr/>
-        </p:nvPicPr>
-        <p:blipFill>
-          <a:blip r:embed="rId6"/>
-          <a:stretch>
-            <a:fillRect/>
-          </a:stretch>
-        </p:blipFill>
-        <p:spPr>
-          <a:xfrm>
-            <a:off x="11686032" y="6355080"/>
-            <a:ext cx="411480" cy="411480"/>
-          </a:xfrm>
-          <a:prstGeom prst="rect">
-            <a:avLst/>
-          </a:prstGeom>
-        </p:spPr>
-      </p:pic>
-      <p:sp>
-        <p:nvSpPr>
-          <p:cNvPr id="27" name="Text 21"/>
-          <p:cNvSpPr/>
-          <p:nvPr/>
-        </p:nvSpPr>
-        <p:spPr>
-          <a:xfrm>
-            <a:off x="548640" y="6565392"/>
-            <a:ext cx="1371600" cy="201168"/>
-          </a:xfrm>
-          <a:prstGeom prst="rect">
-            <a:avLst/>
-          </a:prstGeom>
-          <a:noFill/>
-          <a:ln/>
-        </p:spPr>
-        <p:txBody>
-          <a:bodyPr wrap="square" lIns="0" tIns="0" rIns="0" bIns="0" rtlCol="0" anchor="ctr"/>
-          <a:lstStyle/>
-          <a:p>
-            <a:pPr marL="0" indent="0" algn="l">
-              <a:buNone/>
-            </a:pPr>
-            <a:r>
-              <a:rPr lang="en-US" sz="900" dirty="0">
-                <a:solidFill>
-                  <a:srgbClr val="B0B0B0"/>
-                </a:solidFill>
-                <a:latin typeface="Calibri" pitchFamily="34" charset="0"/>
-                <a:ea typeface="Calibri" pitchFamily="34" charset="-122"/>
-                <a:cs typeface="Calibri" pitchFamily="34" charset="-120"/>
-              </a:rPr>
-              <a:t>9 / 13</a:t>
-            </a:r>
-            <a:endParaRPr lang="en-US" sz="900" dirty="0"/>
           </a:p>
         </p:txBody>
       </p:sp>

--- a/ppt/HighFive_Step3_Submission.pptx
+++ b/ppt/HighFive_Step3_Submission.pptx
@@ -5,7 +5,7 @@
     <p:sldMasterId id="2147483648" r:id="rId1"/>
   </p:sldMasterIdLst>
   <p:notesMasterIdLst>
-    <p:notesMasterId r:id="rId15"/>
+    <p:notesMasterId r:id="rId14"/>
   </p:notesMasterIdLst>
   <p:sldIdLst>
     <p:sldId id="256" r:id="rId2"/>
@@ -15,12 +15,11 @@
     <p:sldId id="260" r:id="rId6"/>
     <p:sldId id="261" r:id="rId7"/>
     <p:sldId id="262" r:id="rId8"/>
-    <p:sldId id="272" r:id="rId9"/>
-    <p:sldId id="269" r:id="rId10"/>
-    <p:sldId id="270" r:id="rId11"/>
-    <p:sldId id="271" r:id="rId12"/>
-    <p:sldId id="265" r:id="rId13"/>
-    <p:sldId id="268" r:id="rId14"/>
+    <p:sldId id="269" r:id="rId9"/>
+    <p:sldId id="270" r:id="rId10"/>
+    <p:sldId id="271" r:id="rId11"/>
+    <p:sldId id="265" r:id="rId12"/>
+    <p:sldId id="268" r:id="rId13"/>
   </p:sldIdLst>
   <p:sldSz cx="12192000" cy="6858000"/>
   <p:notesSz cx="6858000" cy="12192000"/>
@@ -862,90 +861,6 @@
 </p:notes>
 </file>
 
-<file path=ppt/notesSlides/notesSlide13.xml><?xml version="1.0" encoding="utf-8"?>
-<p:notes xmlns:a="http://schemas.openxmlformats.org/drawingml/2006/main" xmlns:r="http://schemas.openxmlformats.org/officeDocument/2006/relationships" xmlns:p="http://schemas.openxmlformats.org/presentationml/2006/main">
-  <p:cSld>
-    <p:spTree>
-      <p:nvGrpSpPr>
-        <p:cNvPr id="1" name=""/>
-        <p:cNvGrpSpPr/>
-        <p:nvPr/>
-      </p:nvGrpSpPr>
-      <p:grpSpPr>
-        <a:xfrm>
-          <a:off x="0" y="0"/>
-          <a:ext cx="0" cy="0"/>
-          <a:chOff x="0" y="0"/>
-          <a:chExt cx="0" cy="0"/>
-        </a:xfrm>
-      </p:grpSpPr>
-      <p:sp>
-        <p:nvSpPr>
-          <p:cNvPr id="2" name="Slide Image Placeholder 1"/>
-          <p:cNvSpPr>
-            <a:spLocks noGrp="1" noRot="1" noChangeAspect="1"/>
-          </p:cNvSpPr>
-          <p:nvPr>
-            <p:ph type="sldImg"/>
-          </p:nvPr>
-        </p:nvSpPr>
-        <p:spPr/>
-      </p:sp>
-      <p:sp>
-        <p:nvSpPr>
-          <p:cNvPr id="3" name="Notes Placeholder 2"/>
-          <p:cNvSpPr>
-            <a:spLocks noGrp="1"/>
-          </p:cNvSpPr>
-          <p:nvPr>
-            <p:ph type="body" idx="1"/>
-          </p:nvPr>
-        </p:nvSpPr>
-        <p:spPr/>
-        <p:txBody>
-          <a:bodyPr/>
-          <a:lstStyle/>
-          <a:p>
-            <a:endParaRPr lang="en-US" dirty="0"/>
-          </a:p>
-        </p:txBody>
-      </p:sp>
-      <p:sp>
-        <p:nvSpPr>
-          <p:cNvPr id="4" name="Slide Number Placeholder 3"/>
-          <p:cNvSpPr>
-            <a:spLocks noGrp="1"/>
-          </p:cNvSpPr>
-          <p:nvPr>
-            <p:ph type="sldNum" sz="quarter" idx="10"/>
-          </p:nvPr>
-        </p:nvSpPr>
-        <p:spPr/>
-        <p:txBody>
-          <a:bodyPr/>
-          <a:lstStyle/>
-          <a:p>
-            <a:fld id="{F7021451-1387-4CA6-816F-3879F97B5CBC}" type="slidenum">
-              <a:rPr lang="en-US"/>
-              <a:t>13</a:t>
-            </a:fld>
-            <a:endParaRPr lang="en-US"/>
-          </a:p>
-        </p:txBody>
-      </p:sp>
-    </p:spTree>
-    <p:extLst>
-      <p:ext uri="{BB962C8B-B14F-4D97-AF65-F5344CB8AC3E}">
-        <p14:creationId xmlns:p14="http://schemas.microsoft.com/office/powerpoint/2010/main" val="1024086991"/>
-      </p:ext>
-    </p:extLst>
-  </p:cSld>
-  <p:clrMapOvr>
-    <a:masterClrMapping/>
-  </p:clrMapOvr>
-</p:notes>
-</file>
-
 <file path=ppt/notesSlides/notesSlide2.xml><?xml version="1.0" encoding="utf-8"?>
 <p:notes xmlns:a="http://schemas.openxmlformats.org/drawingml/2006/main" xmlns:r="http://schemas.openxmlformats.org/officeDocument/2006/relationships" xmlns:p="http://schemas.openxmlformats.org/presentationml/2006/main">
   <p:cSld>
@@ -1455,13 +1370,7 @@
   <p:cSld>
     <p:spTree>
       <p:nvGrpSpPr>
-        <p:cNvPr id="1" name="">
-          <a:extLst>
-            <a:ext uri="{FF2B5EF4-FFF2-40B4-BE49-F238E27FC236}">
-              <a16:creationId xmlns:a16="http://schemas.microsoft.com/office/drawing/2014/main" id="{135EEF0E-B2FC-A970-113C-E920588FCBA7}"/>
-            </a:ext>
-          </a:extLst>
-        </p:cNvPr>
+        <p:cNvPr id="1" name=""/>
         <p:cNvGrpSpPr/>
         <p:nvPr/>
       </p:nvGrpSpPr>
@@ -1475,13 +1384,7 @@
       </p:grpSpPr>
       <p:sp>
         <p:nvSpPr>
-          <p:cNvPr id="2" name="Slide Image Placeholder 1">
-            <a:extLst>
-              <a:ext uri="{FF2B5EF4-FFF2-40B4-BE49-F238E27FC236}">
-                <a16:creationId xmlns:a16="http://schemas.microsoft.com/office/drawing/2014/main" id="{A8C8247B-5FC3-DD78-BC68-0DB0C7C9A7AD}"/>
-              </a:ext>
-            </a:extLst>
-          </p:cNvPr>
+          <p:cNvPr id="2" name="Slide Image Placeholder 1"/>
           <p:cNvSpPr>
             <a:spLocks noGrp="1" noRot="1" noChangeAspect="1"/>
           </p:cNvSpPr>
@@ -1493,13 +1396,7 @@
       </p:sp>
       <p:sp>
         <p:nvSpPr>
-          <p:cNvPr id="3" name="Notes Placeholder 2">
-            <a:extLst>
-              <a:ext uri="{FF2B5EF4-FFF2-40B4-BE49-F238E27FC236}">
-                <a16:creationId xmlns:a16="http://schemas.microsoft.com/office/drawing/2014/main" id="{E24A70BF-5246-E676-E0BE-CE2BD8F8D5B5}"/>
-              </a:ext>
-            </a:extLst>
-          </p:cNvPr>
+          <p:cNvPr id="3" name="Notes Placeholder 2"/>
           <p:cNvSpPr>
             <a:spLocks noGrp="1"/>
           </p:cNvSpPr>
@@ -1518,13 +1415,7 @@
       </p:sp>
       <p:sp>
         <p:nvSpPr>
-          <p:cNvPr id="4" name="Slide Number Placeholder 3">
-            <a:extLst>
-              <a:ext uri="{FF2B5EF4-FFF2-40B4-BE49-F238E27FC236}">
-                <a16:creationId xmlns:a16="http://schemas.microsoft.com/office/drawing/2014/main" id="{854A4E9F-7E32-683B-0CF6-D6F4C4BDEED7}"/>
-              </a:ext>
-            </a:extLst>
-          </p:cNvPr>
+          <p:cNvPr id="4" name="Slide Number Placeholder 3"/>
           <p:cNvSpPr>
             <a:spLocks noGrp="1"/>
           </p:cNvSpPr>
@@ -1548,7 +1439,7 @@
     </p:spTree>
     <p:extLst>
       <p:ext uri="{BB962C8B-B14F-4D97-AF65-F5344CB8AC3E}">
-        <p14:creationId xmlns:p14="http://schemas.microsoft.com/office/powerpoint/2010/main" val="2995370419"/>
+        <p14:creationId xmlns:p14="http://schemas.microsoft.com/office/powerpoint/2010/main" val="1024086991"/>
       </p:ext>
     </p:extLst>
   </p:cSld>
@@ -3482,1056 +3373,6 @@
 </file>
 
 <file path=ppt/slides/slide10.xml><?xml version="1.0" encoding="utf-8"?>
-<p:sld xmlns:a="http://schemas.openxmlformats.org/drawingml/2006/main" xmlns:r="http://schemas.openxmlformats.org/officeDocument/2006/relationships" xmlns:p="http://schemas.openxmlformats.org/presentationml/2006/main">
-  <p:cSld>
-    <p:spTree>
-      <p:nvGrpSpPr>
-        <p:cNvPr id="1" name=""/>
-        <p:cNvGrpSpPr/>
-        <p:nvPr/>
-      </p:nvGrpSpPr>
-      <p:grpSpPr>
-        <a:xfrm>
-          <a:off x="0" y="0"/>
-          <a:ext cx="0" cy="0"/>
-          <a:chOff x="0" y="0"/>
-          <a:chExt cx="0" cy="0"/>
-        </a:xfrm>
-      </p:grpSpPr>
-      <p:sp>
-        <p:nvSpPr>
-          <p:cNvPr id="2" name="Text 0"/>
-          <p:cNvSpPr/>
-          <p:nvPr/>
-        </p:nvSpPr>
-        <p:spPr>
-          <a:xfrm>
-            <a:off x="548640" y="182880"/>
-            <a:ext cx="7315200" cy="201168"/>
-          </a:xfrm>
-          <a:prstGeom prst="rect">
-            <a:avLst/>
-          </a:prstGeom>
-          <a:noFill/>
-          <a:ln/>
-        </p:spPr>
-        <p:txBody>
-          <a:bodyPr wrap="square" lIns="0" tIns="0" rIns="0" bIns="0" rtlCol="0" anchor="ctr"/>
-          <a:lstStyle/>
-          <a:p>
-            <a:pPr marL="0" indent="0" algn="l">
-              <a:buNone/>
-            </a:pPr>
-            <a:r>
-              <a:rPr lang="en-US" sz="900" b="1" kern="0" spc="300" dirty="0">
-                <a:solidFill>
-                  <a:srgbClr val="2E869B"/>
-                </a:solidFill>
-                <a:latin typeface="Calibri" pitchFamily="34" charset="0"/>
-                <a:ea typeface="Calibri" pitchFamily="34" charset="-122"/>
-                <a:cs typeface="Calibri" pitchFamily="34" charset="-120"/>
-              </a:rPr>
-              <a:t>SECTION III  ·  PRELIMINARY RESULTS  ·  4 / 6</a:t>
-            </a:r>
-            <a:endParaRPr lang="en-US" sz="900" dirty="0"/>
-          </a:p>
-        </p:txBody>
-      </p:sp>
-      <p:sp>
-        <p:nvSpPr>
-          <p:cNvPr id="3" name="Text 1"/>
-          <p:cNvSpPr/>
-          <p:nvPr/>
-        </p:nvSpPr>
-        <p:spPr>
-          <a:xfrm>
-            <a:off x="548640" y="365760"/>
-            <a:ext cx="10058400" cy="594360"/>
-          </a:xfrm>
-          <a:prstGeom prst="rect">
-            <a:avLst/>
-          </a:prstGeom>
-          <a:noFill/>
-          <a:ln/>
-        </p:spPr>
-        <p:txBody>
-          <a:bodyPr wrap="square" lIns="0" tIns="0" rIns="0" bIns="0" rtlCol="0" anchor="b"/>
-          <a:lstStyle/>
-          <a:p>
-            <a:pPr marL="0" indent="0" algn="l">
-              <a:buNone/>
-            </a:pPr>
-            <a:r>
-              <a:rPr lang="en-US" sz="3000" b="1" dirty="0">
-                <a:solidFill>
-                  <a:srgbClr val="14263D"/>
-                </a:solidFill>
-                <a:latin typeface="Calibri" pitchFamily="34" charset="0"/>
-                <a:ea typeface="Calibri" pitchFamily="34" charset="-122"/>
-                <a:cs typeface="Calibri" pitchFamily="34" charset="-120"/>
-              </a:rPr>
-              <a:t>Does infrastructure offset individual vulnerability?</a:t>
-            </a:r>
-            <a:endParaRPr lang="en-US" sz="3000" dirty="0"/>
-          </a:p>
-        </p:txBody>
-      </p:sp>
-      <p:sp>
-        <p:nvSpPr>
-          <p:cNvPr id="6" name="Shape 4"/>
-          <p:cNvSpPr/>
-          <p:nvPr/>
-        </p:nvSpPr>
-        <p:spPr>
-          <a:xfrm>
-            <a:off x="548640" y="978408"/>
-            <a:ext cx="594360" cy="41148"/>
-          </a:xfrm>
-          <a:prstGeom prst="rect">
-            <a:avLst/>
-          </a:prstGeom>
-          <a:solidFill>
-            <a:srgbClr val="2E869B"/>
-          </a:solidFill>
-          <a:ln/>
-        </p:spPr>
-        <p:txBody>
-          <a:bodyPr/>
-          <a:lstStyle/>
-          <a:p>
-            <a:endParaRPr lang="ko-KR" altLang="en-US"/>
-          </a:p>
-        </p:txBody>
-      </p:sp>
-      <p:sp>
-        <p:nvSpPr>
-          <p:cNvPr id="7" name="Text 5"/>
-          <p:cNvSpPr/>
-          <p:nvPr/>
-        </p:nvSpPr>
-        <p:spPr>
-          <a:xfrm>
-            <a:off x="548640" y="1069848"/>
-            <a:ext cx="11064240" cy="320040"/>
-          </a:xfrm>
-          <a:prstGeom prst="rect">
-            <a:avLst/>
-          </a:prstGeom>
-          <a:noFill/>
-          <a:ln/>
-        </p:spPr>
-        <p:txBody>
-          <a:bodyPr wrap="square" lIns="0" tIns="0" rIns="0" bIns="0" rtlCol="0" anchor="t"/>
-          <a:lstStyle/>
-          <a:p>
-            <a:pPr marL="0" indent="0" algn="l">
-              <a:buNone/>
-            </a:pPr>
-            <a:r>
-              <a:rPr lang="en-US" sz="1400" dirty="0">
-                <a:solidFill>
-                  <a:srgbClr val="6B6B6B"/>
-                </a:solidFill>
-                <a:latin typeface="Calibri" pitchFamily="34" charset="0"/>
-                <a:ea typeface="Calibri" pitchFamily="34" charset="-122"/>
-                <a:cs typeface="Calibri" pitchFamily="34" charset="-120"/>
-              </a:rPr>
-              <a:t>HLM: cross-level interactions</a:t>
-            </a:r>
-            <a:endParaRPr lang="en-US" sz="1400" dirty="0"/>
-          </a:p>
-        </p:txBody>
-      </p:sp>
-      <p:pic>
-        <p:nvPicPr>
-          <p:cNvPr id="8" name="Image 0" descr="/mnt/project/fig_interaction_cross.png"/>
-          <p:cNvPicPr>
-            <a:picLocks noChangeAspect="1"/>
-          </p:cNvPicPr>
-          <p:nvPr/>
-        </p:nvPicPr>
-        <p:blipFill>
-          <a:blip r:embed="rId3"/>
-          <a:stretch>
-            <a:fillRect/>
-          </a:stretch>
-        </p:blipFill>
-        <p:spPr>
-          <a:xfrm>
-            <a:off x="563472" y="1438326"/>
-            <a:ext cx="6900013" cy="4572000"/>
-          </a:xfrm>
-          <a:prstGeom prst="rect">
-            <a:avLst/>
-          </a:prstGeom>
-        </p:spPr>
-      </p:pic>
-      <p:sp>
-        <p:nvSpPr>
-          <p:cNvPr id="9" name="Text 6"/>
-          <p:cNvSpPr/>
-          <p:nvPr/>
-        </p:nvSpPr>
-        <p:spPr>
-          <a:xfrm>
-            <a:off x="365760" y="5917401"/>
-            <a:ext cx="7315200" cy="228600"/>
-          </a:xfrm>
-          <a:prstGeom prst="rect">
-            <a:avLst/>
-          </a:prstGeom>
-          <a:noFill/>
-          <a:ln/>
-        </p:spPr>
-        <p:txBody>
-          <a:bodyPr wrap="square" lIns="0" tIns="0" rIns="0" bIns="0" rtlCol="0" anchor="ctr"/>
-          <a:lstStyle/>
-          <a:p>
-            <a:pPr marL="0" indent="0" algn="ctr">
-              <a:buNone/>
-            </a:pPr>
-            <a:r>
-              <a:rPr lang="en-US" sz="1200" i="1" dirty="0">
-                <a:solidFill>
-                  <a:srgbClr val="6B6B6B"/>
-                </a:solidFill>
-                <a:latin typeface="Calibri" pitchFamily="34" charset="0"/>
-                <a:ea typeface="Calibri" pitchFamily="34" charset="-122"/>
-                <a:cs typeface="Calibri" pitchFamily="34" charset="-120"/>
-              </a:rPr>
-              <a:t>Cross-level interactions: how district-level UMC dimensions interact with vulnerable groups.</a:t>
-            </a:r>
-            <a:endParaRPr lang="en-US" sz="1200" dirty="0"/>
-          </a:p>
-        </p:txBody>
-      </p:sp>
-      <p:sp>
-        <p:nvSpPr>
-          <p:cNvPr id="10" name="Text 7"/>
-          <p:cNvSpPr/>
-          <p:nvPr/>
-        </p:nvSpPr>
-        <p:spPr>
-          <a:xfrm>
-            <a:off x="7794639" y="1538415"/>
-            <a:ext cx="4023360" cy="274320"/>
-          </a:xfrm>
-          <a:prstGeom prst="rect">
-            <a:avLst/>
-          </a:prstGeom>
-          <a:noFill/>
-          <a:ln/>
-        </p:spPr>
-        <p:txBody>
-          <a:bodyPr wrap="square" lIns="0" tIns="0" rIns="0" bIns="0" rtlCol="0" anchor="ctr"/>
-          <a:lstStyle/>
-          <a:p>
-            <a:pPr marL="0" indent="0" algn="l">
-              <a:buNone/>
-            </a:pPr>
-            <a:r>
-              <a:rPr lang="en-US" sz="1600" b="1" kern="0" spc="200" dirty="0">
-                <a:solidFill>
-                  <a:srgbClr val="2E869B"/>
-                </a:solidFill>
-                <a:latin typeface="Calibri" pitchFamily="34" charset="0"/>
-                <a:ea typeface="Calibri" pitchFamily="34" charset="-122"/>
-                <a:cs typeface="Calibri" pitchFamily="34" charset="-120"/>
-              </a:rPr>
-              <a:t>MAIN EFFECT</a:t>
-            </a:r>
-            <a:endParaRPr lang="en-US" sz="1600" dirty="0"/>
-          </a:p>
-        </p:txBody>
-      </p:sp>
-      <p:sp>
-        <p:nvSpPr>
-          <p:cNvPr id="11" name="Text 8"/>
-          <p:cNvSpPr/>
-          <p:nvPr/>
-        </p:nvSpPr>
-        <p:spPr>
-          <a:xfrm>
-            <a:off x="7794639" y="1862163"/>
-            <a:ext cx="4023360" cy="500000"/>
-          </a:xfrm>
-          <a:prstGeom prst="rect">
-            <a:avLst/>
-          </a:prstGeom>
-          <a:noFill/>
-          <a:ln/>
-        </p:spPr>
-        <p:txBody>
-          <a:bodyPr wrap="square" lIns="0" tIns="0" rIns="0" bIns="0" rtlCol="0" anchor="t"/>
-          <a:lstStyle/>
-          <a:p>
-            <a:pPr marL="0" indent="0" algn="l">
-              <a:lnSpc>
-                <a:spcPct val="110000"/>
-              </a:lnSpc>
-              <a:buNone/>
-            </a:pPr>
-            <a:r>
-              <a:rPr lang="en-US" sz="1300" dirty="0">
-                <a:solidFill>
-                  <a:srgbClr val="333333"/>
-                </a:solidFill>
-                <a:latin typeface="Calibri" pitchFamily="34" charset="0"/>
-                <a:ea typeface="Calibri" pitchFamily="34" charset="-122"/>
-                <a:cs typeface="Calibri" pitchFamily="34" charset="-120"/>
-              </a:rPr>
-              <a:t>District-level UMC dimensions show only weak, contextual associations with individual digital use.</a:t>
-            </a:r>
-            <a:endParaRPr lang="en-US" sz="1300" dirty="0"/>
-          </a:p>
-        </p:txBody>
-      </p:sp>
-      <p:sp>
-        <p:nvSpPr>
-          <p:cNvPr id="12" name="Shape 9"/>
-          <p:cNvSpPr/>
-          <p:nvPr/>
-        </p:nvSpPr>
-        <p:spPr>
-          <a:xfrm>
-            <a:off x="7794639" y="2407095"/>
-            <a:ext cx="4023360" cy="7315"/>
-          </a:xfrm>
-          <a:prstGeom prst="rect">
-            <a:avLst/>
-          </a:prstGeom>
-          <a:solidFill>
-            <a:srgbClr val="D0D0D0"/>
-          </a:solidFill>
-          <a:ln/>
-        </p:spPr>
-        <p:txBody>
-          <a:bodyPr/>
-          <a:lstStyle/>
-          <a:p>
-            <a:endParaRPr lang="ko-KR" altLang="en-US"/>
-          </a:p>
-        </p:txBody>
-      </p:sp>
-      <p:sp>
-        <p:nvSpPr>
-          <p:cNvPr id="13" name="Text 10"/>
-          <p:cNvSpPr/>
-          <p:nvPr/>
-        </p:nvSpPr>
-        <p:spPr>
-          <a:xfrm>
-            <a:off x="7794639" y="2544255"/>
-            <a:ext cx="4023360" cy="274320"/>
-          </a:xfrm>
-          <a:prstGeom prst="rect">
-            <a:avLst/>
-          </a:prstGeom>
-          <a:noFill/>
-          <a:ln/>
-        </p:spPr>
-        <p:txBody>
-          <a:bodyPr wrap="square" lIns="0" tIns="0" rIns="0" bIns="0" rtlCol="0" anchor="ctr"/>
-          <a:lstStyle/>
-          <a:p>
-            <a:pPr marL="0" indent="0" algn="l">
-              <a:buNone/>
-            </a:pPr>
-            <a:r>
-              <a:rPr lang="en-US" sz="1400" b="1" kern="0" spc="200" dirty="0">
-                <a:solidFill>
-                  <a:srgbClr val="2E869B"/>
-                </a:solidFill>
-                <a:latin typeface="Calibri" pitchFamily="34" charset="0"/>
-                <a:ea typeface="Calibri" pitchFamily="34" charset="-122"/>
-                <a:cs typeface="Calibri" pitchFamily="34" charset="-120"/>
-              </a:rPr>
-              <a:t>CROSS-LEVEL INTERACTIONS</a:t>
-            </a:r>
-            <a:endParaRPr lang="en-US" sz="1400" dirty="0"/>
-          </a:p>
-        </p:txBody>
-      </p:sp>
-      <p:sp>
-        <p:nvSpPr>
-          <p:cNvPr id="14" name="Text 11"/>
-          <p:cNvSpPr/>
-          <p:nvPr/>
-        </p:nvSpPr>
-        <p:spPr>
-          <a:xfrm>
-            <a:off x="7794639" y="2864295"/>
-            <a:ext cx="2200000" cy="300000"/>
-          </a:xfrm>
-          <a:prstGeom prst="rect">
-            <a:avLst/>
-          </a:prstGeom>
-          <a:noFill/>
-          <a:ln/>
-        </p:spPr>
-        <p:txBody>
-          <a:bodyPr wrap="square" lIns="0" tIns="0" rIns="0" bIns="0" rtlCol="0" anchor="ctr"/>
-          <a:lstStyle/>
-          <a:p>
-            <a:pPr marL="0" indent="0" algn="l">
-              <a:buNone/>
-            </a:pPr>
-            <a:r>
-              <a:rPr lang="en-US" sz="1300" dirty="0">
-                <a:solidFill>
-                  <a:srgbClr val="333333"/>
-                </a:solidFill>
-                <a:latin typeface="Calibri" pitchFamily="34" charset="0"/>
-                <a:ea typeface="Calibri" pitchFamily="34" charset="-122"/>
-                <a:cs typeface="Calibri" pitchFamily="34" charset="-120"/>
-              </a:rPr>
-              <a:t>Affordability × Elderly (65+)</a:t>
-            </a:r>
-            <a:endParaRPr lang="en-US" sz="1300" dirty="0"/>
-          </a:p>
-        </p:txBody>
-      </p:sp>
-      <p:sp>
-        <p:nvSpPr>
-          <p:cNvPr id="15" name="Text 12"/>
-          <p:cNvSpPr/>
-          <p:nvPr/>
-        </p:nvSpPr>
-        <p:spPr>
-          <a:xfrm>
-            <a:off x="9994639" y="2864295"/>
-            <a:ext cx="1823360" cy="300000"/>
-          </a:xfrm>
-          <a:prstGeom prst="rect">
-            <a:avLst/>
-          </a:prstGeom>
-          <a:noFill/>
-          <a:ln/>
-        </p:spPr>
-        <p:txBody>
-          <a:bodyPr wrap="square" lIns="0" tIns="0" rIns="0" bIns="0" rtlCol="0" anchor="ctr"/>
-          <a:lstStyle/>
-          <a:p>
-            <a:pPr marL="0" indent="0" algn="r">
-              <a:buNone/>
-            </a:pPr>
-            <a:r>
-              <a:rPr lang="en-US" sz="1400" b="1" dirty="0">
-                <a:solidFill>
-                  <a:srgbClr val="14263D"/>
-                </a:solidFill>
-                <a:latin typeface="Calibri" pitchFamily="34" charset="0"/>
-                <a:ea typeface="Calibri" pitchFamily="34" charset="-122"/>
-                <a:cs typeface="Calibri" pitchFamily="34" charset="-120"/>
-              </a:rPr>
-              <a:t>+3.23</a:t>
-            </a:r>
-            <a:r>
-              <a:rPr lang="en-US" sz="1000" i="1" dirty="0">
-                <a:solidFill>
-                  <a:srgbClr val="6B6B6B"/>
-                </a:solidFill>
-                <a:latin typeface="Calibri" pitchFamily="34" charset="0"/>
-                <a:ea typeface="Calibri" pitchFamily="34" charset="-122"/>
-                <a:cs typeface="Calibri" pitchFamily="34" charset="-120"/>
-              </a:rPr>
-              <a:t>  p=0.08 †</a:t>
-            </a:r>
-            <a:endParaRPr lang="en-US" sz="1400" dirty="0"/>
-          </a:p>
-        </p:txBody>
-      </p:sp>
-      <p:sp>
-        <p:nvSpPr>
-          <p:cNvPr id="16" name="Text 13"/>
-          <p:cNvSpPr/>
-          <p:nvPr/>
-        </p:nvSpPr>
-        <p:spPr>
-          <a:xfrm>
-            <a:off x="7794639" y="3164295"/>
-            <a:ext cx="2200000" cy="300000"/>
-          </a:xfrm>
-          <a:prstGeom prst="rect">
-            <a:avLst/>
-          </a:prstGeom>
-          <a:noFill/>
-          <a:ln/>
-        </p:spPr>
-        <p:txBody>
-          <a:bodyPr wrap="square" lIns="0" tIns="0" rIns="0" bIns="0" rtlCol="0" anchor="ctr"/>
-          <a:lstStyle/>
-          <a:p>
-            <a:pPr marL="0" indent="0" algn="l">
-              <a:buNone/>
-            </a:pPr>
-            <a:r>
-              <a:rPr lang="en-US" sz="1300" dirty="0">
-                <a:solidFill>
-                  <a:srgbClr val="6B6B6B"/>
-                </a:solidFill>
-                <a:latin typeface="Calibri" pitchFamily="34" charset="0"/>
-                <a:ea typeface="Calibri" pitchFamily="34" charset="-122"/>
-                <a:cs typeface="Calibri" pitchFamily="34" charset="-120"/>
-              </a:rPr>
-              <a:t>Connectivity × Elderly</a:t>
-            </a:r>
-            <a:endParaRPr lang="en-US" sz="1300" dirty="0"/>
-          </a:p>
-        </p:txBody>
-      </p:sp>
-      <p:sp>
-        <p:nvSpPr>
-          <p:cNvPr id="17" name="Text 14"/>
-          <p:cNvSpPr/>
-          <p:nvPr/>
-        </p:nvSpPr>
-        <p:spPr>
-          <a:xfrm>
-            <a:off x="9994639" y="3164295"/>
-            <a:ext cx="1823360" cy="300000"/>
-          </a:xfrm>
-          <a:prstGeom prst="rect">
-            <a:avLst/>
-          </a:prstGeom>
-          <a:noFill/>
-          <a:ln/>
-        </p:spPr>
-        <p:txBody>
-          <a:bodyPr wrap="square" lIns="0" tIns="0" rIns="0" bIns="0" rtlCol="0" anchor="ctr"/>
-          <a:lstStyle/>
-          <a:p>
-            <a:pPr marL="0" indent="0" algn="r">
-              <a:buNone/>
-            </a:pPr>
-            <a:r>
-              <a:rPr lang="en-US" sz="1400" b="1" dirty="0">
-                <a:solidFill>
-                  <a:srgbClr val="8A8A8A"/>
-                </a:solidFill>
-                <a:latin typeface="Calibri" pitchFamily="34" charset="0"/>
-                <a:ea typeface="Calibri" pitchFamily="34" charset="-122"/>
-                <a:cs typeface="Calibri" pitchFamily="34" charset="-120"/>
-              </a:rPr>
-              <a:t>+1.84</a:t>
-            </a:r>
-            <a:r>
-              <a:rPr lang="en-US" sz="1000" i="1" dirty="0">
-                <a:solidFill>
-                  <a:srgbClr val="8A8A8A"/>
-                </a:solidFill>
-                <a:latin typeface="Calibri" pitchFamily="34" charset="0"/>
-                <a:ea typeface="Calibri" pitchFamily="34" charset="-122"/>
-                <a:cs typeface="Calibri" pitchFamily="34" charset="-120"/>
-              </a:rPr>
-              <a:t>  n.s.</a:t>
-            </a:r>
-            <a:endParaRPr lang="en-US" sz="1400" dirty="0"/>
-          </a:p>
-        </p:txBody>
-      </p:sp>
-      <p:sp>
-        <p:nvSpPr>
-          <p:cNvPr id="18" name="Text 15"/>
-          <p:cNvSpPr/>
-          <p:nvPr/>
-        </p:nvSpPr>
-        <p:spPr>
-          <a:xfrm>
-            <a:off x="7794639" y="3464295"/>
-            <a:ext cx="2200000" cy="300000"/>
-          </a:xfrm>
-          <a:prstGeom prst="rect">
-            <a:avLst/>
-          </a:prstGeom>
-          <a:noFill/>
-          <a:ln/>
-        </p:spPr>
-        <p:txBody>
-          <a:bodyPr wrap="square" lIns="0" tIns="0" rIns="0" bIns="0" rtlCol="0" anchor="ctr"/>
-          <a:lstStyle/>
-          <a:p>
-            <a:pPr marL="0" indent="0" algn="l">
-              <a:buNone/>
-            </a:pPr>
-            <a:r>
-              <a:rPr lang="en-US" sz="1300" dirty="0">
-                <a:solidFill>
-                  <a:srgbClr val="6B6B6B"/>
-                </a:solidFill>
-                <a:latin typeface="Calibri" pitchFamily="34" charset="0"/>
-                <a:ea typeface="Calibri" pitchFamily="34" charset="-122"/>
-                <a:cs typeface="Calibri" pitchFamily="34" charset="-120"/>
-              </a:rPr>
-              <a:t>Available for Use × Elderly</a:t>
-            </a:r>
-            <a:endParaRPr lang="en-US" sz="1300" dirty="0"/>
-          </a:p>
-        </p:txBody>
-      </p:sp>
-      <p:sp>
-        <p:nvSpPr>
-          <p:cNvPr id="19" name="Text 16"/>
-          <p:cNvSpPr/>
-          <p:nvPr/>
-        </p:nvSpPr>
-        <p:spPr>
-          <a:xfrm>
-            <a:off x="9994639" y="3464295"/>
-            <a:ext cx="1823360" cy="300000"/>
-          </a:xfrm>
-          <a:prstGeom prst="rect">
-            <a:avLst/>
-          </a:prstGeom>
-          <a:noFill/>
-          <a:ln/>
-        </p:spPr>
-        <p:txBody>
-          <a:bodyPr wrap="square" lIns="0" tIns="0" rIns="0" bIns="0" rtlCol="0" anchor="ctr"/>
-          <a:lstStyle/>
-          <a:p>
-            <a:pPr marL="0" indent="0" algn="r">
-              <a:buNone/>
-            </a:pPr>
-            <a:r>
-              <a:rPr lang="en-US" sz="1400" b="1" dirty="0">
-                <a:solidFill>
-                  <a:srgbClr val="8A8A8A"/>
-                </a:solidFill>
-                <a:latin typeface="Calibri" pitchFamily="34" charset="0"/>
-                <a:ea typeface="Calibri" pitchFamily="34" charset="-122"/>
-                <a:cs typeface="Calibri" pitchFamily="34" charset="-120"/>
-              </a:rPr>
-              <a:t>+1.31</a:t>
-            </a:r>
-            <a:r>
-              <a:rPr lang="en-US" sz="1000" i="1" dirty="0">
-                <a:solidFill>
-                  <a:srgbClr val="8A8A8A"/>
-                </a:solidFill>
-                <a:latin typeface="Calibri" pitchFamily="34" charset="0"/>
-                <a:ea typeface="Calibri" pitchFamily="34" charset="-122"/>
-                <a:cs typeface="Calibri" pitchFamily="34" charset="-120"/>
-              </a:rPr>
-              <a:t>  n.s.</a:t>
-            </a:r>
-            <a:endParaRPr lang="en-US" sz="1400" dirty="0"/>
-          </a:p>
-        </p:txBody>
-      </p:sp>
-      <p:sp>
-        <p:nvSpPr>
-          <p:cNvPr id="50" name="Text Row 4 Label"/>
-          <p:cNvSpPr/>
-          <p:nvPr/>
-        </p:nvSpPr>
-        <p:spPr>
-          <a:xfrm>
-            <a:off x="7794639" y="3764295"/>
-            <a:ext cx="2200000" cy="300000"/>
-          </a:xfrm>
-          <a:prstGeom prst="rect">
-            <a:avLst/>
-          </a:prstGeom>
-          <a:noFill/>
-          <a:ln/>
-        </p:spPr>
-        <p:txBody>
-          <a:bodyPr wrap="square" lIns="0" tIns="0" rIns="0" bIns="0" rtlCol="0" anchor="ctr"/>
-          <a:lstStyle/>
-          <a:p>
-            <a:pPr marL="0" indent="0" algn="l">
-              <a:buNone/>
-            </a:pPr>
-            <a:r>
-              <a:rPr lang="en-US" sz="1300" dirty="0">
-                <a:solidFill>
-                  <a:srgbClr val="6B6B6B"/>
-                </a:solidFill>
-                <a:latin typeface="Calibri" pitchFamily="34" charset="0"/>
-                <a:ea typeface="Calibri" pitchFamily="34" charset="-122"/>
-                <a:cs typeface="Calibri" pitchFamily="34" charset="-120"/>
-              </a:rPr>
-              <a:t>Connectivity × Low education</a:t>
-            </a:r>
-            <a:endParaRPr lang="en-US" sz="1300" dirty="0"/>
-          </a:p>
-        </p:txBody>
-      </p:sp>
-      <p:sp>
-        <p:nvSpPr>
-          <p:cNvPr id="51" name="Text Row 4 Value"/>
-          <p:cNvSpPr/>
-          <p:nvPr/>
-        </p:nvSpPr>
-        <p:spPr>
-          <a:xfrm>
-            <a:off x="9994639" y="3764295"/>
-            <a:ext cx="1823360" cy="300000"/>
-          </a:xfrm>
-          <a:prstGeom prst="rect">
-            <a:avLst/>
-          </a:prstGeom>
-          <a:noFill/>
-          <a:ln/>
-        </p:spPr>
-        <p:txBody>
-          <a:bodyPr wrap="square" lIns="0" tIns="0" rIns="0" bIns="0" rtlCol="0" anchor="ctr"/>
-          <a:lstStyle/>
-          <a:p>
-            <a:pPr marL="0" indent="0" algn="r">
-              <a:buNone/>
-            </a:pPr>
-            <a:r>
-              <a:rPr lang="en-US" sz="1400" b="1" dirty="0">
-                <a:solidFill>
-                  <a:srgbClr val="8A8A8A"/>
-                </a:solidFill>
-                <a:latin typeface="Calibri" pitchFamily="34" charset="0"/>
-                <a:ea typeface="Calibri" pitchFamily="34" charset="-122"/>
-                <a:cs typeface="Calibri" pitchFamily="34" charset="-120"/>
-              </a:rPr>
-              <a:t>+4.18</a:t>
-            </a:r>
-            <a:r>
-              <a:rPr lang="en-US" sz="1000" i="1" dirty="0">
-                <a:solidFill>
-                  <a:srgbClr val="8A8A8A"/>
-                </a:solidFill>
-                <a:latin typeface="Calibri" pitchFamily="34" charset="0"/>
-                <a:ea typeface="Calibri" pitchFamily="34" charset="-122"/>
-                <a:cs typeface="Calibri" pitchFamily="34" charset="-120"/>
-              </a:rPr>
-              <a:t>  n.s.</a:t>
-            </a:r>
-            <a:endParaRPr lang="en-US" sz="1400" dirty="0"/>
-          </a:p>
-        </p:txBody>
-      </p:sp>
-      <p:sp>
-        <p:nvSpPr>
-          <p:cNvPr id="20" name="Shape 17"/>
-          <p:cNvSpPr/>
-          <p:nvPr/>
-        </p:nvSpPr>
-        <p:spPr>
-          <a:xfrm>
-            <a:off x="7794639" y="4291500"/>
-            <a:ext cx="4035717" cy="1763580"/>
-          </a:xfrm>
-          <a:prstGeom prst="roundRect">
-            <a:avLst>
-              <a:gd name="adj" fmla="val 2703"/>
-            </a:avLst>
-          </a:prstGeom>
-          <a:solidFill>
-            <a:srgbClr val="1F3864"/>
-          </a:solidFill>
-          <a:ln/>
-        </p:spPr>
-        <p:txBody>
-          <a:bodyPr/>
-          <a:lstStyle/>
-          <a:p>
-            <a:endParaRPr lang="ko-KR" altLang="en-US"/>
-          </a:p>
-        </p:txBody>
-      </p:sp>
-      <p:sp>
-        <p:nvSpPr>
-          <p:cNvPr id="21" name="Text 18"/>
-          <p:cNvSpPr/>
-          <p:nvPr/>
-        </p:nvSpPr>
-        <p:spPr>
-          <a:xfrm>
-            <a:off x="7989876" y="4401228"/>
-            <a:ext cx="3657600" cy="228600"/>
-          </a:xfrm>
-          <a:prstGeom prst="rect">
-            <a:avLst/>
-          </a:prstGeom>
-          <a:noFill/>
-          <a:ln/>
-        </p:spPr>
-        <p:txBody>
-          <a:bodyPr wrap="square" lIns="0" tIns="0" rIns="0" bIns="0" rtlCol="0" anchor="ctr"/>
-          <a:lstStyle/>
-          <a:p>
-            <a:pPr marL="0" indent="0" algn="l">
-              <a:buNone/>
-            </a:pPr>
-            <a:r>
-              <a:rPr lang="en-US" sz="1600" b="1" kern="0" spc="200" dirty="0">
-                <a:solidFill>
-                  <a:srgbClr val="7FE4C4"/>
-                </a:solidFill>
-                <a:latin typeface="Calibri" pitchFamily="34" charset="0"/>
-                <a:ea typeface="Calibri" pitchFamily="34" charset="-122"/>
-                <a:cs typeface="Calibri" pitchFamily="34" charset="-120"/>
-              </a:rPr>
-              <a:t>INTERPRETATION</a:t>
-            </a:r>
-            <a:endParaRPr lang="en-US" sz="1600" dirty="0"/>
-          </a:p>
-        </p:txBody>
-      </p:sp>
-      <p:sp>
-        <p:nvSpPr>
-          <p:cNvPr id="22" name="Text 19"/>
-          <p:cNvSpPr/>
-          <p:nvPr/>
-        </p:nvSpPr>
-        <p:spPr>
-          <a:xfrm>
-            <a:off x="7989876" y="4657260"/>
-            <a:ext cx="3586428" cy="1280160"/>
-          </a:xfrm>
-          <a:prstGeom prst="rect">
-            <a:avLst/>
-          </a:prstGeom>
-          <a:noFill/>
-          <a:ln/>
-        </p:spPr>
-        <p:txBody>
-          <a:bodyPr wrap="square" lIns="0" tIns="0" rIns="0" bIns="0" rtlCol="0" anchor="t"/>
-          <a:lstStyle/>
-          <a:p>
-            <a:pPr marL="0" indent="0" algn="l">
-              <a:lnSpc>
-                <a:spcPct val="115000"/>
-              </a:lnSpc>
-              <a:spcAft>
-                <a:spcPts val="400"/>
-              </a:spcAft>
-              <a:buNone/>
-            </a:pPr>
-            <a:r>
-              <a:rPr lang="en-US" sz="1200" dirty="0">
-                <a:solidFill>
-                  <a:srgbClr val="FFFFFF"/>
-                </a:solidFill>
-                <a:latin typeface="Calibri" pitchFamily="34" charset="0"/>
-                <a:ea typeface="Calibri" pitchFamily="34" charset="-122"/>
-                <a:cs typeface="Calibri" pitchFamily="34" charset="-120"/>
-              </a:rPr>
-              <a:t>Only the Affordability–Elderly interaction approaches significance. District infrastructure does not show a strong differential effect for vulnerable groups.</a:t>
-            </a:r>
-            <a:endParaRPr lang="en-US" sz="1200" dirty="0"/>
-          </a:p>
-          <a:p>
-            <a:pPr marL="0" indent="0" algn="l">
-              <a:lnSpc>
-                <a:spcPct val="115000"/>
-              </a:lnSpc>
-              <a:buNone/>
-            </a:pPr>
-            <a:r>
-              <a:rPr lang="en-US" sz="1200" dirty="0">
-                <a:solidFill>
-                  <a:srgbClr val="FFFFFF"/>
-                </a:solidFill>
-                <a:latin typeface="Calibri" pitchFamily="34" charset="0"/>
-                <a:ea typeface="Calibri" pitchFamily="34" charset="-122"/>
-                <a:cs typeface="Calibri" pitchFamily="34" charset="-120"/>
-              </a:rPr>
-              <a:t>District scores identify </a:t>
-            </a:r>
-            <a:r>
-              <a:rPr lang="en-US" sz="1200" b="1" dirty="0">
-                <a:solidFill>
-                  <a:srgbClr val="FFFFFF"/>
-                </a:solidFill>
-                <a:latin typeface="Calibri" pitchFamily="34" charset="0"/>
-                <a:ea typeface="Calibri" pitchFamily="34" charset="-122"/>
-                <a:cs typeface="Calibri" pitchFamily="34" charset="-120"/>
-              </a:rPr>
-              <a:t>where</a:t>
-            </a:r>
-            <a:r>
-              <a:rPr lang="en-US" sz="1200" dirty="0">
-                <a:solidFill>
-                  <a:srgbClr val="FFFFFF"/>
-                </a:solidFill>
-                <a:latin typeface="Calibri" pitchFamily="34" charset="0"/>
-                <a:ea typeface="Calibri" pitchFamily="34" charset="-122"/>
-                <a:cs typeface="Calibri" pitchFamily="34" charset="-120"/>
-              </a:rPr>
-              <a:t> vulnerable individuals are concentrated — supporting </a:t>
-            </a:r>
-            <a:r>
-              <a:rPr lang="en-US" sz="1200" b="1" i="1" dirty="0">
-                <a:solidFill>
-                  <a:srgbClr val="7FE4C4"/>
-                </a:solidFill>
-                <a:latin typeface="Calibri" pitchFamily="34" charset="0"/>
-                <a:ea typeface="Calibri" pitchFamily="34" charset="-122"/>
-                <a:cs typeface="Calibri" pitchFamily="34" charset="-120"/>
-              </a:rPr>
-              <a:t>place-sensitive</a:t>
-            </a:r>
-            <a:r>
-              <a:rPr lang="en-US" sz="1200" dirty="0">
-                <a:solidFill>
-                  <a:srgbClr val="FFFFFF"/>
-                </a:solidFill>
-                <a:latin typeface="Calibri" pitchFamily="34" charset="0"/>
-                <a:ea typeface="Calibri" pitchFamily="34" charset="-122"/>
-                <a:cs typeface="Calibri" pitchFamily="34" charset="-120"/>
-              </a:rPr>
-              <a:t> (not place-based) targeting.</a:t>
-            </a:r>
-            <a:endParaRPr lang="en-US" sz="1200" dirty="0"/>
-          </a:p>
-        </p:txBody>
-      </p:sp>
-      <p:sp>
-        <p:nvSpPr>
-          <p:cNvPr id="23" name="Shape 20"/>
-          <p:cNvSpPr/>
-          <p:nvPr/>
-        </p:nvSpPr>
-        <p:spPr>
-          <a:xfrm>
-            <a:off x="548640" y="6263640"/>
-            <a:ext cx="11064240" cy="7315"/>
-          </a:xfrm>
-          <a:prstGeom prst="rect">
-            <a:avLst/>
-          </a:prstGeom>
-          <a:solidFill>
-            <a:srgbClr val="D0D0D0"/>
-          </a:solidFill>
-          <a:ln/>
-        </p:spPr>
-        <p:txBody>
-          <a:bodyPr/>
-          <a:lstStyle/>
-          <a:p>
-            <a:endParaRPr lang="ko-KR" altLang="en-US"/>
-          </a:p>
-        </p:txBody>
-      </p:sp>
-      <p:pic>
-        <p:nvPicPr>
-          <p:cNvPr id="24" name="Image 1" descr="/home/claude/work/logo_gateway.jpeg"/>
-          <p:cNvPicPr>
-            <a:picLocks noChangeAspect="1"/>
-          </p:cNvPicPr>
-          <p:nvPr/>
-        </p:nvPicPr>
-        <p:blipFill>
-          <a:blip r:embed="rId4"/>
-          <a:stretch>
-            <a:fillRect/>
-          </a:stretch>
-        </p:blipFill>
-        <p:spPr>
-          <a:xfrm>
-            <a:off x="9555480" y="6355080"/>
-            <a:ext cx="640080" cy="411480"/>
-          </a:xfrm>
-          <a:prstGeom prst="rect">
-            <a:avLst/>
-          </a:prstGeom>
-        </p:spPr>
-      </p:pic>
-      <p:pic>
-        <p:nvPicPr>
-          <p:cNvPr id="25" name="Image 2" descr="/home/claude/work/logo_eu.jpeg"/>
-          <p:cNvPicPr>
-            <a:picLocks noChangeAspect="1"/>
-          </p:cNvPicPr>
-          <p:nvPr/>
-        </p:nvPicPr>
-        <p:blipFill>
-          <a:blip r:embed="rId5"/>
-          <a:stretch>
-            <a:fillRect/>
-          </a:stretch>
-        </p:blipFill>
-        <p:spPr>
-          <a:xfrm>
-            <a:off x="10296144" y="6400800"/>
-            <a:ext cx="1280160" cy="320040"/>
-          </a:xfrm>
-          <a:prstGeom prst="rect">
-            <a:avLst/>
-          </a:prstGeom>
-        </p:spPr>
-      </p:pic>
-      <p:pic>
-        <p:nvPicPr>
-          <p:cNvPr id="26" name="Image 3" descr="/home/claude/work/logo_itu.png"/>
-          <p:cNvPicPr>
-            <a:picLocks noChangeAspect="1"/>
-          </p:cNvPicPr>
-          <p:nvPr/>
-        </p:nvPicPr>
-        <p:blipFill>
-          <a:blip r:embed="rId6"/>
-          <a:stretch>
-            <a:fillRect/>
-          </a:stretch>
-        </p:blipFill>
-        <p:spPr>
-          <a:xfrm>
-            <a:off x="11686032" y="6355080"/>
-            <a:ext cx="411480" cy="411480"/>
-          </a:xfrm>
-          <a:prstGeom prst="rect">
-            <a:avLst/>
-          </a:prstGeom>
-        </p:spPr>
-      </p:pic>
-      <p:sp>
-        <p:nvSpPr>
-          <p:cNvPr id="27" name="Text 21"/>
-          <p:cNvSpPr/>
-          <p:nvPr/>
-        </p:nvSpPr>
-        <p:spPr>
-          <a:xfrm>
-            <a:off x="548640" y="6565392"/>
-            <a:ext cx="1371600" cy="201168"/>
-          </a:xfrm>
-          <a:prstGeom prst="rect">
-            <a:avLst/>
-          </a:prstGeom>
-          <a:noFill/>
-          <a:ln/>
-        </p:spPr>
-        <p:txBody>
-          <a:bodyPr wrap="square" lIns="0" tIns="0" rIns="0" bIns="0" rtlCol="0" anchor="ctr"/>
-          <a:lstStyle/>
-          <a:p>
-            <a:pPr marL="0" indent="0" algn="l">
-              <a:buNone/>
-            </a:pPr>
-            <a:r>
-              <a:rPr lang="en-US" sz="900" dirty="0">
-                <a:solidFill>
-                  <a:srgbClr val="B0B0B0"/>
-                </a:solidFill>
-                <a:latin typeface="Calibri" pitchFamily="34" charset="0"/>
-                <a:ea typeface="Calibri" pitchFamily="34" charset="-122"/>
-                <a:cs typeface="Calibri" pitchFamily="34" charset="-120"/>
-              </a:rPr>
-              <a:t>10 / 13</a:t>
-            </a:r>
-            <a:endParaRPr lang="en-US" sz="900" dirty="0"/>
-          </a:p>
-        </p:txBody>
-      </p:sp>
-    </p:spTree>
-  </p:cSld>
-  <p:clrMapOvr>
-    <a:masterClrMapping/>
-  </p:clrMapOvr>
-</p:sld>
-</file>
-
-<file path=ppt/slides/slide11.xml><?xml version="1.0" encoding="utf-8"?>
 <p:sld xmlns:a="http://schemas.openxmlformats.org/drawingml/2006/main" xmlns:r="http://schemas.openxmlformats.org/officeDocument/2006/relationships" xmlns:p="http://schemas.openxmlformats.org/presentationml/2006/main">
   <p:cSld>
     <p:spTree>
@@ -6267,7 +5108,7 @@
 </p:sld>
 </file>
 
-<file path=ppt/slides/slide12.xml><?xml version="1.0" encoding="utf-8"?>
+<file path=ppt/slides/slide11.xml><?xml version="1.0" encoding="utf-8"?>
 <p:sld xmlns:a="http://schemas.openxmlformats.org/drawingml/2006/main" xmlns:r="http://schemas.openxmlformats.org/officeDocument/2006/relationships" xmlns:p="http://schemas.openxmlformats.org/presentationml/2006/main">
   <p:cSld name="Slide 10">
     <p:bg>
@@ -7081,7 +5922,7 @@
 </p:sld>
 </file>
 
-<file path=ppt/slides/slide13.xml><?xml version="1.0" encoding="utf-8"?>
+<file path=ppt/slides/slide12.xml><?xml version="1.0" encoding="utf-8"?>
 <p:sld xmlns:a="http://schemas.openxmlformats.org/drawingml/2006/main" xmlns:r="http://schemas.openxmlformats.org/officeDocument/2006/relationships" xmlns:p="http://schemas.openxmlformats.org/presentationml/2006/main">
   <p:cSld name="Slide 13">
     <p:bg>
@@ -12656,7 +11497,29 @@
                 <a:ea typeface="Calibri" pitchFamily="34" charset="-122"/>
                 <a:cs typeface="Calibri" pitchFamily="34" charset="-120"/>
               </a:rPr>
-              <a:t>SECTION II  ·  ETL APPROACH  ·  2 / 4</a:t>
+              <a:t>SECTION II  ·  ETL APPROACH  ·  </a:t>
+            </a:r>
+            <a:r>
+              <a:rPr lang="en-US" altLang="ko-KR" sz="900" b="1" kern="0" spc="300" dirty="0">
+                <a:solidFill>
+                  <a:srgbClr val="2E869B"/>
+                </a:solidFill>
+                <a:latin typeface="Calibri" pitchFamily="34" charset="0"/>
+                <a:ea typeface="Calibri" pitchFamily="34" charset="-122"/>
+                <a:cs typeface="Calibri" pitchFamily="34" charset="-120"/>
+              </a:rPr>
+              <a:t>2</a:t>
+            </a:r>
+            <a:r>
+              <a:rPr lang="en-US" sz="900" b="1" kern="0" spc="300" dirty="0">
+                <a:solidFill>
+                  <a:srgbClr val="2E869B"/>
+                </a:solidFill>
+                <a:latin typeface="Calibri" pitchFamily="34" charset="0"/>
+                <a:ea typeface="Calibri" pitchFamily="34" charset="-122"/>
+                <a:cs typeface="Calibri" pitchFamily="34" charset="-120"/>
+              </a:rPr>
+              <a:t> / 4</a:t>
             </a:r>
             <a:endParaRPr lang="en-US" sz="900" dirty="0"/>
           </a:p>
@@ -14204,7 +13067,29 @@
                 <a:ea typeface="Calibri" pitchFamily="34" charset="-122"/>
                 <a:cs typeface="Calibri" pitchFamily="34" charset="-120"/>
               </a:rPr>
-              <a:t>SECTION II  ·  ETL APPROACH  ·  3 / 4</a:t>
+              <a:t>SECTION II  ·  ETL APPROACH  ·  </a:t>
+            </a:r>
+            <a:r>
+              <a:rPr lang="en-US" altLang="ko-KR" sz="900" b="1" kern="0" spc="300" dirty="0">
+                <a:solidFill>
+                  <a:srgbClr val="2E869B"/>
+                </a:solidFill>
+                <a:latin typeface="Calibri" pitchFamily="34" charset="0"/>
+                <a:ea typeface="Calibri" pitchFamily="34" charset="-122"/>
+                <a:cs typeface="Calibri" pitchFamily="34" charset="-120"/>
+              </a:rPr>
+              <a:t>3</a:t>
+            </a:r>
+            <a:r>
+              <a:rPr lang="en-US" sz="900" b="1" kern="0" spc="300" dirty="0">
+                <a:solidFill>
+                  <a:srgbClr val="2E869B"/>
+                </a:solidFill>
+                <a:latin typeface="Calibri" pitchFamily="34" charset="0"/>
+                <a:ea typeface="Calibri" pitchFamily="34" charset="-122"/>
+                <a:cs typeface="Calibri" pitchFamily="34" charset="-120"/>
+              </a:rPr>
+              <a:t> / 4</a:t>
             </a:r>
             <a:endParaRPr lang="en-US" sz="900" dirty="0"/>
           </a:p>
@@ -16332,7 +15217,7 @@
         <p:spPr>
           <a:xfrm>
             <a:off x="548640" y="1069848"/>
-            <a:ext cx="11064240" cy="320040"/>
+            <a:ext cx="4213365" cy="320040"/>
           </a:xfrm>
           <a:prstGeom prst="rect">
             <a:avLst/>
@@ -20282,13 +19167,7 @@
   <p:cSld>
     <p:spTree>
       <p:nvGrpSpPr>
-        <p:cNvPr id="1" name="">
-          <a:extLst>
-            <a:ext uri="{FF2B5EF4-FFF2-40B4-BE49-F238E27FC236}">
-              <a16:creationId xmlns:a16="http://schemas.microsoft.com/office/drawing/2014/main" id="{526CF3EB-9E13-BE72-ECF2-CFB9F235D50E}"/>
-            </a:ext>
-          </a:extLst>
-        </p:cNvPr>
+        <p:cNvPr id="1" name=""/>
         <p:cNvGrpSpPr/>
         <p:nvPr/>
       </p:nvGrpSpPr>
@@ -20302,13 +19181,7 @@
       </p:grpSpPr>
       <p:sp>
         <p:nvSpPr>
-          <p:cNvPr id="2" name="Text 0">
-            <a:extLst>
-              <a:ext uri="{FF2B5EF4-FFF2-40B4-BE49-F238E27FC236}">
-                <a16:creationId xmlns:a16="http://schemas.microsoft.com/office/drawing/2014/main" id="{0271651C-A770-3FEF-D351-3D329D2AD5ED}"/>
-              </a:ext>
-            </a:extLst>
-          </p:cNvPr>
+          <p:cNvPr id="2" name="Text 0"/>
           <p:cNvSpPr/>
           <p:nvPr/>
         </p:nvSpPr>
@@ -20347,13 +19220,7 @@
       </p:sp>
       <p:sp>
         <p:nvSpPr>
-          <p:cNvPr id="3" name="Text 1">
-            <a:extLst>
-              <a:ext uri="{FF2B5EF4-FFF2-40B4-BE49-F238E27FC236}">
-                <a16:creationId xmlns:a16="http://schemas.microsoft.com/office/drawing/2014/main" id="{D754CC2D-5073-3F96-6E25-8036714E2BCE}"/>
-              </a:ext>
-            </a:extLst>
-          </p:cNvPr>
+          <p:cNvPr id="3" name="Text 1"/>
           <p:cNvSpPr/>
           <p:nvPr/>
         </p:nvSpPr>
@@ -20392,3932 +19259,6 @@
       </p:sp>
       <p:sp>
         <p:nvSpPr>
-          <p:cNvPr id="6" name="Shape 4">
-            <a:extLst>
-              <a:ext uri="{FF2B5EF4-FFF2-40B4-BE49-F238E27FC236}">
-                <a16:creationId xmlns:a16="http://schemas.microsoft.com/office/drawing/2014/main" id="{5D81C419-DBB5-8B36-C71A-CFAD64AE0841}"/>
-              </a:ext>
-            </a:extLst>
-          </p:cNvPr>
-          <p:cNvSpPr/>
-          <p:nvPr/>
-        </p:nvSpPr>
-        <p:spPr>
-          <a:xfrm>
-            <a:off x="548640" y="978408"/>
-            <a:ext cx="594360" cy="41148"/>
-          </a:xfrm>
-          <a:prstGeom prst="rect">
-            <a:avLst/>
-          </a:prstGeom>
-          <a:solidFill>
-            <a:srgbClr val="2E869B"/>
-          </a:solidFill>
-          <a:ln/>
-        </p:spPr>
-        <p:txBody>
-          <a:bodyPr/>
-          <a:lstStyle/>
-          <a:p>
-            <a:endParaRPr lang="ko-KR" altLang="en-US"/>
-          </a:p>
-        </p:txBody>
-      </p:sp>
-      <p:sp>
-        <p:nvSpPr>
-          <p:cNvPr id="33" name="Shape 30">
-            <a:extLst>
-              <a:ext uri="{FF2B5EF4-FFF2-40B4-BE49-F238E27FC236}">
-                <a16:creationId xmlns:a16="http://schemas.microsoft.com/office/drawing/2014/main" id="{F81005CA-342E-C572-CF21-E4520D3D9CA2}"/>
-              </a:ext>
-            </a:extLst>
-          </p:cNvPr>
-          <p:cNvSpPr/>
-          <p:nvPr/>
-        </p:nvSpPr>
-        <p:spPr>
-          <a:xfrm>
-            <a:off x="548640" y="6263640"/>
-            <a:ext cx="11064240" cy="7315"/>
-          </a:xfrm>
-          <a:prstGeom prst="rect">
-            <a:avLst/>
-          </a:prstGeom>
-          <a:solidFill>
-            <a:srgbClr val="D0D0D0"/>
-          </a:solidFill>
-          <a:ln/>
-        </p:spPr>
-        <p:txBody>
-          <a:bodyPr/>
-          <a:lstStyle/>
-          <a:p>
-            <a:endParaRPr lang="ko-KR" altLang="en-US"/>
-          </a:p>
-        </p:txBody>
-      </p:sp>
-      <p:pic>
-        <p:nvPicPr>
-          <p:cNvPr id="34" name="Image 1" descr="/home/claude/work/logo_gateway.jpeg">
-            <a:extLst>
-              <a:ext uri="{FF2B5EF4-FFF2-40B4-BE49-F238E27FC236}">
-                <a16:creationId xmlns:a16="http://schemas.microsoft.com/office/drawing/2014/main" id="{BA9DD910-7FD1-6799-B951-18C789F86CA8}"/>
-              </a:ext>
-            </a:extLst>
-          </p:cNvPr>
-          <p:cNvPicPr>
-            <a:picLocks noChangeAspect="1"/>
-          </p:cNvPicPr>
-          <p:nvPr/>
-        </p:nvPicPr>
-        <p:blipFill>
-          <a:blip r:embed="rId3"/>
-          <a:stretch>
-            <a:fillRect/>
-          </a:stretch>
-        </p:blipFill>
-        <p:spPr>
-          <a:xfrm>
-            <a:off x="9555480" y="6355080"/>
-            <a:ext cx="640080" cy="411480"/>
-          </a:xfrm>
-          <a:prstGeom prst="rect">
-            <a:avLst/>
-          </a:prstGeom>
-        </p:spPr>
-      </p:pic>
-      <p:pic>
-        <p:nvPicPr>
-          <p:cNvPr id="35" name="Image 2" descr="/home/claude/work/logo_eu.jpeg">
-            <a:extLst>
-              <a:ext uri="{FF2B5EF4-FFF2-40B4-BE49-F238E27FC236}">
-                <a16:creationId xmlns:a16="http://schemas.microsoft.com/office/drawing/2014/main" id="{2A0686E4-DC22-D899-AB53-A07E0FDE6F5E}"/>
-              </a:ext>
-            </a:extLst>
-          </p:cNvPr>
-          <p:cNvPicPr>
-            <a:picLocks noChangeAspect="1"/>
-          </p:cNvPicPr>
-          <p:nvPr/>
-        </p:nvPicPr>
-        <p:blipFill>
-          <a:blip r:embed="rId4"/>
-          <a:stretch>
-            <a:fillRect/>
-          </a:stretch>
-        </p:blipFill>
-        <p:spPr>
-          <a:xfrm>
-            <a:off x="10296144" y="6400800"/>
-            <a:ext cx="1280160" cy="320040"/>
-          </a:xfrm>
-          <a:prstGeom prst="rect">
-            <a:avLst/>
-          </a:prstGeom>
-        </p:spPr>
-      </p:pic>
-      <p:pic>
-        <p:nvPicPr>
-          <p:cNvPr id="36" name="Image 3" descr="/home/claude/work/logo_itu.png">
-            <a:extLst>
-              <a:ext uri="{FF2B5EF4-FFF2-40B4-BE49-F238E27FC236}">
-                <a16:creationId xmlns:a16="http://schemas.microsoft.com/office/drawing/2014/main" id="{F7D71821-BDDE-9313-4E67-60FFF1550C2E}"/>
-              </a:ext>
-            </a:extLst>
-          </p:cNvPr>
-          <p:cNvPicPr>
-            <a:picLocks noChangeAspect="1"/>
-          </p:cNvPicPr>
-          <p:nvPr/>
-        </p:nvPicPr>
-        <p:blipFill>
-          <a:blip r:embed="rId5"/>
-          <a:stretch>
-            <a:fillRect/>
-          </a:stretch>
-        </p:blipFill>
-        <p:spPr>
-          <a:xfrm>
-            <a:off x="11686032" y="6355080"/>
-            <a:ext cx="411480" cy="411480"/>
-          </a:xfrm>
-          <a:prstGeom prst="rect">
-            <a:avLst/>
-          </a:prstGeom>
-        </p:spPr>
-      </p:pic>
-      <p:sp>
-        <p:nvSpPr>
-          <p:cNvPr id="37" name="Text 31">
-            <a:extLst>
-              <a:ext uri="{FF2B5EF4-FFF2-40B4-BE49-F238E27FC236}">
-                <a16:creationId xmlns:a16="http://schemas.microsoft.com/office/drawing/2014/main" id="{563F04FD-1C7A-CA38-3DF7-9CFCD5A683E9}"/>
-              </a:ext>
-            </a:extLst>
-          </p:cNvPr>
-          <p:cNvSpPr/>
-          <p:nvPr/>
-        </p:nvSpPr>
-        <p:spPr>
-          <a:xfrm>
-            <a:off x="548640" y="6565392"/>
-            <a:ext cx="1371600" cy="201168"/>
-          </a:xfrm>
-          <a:prstGeom prst="rect">
-            <a:avLst/>
-          </a:prstGeom>
-          <a:noFill/>
-          <a:ln/>
-        </p:spPr>
-        <p:txBody>
-          <a:bodyPr wrap="square" lIns="0" tIns="0" rIns="0" bIns="0" rtlCol="0" anchor="ctr"/>
-          <a:lstStyle/>
-          <a:p>
-            <a:pPr marL="0" indent="0" algn="l">
-              <a:buNone/>
-            </a:pPr>
-            <a:r>
-              <a:rPr lang="en-US" sz="900" dirty="0">
-                <a:solidFill>
-                  <a:srgbClr val="B0B0B0"/>
-                </a:solidFill>
-                <a:latin typeface="Calibri" pitchFamily="34" charset="0"/>
-                <a:ea typeface="Calibri" pitchFamily="34" charset="-122"/>
-                <a:cs typeface="Calibri" pitchFamily="34" charset="-120"/>
-              </a:rPr>
-              <a:t>8 / 13</a:t>
-            </a:r>
-            <a:endParaRPr lang="en-US" sz="900" dirty="0"/>
-          </a:p>
-        </p:txBody>
-      </p:sp>
-      <p:graphicFrame>
-        <p:nvGraphicFramePr>
-          <p:cNvPr id="4" name="표 3">
-            <a:extLst>
-              <a:ext uri="{FF2B5EF4-FFF2-40B4-BE49-F238E27FC236}">
-                <a16:creationId xmlns:a16="http://schemas.microsoft.com/office/drawing/2014/main" id="{59F77DC4-A30B-9C53-9FF4-0F666543D6F5}"/>
-              </a:ext>
-            </a:extLst>
-          </p:cNvPr>
-          <p:cNvGraphicFramePr>
-            <a:graphicFrameLocks noGrp="1"/>
-          </p:cNvGraphicFramePr>
-          <p:nvPr>
-            <p:extLst>
-              <p:ext uri="{D42A27DB-BD31-4B8C-83A1-F6EECF244321}">
-                <p14:modId xmlns:p14="http://schemas.microsoft.com/office/powerpoint/2010/main" val="1963276421"/>
-              </p:ext>
-            </p:extLst>
-          </p:nvPr>
-        </p:nvGraphicFramePr>
-        <p:xfrm>
-          <a:off x="548640" y="987552"/>
-          <a:ext cx="6851620" cy="4686300"/>
-        </p:xfrm>
-        <a:graphic>
-          <a:graphicData uri="http://schemas.openxmlformats.org/drawingml/2006/table">
-            <a:tbl>
-              <a:tblPr firstRow="1" firstCol="1" bandRow="1">
-                <a:tableStyleId>{5C22544A-7EE6-4342-B048-85BDC9FD1C3A}</a:tableStyleId>
-              </a:tblPr>
-              <a:tblGrid>
-                <a:gridCol w="2524474">
-                  <a:extLst>
-                    <a:ext uri="{9D8B030D-6E8A-4147-A177-3AD203B41FA5}">
-                      <a16:colId xmlns:a16="http://schemas.microsoft.com/office/drawing/2014/main" val="3845813342"/>
-                    </a:ext>
-                  </a:extLst>
-                </a:gridCol>
-                <a:gridCol w="1527142">
-                  <a:extLst>
-                    <a:ext uri="{9D8B030D-6E8A-4147-A177-3AD203B41FA5}">
-                      <a16:colId xmlns:a16="http://schemas.microsoft.com/office/drawing/2014/main" val="3636806750"/>
-                    </a:ext>
-                  </a:extLst>
-                </a:gridCol>
-                <a:gridCol w="1557919">
-                  <a:extLst>
-                    <a:ext uri="{9D8B030D-6E8A-4147-A177-3AD203B41FA5}">
-                      <a16:colId xmlns:a16="http://schemas.microsoft.com/office/drawing/2014/main" val="3258051874"/>
-                    </a:ext>
-                  </a:extLst>
-                </a:gridCol>
-                <a:gridCol w="1242085">
-                  <a:extLst>
-                    <a:ext uri="{9D8B030D-6E8A-4147-A177-3AD203B41FA5}">
-                      <a16:colId xmlns:a16="http://schemas.microsoft.com/office/drawing/2014/main" val="3925040223"/>
-                    </a:ext>
-                  </a:extLst>
-                </a:gridCol>
-              </a:tblGrid>
-              <a:tr h="187452">
-                <a:tc>
-                  <a:txBody>
-                    <a:bodyPr/>
-                    <a:lstStyle/>
-                    <a:p>
-                      <a:pPr algn="ctr">
-                        <a:lnSpc>
-                          <a:spcPct val="107000"/>
-                        </a:lnSpc>
-                        <a:spcAft>
-                          <a:spcPts val="500"/>
-                        </a:spcAft>
-                        <a:buNone/>
-                      </a:pPr>
-                      <a:r>
-                        <a:rPr lang="ko-KR" sz="900" dirty="0" err="1">
-                          <a:effectLst/>
-                        </a:rPr>
-                        <a:t>Variable</a:t>
-                      </a:r>
-                      <a:endParaRPr lang="ko-KR" sz="1100" dirty="0">
-                        <a:solidFill>
-                          <a:srgbClr val="222222"/>
-                        </a:solidFill>
-                        <a:effectLst/>
-                        <a:latin typeface="Aptos" panose="020B0004020202020204" pitchFamily="34" charset="0"/>
-                        <a:ea typeface="Aptos" panose="020B0004020202020204" pitchFamily="34" charset="0"/>
-                        <a:cs typeface="Aptos" panose="020B0004020202020204" pitchFamily="34" charset="0"/>
-                      </a:endParaRPr>
-                    </a:p>
-                  </a:txBody>
-                  <a:tcPr marL="32116" marR="32116" marT="10972" marB="10972" anchor="ctr"/>
-                </a:tc>
-                <a:tc>
-                  <a:txBody>
-                    <a:bodyPr/>
-                    <a:lstStyle/>
-                    <a:p>
-                      <a:pPr algn="ctr">
-                        <a:lnSpc>
-                          <a:spcPct val="107000"/>
-                        </a:lnSpc>
-                        <a:spcAft>
-                          <a:spcPts val="500"/>
-                        </a:spcAft>
-                        <a:buNone/>
-                      </a:pPr>
-                      <a:r>
-                        <a:rPr lang="ko-KR" sz="900" dirty="0" err="1">
-                          <a:effectLst/>
-                        </a:rPr>
-                        <a:t>Model</a:t>
-                      </a:r>
-                      <a:r>
-                        <a:rPr lang="ko-KR" sz="900" dirty="0">
-                          <a:effectLst/>
-                        </a:rPr>
-                        <a:t> 1</a:t>
-                      </a:r>
-                      <a:endParaRPr lang="ko-KR" sz="1100" dirty="0">
-                        <a:solidFill>
-                          <a:srgbClr val="222222"/>
-                        </a:solidFill>
-                        <a:effectLst/>
-                        <a:latin typeface="Aptos" panose="020B0004020202020204" pitchFamily="34" charset="0"/>
-                        <a:ea typeface="Aptos" panose="020B0004020202020204" pitchFamily="34" charset="0"/>
-                        <a:cs typeface="Aptos" panose="020B0004020202020204" pitchFamily="34" charset="0"/>
-                      </a:endParaRPr>
-                    </a:p>
-                  </a:txBody>
-                  <a:tcPr marL="32116" marR="32116" marT="10972" marB="10972" anchor="ctr"/>
-                </a:tc>
-                <a:tc>
-                  <a:txBody>
-                    <a:bodyPr/>
-                    <a:lstStyle/>
-                    <a:p>
-                      <a:pPr algn="ctr">
-                        <a:lnSpc>
-                          <a:spcPct val="107000"/>
-                        </a:lnSpc>
-                        <a:spcAft>
-                          <a:spcPts val="500"/>
-                        </a:spcAft>
-                        <a:buNone/>
-                      </a:pPr>
-                      <a:r>
-                        <a:rPr lang="ko-KR" sz="900" dirty="0" err="1">
-                          <a:effectLst/>
-                        </a:rPr>
-                        <a:t>Model</a:t>
-                      </a:r>
-                      <a:r>
-                        <a:rPr lang="ko-KR" sz="900" dirty="0">
-                          <a:effectLst/>
-                        </a:rPr>
-                        <a:t> 2</a:t>
-                      </a:r>
-                      <a:endParaRPr lang="ko-KR" sz="1100" dirty="0">
-                        <a:solidFill>
-                          <a:srgbClr val="222222"/>
-                        </a:solidFill>
-                        <a:effectLst/>
-                        <a:latin typeface="Aptos" panose="020B0004020202020204" pitchFamily="34" charset="0"/>
-                        <a:ea typeface="Aptos" panose="020B0004020202020204" pitchFamily="34" charset="0"/>
-                        <a:cs typeface="Aptos" panose="020B0004020202020204" pitchFamily="34" charset="0"/>
-                      </a:endParaRPr>
-                    </a:p>
-                  </a:txBody>
-                  <a:tcPr marL="32116" marR="32116" marT="10972" marB="10972" anchor="ctr"/>
-                </a:tc>
-                <a:tc>
-                  <a:txBody>
-                    <a:bodyPr/>
-                    <a:lstStyle/>
-                    <a:p>
-                      <a:pPr algn="ctr">
-                        <a:lnSpc>
-                          <a:spcPct val="107000"/>
-                        </a:lnSpc>
-                        <a:spcAft>
-                          <a:spcPts val="500"/>
-                        </a:spcAft>
-                        <a:buNone/>
-                      </a:pPr>
-                      <a:r>
-                        <a:rPr lang="ko-KR" sz="900" dirty="0" err="1">
-                          <a:effectLst/>
-                        </a:rPr>
-                        <a:t>Model</a:t>
-                      </a:r>
-                      <a:r>
-                        <a:rPr lang="ko-KR" sz="900" dirty="0">
-                          <a:effectLst/>
-                        </a:rPr>
-                        <a:t> 3</a:t>
-                      </a:r>
-                      <a:endParaRPr lang="ko-KR" sz="1100" dirty="0">
-                        <a:solidFill>
-                          <a:srgbClr val="222222"/>
-                        </a:solidFill>
-                        <a:effectLst/>
-                        <a:latin typeface="Aptos" panose="020B0004020202020204" pitchFamily="34" charset="0"/>
-                        <a:ea typeface="Aptos" panose="020B0004020202020204" pitchFamily="34" charset="0"/>
-                        <a:cs typeface="Aptos" panose="020B0004020202020204" pitchFamily="34" charset="0"/>
-                      </a:endParaRPr>
-                    </a:p>
-                  </a:txBody>
-                  <a:tcPr marL="32116" marR="32116" marT="10972" marB="10972" anchor="ctr"/>
-                </a:tc>
-                <a:extLst>
-                  <a:ext uri="{0D108BD9-81ED-4DB2-BD59-A6C34878D82A}">
-                    <a16:rowId xmlns:a16="http://schemas.microsoft.com/office/drawing/2014/main" val="3031726232"/>
-                  </a:ext>
-                </a:extLst>
-              </a:tr>
-              <a:tr h="187452">
-                <a:tc>
-                  <a:txBody>
-                    <a:bodyPr/>
-                    <a:lstStyle/>
-                    <a:p>
-                      <a:pPr algn="ctr">
-                        <a:lnSpc>
-                          <a:spcPct val="107000"/>
-                        </a:lnSpc>
-                        <a:spcAft>
-                          <a:spcPts val="500"/>
-                        </a:spcAft>
-                        <a:buNone/>
-                      </a:pPr>
-                      <a:r>
-                        <a:rPr lang="ko-KR" sz="900" dirty="0" err="1">
-                          <a:effectLst/>
-                        </a:rPr>
-                        <a:t>Level</a:t>
-                      </a:r>
-                      <a:r>
-                        <a:rPr lang="ko-KR" sz="900" dirty="0">
-                          <a:effectLst/>
-                        </a:rPr>
-                        <a:t> 1: </a:t>
-                      </a:r>
-                      <a:r>
-                        <a:rPr lang="ko-KR" sz="900" dirty="0" err="1">
-                          <a:effectLst/>
-                        </a:rPr>
-                        <a:t>Individual</a:t>
-                      </a:r>
-                      <a:r>
-                        <a:rPr lang="ko-KR" sz="900" dirty="0">
-                          <a:effectLst/>
-                        </a:rPr>
-                        <a:t> </a:t>
-                      </a:r>
-                      <a:r>
-                        <a:rPr lang="ko-KR" sz="900" dirty="0" err="1">
-                          <a:effectLst/>
-                        </a:rPr>
-                        <a:t>characteristics</a:t>
-                      </a:r>
-                      <a:endParaRPr lang="ko-KR" sz="1000" dirty="0">
-                        <a:solidFill>
-                          <a:srgbClr val="222222"/>
-                        </a:solidFill>
-                        <a:effectLst/>
-                        <a:latin typeface="Aptos" panose="020B0004020202020204" pitchFamily="34" charset="0"/>
-                        <a:ea typeface="Aptos" panose="020B0004020202020204" pitchFamily="34" charset="0"/>
-                        <a:cs typeface="Aptos" panose="020B0004020202020204" pitchFamily="34" charset="0"/>
-                      </a:endParaRPr>
-                    </a:p>
-                  </a:txBody>
-                  <a:tcPr marL="34586" marR="34586" marT="10972" marB="10972" anchor="ctr"/>
-                </a:tc>
-                <a:tc>
-                  <a:txBody>
-                    <a:bodyPr/>
-                    <a:lstStyle/>
-                    <a:p>
-                      <a:pPr algn="ctr">
-                        <a:lnSpc>
-                          <a:spcPct val="107000"/>
-                        </a:lnSpc>
-                        <a:spcAft>
-                          <a:spcPts val="500"/>
-                        </a:spcAft>
-                        <a:buNone/>
-                      </a:pPr>
-                      <a:r>
-                        <a:rPr lang="ko-KR" sz="900" dirty="0">
-                          <a:effectLst/>
-                        </a:rPr>
-                        <a:t> </a:t>
-                      </a:r>
-                      <a:endParaRPr lang="ko-KR" sz="1000" dirty="0">
-                        <a:solidFill>
-                          <a:srgbClr val="222222"/>
-                        </a:solidFill>
-                        <a:effectLst/>
-                        <a:latin typeface="Aptos" panose="020B0004020202020204" pitchFamily="34" charset="0"/>
-                        <a:ea typeface="Aptos" panose="020B0004020202020204" pitchFamily="34" charset="0"/>
-                        <a:cs typeface="Aptos" panose="020B0004020202020204" pitchFamily="34" charset="0"/>
-                      </a:endParaRPr>
-                    </a:p>
-                  </a:txBody>
-                  <a:tcPr marL="34586" marR="34586" marT="10972" marB="10972"/>
-                </a:tc>
-                <a:tc>
-                  <a:txBody>
-                    <a:bodyPr/>
-                    <a:lstStyle/>
-                    <a:p>
-                      <a:pPr algn="ctr">
-                        <a:lnSpc>
-                          <a:spcPct val="107000"/>
-                        </a:lnSpc>
-                        <a:spcAft>
-                          <a:spcPts val="500"/>
-                        </a:spcAft>
-                        <a:buNone/>
-                      </a:pPr>
-                      <a:r>
-                        <a:rPr lang="ko-KR" sz="900" dirty="0">
-                          <a:effectLst/>
-                        </a:rPr>
-                        <a:t> </a:t>
-                      </a:r>
-                      <a:endParaRPr lang="ko-KR" sz="1000" dirty="0">
-                        <a:solidFill>
-                          <a:srgbClr val="222222"/>
-                        </a:solidFill>
-                        <a:effectLst/>
-                        <a:latin typeface="Aptos" panose="020B0004020202020204" pitchFamily="34" charset="0"/>
-                        <a:ea typeface="Aptos" panose="020B0004020202020204" pitchFamily="34" charset="0"/>
-                        <a:cs typeface="Aptos" panose="020B0004020202020204" pitchFamily="34" charset="0"/>
-                      </a:endParaRPr>
-                    </a:p>
-                  </a:txBody>
-                  <a:tcPr marL="34586" marR="34586" marT="10972" marB="10972"/>
-                </a:tc>
-                <a:tc>
-                  <a:txBody>
-                    <a:bodyPr/>
-                    <a:lstStyle/>
-                    <a:p>
-                      <a:pPr algn="ctr">
-                        <a:lnSpc>
-                          <a:spcPct val="107000"/>
-                        </a:lnSpc>
-                        <a:spcAft>
-                          <a:spcPts val="500"/>
-                        </a:spcAft>
-                        <a:buNone/>
-                      </a:pPr>
-                      <a:r>
-                        <a:rPr lang="ko-KR" sz="900" dirty="0">
-                          <a:effectLst/>
-                        </a:rPr>
-                        <a:t> </a:t>
-                      </a:r>
-                      <a:endParaRPr lang="ko-KR" sz="1000" dirty="0">
-                        <a:solidFill>
-                          <a:srgbClr val="222222"/>
-                        </a:solidFill>
-                        <a:effectLst/>
-                        <a:latin typeface="Aptos" panose="020B0004020202020204" pitchFamily="34" charset="0"/>
-                        <a:ea typeface="Aptos" panose="020B0004020202020204" pitchFamily="34" charset="0"/>
-                        <a:cs typeface="Aptos" panose="020B0004020202020204" pitchFamily="34" charset="0"/>
-                      </a:endParaRPr>
-                    </a:p>
-                  </a:txBody>
-                  <a:tcPr marL="34586" marR="34586" marT="10972" marB="10972"/>
-                </a:tc>
-                <a:extLst>
-                  <a:ext uri="{0D108BD9-81ED-4DB2-BD59-A6C34878D82A}">
-                    <a16:rowId xmlns:a16="http://schemas.microsoft.com/office/drawing/2014/main" val="3653367983"/>
-                  </a:ext>
-                </a:extLst>
-              </a:tr>
-              <a:tr h="187452">
-                <a:tc>
-                  <a:txBody>
-                    <a:bodyPr/>
-                    <a:lstStyle/>
-                    <a:p>
-                      <a:pPr algn="just">
-                        <a:lnSpc>
-                          <a:spcPct val="107000"/>
-                        </a:lnSpc>
-                        <a:spcAft>
-                          <a:spcPts val="500"/>
-                        </a:spcAft>
-                        <a:buNone/>
-                      </a:pPr>
-                      <a:r>
-                        <a:rPr lang="ko-KR" sz="900" dirty="0" err="1">
-                          <a:effectLst/>
-                        </a:rPr>
-                        <a:t>Intercept</a:t>
-                      </a:r>
-                      <a:endParaRPr lang="ko-KR" sz="1000" dirty="0">
-                        <a:solidFill>
-                          <a:srgbClr val="222222"/>
-                        </a:solidFill>
-                        <a:effectLst/>
-                        <a:latin typeface="Aptos" panose="020B0004020202020204" pitchFamily="34" charset="0"/>
-                        <a:ea typeface="Aptos" panose="020B0004020202020204" pitchFamily="34" charset="0"/>
-                        <a:cs typeface="Aptos" panose="020B0004020202020204" pitchFamily="34" charset="0"/>
-                      </a:endParaRPr>
-                    </a:p>
-                  </a:txBody>
-                  <a:tcPr marL="34586" marR="34586" marT="10972" marB="10972" anchor="ctr"/>
-                </a:tc>
-                <a:tc>
-                  <a:txBody>
-                    <a:bodyPr/>
-                    <a:lstStyle/>
-                    <a:p>
-                      <a:pPr algn="ctr">
-                        <a:lnSpc>
-                          <a:spcPct val="107000"/>
-                        </a:lnSpc>
-                        <a:spcAft>
-                          <a:spcPts val="500"/>
-                        </a:spcAft>
-                        <a:buNone/>
-                      </a:pPr>
-                      <a:r>
-                        <a:rPr lang="ko-KR" sz="900">
-                          <a:effectLst/>
-                        </a:rPr>
-                        <a:t>63.204*** (0.416)</a:t>
-                      </a:r>
-                      <a:endParaRPr lang="ko-KR" sz="1000">
-                        <a:solidFill>
-                          <a:srgbClr val="222222"/>
-                        </a:solidFill>
-                        <a:effectLst/>
-                        <a:latin typeface="Aptos" panose="020B0004020202020204" pitchFamily="34" charset="0"/>
-                        <a:ea typeface="Aptos" panose="020B0004020202020204" pitchFamily="34" charset="0"/>
-                        <a:cs typeface="Aptos" panose="020B0004020202020204" pitchFamily="34" charset="0"/>
-                      </a:endParaRPr>
-                    </a:p>
-                  </a:txBody>
-                  <a:tcPr marL="34586" marR="34586" marT="10972" marB="10972"/>
-                </a:tc>
-                <a:tc>
-                  <a:txBody>
-                    <a:bodyPr/>
-                    <a:lstStyle/>
-                    <a:p>
-                      <a:pPr algn="ctr">
-                        <a:lnSpc>
-                          <a:spcPct val="107000"/>
-                        </a:lnSpc>
-                        <a:spcAft>
-                          <a:spcPts val="500"/>
-                        </a:spcAft>
-                        <a:buNone/>
-                      </a:pPr>
-                      <a:r>
-                        <a:rPr lang="ko-KR" sz="900">
-                          <a:effectLst/>
-                        </a:rPr>
-                        <a:t>64.282*** (0.764)</a:t>
-                      </a:r>
-                      <a:endParaRPr lang="ko-KR" sz="1000">
-                        <a:solidFill>
-                          <a:srgbClr val="222222"/>
-                        </a:solidFill>
-                        <a:effectLst/>
-                        <a:latin typeface="Aptos" panose="020B0004020202020204" pitchFamily="34" charset="0"/>
-                        <a:ea typeface="Aptos" panose="020B0004020202020204" pitchFamily="34" charset="0"/>
-                        <a:cs typeface="Aptos" panose="020B0004020202020204" pitchFamily="34" charset="0"/>
-                      </a:endParaRPr>
-                    </a:p>
-                  </a:txBody>
-                  <a:tcPr marL="34586" marR="34586" marT="10972" marB="10972"/>
-                </a:tc>
-                <a:tc>
-                  <a:txBody>
-                    <a:bodyPr/>
-                    <a:lstStyle/>
-                    <a:p>
-                      <a:pPr algn="ctr">
-                        <a:lnSpc>
-                          <a:spcPct val="107000"/>
-                        </a:lnSpc>
-                        <a:spcAft>
-                          <a:spcPts val="500"/>
-                        </a:spcAft>
-                        <a:buNone/>
-                      </a:pPr>
-                      <a:r>
-                        <a:rPr lang="ko-KR" sz="900">
-                          <a:effectLst/>
-                        </a:rPr>
-                        <a:t>64.431*** (0.759)</a:t>
-                      </a:r>
-                      <a:endParaRPr lang="ko-KR" sz="1000">
-                        <a:solidFill>
-                          <a:srgbClr val="222222"/>
-                        </a:solidFill>
-                        <a:effectLst/>
-                        <a:latin typeface="Aptos" panose="020B0004020202020204" pitchFamily="34" charset="0"/>
-                        <a:ea typeface="Aptos" panose="020B0004020202020204" pitchFamily="34" charset="0"/>
-                        <a:cs typeface="Aptos" panose="020B0004020202020204" pitchFamily="34" charset="0"/>
-                      </a:endParaRPr>
-                    </a:p>
-                  </a:txBody>
-                  <a:tcPr marL="34586" marR="34586" marT="10972" marB="10972"/>
-                </a:tc>
-                <a:extLst>
-                  <a:ext uri="{0D108BD9-81ED-4DB2-BD59-A6C34878D82A}">
-                    <a16:rowId xmlns:a16="http://schemas.microsoft.com/office/drawing/2014/main" val="2861784482"/>
-                  </a:ext>
-                </a:extLst>
-              </a:tr>
-              <a:tr h="187452">
-                <a:tc>
-                  <a:txBody>
-                    <a:bodyPr/>
-                    <a:lstStyle/>
-                    <a:p>
-                      <a:pPr algn="just">
-                        <a:lnSpc>
-                          <a:spcPct val="107000"/>
-                        </a:lnSpc>
-                        <a:spcAft>
-                          <a:spcPts val="500"/>
-                        </a:spcAft>
-                        <a:buNone/>
-                      </a:pPr>
-                      <a:r>
-                        <a:rPr lang="ko-KR" sz="900" dirty="0" err="1">
-                          <a:effectLst/>
-                        </a:rPr>
-                        <a:t>Age</a:t>
-                      </a:r>
-                      <a:r>
-                        <a:rPr lang="ko-KR" sz="900" dirty="0">
-                          <a:effectLst/>
-                        </a:rPr>
-                        <a:t> (</a:t>
-                      </a:r>
-                      <a:r>
-                        <a:rPr lang="ko-KR" sz="900" dirty="0" err="1">
-                          <a:effectLst/>
-                        </a:rPr>
-                        <a:t>centered</a:t>
-                      </a:r>
-                      <a:r>
-                        <a:rPr lang="ko-KR" sz="900" dirty="0">
-                          <a:effectLst/>
-                        </a:rPr>
-                        <a:t>)</a:t>
-                      </a:r>
-                      <a:endParaRPr lang="ko-KR" sz="1000" dirty="0">
-                        <a:solidFill>
-                          <a:srgbClr val="222222"/>
-                        </a:solidFill>
-                        <a:effectLst/>
-                        <a:latin typeface="Aptos" panose="020B0004020202020204" pitchFamily="34" charset="0"/>
-                        <a:ea typeface="Aptos" panose="020B0004020202020204" pitchFamily="34" charset="0"/>
-                        <a:cs typeface="Aptos" panose="020B0004020202020204" pitchFamily="34" charset="0"/>
-                      </a:endParaRPr>
-                    </a:p>
-                  </a:txBody>
-                  <a:tcPr marL="34586" marR="34586" marT="10972" marB="10972" anchor="ctr"/>
-                </a:tc>
-                <a:tc>
-                  <a:txBody>
-                    <a:bodyPr/>
-                    <a:lstStyle/>
-                    <a:p>
-                      <a:pPr algn="ctr">
-                        <a:lnSpc>
-                          <a:spcPct val="107000"/>
-                        </a:lnSpc>
-                        <a:spcAft>
-                          <a:spcPts val="500"/>
-                        </a:spcAft>
-                        <a:buNone/>
-                      </a:pPr>
-                      <a:r>
-                        <a:rPr lang="ko-KR" sz="900">
-                          <a:effectLst/>
-                        </a:rPr>
-                        <a:t>-0.347*** (0.012)</a:t>
-                      </a:r>
-                      <a:endParaRPr lang="ko-KR" sz="1000">
-                        <a:solidFill>
-                          <a:srgbClr val="222222"/>
-                        </a:solidFill>
-                        <a:effectLst/>
-                        <a:latin typeface="Aptos" panose="020B0004020202020204" pitchFamily="34" charset="0"/>
-                        <a:ea typeface="Aptos" panose="020B0004020202020204" pitchFamily="34" charset="0"/>
-                        <a:cs typeface="Aptos" panose="020B0004020202020204" pitchFamily="34" charset="0"/>
-                      </a:endParaRPr>
-                    </a:p>
-                  </a:txBody>
-                  <a:tcPr marL="34586" marR="34586" marT="10972" marB="10972"/>
-                </a:tc>
-                <a:tc>
-                  <a:txBody>
-                    <a:bodyPr/>
-                    <a:lstStyle/>
-                    <a:p>
-                      <a:pPr algn="ctr">
-                        <a:lnSpc>
-                          <a:spcPct val="107000"/>
-                        </a:lnSpc>
-                        <a:spcAft>
-                          <a:spcPts val="500"/>
-                        </a:spcAft>
-                        <a:buNone/>
-                      </a:pPr>
-                      <a:r>
-                        <a:rPr lang="ko-KR" sz="900">
-                          <a:effectLst/>
-                        </a:rPr>
-                        <a:t>-0.347*** (0.012)</a:t>
-                      </a:r>
-                      <a:endParaRPr lang="ko-KR" sz="1000">
-                        <a:solidFill>
-                          <a:srgbClr val="222222"/>
-                        </a:solidFill>
-                        <a:effectLst/>
-                        <a:latin typeface="Aptos" panose="020B0004020202020204" pitchFamily="34" charset="0"/>
-                        <a:ea typeface="Aptos" panose="020B0004020202020204" pitchFamily="34" charset="0"/>
-                        <a:cs typeface="Aptos" panose="020B0004020202020204" pitchFamily="34" charset="0"/>
-                      </a:endParaRPr>
-                    </a:p>
-                  </a:txBody>
-                  <a:tcPr marL="34586" marR="34586" marT="10972" marB="10972"/>
-                </a:tc>
-                <a:tc>
-                  <a:txBody>
-                    <a:bodyPr/>
-                    <a:lstStyle/>
-                    <a:p>
-                      <a:pPr algn="ctr">
-                        <a:lnSpc>
-                          <a:spcPct val="107000"/>
-                        </a:lnSpc>
-                        <a:spcAft>
-                          <a:spcPts val="500"/>
-                        </a:spcAft>
-                        <a:buNone/>
-                      </a:pPr>
-                      <a:r>
-                        <a:rPr lang="ko-KR" sz="900">
-                          <a:effectLst/>
-                        </a:rPr>
-                        <a:t>-0.337*** (0.012)</a:t>
-                      </a:r>
-                      <a:endParaRPr lang="ko-KR" sz="1000">
-                        <a:solidFill>
-                          <a:srgbClr val="222222"/>
-                        </a:solidFill>
-                        <a:effectLst/>
-                        <a:latin typeface="Aptos" panose="020B0004020202020204" pitchFamily="34" charset="0"/>
-                        <a:ea typeface="Aptos" panose="020B0004020202020204" pitchFamily="34" charset="0"/>
-                        <a:cs typeface="Aptos" panose="020B0004020202020204" pitchFamily="34" charset="0"/>
-                      </a:endParaRPr>
-                    </a:p>
-                  </a:txBody>
-                  <a:tcPr marL="34586" marR="34586" marT="10972" marB="10972"/>
-                </a:tc>
-                <a:extLst>
-                  <a:ext uri="{0D108BD9-81ED-4DB2-BD59-A6C34878D82A}">
-                    <a16:rowId xmlns:a16="http://schemas.microsoft.com/office/drawing/2014/main" val="2077787482"/>
-                  </a:ext>
-                </a:extLst>
-              </a:tr>
-              <a:tr h="187452">
-                <a:tc>
-                  <a:txBody>
-                    <a:bodyPr/>
-                    <a:lstStyle/>
-                    <a:p>
-                      <a:pPr algn="just">
-                        <a:lnSpc>
-                          <a:spcPct val="107000"/>
-                        </a:lnSpc>
-                        <a:spcAft>
-                          <a:spcPts val="500"/>
-                        </a:spcAft>
-                        <a:buNone/>
-                      </a:pPr>
-                      <a:r>
-                        <a:rPr lang="ko-KR" sz="900" dirty="0" err="1">
-                          <a:effectLst/>
-                        </a:rPr>
-                        <a:t>Female</a:t>
-                      </a:r>
-                      <a:endParaRPr lang="ko-KR" sz="1000" dirty="0">
-                        <a:solidFill>
-                          <a:srgbClr val="222222"/>
-                        </a:solidFill>
-                        <a:effectLst/>
-                        <a:latin typeface="Aptos" panose="020B0004020202020204" pitchFamily="34" charset="0"/>
-                        <a:ea typeface="Aptos" panose="020B0004020202020204" pitchFamily="34" charset="0"/>
-                        <a:cs typeface="Aptos" panose="020B0004020202020204" pitchFamily="34" charset="0"/>
-                      </a:endParaRPr>
-                    </a:p>
-                  </a:txBody>
-                  <a:tcPr marL="34586" marR="34586" marT="10972" marB="10972" anchor="ctr"/>
-                </a:tc>
-                <a:tc>
-                  <a:txBody>
-                    <a:bodyPr/>
-                    <a:lstStyle/>
-                    <a:p>
-                      <a:pPr algn="ctr">
-                        <a:lnSpc>
-                          <a:spcPct val="107000"/>
-                        </a:lnSpc>
-                        <a:spcAft>
-                          <a:spcPts val="500"/>
-                        </a:spcAft>
-                        <a:buNone/>
-                      </a:pPr>
-                      <a:r>
-                        <a:rPr lang="ko-KR" sz="900">
-                          <a:effectLst/>
-                        </a:rPr>
-                        <a:t>2.636*** (0.305)</a:t>
-                      </a:r>
-                      <a:endParaRPr lang="ko-KR" sz="1000">
-                        <a:solidFill>
-                          <a:srgbClr val="222222"/>
-                        </a:solidFill>
-                        <a:effectLst/>
-                        <a:latin typeface="Aptos" panose="020B0004020202020204" pitchFamily="34" charset="0"/>
-                        <a:ea typeface="Aptos" panose="020B0004020202020204" pitchFamily="34" charset="0"/>
-                        <a:cs typeface="Aptos" panose="020B0004020202020204" pitchFamily="34" charset="0"/>
-                      </a:endParaRPr>
-                    </a:p>
-                  </a:txBody>
-                  <a:tcPr marL="34586" marR="34586" marT="10972" marB="10972"/>
-                </a:tc>
-                <a:tc>
-                  <a:txBody>
-                    <a:bodyPr/>
-                    <a:lstStyle/>
-                    <a:p>
-                      <a:pPr algn="ctr">
-                        <a:lnSpc>
-                          <a:spcPct val="107000"/>
-                        </a:lnSpc>
-                        <a:spcAft>
-                          <a:spcPts val="500"/>
-                        </a:spcAft>
-                        <a:buNone/>
-                      </a:pPr>
-                      <a:r>
-                        <a:rPr lang="ko-KR" sz="900">
-                          <a:effectLst/>
-                        </a:rPr>
-                        <a:t>2.659*** (0.305)</a:t>
-                      </a:r>
-                      <a:endParaRPr lang="ko-KR" sz="1000">
-                        <a:solidFill>
-                          <a:srgbClr val="222222"/>
-                        </a:solidFill>
-                        <a:effectLst/>
-                        <a:latin typeface="Aptos" panose="020B0004020202020204" pitchFamily="34" charset="0"/>
-                        <a:ea typeface="Aptos" panose="020B0004020202020204" pitchFamily="34" charset="0"/>
-                        <a:cs typeface="Aptos" panose="020B0004020202020204" pitchFamily="34" charset="0"/>
-                      </a:endParaRPr>
-                    </a:p>
-                  </a:txBody>
-                  <a:tcPr marL="34586" marR="34586" marT="10972" marB="10972"/>
-                </a:tc>
-                <a:tc>
-                  <a:txBody>
-                    <a:bodyPr/>
-                    <a:lstStyle/>
-                    <a:p>
-                      <a:pPr algn="ctr">
-                        <a:lnSpc>
-                          <a:spcPct val="107000"/>
-                        </a:lnSpc>
-                        <a:spcAft>
-                          <a:spcPts val="500"/>
-                        </a:spcAft>
-                        <a:buNone/>
-                      </a:pPr>
-                      <a:r>
-                        <a:rPr lang="ko-KR" sz="900" dirty="0">
-                          <a:effectLst/>
-                        </a:rPr>
-                        <a:t>2.690*** (0.305)</a:t>
-                      </a:r>
-                      <a:endParaRPr lang="ko-KR" sz="1000" dirty="0">
-                        <a:solidFill>
-                          <a:srgbClr val="222222"/>
-                        </a:solidFill>
-                        <a:effectLst/>
-                        <a:latin typeface="Aptos" panose="020B0004020202020204" pitchFamily="34" charset="0"/>
-                        <a:ea typeface="Aptos" panose="020B0004020202020204" pitchFamily="34" charset="0"/>
-                        <a:cs typeface="Aptos" panose="020B0004020202020204" pitchFamily="34" charset="0"/>
-                      </a:endParaRPr>
-                    </a:p>
-                  </a:txBody>
-                  <a:tcPr marL="34586" marR="34586" marT="10972" marB="10972"/>
-                </a:tc>
-                <a:extLst>
-                  <a:ext uri="{0D108BD9-81ED-4DB2-BD59-A6C34878D82A}">
-                    <a16:rowId xmlns:a16="http://schemas.microsoft.com/office/drawing/2014/main" val="4148763290"/>
-                  </a:ext>
-                </a:extLst>
-              </a:tr>
-              <a:tr h="187452">
-                <a:tc>
-                  <a:txBody>
-                    <a:bodyPr/>
-                    <a:lstStyle/>
-                    <a:p>
-                      <a:pPr algn="just">
-                        <a:lnSpc>
-                          <a:spcPct val="107000"/>
-                        </a:lnSpc>
-                        <a:spcAft>
-                          <a:spcPts val="500"/>
-                        </a:spcAft>
-                        <a:buNone/>
-                      </a:pPr>
-                      <a:r>
-                        <a:rPr lang="ko-KR" sz="900">
-                          <a:effectLst/>
-                        </a:rPr>
-                        <a:t>Education: middle school or below</a:t>
-                      </a:r>
-                      <a:endParaRPr lang="ko-KR" sz="1000">
-                        <a:solidFill>
-                          <a:srgbClr val="222222"/>
-                        </a:solidFill>
-                        <a:effectLst/>
-                        <a:latin typeface="Aptos" panose="020B0004020202020204" pitchFamily="34" charset="0"/>
-                        <a:ea typeface="Aptos" panose="020B0004020202020204" pitchFamily="34" charset="0"/>
-                        <a:cs typeface="Aptos" panose="020B0004020202020204" pitchFamily="34" charset="0"/>
-                      </a:endParaRPr>
-                    </a:p>
-                  </a:txBody>
-                  <a:tcPr marL="34586" marR="34586" marT="10972" marB="10972" anchor="ctr"/>
-                </a:tc>
-                <a:tc>
-                  <a:txBody>
-                    <a:bodyPr/>
-                    <a:lstStyle/>
-                    <a:p>
-                      <a:pPr algn="ctr">
-                        <a:lnSpc>
-                          <a:spcPct val="107000"/>
-                        </a:lnSpc>
-                        <a:spcAft>
-                          <a:spcPts val="500"/>
-                        </a:spcAft>
-                        <a:buNone/>
-                      </a:pPr>
-                      <a:r>
-                        <a:rPr lang="ko-KR" sz="900" dirty="0">
-                          <a:effectLst/>
-                        </a:rPr>
-                        <a:t>-22.618*** (0.770)</a:t>
-                      </a:r>
-                      <a:endParaRPr lang="ko-KR" sz="1000" dirty="0">
-                        <a:solidFill>
-                          <a:srgbClr val="222222"/>
-                        </a:solidFill>
-                        <a:effectLst/>
-                        <a:latin typeface="Aptos" panose="020B0004020202020204" pitchFamily="34" charset="0"/>
-                        <a:ea typeface="Aptos" panose="020B0004020202020204" pitchFamily="34" charset="0"/>
-                        <a:cs typeface="Aptos" panose="020B0004020202020204" pitchFamily="34" charset="0"/>
-                      </a:endParaRPr>
-                    </a:p>
-                  </a:txBody>
-                  <a:tcPr marL="34586" marR="34586" marT="10972" marB="10972"/>
-                </a:tc>
-                <a:tc>
-                  <a:txBody>
-                    <a:bodyPr/>
-                    <a:lstStyle/>
-                    <a:p>
-                      <a:pPr algn="ctr">
-                        <a:lnSpc>
-                          <a:spcPct val="107000"/>
-                        </a:lnSpc>
-                        <a:spcAft>
-                          <a:spcPts val="500"/>
-                        </a:spcAft>
-                        <a:buNone/>
-                      </a:pPr>
-                      <a:r>
-                        <a:rPr lang="ko-KR" sz="900">
-                          <a:effectLst/>
-                        </a:rPr>
-                        <a:t>-22.674*** (0.770)</a:t>
-                      </a:r>
-                      <a:endParaRPr lang="ko-KR" sz="1000">
-                        <a:solidFill>
-                          <a:srgbClr val="222222"/>
-                        </a:solidFill>
-                        <a:effectLst/>
-                        <a:latin typeface="Aptos" panose="020B0004020202020204" pitchFamily="34" charset="0"/>
-                        <a:ea typeface="Aptos" panose="020B0004020202020204" pitchFamily="34" charset="0"/>
-                        <a:cs typeface="Aptos" panose="020B0004020202020204" pitchFamily="34" charset="0"/>
-                      </a:endParaRPr>
-                    </a:p>
-                  </a:txBody>
-                  <a:tcPr marL="34586" marR="34586" marT="10972" marB="10972"/>
-                </a:tc>
-                <a:tc>
-                  <a:txBody>
-                    <a:bodyPr/>
-                    <a:lstStyle/>
-                    <a:p>
-                      <a:pPr algn="ctr">
-                        <a:lnSpc>
-                          <a:spcPct val="107000"/>
-                        </a:lnSpc>
-                        <a:spcAft>
-                          <a:spcPts val="500"/>
-                        </a:spcAft>
-                        <a:buNone/>
-                      </a:pPr>
-                      <a:r>
-                        <a:rPr lang="ko-KR" sz="900" dirty="0">
-                          <a:effectLst/>
-                        </a:rPr>
-                        <a:t>-18.353*** (2.345)</a:t>
-                      </a:r>
-                      <a:endParaRPr lang="ko-KR" sz="1000" dirty="0">
-                        <a:solidFill>
-                          <a:srgbClr val="222222"/>
-                        </a:solidFill>
-                        <a:effectLst/>
-                        <a:highlight>
-                          <a:srgbClr val="FFFF00"/>
-                        </a:highlight>
-                        <a:latin typeface="Aptos" panose="020B0004020202020204" pitchFamily="34" charset="0"/>
-                        <a:ea typeface="Aptos" panose="020B0004020202020204" pitchFamily="34" charset="0"/>
-                        <a:cs typeface="Aptos" panose="020B0004020202020204" pitchFamily="34" charset="0"/>
-                      </a:endParaRPr>
-                    </a:p>
-                  </a:txBody>
-                  <a:tcPr marL="34586" marR="34586" marT="10972" marB="10972"/>
-                </a:tc>
-                <a:extLst>
-                  <a:ext uri="{0D108BD9-81ED-4DB2-BD59-A6C34878D82A}">
-                    <a16:rowId xmlns:a16="http://schemas.microsoft.com/office/drawing/2014/main" val="1723650672"/>
-                  </a:ext>
-                </a:extLst>
-              </a:tr>
-              <a:tr h="187452">
-                <a:tc>
-                  <a:txBody>
-                    <a:bodyPr/>
-                    <a:lstStyle/>
-                    <a:p>
-                      <a:pPr algn="just">
-                        <a:lnSpc>
-                          <a:spcPct val="107000"/>
-                        </a:lnSpc>
-                        <a:spcAft>
-                          <a:spcPts val="500"/>
-                        </a:spcAft>
-                        <a:buNone/>
-                      </a:pPr>
-                      <a:r>
-                        <a:rPr lang="ko-KR" sz="900">
-                          <a:effectLst/>
-                        </a:rPr>
-                        <a:t>Education: high school</a:t>
-                      </a:r>
-                      <a:endParaRPr lang="ko-KR" sz="1000">
-                        <a:solidFill>
-                          <a:srgbClr val="222222"/>
-                        </a:solidFill>
-                        <a:effectLst/>
-                        <a:latin typeface="Aptos" panose="020B0004020202020204" pitchFamily="34" charset="0"/>
-                        <a:ea typeface="Aptos" panose="020B0004020202020204" pitchFamily="34" charset="0"/>
-                        <a:cs typeface="Aptos" panose="020B0004020202020204" pitchFamily="34" charset="0"/>
-                      </a:endParaRPr>
-                    </a:p>
-                  </a:txBody>
-                  <a:tcPr marL="34586" marR="34586" marT="10972" marB="10972" anchor="ctr"/>
-                </a:tc>
-                <a:tc>
-                  <a:txBody>
-                    <a:bodyPr/>
-                    <a:lstStyle/>
-                    <a:p>
-                      <a:pPr algn="ctr">
-                        <a:lnSpc>
-                          <a:spcPct val="107000"/>
-                        </a:lnSpc>
-                        <a:spcAft>
-                          <a:spcPts val="500"/>
-                        </a:spcAft>
-                        <a:buNone/>
-                      </a:pPr>
-                      <a:r>
-                        <a:rPr lang="ko-KR" sz="900">
-                          <a:effectLst/>
-                        </a:rPr>
-                        <a:t>-7.289*** (0.380)</a:t>
-                      </a:r>
-                      <a:endParaRPr lang="ko-KR" sz="1000">
-                        <a:solidFill>
-                          <a:srgbClr val="222222"/>
-                        </a:solidFill>
-                        <a:effectLst/>
-                        <a:latin typeface="Aptos" panose="020B0004020202020204" pitchFamily="34" charset="0"/>
-                        <a:ea typeface="Aptos" panose="020B0004020202020204" pitchFamily="34" charset="0"/>
-                        <a:cs typeface="Aptos" panose="020B0004020202020204" pitchFamily="34" charset="0"/>
-                      </a:endParaRPr>
-                    </a:p>
-                  </a:txBody>
-                  <a:tcPr marL="34586" marR="34586" marT="10972" marB="10972"/>
-                </a:tc>
-                <a:tc>
-                  <a:txBody>
-                    <a:bodyPr/>
-                    <a:lstStyle/>
-                    <a:p>
-                      <a:pPr algn="ctr">
-                        <a:lnSpc>
-                          <a:spcPct val="107000"/>
-                        </a:lnSpc>
-                        <a:spcAft>
-                          <a:spcPts val="500"/>
-                        </a:spcAft>
-                        <a:buNone/>
-                      </a:pPr>
-                      <a:r>
-                        <a:rPr lang="ko-KR" sz="900">
-                          <a:effectLst/>
-                        </a:rPr>
-                        <a:t>-7.330*** (0.381)</a:t>
-                      </a:r>
-                      <a:endParaRPr lang="ko-KR" sz="1000">
-                        <a:solidFill>
-                          <a:srgbClr val="222222"/>
-                        </a:solidFill>
-                        <a:effectLst/>
-                        <a:latin typeface="Aptos" panose="020B0004020202020204" pitchFamily="34" charset="0"/>
-                        <a:ea typeface="Aptos" panose="020B0004020202020204" pitchFamily="34" charset="0"/>
-                        <a:cs typeface="Aptos" panose="020B0004020202020204" pitchFamily="34" charset="0"/>
-                      </a:endParaRPr>
-                    </a:p>
-                  </a:txBody>
-                  <a:tcPr marL="34586" marR="34586" marT="10972" marB="10972"/>
-                </a:tc>
-                <a:tc>
-                  <a:txBody>
-                    <a:bodyPr/>
-                    <a:lstStyle/>
-                    <a:p>
-                      <a:pPr algn="ctr">
-                        <a:lnSpc>
-                          <a:spcPct val="107000"/>
-                        </a:lnSpc>
-                        <a:spcAft>
-                          <a:spcPts val="500"/>
-                        </a:spcAft>
-                        <a:buNone/>
-                      </a:pPr>
-                      <a:r>
-                        <a:rPr lang="ko-KR" sz="900" dirty="0">
-                          <a:effectLst/>
-                        </a:rPr>
-                        <a:t>-7.432*** (0.381)</a:t>
-                      </a:r>
-                      <a:endParaRPr lang="ko-KR" sz="1000" dirty="0">
-                        <a:solidFill>
-                          <a:srgbClr val="222222"/>
-                        </a:solidFill>
-                        <a:effectLst/>
-                        <a:latin typeface="Aptos" panose="020B0004020202020204" pitchFamily="34" charset="0"/>
-                        <a:ea typeface="Aptos" panose="020B0004020202020204" pitchFamily="34" charset="0"/>
-                        <a:cs typeface="Aptos" panose="020B0004020202020204" pitchFamily="34" charset="0"/>
-                      </a:endParaRPr>
-                    </a:p>
-                  </a:txBody>
-                  <a:tcPr marL="34586" marR="34586" marT="10972" marB="10972"/>
-                </a:tc>
-                <a:extLst>
-                  <a:ext uri="{0D108BD9-81ED-4DB2-BD59-A6C34878D82A}">
-                    <a16:rowId xmlns:a16="http://schemas.microsoft.com/office/drawing/2014/main" val="3988583600"/>
-                  </a:ext>
-                </a:extLst>
-              </a:tr>
-              <a:tr h="187452">
-                <a:tc>
-                  <a:txBody>
-                    <a:bodyPr/>
-                    <a:lstStyle/>
-                    <a:p>
-                      <a:pPr algn="just">
-                        <a:lnSpc>
-                          <a:spcPct val="107000"/>
-                        </a:lnSpc>
-                        <a:spcAft>
-                          <a:spcPts val="500"/>
-                        </a:spcAft>
-                        <a:buNone/>
-                      </a:pPr>
-                      <a:r>
-                        <a:rPr lang="ko-KR" sz="900">
-                          <a:effectLst/>
-                        </a:rPr>
-                        <a:t>Education: graduate school or higher</a:t>
-                      </a:r>
-                      <a:endParaRPr lang="ko-KR" sz="1000">
-                        <a:solidFill>
-                          <a:srgbClr val="222222"/>
-                        </a:solidFill>
-                        <a:effectLst/>
-                        <a:latin typeface="Aptos" panose="020B0004020202020204" pitchFamily="34" charset="0"/>
-                        <a:ea typeface="Aptos" panose="020B0004020202020204" pitchFamily="34" charset="0"/>
-                        <a:cs typeface="Aptos" panose="020B0004020202020204" pitchFamily="34" charset="0"/>
-                      </a:endParaRPr>
-                    </a:p>
-                  </a:txBody>
-                  <a:tcPr marL="34586" marR="34586" marT="10972" marB="10972" anchor="ctr"/>
-                </a:tc>
-                <a:tc>
-                  <a:txBody>
-                    <a:bodyPr/>
-                    <a:lstStyle/>
-                    <a:p>
-                      <a:pPr algn="ctr">
-                        <a:lnSpc>
-                          <a:spcPct val="107000"/>
-                        </a:lnSpc>
-                        <a:spcAft>
-                          <a:spcPts val="500"/>
-                        </a:spcAft>
-                        <a:buNone/>
-                      </a:pPr>
-                      <a:r>
-                        <a:rPr lang="ko-KR" sz="900" dirty="0">
-                          <a:effectLst/>
-                        </a:rPr>
-                        <a:t>2.906*** (0.483)</a:t>
-                      </a:r>
-                      <a:endParaRPr lang="ko-KR" sz="1000" dirty="0">
-                        <a:solidFill>
-                          <a:srgbClr val="222222"/>
-                        </a:solidFill>
-                        <a:effectLst/>
-                        <a:latin typeface="Aptos" panose="020B0004020202020204" pitchFamily="34" charset="0"/>
-                        <a:ea typeface="Aptos" panose="020B0004020202020204" pitchFamily="34" charset="0"/>
-                        <a:cs typeface="Aptos" panose="020B0004020202020204" pitchFamily="34" charset="0"/>
-                      </a:endParaRPr>
-                    </a:p>
-                  </a:txBody>
-                  <a:tcPr marL="34586" marR="34586" marT="10972" marB="10972"/>
-                </a:tc>
-                <a:tc>
-                  <a:txBody>
-                    <a:bodyPr/>
-                    <a:lstStyle/>
-                    <a:p>
-                      <a:pPr algn="ctr">
-                        <a:lnSpc>
-                          <a:spcPct val="107000"/>
-                        </a:lnSpc>
-                        <a:spcAft>
-                          <a:spcPts val="500"/>
-                        </a:spcAft>
-                        <a:buNone/>
-                      </a:pPr>
-                      <a:r>
-                        <a:rPr lang="ko-KR" sz="900" dirty="0">
-                          <a:effectLst/>
-                        </a:rPr>
-                        <a:t>2.952*** (0.483)</a:t>
-                      </a:r>
-                      <a:endParaRPr lang="ko-KR" sz="1000" dirty="0">
-                        <a:solidFill>
-                          <a:srgbClr val="222222"/>
-                        </a:solidFill>
-                        <a:effectLst/>
-                        <a:latin typeface="Aptos" panose="020B0004020202020204" pitchFamily="34" charset="0"/>
-                        <a:ea typeface="Aptos" panose="020B0004020202020204" pitchFamily="34" charset="0"/>
-                        <a:cs typeface="Aptos" panose="020B0004020202020204" pitchFamily="34" charset="0"/>
-                      </a:endParaRPr>
-                    </a:p>
-                  </a:txBody>
-                  <a:tcPr marL="34586" marR="34586" marT="10972" marB="10972"/>
-                </a:tc>
-                <a:tc>
-                  <a:txBody>
-                    <a:bodyPr/>
-                    <a:lstStyle/>
-                    <a:p>
-                      <a:pPr algn="ctr">
-                        <a:lnSpc>
-                          <a:spcPct val="107000"/>
-                        </a:lnSpc>
-                        <a:spcAft>
-                          <a:spcPts val="500"/>
-                        </a:spcAft>
-                        <a:buNone/>
-                      </a:pPr>
-                      <a:r>
-                        <a:rPr lang="ko-KR" sz="900">
-                          <a:effectLst/>
-                        </a:rPr>
-                        <a:t>2.938*** (0.482)</a:t>
-                      </a:r>
-                      <a:endParaRPr lang="ko-KR" sz="1000">
-                        <a:solidFill>
-                          <a:srgbClr val="222222"/>
-                        </a:solidFill>
-                        <a:effectLst/>
-                        <a:latin typeface="Aptos" panose="020B0004020202020204" pitchFamily="34" charset="0"/>
-                        <a:ea typeface="Aptos" panose="020B0004020202020204" pitchFamily="34" charset="0"/>
-                        <a:cs typeface="Aptos" panose="020B0004020202020204" pitchFamily="34" charset="0"/>
-                      </a:endParaRPr>
-                    </a:p>
-                  </a:txBody>
-                  <a:tcPr marL="34586" marR="34586" marT="10972" marB="10972"/>
-                </a:tc>
-                <a:extLst>
-                  <a:ext uri="{0D108BD9-81ED-4DB2-BD59-A6C34878D82A}">
-                    <a16:rowId xmlns:a16="http://schemas.microsoft.com/office/drawing/2014/main" val="540344374"/>
-                  </a:ext>
-                </a:extLst>
-              </a:tr>
-              <a:tr h="187452">
-                <a:tc>
-                  <a:txBody>
-                    <a:bodyPr/>
-                    <a:lstStyle/>
-                    <a:p>
-                      <a:pPr algn="just">
-                        <a:lnSpc>
-                          <a:spcPct val="107000"/>
-                        </a:lnSpc>
-                        <a:spcAft>
-                          <a:spcPts val="500"/>
-                        </a:spcAft>
-                        <a:buNone/>
-                      </a:pPr>
-                      <a:r>
-                        <a:rPr lang="ko-KR" sz="900">
-                          <a:effectLst/>
-                        </a:rPr>
-                        <a:t>Disability</a:t>
-                      </a:r>
-                      <a:endParaRPr lang="ko-KR" sz="1000">
-                        <a:solidFill>
-                          <a:srgbClr val="222222"/>
-                        </a:solidFill>
-                        <a:effectLst/>
-                        <a:latin typeface="Aptos" panose="020B0004020202020204" pitchFamily="34" charset="0"/>
-                        <a:ea typeface="Aptos" panose="020B0004020202020204" pitchFamily="34" charset="0"/>
-                        <a:cs typeface="Aptos" panose="020B0004020202020204" pitchFamily="34" charset="0"/>
-                      </a:endParaRPr>
-                    </a:p>
-                  </a:txBody>
-                  <a:tcPr marL="34586" marR="34586" marT="10972" marB="10972" anchor="ctr"/>
-                </a:tc>
-                <a:tc>
-                  <a:txBody>
-                    <a:bodyPr/>
-                    <a:lstStyle/>
-                    <a:p>
-                      <a:pPr algn="ctr">
-                        <a:lnSpc>
-                          <a:spcPct val="107000"/>
-                        </a:lnSpc>
-                        <a:spcAft>
-                          <a:spcPts val="500"/>
-                        </a:spcAft>
-                        <a:buNone/>
-                      </a:pPr>
-                      <a:r>
-                        <a:rPr lang="ko-KR" sz="900">
-                          <a:effectLst/>
-                        </a:rPr>
-                        <a:t>3.084*** (0.888)</a:t>
-                      </a:r>
-                      <a:endParaRPr lang="ko-KR" sz="1000">
-                        <a:solidFill>
-                          <a:srgbClr val="222222"/>
-                        </a:solidFill>
-                        <a:effectLst/>
-                        <a:latin typeface="Aptos" panose="020B0004020202020204" pitchFamily="34" charset="0"/>
-                        <a:ea typeface="Aptos" panose="020B0004020202020204" pitchFamily="34" charset="0"/>
-                        <a:cs typeface="Aptos" panose="020B0004020202020204" pitchFamily="34" charset="0"/>
-                      </a:endParaRPr>
-                    </a:p>
-                  </a:txBody>
-                  <a:tcPr marL="34586" marR="34586" marT="10972" marB="10972"/>
-                </a:tc>
-                <a:tc>
-                  <a:txBody>
-                    <a:bodyPr/>
-                    <a:lstStyle/>
-                    <a:p>
-                      <a:pPr algn="ctr">
-                        <a:lnSpc>
-                          <a:spcPct val="107000"/>
-                        </a:lnSpc>
-                        <a:spcAft>
-                          <a:spcPts val="500"/>
-                        </a:spcAft>
-                        <a:buNone/>
-                      </a:pPr>
-                      <a:r>
-                        <a:rPr lang="ko-KR" sz="900">
-                          <a:effectLst/>
-                        </a:rPr>
-                        <a:t>3.040*** (0.888)</a:t>
-                      </a:r>
-                      <a:endParaRPr lang="ko-KR" sz="1000">
-                        <a:solidFill>
-                          <a:srgbClr val="222222"/>
-                        </a:solidFill>
-                        <a:effectLst/>
-                        <a:latin typeface="Aptos" panose="020B0004020202020204" pitchFamily="34" charset="0"/>
-                        <a:ea typeface="Aptos" panose="020B0004020202020204" pitchFamily="34" charset="0"/>
-                        <a:cs typeface="Aptos" panose="020B0004020202020204" pitchFamily="34" charset="0"/>
-                      </a:endParaRPr>
-                    </a:p>
-                  </a:txBody>
-                  <a:tcPr marL="34586" marR="34586" marT="10972" marB="10972"/>
-                </a:tc>
-                <a:tc>
-                  <a:txBody>
-                    <a:bodyPr/>
-                    <a:lstStyle/>
-                    <a:p>
-                      <a:pPr algn="ctr">
-                        <a:lnSpc>
-                          <a:spcPct val="107000"/>
-                        </a:lnSpc>
-                        <a:spcAft>
-                          <a:spcPts val="500"/>
-                        </a:spcAft>
-                        <a:buNone/>
-                      </a:pPr>
-                      <a:r>
-                        <a:rPr lang="ko-KR" sz="900">
-                          <a:effectLst/>
-                        </a:rPr>
-                        <a:t>3.073*** (0.887)</a:t>
-                      </a:r>
-                      <a:endParaRPr lang="ko-KR" sz="1000">
-                        <a:solidFill>
-                          <a:srgbClr val="222222"/>
-                        </a:solidFill>
-                        <a:effectLst/>
-                        <a:latin typeface="Aptos" panose="020B0004020202020204" pitchFamily="34" charset="0"/>
-                        <a:ea typeface="Aptos" panose="020B0004020202020204" pitchFamily="34" charset="0"/>
-                        <a:cs typeface="Aptos" panose="020B0004020202020204" pitchFamily="34" charset="0"/>
-                      </a:endParaRPr>
-                    </a:p>
-                  </a:txBody>
-                  <a:tcPr marL="34586" marR="34586" marT="10972" marB="10972"/>
-                </a:tc>
-                <a:extLst>
-                  <a:ext uri="{0D108BD9-81ED-4DB2-BD59-A6C34878D82A}">
-                    <a16:rowId xmlns:a16="http://schemas.microsoft.com/office/drawing/2014/main" val="3426697628"/>
-                  </a:ext>
-                </a:extLst>
-              </a:tr>
-              <a:tr h="187452">
-                <a:tc>
-                  <a:txBody>
-                    <a:bodyPr/>
-                    <a:lstStyle/>
-                    <a:p>
-                      <a:pPr algn="just">
-                        <a:lnSpc>
-                          <a:spcPct val="107000"/>
-                        </a:lnSpc>
-                        <a:spcAft>
-                          <a:spcPts val="500"/>
-                        </a:spcAft>
-                        <a:buNone/>
-                      </a:pPr>
-                      <a:r>
-                        <a:rPr lang="ko-KR" sz="900">
-                          <a:effectLst/>
-                        </a:rPr>
-                        <a:t>Income (centered)</a:t>
-                      </a:r>
-                      <a:endParaRPr lang="ko-KR" sz="1000">
-                        <a:solidFill>
-                          <a:srgbClr val="222222"/>
-                        </a:solidFill>
-                        <a:effectLst/>
-                        <a:latin typeface="Aptos" panose="020B0004020202020204" pitchFamily="34" charset="0"/>
-                        <a:ea typeface="Aptos" panose="020B0004020202020204" pitchFamily="34" charset="0"/>
-                        <a:cs typeface="Aptos" panose="020B0004020202020204" pitchFamily="34" charset="0"/>
-                      </a:endParaRPr>
-                    </a:p>
-                  </a:txBody>
-                  <a:tcPr marL="34586" marR="34586" marT="10972" marB="10972" anchor="ctr"/>
-                </a:tc>
-                <a:tc>
-                  <a:txBody>
-                    <a:bodyPr/>
-                    <a:lstStyle/>
-                    <a:p>
-                      <a:pPr algn="ctr">
-                        <a:lnSpc>
-                          <a:spcPct val="107000"/>
-                        </a:lnSpc>
-                        <a:spcAft>
-                          <a:spcPts val="500"/>
-                        </a:spcAft>
-                        <a:buNone/>
-                      </a:pPr>
-                      <a:r>
-                        <a:rPr lang="ko-KR" sz="900" dirty="0">
-                          <a:effectLst/>
-                        </a:rPr>
-                        <a:t>0.003*** (0.001)</a:t>
-                      </a:r>
-                      <a:endParaRPr lang="ko-KR" sz="1000" dirty="0">
-                        <a:solidFill>
-                          <a:srgbClr val="222222"/>
-                        </a:solidFill>
-                        <a:effectLst/>
-                        <a:latin typeface="Aptos" panose="020B0004020202020204" pitchFamily="34" charset="0"/>
-                        <a:ea typeface="Aptos" panose="020B0004020202020204" pitchFamily="34" charset="0"/>
-                        <a:cs typeface="Aptos" panose="020B0004020202020204" pitchFamily="34" charset="0"/>
-                      </a:endParaRPr>
-                    </a:p>
-                  </a:txBody>
-                  <a:tcPr marL="34586" marR="34586" marT="10972" marB="10972"/>
-                </a:tc>
-                <a:tc>
-                  <a:txBody>
-                    <a:bodyPr/>
-                    <a:lstStyle/>
-                    <a:p>
-                      <a:pPr algn="ctr">
-                        <a:lnSpc>
-                          <a:spcPct val="107000"/>
-                        </a:lnSpc>
-                        <a:spcAft>
-                          <a:spcPts val="500"/>
-                        </a:spcAft>
-                        <a:buNone/>
-                      </a:pPr>
-                      <a:r>
-                        <a:rPr lang="ko-KR" sz="900">
-                          <a:effectLst/>
-                        </a:rPr>
-                        <a:t>0.003*** (0.001)</a:t>
-                      </a:r>
-                      <a:endParaRPr lang="ko-KR" sz="1000">
-                        <a:solidFill>
-                          <a:srgbClr val="222222"/>
-                        </a:solidFill>
-                        <a:effectLst/>
-                        <a:latin typeface="Aptos" panose="020B0004020202020204" pitchFamily="34" charset="0"/>
-                        <a:ea typeface="Aptos" panose="020B0004020202020204" pitchFamily="34" charset="0"/>
-                        <a:cs typeface="Aptos" panose="020B0004020202020204" pitchFamily="34" charset="0"/>
-                      </a:endParaRPr>
-                    </a:p>
-                  </a:txBody>
-                  <a:tcPr marL="34586" marR="34586" marT="10972" marB="10972"/>
-                </a:tc>
-                <a:tc>
-                  <a:txBody>
-                    <a:bodyPr/>
-                    <a:lstStyle/>
-                    <a:p>
-                      <a:pPr algn="ctr">
-                        <a:lnSpc>
-                          <a:spcPct val="107000"/>
-                        </a:lnSpc>
-                        <a:spcAft>
-                          <a:spcPts val="500"/>
-                        </a:spcAft>
-                        <a:buNone/>
-                      </a:pPr>
-                      <a:r>
-                        <a:rPr lang="ko-KR" sz="900">
-                          <a:effectLst/>
-                        </a:rPr>
-                        <a:t>0.003*** (0.001)</a:t>
-                      </a:r>
-                      <a:endParaRPr lang="ko-KR" sz="1000">
-                        <a:solidFill>
-                          <a:srgbClr val="222222"/>
-                        </a:solidFill>
-                        <a:effectLst/>
-                        <a:latin typeface="Aptos" panose="020B0004020202020204" pitchFamily="34" charset="0"/>
-                        <a:ea typeface="Aptos" panose="020B0004020202020204" pitchFamily="34" charset="0"/>
-                        <a:cs typeface="Aptos" panose="020B0004020202020204" pitchFamily="34" charset="0"/>
-                      </a:endParaRPr>
-                    </a:p>
-                  </a:txBody>
-                  <a:tcPr marL="34586" marR="34586" marT="10972" marB="10972"/>
-                </a:tc>
-                <a:extLst>
-                  <a:ext uri="{0D108BD9-81ED-4DB2-BD59-A6C34878D82A}">
-                    <a16:rowId xmlns:a16="http://schemas.microsoft.com/office/drawing/2014/main" val="2371346791"/>
-                  </a:ext>
-                </a:extLst>
-              </a:tr>
-              <a:tr h="187452">
-                <a:tc>
-                  <a:txBody>
-                    <a:bodyPr/>
-                    <a:lstStyle/>
-                    <a:p>
-                      <a:pPr algn="just">
-                        <a:lnSpc>
-                          <a:spcPct val="107000"/>
-                        </a:lnSpc>
-                        <a:spcAft>
-                          <a:spcPts val="500"/>
-                        </a:spcAft>
-                        <a:buNone/>
-                      </a:pPr>
-                      <a:r>
-                        <a:rPr lang="ko-KR" sz="900" dirty="0" err="1">
-                          <a:effectLst/>
-                        </a:rPr>
-                        <a:t>Job</a:t>
-                      </a:r>
-                      <a:r>
-                        <a:rPr lang="ko-KR" sz="900" dirty="0">
-                          <a:effectLst/>
-                        </a:rPr>
-                        <a:t>: </a:t>
-                      </a:r>
-                      <a:r>
-                        <a:rPr lang="ko-KR" sz="900" dirty="0" err="1">
-                          <a:effectLst/>
-                        </a:rPr>
-                        <a:t>professional</a:t>
-                      </a:r>
-                      <a:endParaRPr lang="ko-KR" sz="1000" dirty="0">
-                        <a:solidFill>
-                          <a:srgbClr val="222222"/>
-                        </a:solidFill>
-                        <a:effectLst/>
-                        <a:latin typeface="Aptos" panose="020B0004020202020204" pitchFamily="34" charset="0"/>
-                        <a:ea typeface="Aptos" panose="020B0004020202020204" pitchFamily="34" charset="0"/>
-                        <a:cs typeface="Aptos" panose="020B0004020202020204" pitchFamily="34" charset="0"/>
-                      </a:endParaRPr>
-                    </a:p>
-                  </a:txBody>
-                  <a:tcPr marL="34586" marR="34586" marT="10972" marB="10972" anchor="ctr"/>
-                </a:tc>
-                <a:tc>
-                  <a:txBody>
-                    <a:bodyPr/>
-                    <a:lstStyle/>
-                    <a:p>
-                      <a:pPr algn="ctr">
-                        <a:lnSpc>
-                          <a:spcPct val="107000"/>
-                        </a:lnSpc>
-                        <a:spcAft>
-                          <a:spcPts val="500"/>
-                        </a:spcAft>
-                        <a:buNone/>
-                      </a:pPr>
-                      <a:r>
-                        <a:rPr lang="ko-KR" sz="900">
-                          <a:effectLst/>
-                        </a:rPr>
-                        <a:t>2.329*** (0.451)</a:t>
-                      </a:r>
-                      <a:endParaRPr lang="ko-KR" sz="1000">
-                        <a:solidFill>
-                          <a:srgbClr val="222222"/>
-                        </a:solidFill>
-                        <a:effectLst/>
-                        <a:latin typeface="Aptos" panose="020B0004020202020204" pitchFamily="34" charset="0"/>
-                        <a:ea typeface="Aptos" panose="020B0004020202020204" pitchFamily="34" charset="0"/>
-                        <a:cs typeface="Aptos" panose="020B0004020202020204" pitchFamily="34" charset="0"/>
-                      </a:endParaRPr>
-                    </a:p>
-                  </a:txBody>
-                  <a:tcPr marL="34586" marR="34586" marT="10972" marB="10972"/>
-                </a:tc>
-                <a:tc>
-                  <a:txBody>
-                    <a:bodyPr/>
-                    <a:lstStyle/>
-                    <a:p>
-                      <a:pPr algn="ctr">
-                        <a:lnSpc>
-                          <a:spcPct val="107000"/>
-                        </a:lnSpc>
-                        <a:spcAft>
-                          <a:spcPts val="500"/>
-                        </a:spcAft>
-                        <a:buNone/>
-                      </a:pPr>
-                      <a:r>
-                        <a:rPr lang="ko-KR" sz="900" dirty="0">
-                          <a:effectLst/>
-                        </a:rPr>
-                        <a:t>2.331*** (0.451)</a:t>
-                      </a:r>
-                      <a:endParaRPr lang="ko-KR" sz="1000" dirty="0">
-                        <a:solidFill>
-                          <a:srgbClr val="222222"/>
-                        </a:solidFill>
-                        <a:effectLst/>
-                        <a:latin typeface="Aptos" panose="020B0004020202020204" pitchFamily="34" charset="0"/>
-                        <a:ea typeface="Aptos" panose="020B0004020202020204" pitchFamily="34" charset="0"/>
-                        <a:cs typeface="Aptos" panose="020B0004020202020204" pitchFamily="34" charset="0"/>
-                      </a:endParaRPr>
-                    </a:p>
-                  </a:txBody>
-                  <a:tcPr marL="34586" marR="34586" marT="10972" marB="10972"/>
-                </a:tc>
-                <a:tc>
-                  <a:txBody>
-                    <a:bodyPr/>
-                    <a:lstStyle/>
-                    <a:p>
-                      <a:pPr algn="ctr">
-                        <a:lnSpc>
-                          <a:spcPct val="107000"/>
-                        </a:lnSpc>
-                        <a:spcAft>
-                          <a:spcPts val="500"/>
-                        </a:spcAft>
-                        <a:buNone/>
-                      </a:pPr>
-                      <a:r>
-                        <a:rPr lang="ko-KR" sz="900">
-                          <a:effectLst/>
-                        </a:rPr>
-                        <a:t>2.270*** (0.450)</a:t>
-                      </a:r>
-                      <a:endParaRPr lang="ko-KR" sz="1000">
-                        <a:solidFill>
-                          <a:srgbClr val="222222"/>
-                        </a:solidFill>
-                        <a:effectLst/>
-                        <a:latin typeface="Aptos" panose="020B0004020202020204" pitchFamily="34" charset="0"/>
-                        <a:ea typeface="Aptos" panose="020B0004020202020204" pitchFamily="34" charset="0"/>
-                        <a:cs typeface="Aptos" panose="020B0004020202020204" pitchFamily="34" charset="0"/>
-                      </a:endParaRPr>
-                    </a:p>
-                  </a:txBody>
-                  <a:tcPr marL="34586" marR="34586" marT="10972" marB="10972"/>
-                </a:tc>
-                <a:extLst>
-                  <a:ext uri="{0D108BD9-81ED-4DB2-BD59-A6C34878D82A}">
-                    <a16:rowId xmlns:a16="http://schemas.microsoft.com/office/drawing/2014/main" val="1201992712"/>
-                  </a:ext>
-                </a:extLst>
-              </a:tr>
-              <a:tr h="187452">
-                <a:tc>
-                  <a:txBody>
-                    <a:bodyPr/>
-                    <a:lstStyle/>
-                    <a:p>
-                      <a:pPr algn="just">
-                        <a:lnSpc>
-                          <a:spcPct val="107000"/>
-                        </a:lnSpc>
-                        <a:spcAft>
-                          <a:spcPts val="500"/>
-                        </a:spcAft>
-                        <a:buNone/>
-                      </a:pPr>
-                      <a:r>
-                        <a:rPr lang="ko-KR" sz="900">
-                          <a:effectLst/>
-                        </a:rPr>
-                        <a:t>Job: blue-collar</a:t>
-                      </a:r>
-                      <a:endParaRPr lang="ko-KR" sz="1000">
-                        <a:solidFill>
-                          <a:srgbClr val="222222"/>
-                        </a:solidFill>
-                        <a:effectLst/>
-                        <a:latin typeface="Aptos" panose="020B0004020202020204" pitchFamily="34" charset="0"/>
-                        <a:ea typeface="Aptos" panose="020B0004020202020204" pitchFamily="34" charset="0"/>
-                        <a:cs typeface="Aptos" panose="020B0004020202020204" pitchFamily="34" charset="0"/>
-                      </a:endParaRPr>
-                    </a:p>
-                  </a:txBody>
-                  <a:tcPr marL="34586" marR="34586" marT="10972" marB="10972" anchor="ctr"/>
-                </a:tc>
-                <a:tc>
-                  <a:txBody>
-                    <a:bodyPr/>
-                    <a:lstStyle/>
-                    <a:p>
-                      <a:pPr algn="ctr">
-                        <a:lnSpc>
-                          <a:spcPct val="107000"/>
-                        </a:lnSpc>
-                        <a:spcAft>
-                          <a:spcPts val="500"/>
-                        </a:spcAft>
-                        <a:buNone/>
-                      </a:pPr>
-                      <a:r>
-                        <a:rPr lang="ko-KR" sz="900">
-                          <a:effectLst/>
-                        </a:rPr>
-                        <a:t>-0.373 (0.424)</a:t>
-                      </a:r>
-                      <a:endParaRPr lang="ko-KR" sz="1000">
-                        <a:solidFill>
-                          <a:srgbClr val="222222"/>
-                        </a:solidFill>
-                        <a:effectLst/>
-                        <a:latin typeface="Aptos" panose="020B0004020202020204" pitchFamily="34" charset="0"/>
-                        <a:ea typeface="Aptos" panose="020B0004020202020204" pitchFamily="34" charset="0"/>
-                        <a:cs typeface="Aptos" panose="020B0004020202020204" pitchFamily="34" charset="0"/>
-                      </a:endParaRPr>
-                    </a:p>
-                  </a:txBody>
-                  <a:tcPr marL="34586" marR="34586" marT="10972" marB="10972"/>
-                </a:tc>
-                <a:tc>
-                  <a:txBody>
-                    <a:bodyPr/>
-                    <a:lstStyle/>
-                    <a:p>
-                      <a:pPr algn="ctr">
-                        <a:lnSpc>
-                          <a:spcPct val="107000"/>
-                        </a:lnSpc>
-                        <a:spcAft>
-                          <a:spcPts val="500"/>
-                        </a:spcAft>
-                        <a:buNone/>
-                      </a:pPr>
-                      <a:r>
-                        <a:rPr lang="ko-KR" sz="900">
-                          <a:effectLst/>
-                        </a:rPr>
-                        <a:t>-0.378 (0.424)</a:t>
-                      </a:r>
-                      <a:endParaRPr lang="ko-KR" sz="1000">
-                        <a:solidFill>
-                          <a:srgbClr val="222222"/>
-                        </a:solidFill>
-                        <a:effectLst/>
-                        <a:latin typeface="Aptos" panose="020B0004020202020204" pitchFamily="34" charset="0"/>
-                        <a:ea typeface="Aptos" panose="020B0004020202020204" pitchFamily="34" charset="0"/>
-                        <a:cs typeface="Aptos" panose="020B0004020202020204" pitchFamily="34" charset="0"/>
-                      </a:endParaRPr>
-                    </a:p>
-                  </a:txBody>
-                  <a:tcPr marL="34586" marR="34586" marT="10972" marB="10972"/>
-                </a:tc>
-                <a:tc>
-                  <a:txBody>
-                    <a:bodyPr/>
-                    <a:lstStyle/>
-                    <a:p>
-                      <a:pPr algn="ctr">
-                        <a:lnSpc>
-                          <a:spcPct val="107000"/>
-                        </a:lnSpc>
-                        <a:spcAft>
-                          <a:spcPts val="500"/>
-                        </a:spcAft>
-                        <a:buNone/>
-                      </a:pPr>
-                      <a:r>
-                        <a:rPr lang="ko-KR" sz="900">
-                          <a:effectLst/>
-                        </a:rPr>
-                        <a:t>-0.497 (0.424)</a:t>
-                      </a:r>
-                      <a:endParaRPr lang="ko-KR" sz="1000">
-                        <a:solidFill>
-                          <a:srgbClr val="222222"/>
-                        </a:solidFill>
-                        <a:effectLst/>
-                        <a:latin typeface="Aptos" panose="020B0004020202020204" pitchFamily="34" charset="0"/>
-                        <a:ea typeface="Aptos" panose="020B0004020202020204" pitchFamily="34" charset="0"/>
-                        <a:cs typeface="Aptos" panose="020B0004020202020204" pitchFamily="34" charset="0"/>
-                      </a:endParaRPr>
-                    </a:p>
-                  </a:txBody>
-                  <a:tcPr marL="34586" marR="34586" marT="10972" marB="10972"/>
-                </a:tc>
-                <a:extLst>
-                  <a:ext uri="{0D108BD9-81ED-4DB2-BD59-A6C34878D82A}">
-                    <a16:rowId xmlns:a16="http://schemas.microsoft.com/office/drawing/2014/main" val="3996773199"/>
-                  </a:ext>
-                </a:extLst>
-              </a:tr>
-              <a:tr h="187452">
-                <a:tc>
-                  <a:txBody>
-                    <a:bodyPr/>
-                    <a:lstStyle/>
-                    <a:p>
-                      <a:pPr algn="just">
-                        <a:lnSpc>
-                          <a:spcPct val="107000"/>
-                        </a:lnSpc>
-                        <a:spcAft>
-                          <a:spcPts val="500"/>
-                        </a:spcAft>
-                        <a:buNone/>
-                      </a:pPr>
-                      <a:r>
-                        <a:rPr lang="ko-KR" sz="900">
-                          <a:effectLst/>
-                        </a:rPr>
-                        <a:t>Job: other</a:t>
-                      </a:r>
-                      <a:endParaRPr lang="ko-KR" sz="1000">
-                        <a:solidFill>
-                          <a:srgbClr val="222222"/>
-                        </a:solidFill>
-                        <a:effectLst/>
-                        <a:latin typeface="Aptos" panose="020B0004020202020204" pitchFamily="34" charset="0"/>
-                        <a:ea typeface="Aptos" panose="020B0004020202020204" pitchFamily="34" charset="0"/>
-                        <a:cs typeface="Aptos" panose="020B0004020202020204" pitchFamily="34" charset="0"/>
-                      </a:endParaRPr>
-                    </a:p>
-                  </a:txBody>
-                  <a:tcPr marL="34586" marR="34586" marT="10972" marB="10972" anchor="ctr"/>
-                </a:tc>
-                <a:tc>
-                  <a:txBody>
-                    <a:bodyPr/>
-                    <a:lstStyle/>
-                    <a:p>
-                      <a:pPr algn="ctr">
-                        <a:lnSpc>
-                          <a:spcPct val="107000"/>
-                        </a:lnSpc>
-                        <a:spcAft>
-                          <a:spcPts val="500"/>
-                        </a:spcAft>
-                        <a:buNone/>
-                      </a:pPr>
-                      <a:r>
-                        <a:rPr lang="ko-KR" sz="900">
-                          <a:effectLst/>
-                        </a:rPr>
-                        <a:t>-1.233** (0.456)</a:t>
-                      </a:r>
-                      <a:endParaRPr lang="ko-KR" sz="1000">
-                        <a:solidFill>
-                          <a:srgbClr val="222222"/>
-                        </a:solidFill>
-                        <a:effectLst/>
-                        <a:latin typeface="Aptos" panose="020B0004020202020204" pitchFamily="34" charset="0"/>
-                        <a:ea typeface="Aptos" panose="020B0004020202020204" pitchFamily="34" charset="0"/>
-                        <a:cs typeface="Aptos" panose="020B0004020202020204" pitchFamily="34" charset="0"/>
-                      </a:endParaRPr>
-                    </a:p>
-                  </a:txBody>
-                  <a:tcPr marL="34586" marR="34586" marT="10972" marB="10972"/>
-                </a:tc>
-                <a:tc>
-                  <a:txBody>
-                    <a:bodyPr/>
-                    <a:lstStyle/>
-                    <a:p>
-                      <a:pPr algn="ctr">
-                        <a:lnSpc>
-                          <a:spcPct val="107000"/>
-                        </a:lnSpc>
-                        <a:spcAft>
-                          <a:spcPts val="500"/>
-                        </a:spcAft>
-                        <a:buNone/>
-                      </a:pPr>
-                      <a:r>
-                        <a:rPr lang="ko-KR" sz="900" dirty="0">
-                          <a:effectLst/>
-                        </a:rPr>
-                        <a:t>-1.213** (0.456)</a:t>
-                      </a:r>
-                      <a:endParaRPr lang="ko-KR" sz="1000" dirty="0">
-                        <a:solidFill>
-                          <a:srgbClr val="222222"/>
-                        </a:solidFill>
-                        <a:effectLst/>
-                        <a:latin typeface="Aptos" panose="020B0004020202020204" pitchFamily="34" charset="0"/>
-                        <a:ea typeface="Aptos" panose="020B0004020202020204" pitchFamily="34" charset="0"/>
-                        <a:cs typeface="Aptos" panose="020B0004020202020204" pitchFamily="34" charset="0"/>
-                      </a:endParaRPr>
-                    </a:p>
-                  </a:txBody>
-                  <a:tcPr marL="34586" marR="34586" marT="10972" marB="10972"/>
-                </a:tc>
-                <a:tc>
-                  <a:txBody>
-                    <a:bodyPr/>
-                    <a:lstStyle/>
-                    <a:p>
-                      <a:pPr algn="ctr">
-                        <a:lnSpc>
-                          <a:spcPct val="107000"/>
-                        </a:lnSpc>
-                        <a:spcAft>
-                          <a:spcPts val="500"/>
-                        </a:spcAft>
-                        <a:buNone/>
-                      </a:pPr>
-                      <a:r>
-                        <a:rPr lang="ko-KR" sz="900">
-                          <a:effectLst/>
-                        </a:rPr>
-                        <a:t>-1.204** (0.455)</a:t>
-                      </a:r>
-                      <a:endParaRPr lang="ko-KR" sz="1000">
-                        <a:solidFill>
-                          <a:srgbClr val="222222"/>
-                        </a:solidFill>
-                        <a:effectLst/>
-                        <a:latin typeface="Aptos" panose="020B0004020202020204" pitchFamily="34" charset="0"/>
-                        <a:ea typeface="Aptos" panose="020B0004020202020204" pitchFamily="34" charset="0"/>
-                        <a:cs typeface="Aptos" panose="020B0004020202020204" pitchFamily="34" charset="0"/>
-                      </a:endParaRPr>
-                    </a:p>
-                  </a:txBody>
-                  <a:tcPr marL="34586" marR="34586" marT="10972" marB="10972"/>
-                </a:tc>
-                <a:extLst>
-                  <a:ext uri="{0D108BD9-81ED-4DB2-BD59-A6C34878D82A}">
-                    <a16:rowId xmlns:a16="http://schemas.microsoft.com/office/drawing/2014/main" val="612919974"/>
-                  </a:ext>
-                </a:extLst>
-              </a:tr>
-              <a:tr h="187452">
-                <a:tc>
-                  <a:txBody>
-                    <a:bodyPr/>
-                    <a:lstStyle/>
-                    <a:p>
-                      <a:pPr algn="just">
-                        <a:lnSpc>
-                          <a:spcPct val="107000"/>
-                        </a:lnSpc>
-                        <a:spcAft>
-                          <a:spcPts val="500"/>
-                        </a:spcAft>
-                        <a:buNone/>
-                      </a:pPr>
-                      <a:r>
-                        <a:rPr lang="ko-KR" sz="900">
-                          <a:effectLst/>
-                        </a:rPr>
-                        <a:t>Single-person household</a:t>
-                      </a:r>
-                      <a:endParaRPr lang="ko-KR" sz="1000">
-                        <a:solidFill>
-                          <a:srgbClr val="222222"/>
-                        </a:solidFill>
-                        <a:effectLst/>
-                        <a:latin typeface="Aptos" panose="020B0004020202020204" pitchFamily="34" charset="0"/>
-                        <a:ea typeface="Aptos" panose="020B0004020202020204" pitchFamily="34" charset="0"/>
-                        <a:cs typeface="Aptos" panose="020B0004020202020204" pitchFamily="34" charset="0"/>
-                      </a:endParaRPr>
-                    </a:p>
-                  </a:txBody>
-                  <a:tcPr marL="34586" marR="34586" marT="10972" marB="10972" anchor="ctr"/>
-                </a:tc>
-                <a:tc>
-                  <a:txBody>
-                    <a:bodyPr/>
-                    <a:lstStyle/>
-                    <a:p>
-                      <a:pPr algn="ctr">
-                        <a:lnSpc>
-                          <a:spcPct val="107000"/>
-                        </a:lnSpc>
-                        <a:spcAft>
-                          <a:spcPts val="500"/>
-                        </a:spcAft>
-                        <a:buNone/>
-                      </a:pPr>
-                      <a:r>
-                        <a:rPr lang="ko-KR" sz="900">
-                          <a:effectLst/>
-                        </a:rPr>
-                        <a:t>-1.775*** (0.338)</a:t>
-                      </a:r>
-                      <a:endParaRPr lang="ko-KR" sz="1000">
-                        <a:solidFill>
-                          <a:srgbClr val="222222"/>
-                        </a:solidFill>
-                        <a:effectLst/>
-                        <a:latin typeface="Aptos" panose="020B0004020202020204" pitchFamily="34" charset="0"/>
-                        <a:ea typeface="Aptos" panose="020B0004020202020204" pitchFamily="34" charset="0"/>
-                        <a:cs typeface="Aptos" panose="020B0004020202020204" pitchFamily="34" charset="0"/>
-                      </a:endParaRPr>
-                    </a:p>
-                  </a:txBody>
-                  <a:tcPr marL="34586" marR="34586" marT="10972" marB="10972"/>
-                </a:tc>
-                <a:tc>
-                  <a:txBody>
-                    <a:bodyPr/>
-                    <a:lstStyle/>
-                    <a:p>
-                      <a:pPr algn="ctr">
-                        <a:lnSpc>
-                          <a:spcPct val="107000"/>
-                        </a:lnSpc>
-                        <a:spcAft>
-                          <a:spcPts val="500"/>
-                        </a:spcAft>
-                        <a:buNone/>
-                      </a:pPr>
-                      <a:r>
-                        <a:rPr lang="ko-KR" sz="900">
-                          <a:effectLst/>
-                        </a:rPr>
-                        <a:t>-1.789*** (0.338)</a:t>
-                      </a:r>
-                      <a:endParaRPr lang="ko-KR" sz="1000">
-                        <a:solidFill>
-                          <a:srgbClr val="222222"/>
-                        </a:solidFill>
-                        <a:effectLst/>
-                        <a:latin typeface="Aptos" panose="020B0004020202020204" pitchFamily="34" charset="0"/>
-                        <a:ea typeface="Aptos" panose="020B0004020202020204" pitchFamily="34" charset="0"/>
-                        <a:cs typeface="Aptos" panose="020B0004020202020204" pitchFamily="34" charset="0"/>
-                      </a:endParaRPr>
-                    </a:p>
-                  </a:txBody>
-                  <a:tcPr marL="34586" marR="34586" marT="10972" marB="10972"/>
-                </a:tc>
-                <a:tc>
-                  <a:txBody>
-                    <a:bodyPr/>
-                    <a:lstStyle/>
-                    <a:p>
-                      <a:pPr algn="ctr">
-                        <a:lnSpc>
-                          <a:spcPct val="107000"/>
-                        </a:lnSpc>
-                        <a:spcAft>
-                          <a:spcPts val="500"/>
-                        </a:spcAft>
-                        <a:buNone/>
-                      </a:pPr>
-                      <a:r>
-                        <a:rPr lang="ko-KR" sz="900">
-                          <a:effectLst/>
-                        </a:rPr>
-                        <a:t>-1.714*** (0.338)</a:t>
-                      </a:r>
-                      <a:endParaRPr lang="ko-KR" sz="1000">
-                        <a:solidFill>
-                          <a:srgbClr val="222222"/>
-                        </a:solidFill>
-                        <a:effectLst/>
-                        <a:latin typeface="Aptos" panose="020B0004020202020204" pitchFamily="34" charset="0"/>
-                        <a:ea typeface="Aptos" panose="020B0004020202020204" pitchFamily="34" charset="0"/>
-                        <a:cs typeface="Aptos" panose="020B0004020202020204" pitchFamily="34" charset="0"/>
-                      </a:endParaRPr>
-                    </a:p>
-                  </a:txBody>
-                  <a:tcPr marL="34586" marR="34586" marT="10972" marB="10972"/>
-                </a:tc>
-                <a:extLst>
-                  <a:ext uri="{0D108BD9-81ED-4DB2-BD59-A6C34878D82A}">
-                    <a16:rowId xmlns:a16="http://schemas.microsoft.com/office/drawing/2014/main" val="4144213980"/>
-                  </a:ext>
-                </a:extLst>
-              </a:tr>
-              <a:tr h="187452">
-                <a:tc>
-                  <a:txBody>
-                    <a:bodyPr/>
-                    <a:lstStyle/>
-                    <a:p>
-                      <a:pPr algn="just">
-                        <a:lnSpc>
-                          <a:spcPct val="107000"/>
-                        </a:lnSpc>
-                        <a:spcAft>
-                          <a:spcPts val="500"/>
-                        </a:spcAft>
-                        <a:buNone/>
-                      </a:pPr>
-                      <a:r>
-                        <a:rPr lang="ko-KR" sz="900">
-                          <a:effectLst/>
-                        </a:rPr>
-                        <a:t>Detached house</a:t>
-                      </a:r>
-                      <a:endParaRPr lang="ko-KR" sz="1000">
-                        <a:solidFill>
-                          <a:srgbClr val="222222"/>
-                        </a:solidFill>
-                        <a:effectLst/>
-                        <a:latin typeface="Aptos" panose="020B0004020202020204" pitchFamily="34" charset="0"/>
-                        <a:ea typeface="Aptos" panose="020B0004020202020204" pitchFamily="34" charset="0"/>
-                        <a:cs typeface="Aptos" panose="020B0004020202020204" pitchFamily="34" charset="0"/>
-                      </a:endParaRPr>
-                    </a:p>
-                  </a:txBody>
-                  <a:tcPr marL="34586" marR="34586" marT="10972" marB="10972" anchor="ctr"/>
-                </a:tc>
-                <a:tc>
-                  <a:txBody>
-                    <a:bodyPr/>
-                    <a:lstStyle/>
-                    <a:p>
-                      <a:pPr algn="ctr">
-                        <a:lnSpc>
-                          <a:spcPct val="107000"/>
-                        </a:lnSpc>
-                        <a:spcAft>
-                          <a:spcPts val="500"/>
-                        </a:spcAft>
-                        <a:buNone/>
-                      </a:pPr>
-                      <a:r>
-                        <a:rPr lang="ko-KR" sz="900">
-                          <a:effectLst/>
-                        </a:rPr>
-                        <a:t>-2.478*** (0.377)</a:t>
-                      </a:r>
-                      <a:endParaRPr lang="ko-KR" sz="1000">
-                        <a:solidFill>
-                          <a:srgbClr val="222222"/>
-                        </a:solidFill>
-                        <a:effectLst/>
-                        <a:latin typeface="Aptos" panose="020B0004020202020204" pitchFamily="34" charset="0"/>
-                        <a:ea typeface="Aptos" panose="020B0004020202020204" pitchFamily="34" charset="0"/>
-                        <a:cs typeface="Aptos" panose="020B0004020202020204" pitchFamily="34" charset="0"/>
-                      </a:endParaRPr>
-                    </a:p>
-                  </a:txBody>
-                  <a:tcPr marL="34586" marR="34586" marT="10972" marB="10972"/>
-                </a:tc>
-                <a:tc>
-                  <a:txBody>
-                    <a:bodyPr/>
-                    <a:lstStyle/>
-                    <a:p>
-                      <a:pPr algn="ctr">
-                        <a:lnSpc>
-                          <a:spcPct val="107000"/>
-                        </a:lnSpc>
-                        <a:spcAft>
-                          <a:spcPts val="500"/>
-                        </a:spcAft>
-                        <a:buNone/>
-                      </a:pPr>
-                      <a:r>
-                        <a:rPr lang="ko-KR" sz="900" dirty="0">
-                          <a:effectLst/>
-                        </a:rPr>
-                        <a:t>-2.486*** (0.379)</a:t>
-                      </a:r>
-                      <a:endParaRPr lang="ko-KR" sz="1000" dirty="0">
-                        <a:solidFill>
-                          <a:srgbClr val="222222"/>
-                        </a:solidFill>
-                        <a:effectLst/>
-                        <a:latin typeface="Aptos" panose="020B0004020202020204" pitchFamily="34" charset="0"/>
-                        <a:ea typeface="Aptos" panose="020B0004020202020204" pitchFamily="34" charset="0"/>
-                        <a:cs typeface="Aptos" panose="020B0004020202020204" pitchFamily="34" charset="0"/>
-                      </a:endParaRPr>
-                    </a:p>
-                  </a:txBody>
-                  <a:tcPr marL="34586" marR="34586" marT="10972" marB="10972"/>
-                </a:tc>
-                <a:tc>
-                  <a:txBody>
-                    <a:bodyPr/>
-                    <a:lstStyle/>
-                    <a:p>
-                      <a:pPr algn="ctr">
-                        <a:lnSpc>
-                          <a:spcPct val="107000"/>
-                        </a:lnSpc>
-                        <a:spcAft>
-                          <a:spcPts val="500"/>
-                        </a:spcAft>
-                        <a:buNone/>
-                      </a:pPr>
-                      <a:r>
-                        <a:rPr lang="ko-KR" sz="900">
-                          <a:effectLst/>
-                        </a:rPr>
-                        <a:t>-2.449*** (0.379)</a:t>
-                      </a:r>
-                      <a:endParaRPr lang="ko-KR" sz="1000">
-                        <a:solidFill>
-                          <a:srgbClr val="222222"/>
-                        </a:solidFill>
-                        <a:effectLst/>
-                        <a:latin typeface="Aptos" panose="020B0004020202020204" pitchFamily="34" charset="0"/>
-                        <a:ea typeface="Aptos" panose="020B0004020202020204" pitchFamily="34" charset="0"/>
-                        <a:cs typeface="Aptos" panose="020B0004020202020204" pitchFamily="34" charset="0"/>
-                      </a:endParaRPr>
-                    </a:p>
-                  </a:txBody>
-                  <a:tcPr marL="34586" marR="34586" marT="10972" marB="10972"/>
-                </a:tc>
-                <a:extLst>
-                  <a:ext uri="{0D108BD9-81ED-4DB2-BD59-A6C34878D82A}">
-                    <a16:rowId xmlns:a16="http://schemas.microsoft.com/office/drawing/2014/main" val="3476612564"/>
-                  </a:ext>
-                </a:extLst>
-              </a:tr>
-              <a:tr h="187452">
-                <a:tc>
-                  <a:txBody>
-                    <a:bodyPr/>
-                    <a:lstStyle/>
-                    <a:p>
-                      <a:pPr algn="just">
-                        <a:lnSpc>
-                          <a:spcPct val="107000"/>
-                        </a:lnSpc>
-                        <a:spcAft>
-                          <a:spcPts val="500"/>
-                        </a:spcAft>
-                        <a:buNone/>
-                      </a:pPr>
-                      <a:r>
-                        <a:rPr lang="ko-KR" sz="900">
-                          <a:effectLst/>
-                        </a:rPr>
-                        <a:t>Multi-family housing</a:t>
-                      </a:r>
-                      <a:endParaRPr lang="ko-KR" sz="1000">
-                        <a:solidFill>
-                          <a:srgbClr val="222222"/>
-                        </a:solidFill>
-                        <a:effectLst/>
-                        <a:latin typeface="Aptos" panose="020B0004020202020204" pitchFamily="34" charset="0"/>
-                        <a:ea typeface="Aptos" panose="020B0004020202020204" pitchFamily="34" charset="0"/>
-                        <a:cs typeface="Aptos" panose="020B0004020202020204" pitchFamily="34" charset="0"/>
-                      </a:endParaRPr>
-                    </a:p>
-                  </a:txBody>
-                  <a:tcPr marL="34586" marR="34586" marT="10972" marB="10972" anchor="ctr"/>
-                </a:tc>
-                <a:tc>
-                  <a:txBody>
-                    <a:bodyPr/>
-                    <a:lstStyle/>
-                    <a:p>
-                      <a:pPr algn="ctr">
-                        <a:lnSpc>
-                          <a:spcPct val="107000"/>
-                        </a:lnSpc>
-                        <a:spcAft>
-                          <a:spcPts val="500"/>
-                        </a:spcAft>
-                        <a:buNone/>
-                      </a:pPr>
-                      <a:r>
-                        <a:rPr lang="ko-KR" sz="900">
-                          <a:effectLst/>
-                        </a:rPr>
-                        <a:t>-1.798*** (0.408)</a:t>
-                      </a:r>
-                      <a:endParaRPr lang="ko-KR" sz="1000">
-                        <a:solidFill>
-                          <a:srgbClr val="222222"/>
-                        </a:solidFill>
-                        <a:effectLst/>
-                        <a:latin typeface="Aptos" panose="020B0004020202020204" pitchFamily="34" charset="0"/>
-                        <a:ea typeface="Aptos" panose="020B0004020202020204" pitchFamily="34" charset="0"/>
-                        <a:cs typeface="Aptos" panose="020B0004020202020204" pitchFamily="34" charset="0"/>
-                      </a:endParaRPr>
-                    </a:p>
-                  </a:txBody>
-                  <a:tcPr marL="34586" marR="34586" marT="10972" marB="10972"/>
-                </a:tc>
-                <a:tc>
-                  <a:txBody>
-                    <a:bodyPr/>
-                    <a:lstStyle/>
-                    <a:p>
-                      <a:pPr algn="ctr">
-                        <a:lnSpc>
-                          <a:spcPct val="107000"/>
-                        </a:lnSpc>
-                        <a:spcAft>
-                          <a:spcPts val="500"/>
-                        </a:spcAft>
-                        <a:buNone/>
-                      </a:pPr>
-                      <a:r>
-                        <a:rPr lang="ko-KR" sz="900">
-                          <a:effectLst/>
-                        </a:rPr>
-                        <a:t>-1.797*** (0.409)</a:t>
-                      </a:r>
-                      <a:endParaRPr lang="ko-KR" sz="1000">
-                        <a:solidFill>
-                          <a:srgbClr val="222222"/>
-                        </a:solidFill>
-                        <a:effectLst/>
-                        <a:latin typeface="Aptos" panose="020B0004020202020204" pitchFamily="34" charset="0"/>
-                        <a:ea typeface="Aptos" panose="020B0004020202020204" pitchFamily="34" charset="0"/>
-                        <a:cs typeface="Aptos" panose="020B0004020202020204" pitchFamily="34" charset="0"/>
-                      </a:endParaRPr>
-                    </a:p>
-                  </a:txBody>
-                  <a:tcPr marL="34586" marR="34586" marT="10972" marB="10972"/>
-                </a:tc>
-                <a:tc>
-                  <a:txBody>
-                    <a:bodyPr/>
-                    <a:lstStyle/>
-                    <a:p>
-                      <a:pPr algn="ctr">
-                        <a:lnSpc>
-                          <a:spcPct val="107000"/>
-                        </a:lnSpc>
-                        <a:spcAft>
-                          <a:spcPts val="500"/>
-                        </a:spcAft>
-                        <a:buNone/>
-                      </a:pPr>
-                      <a:r>
-                        <a:rPr lang="ko-KR" sz="900">
-                          <a:effectLst/>
-                        </a:rPr>
-                        <a:t>-1.767*** (0.408)</a:t>
-                      </a:r>
-                      <a:endParaRPr lang="ko-KR" sz="1000">
-                        <a:solidFill>
-                          <a:srgbClr val="222222"/>
-                        </a:solidFill>
-                        <a:effectLst/>
-                        <a:latin typeface="Aptos" panose="020B0004020202020204" pitchFamily="34" charset="0"/>
-                        <a:ea typeface="Aptos" panose="020B0004020202020204" pitchFamily="34" charset="0"/>
-                        <a:cs typeface="Aptos" panose="020B0004020202020204" pitchFamily="34" charset="0"/>
-                      </a:endParaRPr>
-                    </a:p>
-                  </a:txBody>
-                  <a:tcPr marL="34586" marR="34586" marT="10972" marB="10972"/>
-                </a:tc>
-                <a:extLst>
-                  <a:ext uri="{0D108BD9-81ED-4DB2-BD59-A6C34878D82A}">
-                    <a16:rowId xmlns:a16="http://schemas.microsoft.com/office/drawing/2014/main" val="2469003859"/>
-                  </a:ext>
-                </a:extLst>
-              </a:tr>
-              <a:tr h="187452">
-                <a:tc>
-                  <a:txBody>
-                    <a:bodyPr/>
-                    <a:lstStyle/>
-                    <a:p>
-                      <a:pPr algn="just">
-                        <a:lnSpc>
-                          <a:spcPct val="107000"/>
-                        </a:lnSpc>
-                        <a:spcAft>
-                          <a:spcPts val="500"/>
-                        </a:spcAft>
-                        <a:buNone/>
-                      </a:pPr>
-                      <a:r>
-                        <a:rPr lang="ko-KR" sz="900">
-                          <a:effectLst/>
-                        </a:rPr>
-                        <a:t>Housing: other</a:t>
-                      </a:r>
-                      <a:endParaRPr lang="ko-KR" sz="1000">
-                        <a:solidFill>
-                          <a:srgbClr val="222222"/>
-                        </a:solidFill>
-                        <a:effectLst/>
-                        <a:latin typeface="Aptos" panose="020B0004020202020204" pitchFamily="34" charset="0"/>
-                        <a:ea typeface="Aptos" panose="020B0004020202020204" pitchFamily="34" charset="0"/>
-                        <a:cs typeface="Aptos" panose="020B0004020202020204" pitchFamily="34" charset="0"/>
-                      </a:endParaRPr>
-                    </a:p>
-                  </a:txBody>
-                  <a:tcPr marL="34586" marR="34586" marT="10972" marB="10972" anchor="ctr"/>
-                </a:tc>
-                <a:tc>
-                  <a:txBody>
-                    <a:bodyPr/>
-                    <a:lstStyle/>
-                    <a:p>
-                      <a:pPr algn="ctr">
-                        <a:lnSpc>
-                          <a:spcPct val="107000"/>
-                        </a:lnSpc>
-                        <a:spcAft>
-                          <a:spcPts val="500"/>
-                        </a:spcAft>
-                        <a:buNone/>
-                      </a:pPr>
-                      <a:r>
-                        <a:rPr lang="ko-KR" sz="900">
-                          <a:effectLst/>
-                        </a:rPr>
-                        <a:t>-0.572 (0.455)</a:t>
-                      </a:r>
-                      <a:endParaRPr lang="ko-KR" sz="1000">
-                        <a:solidFill>
-                          <a:srgbClr val="222222"/>
-                        </a:solidFill>
-                        <a:effectLst/>
-                        <a:latin typeface="Aptos" panose="020B0004020202020204" pitchFamily="34" charset="0"/>
-                        <a:ea typeface="Aptos" panose="020B0004020202020204" pitchFamily="34" charset="0"/>
-                        <a:cs typeface="Aptos" panose="020B0004020202020204" pitchFamily="34" charset="0"/>
-                      </a:endParaRPr>
-                    </a:p>
-                  </a:txBody>
-                  <a:tcPr marL="34586" marR="34586" marT="10972" marB="10972"/>
-                </a:tc>
-                <a:tc>
-                  <a:txBody>
-                    <a:bodyPr/>
-                    <a:lstStyle/>
-                    <a:p>
-                      <a:pPr algn="ctr">
-                        <a:lnSpc>
-                          <a:spcPct val="107000"/>
-                        </a:lnSpc>
-                        <a:spcAft>
-                          <a:spcPts val="500"/>
-                        </a:spcAft>
-                        <a:buNone/>
-                      </a:pPr>
-                      <a:r>
-                        <a:rPr lang="ko-KR" sz="900">
-                          <a:effectLst/>
-                        </a:rPr>
-                        <a:t>-0.550 (0.456)</a:t>
-                      </a:r>
-                      <a:endParaRPr lang="ko-KR" sz="1000">
-                        <a:solidFill>
-                          <a:srgbClr val="222222"/>
-                        </a:solidFill>
-                        <a:effectLst/>
-                        <a:latin typeface="Aptos" panose="020B0004020202020204" pitchFamily="34" charset="0"/>
-                        <a:ea typeface="Aptos" panose="020B0004020202020204" pitchFamily="34" charset="0"/>
-                        <a:cs typeface="Aptos" panose="020B0004020202020204" pitchFamily="34" charset="0"/>
-                      </a:endParaRPr>
-                    </a:p>
-                  </a:txBody>
-                  <a:tcPr marL="34586" marR="34586" marT="10972" marB="10972"/>
-                </a:tc>
-                <a:tc>
-                  <a:txBody>
-                    <a:bodyPr/>
-                    <a:lstStyle/>
-                    <a:p>
-                      <a:pPr algn="ctr">
-                        <a:lnSpc>
-                          <a:spcPct val="107000"/>
-                        </a:lnSpc>
-                        <a:spcAft>
-                          <a:spcPts val="500"/>
-                        </a:spcAft>
-                        <a:buNone/>
-                      </a:pPr>
-                      <a:r>
-                        <a:rPr lang="ko-KR" sz="900">
-                          <a:effectLst/>
-                        </a:rPr>
-                        <a:t>-0.507 (0.456)</a:t>
-                      </a:r>
-                      <a:endParaRPr lang="ko-KR" sz="1000">
-                        <a:solidFill>
-                          <a:srgbClr val="222222"/>
-                        </a:solidFill>
-                        <a:effectLst/>
-                        <a:latin typeface="Aptos" panose="020B0004020202020204" pitchFamily="34" charset="0"/>
-                        <a:ea typeface="Aptos" panose="020B0004020202020204" pitchFamily="34" charset="0"/>
-                        <a:cs typeface="Aptos" panose="020B0004020202020204" pitchFamily="34" charset="0"/>
-                      </a:endParaRPr>
-                    </a:p>
-                  </a:txBody>
-                  <a:tcPr marL="34586" marR="34586" marT="10972" marB="10972"/>
-                </a:tc>
-                <a:extLst>
-                  <a:ext uri="{0D108BD9-81ED-4DB2-BD59-A6C34878D82A}">
-                    <a16:rowId xmlns:a16="http://schemas.microsoft.com/office/drawing/2014/main" val="1406503180"/>
-                  </a:ext>
-                </a:extLst>
-              </a:tr>
-              <a:tr h="187452">
-                <a:tc>
-                  <a:txBody>
-                    <a:bodyPr/>
-                    <a:lstStyle/>
-                    <a:p>
-                      <a:pPr algn="just">
-                        <a:lnSpc>
-                          <a:spcPct val="107000"/>
-                        </a:lnSpc>
-                        <a:spcAft>
-                          <a:spcPts val="500"/>
-                        </a:spcAft>
-                        <a:buNone/>
-                      </a:pPr>
-                      <a:r>
-                        <a:rPr lang="ko-KR" sz="900">
-                          <a:effectLst/>
-                        </a:rPr>
-                        <a:t>Year (2024)</a:t>
-                      </a:r>
-                      <a:endParaRPr lang="ko-KR" sz="1000">
-                        <a:solidFill>
-                          <a:srgbClr val="222222"/>
-                        </a:solidFill>
-                        <a:effectLst/>
-                        <a:latin typeface="Aptos" panose="020B0004020202020204" pitchFamily="34" charset="0"/>
-                        <a:ea typeface="Aptos" panose="020B0004020202020204" pitchFamily="34" charset="0"/>
-                        <a:cs typeface="Aptos" panose="020B0004020202020204" pitchFamily="34" charset="0"/>
-                      </a:endParaRPr>
-                    </a:p>
-                  </a:txBody>
-                  <a:tcPr marL="34586" marR="34586" marT="10972" marB="10972" anchor="ctr"/>
-                </a:tc>
-                <a:tc>
-                  <a:txBody>
-                    <a:bodyPr/>
-                    <a:lstStyle/>
-                    <a:p>
-                      <a:pPr algn="ctr">
-                        <a:lnSpc>
-                          <a:spcPct val="107000"/>
-                        </a:lnSpc>
-                        <a:spcAft>
-                          <a:spcPts val="500"/>
-                        </a:spcAft>
-                        <a:buNone/>
-                      </a:pPr>
-                      <a:r>
-                        <a:rPr lang="ko-KR" sz="900">
-                          <a:effectLst/>
-                        </a:rPr>
-                        <a:t>0.294 (0.283)</a:t>
-                      </a:r>
-                      <a:endParaRPr lang="ko-KR" sz="1000">
-                        <a:solidFill>
-                          <a:srgbClr val="222222"/>
-                        </a:solidFill>
-                        <a:effectLst/>
-                        <a:latin typeface="Aptos" panose="020B0004020202020204" pitchFamily="34" charset="0"/>
-                        <a:ea typeface="Aptos" panose="020B0004020202020204" pitchFamily="34" charset="0"/>
-                        <a:cs typeface="Aptos" panose="020B0004020202020204" pitchFamily="34" charset="0"/>
-                      </a:endParaRPr>
-                    </a:p>
-                  </a:txBody>
-                  <a:tcPr marL="34586" marR="34586" marT="10972" marB="10972"/>
-                </a:tc>
-                <a:tc>
-                  <a:txBody>
-                    <a:bodyPr/>
-                    <a:lstStyle/>
-                    <a:p>
-                      <a:pPr algn="ctr">
-                        <a:lnSpc>
-                          <a:spcPct val="107000"/>
-                        </a:lnSpc>
-                        <a:spcAft>
-                          <a:spcPts val="500"/>
-                        </a:spcAft>
-                        <a:buNone/>
-                      </a:pPr>
-                      <a:r>
-                        <a:rPr lang="ko-KR" sz="900" dirty="0">
-                          <a:effectLst/>
-                        </a:rPr>
-                        <a:t>0.257 (0.286)</a:t>
-                      </a:r>
-                      <a:endParaRPr lang="ko-KR" sz="1000" dirty="0">
-                        <a:solidFill>
-                          <a:srgbClr val="222222"/>
-                        </a:solidFill>
-                        <a:effectLst/>
-                        <a:latin typeface="Aptos" panose="020B0004020202020204" pitchFamily="34" charset="0"/>
-                        <a:ea typeface="Aptos" panose="020B0004020202020204" pitchFamily="34" charset="0"/>
-                        <a:cs typeface="Aptos" panose="020B0004020202020204" pitchFamily="34" charset="0"/>
-                      </a:endParaRPr>
-                    </a:p>
-                  </a:txBody>
-                  <a:tcPr marL="34586" marR="34586" marT="10972" marB="10972"/>
-                </a:tc>
-                <a:tc>
-                  <a:txBody>
-                    <a:bodyPr/>
-                    <a:lstStyle/>
-                    <a:p>
-                      <a:pPr algn="ctr">
-                        <a:lnSpc>
-                          <a:spcPct val="107000"/>
-                        </a:lnSpc>
-                        <a:spcAft>
-                          <a:spcPts val="500"/>
-                        </a:spcAft>
-                        <a:buNone/>
-                      </a:pPr>
-                      <a:r>
-                        <a:rPr lang="ko-KR" sz="900">
-                          <a:effectLst/>
-                        </a:rPr>
-                        <a:t>0.252 (0.285)</a:t>
-                      </a:r>
-                      <a:endParaRPr lang="ko-KR" sz="1000">
-                        <a:solidFill>
-                          <a:srgbClr val="222222"/>
-                        </a:solidFill>
-                        <a:effectLst/>
-                        <a:latin typeface="Aptos" panose="020B0004020202020204" pitchFamily="34" charset="0"/>
-                        <a:ea typeface="Aptos" panose="020B0004020202020204" pitchFamily="34" charset="0"/>
-                        <a:cs typeface="Aptos" panose="020B0004020202020204" pitchFamily="34" charset="0"/>
-                      </a:endParaRPr>
-                    </a:p>
-                  </a:txBody>
-                  <a:tcPr marL="34586" marR="34586" marT="10972" marB="10972"/>
-                </a:tc>
-                <a:extLst>
-                  <a:ext uri="{0D108BD9-81ED-4DB2-BD59-A6C34878D82A}">
-                    <a16:rowId xmlns:a16="http://schemas.microsoft.com/office/drawing/2014/main" val="161741346"/>
-                  </a:ext>
-                </a:extLst>
-              </a:tr>
-              <a:tr h="187452">
-                <a:tc>
-                  <a:txBody>
-                    <a:bodyPr/>
-                    <a:lstStyle/>
-                    <a:p>
-                      <a:pPr algn="ctr">
-                        <a:lnSpc>
-                          <a:spcPct val="107000"/>
-                        </a:lnSpc>
-                        <a:spcAft>
-                          <a:spcPts val="500"/>
-                        </a:spcAft>
-                        <a:buNone/>
-                      </a:pPr>
-                      <a:r>
-                        <a:rPr lang="ko-KR" sz="900">
-                          <a:effectLst/>
-                        </a:rPr>
-                        <a:t>Level 2: District characteristics</a:t>
-                      </a:r>
-                      <a:endParaRPr lang="ko-KR" sz="1000">
-                        <a:solidFill>
-                          <a:srgbClr val="222222"/>
-                        </a:solidFill>
-                        <a:effectLst/>
-                        <a:latin typeface="Aptos" panose="020B0004020202020204" pitchFamily="34" charset="0"/>
-                        <a:ea typeface="Aptos" panose="020B0004020202020204" pitchFamily="34" charset="0"/>
-                        <a:cs typeface="Aptos" panose="020B0004020202020204" pitchFamily="34" charset="0"/>
-                      </a:endParaRPr>
-                    </a:p>
-                  </a:txBody>
-                  <a:tcPr marL="34586" marR="34586" marT="10972" marB="10972" anchor="ctr"/>
-                </a:tc>
-                <a:tc>
-                  <a:txBody>
-                    <a:bodyPr/>
-                    <a:lstStyle/>
-                    <a:p>
-                      <a:pPr algn="ctr">
-                        <a:lnSpc>
-                          <a:spcPct val="107000"/>
-                        </a:lnSpc>
-                        <a:spcAft>
-                          <a:spcPts val="500"/>
-                        </a:spcAft>
-                        <a:buNone/>
-                      </a:pPr>
-                      <a:r>
-                        <a:rPr lang="ko-KR" sz="900">
-                          <a:effectLst/>
-                        </a:rPr>
-                        <a:t> </a:t>
-                      </a:r>
-                      <a:endParaRPr lang="ko-KR" sz="1000">
-                        <a:solidFill>
-                          <a:srgbClr val="222222"/>
-                        </a:solidFill>
-                        <a:effectLst/>
-                        <a:latin typeface="Aptos" panose="020B0004020202020204" pitchFamily="34" charset="0"/>
-                        <a:ea typeface="Aptos" panose="020B0004020202020204" pitchFamily="34" charset="0"/>
-                        <a:cs typeface="Aptos" panose="020B0004020202020204" pitchFamily="34" charset="0"/>
-                      </a:endParaRPr>
-                    </a:p>
-                  </a:txBody>
-                  <a:tcPr marL="34586" marR="34586" marT="10972" marB="10972"/>
-                </a:tc>
-                <a:tc>
-                  <a:txBody>
-                    <a:bodyPr/>
-                    <a:lstStyle/>
-                    <a:p>
-                      <a:pPr algn="ctr">
-                        <a:lnSpc>
-                          <a:spcPct val="107000"/>
-                        </a:lnSpc>
-                        <a:spcAft>
-                          <a:spcPts val="500"/>
-                        </a:spcAft>
-                        <a:buNone/>
-                      </a:pPr>
-                      <a:r>
-                        <a:rPr lang="ko-KR" sz="900">
-                          <a:effectLst/>
-                        </a:rPr>
-                        <a:t> </a:t>
-                      </a:r>
-                      <a:endParaRPr lang="ko-KR" sz="1000">
-                        <a:solidFill>
-                          <a:srgbClr val="222222"/>
-                        </a:solidFill>
-                        <a:effectLst/>
-                        <a:latin typeface="Aptos" panose="020B0004020202020204" pitchFamily="34" charset="0"/>
-                        <a:ea typeface="Aptos" panose="020B0004020202020204" pitchFamily="34" charset="0"/>
-                        <a:cs typeface="Aptos" panose="020B0004020202020204" pitchFamily="34" charset="0"/>
-                      </a:endParaRPr>
-                    </a:p>
-                  </a:txBody>
-                  <a:tcPr marL="34586" marR="34586" marT="10972" marB="10972"/>
-                </a:tc>
-                <a:tc>
-                  <a:txBody>
-                    <a:bodyPr/>
-                    <a:lstStyle/>
-                    <a:p>
-                      <a:pPr algn="ctr">
-                        <a:lnSpc>
-                          <a:spcPct val="107000"/>
-                        </a:lnSpc>
-                        <a:spcAft>
-                          <a:spcPts val="500"/>
-                        </a:spcAft>
-                        <a:buNone/>
-                      </a:pPr>
-                      <a:r>
-                        <a:rPr lang="ko-KR" sz="900" dirty="0">
-                          <a:effectLst/>
-                        </a:rPr>
-                        <a:t> </a:t>
-                      </a:r>
-                      <a:endParaRPr lang="ko-KR" sz="1000" dirty="0">
-                        <a:solidFill>
-                          <a:srgbClr val="222222"/>
-                        </a:solidFill>
-                        <a:effectLst/>
-                        <a:latin typeface="Aptos" panose="020B0004020202020204" pitchFamily="34" charset="0"/>
-                        <a:ea typeface="Aptos" panose="020B0004020202020204" pitchFamily="34" charset="0"/>
-                        <a:cs typeface="Aptos" panose="020B0004020202020204" pitchFamily="34" charset="0"/>
-                      </a:endParaRPr>
-                    </a:p>
-                  </a:txBody>
-                  <a:tcPr marL="34586" marR="34586" marT="10972" marB="10972"/>
-                </a:tc>
-                <a:extLst>
-                  <a:ext uri="{0D108BD9-81ED-4DB2-BD59-A6C34878D82A}">
-                    <a16:rowId xmlns:a16="http://schemas.microsoft.com/office/drawing/2014/main" val="2696144726"/>
-                  </a:ext>
-                </a:extLst>
-              </a:tr>
-              <a:tr h="187452">
-                <a:tc>
-                  <a:txBody>
-                    <a:bodyPr/>
-                    <a:lstStyle/>
-                    <a:p>
-                      <a:pPr algn="just">
-                        <a:lnSpc>
-                          <a:spcPct val="107000"/>
-                        </a:lnSpc>
-                        <a:spcAft>
-                          <a:spcPts val="500"/>
-                        </a:spcAft>
-                        <a:buNone/>
-                      </a:pPr>
-                      <a:r>
-                        <a:rPr lang="ko-KR" sz="900">
-                          <a:effectLst/>
-                        </a:rPr>
-                        <a:t>Connectivity</a:t>
-                      </a:r>
-                      <a:endParaRPr lang="ko-KR" sz="1000">
-                        <a:solidFill>
-                          <a:srgbClr val="222222"/>
-                        </a:solidFill>
-                        <a:effectLst/>
-                        <a:latin typeface="Aptos" panose="020B0004020202020204" pitchFamily="34" charset="0"/>
-                        <a:ea typeface="Aptos" panose="020B0004020202020204" pitchFamily="34" charset="0"/>
-                        <a:cs typeface="Aptos" panose="020B0004020202020204" pitchFamily="34" charset="0"/>
-                      </a:endParaRPr>
-                    </a:p>
-                  </a:txBody>
-                  <a:tcPr marL="34586" marR="34586" marT="10972" marB="10972" anchor="ctr"/>
-                </a:tc>
-                <a:tc>
-                  <a:txBody>
-                    <a:bodyPr/>
-                    <a:lstStyle/>
-                    <a:p>
-                      <a:pPr algn="ctr">
-                        <a:lnSpc>
-                          <a:spcPct val="107000"/>
-                        </a:lnSpc>
-                        <a:spcAft>
-                          <a:spcPts val="500"/>
-                        </a:spcAft>
-                        <a:buNone/>
-                      </a:pPr>
-                      <a:r>
-                        <a:rPr lang="ko-KR" sz="900">
-                          <a:effectLst/>
-                        </a:rPr>
-                        <a:t> </a:t>
-                      </a:r>
-                      <a:endParaRPr lang="ko-KR" sz="1000">
-                        <a:solidFill>
-                          <a:srgbClr val="222222"/>
-                        </a:solidFill>
-                        <a:effectLst/>
-                        <a:latin typeface="Aptos" panose="020B0004020202020204" pitchFamily="34" charset="0"/>
-                        <a:ea typeface="Aptos" panose="020B0004020202020204" pitchFamily="34" charset="0"/>
-                        <a:cs typeface="Aptos" panose="020B0004020202020204" pitchFamily="34" charset="0"/>
-                      </a:endParaRPr>
-                    </a:p>
-                  </a:txBody>
-                  <a:tcPr marL="34586" marR="34586" marT="10972" marB="10972"/>
-                </a:tc>
-                <a:tc>
-                  <a:txBody>
-                    <a:bodyPr/>
-                    <a:lstStyle/>
-                    <a:p>
-                      <a:pPr algn="ctr">
-                        <a:lnSpc>
-                          <a:spcPct val="107000"/>
-                        </a:lnSpc>
-                        <a:spcAft>
-                          <a:spcPts val="500"/>
-                        </a:spcAft>
-                        <a:buNone/>
-                      </a:pPr>
-                      <a:r>
-                        <a:rPr lang="ko-KR" sz="900">
-                          <a:effectLst/>
-                        </a:rPr>
-                        <a:t>-1.068 (0.714)</a:t>
-                      </a:r>
-                      <a:endParaRPr lang="ko-KR" sz="1000">
-                        <a:solidFill>
-                          <a:srgbClr val="222222"/>
-                        </a:solidFill>
-                        <a:effectLst/>
-                        <a:latin typeface="Aptos" panose="020B0004020202020204" pitchFamily="34" charset="0"/>
-                        <a:ea typeface="Aptos" panose="020B0004020202020204" pitchFamily="34" charset="0"/>
-                        <a:cs typeface="Aptos" panose="020B0004020202020204" pitchFamily="34" charset="0"/>
-                      </a:endParaRPr>
-                    </a:p>
-                  </a:txBody>
-                  <a:tcPr marL="34586" marR="34586" marT="10972" marB="10972"/>
-                </a:tc>
-                <a:tc>
-                  <a:txBody>
-                    <a:bodyPr/>
-                    <a:lstStyle/>
-                    <a:p>
-                      <a:pPr algn="ctr">
-                        <a:lnSpc>
-                          <a:spcPct val="107000"/>
-                        </a:lnSpc>
-                        <a:spcAft>
-                          <a:spcPts val="500"/>
-                        </a:spcAft>
-                        <a:buNone/>
-                      </a:pPr>
-                      <a:r>
-                        <a:rPr lang="ko-KR" sz="900">
-                          <a:effectLst/>
-                        </a:rPr>
-                        <a:t>-1.340† (0.717)</a:t>
-                      </a:r>
-                      <a:endParaRPr lang="ko-KR" sz="1000">
-                        <a:solidFill>
-                          <a:srgbClr val="222222"/>
-                        </a:solidFill>
-                        <a:effectLst/>
-                        <a:latin typeface="Aptos" panose="020B0004020202020204" pitchFamily="34" charset="0"/>
-                        <a:ea typeface="Aptos" panose="020B0004020202020204" pitchFamily="34" charset="0"/>
-                        <a:cs typeface="Aptos" panose="020B0004020202020204" pitchFamily="34" charset="0"/>
-                      </a:endParaRPr>
-                    </a:p>
-                  </a:txBody>
-                  <a:tcPr marL="34586" marR="34586" marT="10972" marB="10972"/>
-                </a:tc>
-                <a:extLst>
-                  <a:ext uri="{0D108BD9-81ED-4DB2-BD59-A6C34878D82A}">
-                    <a16:rowId xmlns:a16="http://schemas.microsoft.com/office/drawing/2014/main" val="813998064"/>
-                  </a:ext>
-                </a:extLst>
-              </a:tr>
-              <a:tr h="187452">
-                <a:tc>
-                  <a:txBody>
-                    <a:bodyPr/>
-                    <a:lstStyle/>
-                    <a:p>
-                      <a:pPr algn="just">
-                        <a:lnSpc>
-                          <a:spcPct val="107000"/>
-                        </a:lnSpc>
-                        <a:spcAft>
-                          <a:spcPts val="500"/>
-                        </a:spcAft>
-                        <a:buNone/>
-                      </a:pPr>
-                      <a:r>
-                        <a:rPr lang="ko-KR" sz="900">
-                          <a:effectLst/>
-                        </a:rPr>
-                        <a:t>Available for Use</a:t>
-                      </a:r>
-                      <a:endParaRPr lang="ko-KR" sz="1000">
-                        <a:solidFill>
-                          <a:srgbClr val="222222"/>
-                        </a:solidFill>
-                        <a:effectLst/>
-                        <a:latin typeface="Aptos" panose="020B0004020202020204" pitchFamily="34" charset="0"/>
-                        <a:ea typeface="Aptos" panose="020B0004020202020204" pitchFamily="34" charset="0"/>
-                        <a:cs typeface="Aptos" panose="020B0004020202020204" pitchFamily="34" charset="0"/>
-                      </a:endParaRPr>
-                    </a:p>
-                  </a:txBody>
-                  <a:tcPr marL="34586" marR="34586" marT="10972" marB="10972" anchor="ctr"/>
-                </a:tc>
-                <a:tc>
-                  <a:txBody>
-                    <a:bodyPr/>
-                    <a:lstStyle/>
-                    <a:p>
-                      <a:pPr algn="ctr">
-                        <a:lnSpc>
-                          <a:spcPct val="107000"/>
-                        </a:lnSpc>
-                        <a:spcAft>
-                          <a:spcPts val="500"/>
-                        </a:spcAft>
-                        <a:buNone/>
-                      </a:pPr>
-                      <a:r>
-                        <a:rPr lang="ko-KR" sz="900">
-                          <a:effectLst/>
-                        </a:rPr>
-                        <a:t> </a:t>
-                      </a:r>
-                      <a:endParaRPr lang="ko-KR" sz="1000">
-                        <a:solidFill>
-                          <a:srgbClr val="222222"/>
-                        </a:solidFill>
-                        <a:effectLst/>
-                        <a:latin typeface="Aptos" panose="020B0004020202020204" pitchFamily="34" charset="0"/>
-                        <a:ea typeface="Aptos" panose="020B0004020202020204" pitchFamily="34" charset="0"/>
-                        <a:cs typeface="Aptos" panose="020B0004020202020204" pitchFamily="34" charset="0"/>
-                      </a:endParaRPr>
-                    </a:p>
-                  </a:txBody>
-                  <a:tcPr marL="34586" marR="34586" marT="10972" marB="10972"/>
-                </a:tc>
-                <a:tc>
-                  <a:txBody>
-                    <a:bodyPr/>
-                    <a:lstStyle/>
-                    <a:p>
-                      <a:pPr algn="ctr">
-                        <a:lnSpc>
-                          <a:spcPct val="107000"/>
-                        </a:lnSpc>
-                        <a:spcAft>
-                          <a:spcPts val="500"/>
-                        </a:spcAft>
-                        <a:buNone/>
-                      </a:pPr>
-                      <a:r>
-                        <a:rPr lang="ko-KR" sz="900" dirty="0">
-                          <a:effectLst/>
-                        </a:rPr>
-                        <a:t>0.210 (0.628)</a:t>
-                      </a:r>
-                      <a:endParaRPr lang="ko-KR" sz="1000" dirty="0">
-                        <a:solidFill>
-                          <a:srgbClr val="222222"/>
-                        </a:solidFill>
-                        <a:effectLst/>
-                        <a:latin typeface="Aptos" panose="020B0004020202020204" pitchFamily="34" charset="0"/>
-                        <a:ea typeface="Aptos" panose="020B0004020202020204" pitchFamily="34" charset="0"/>
-                        <a:cs typeface="Aptos" panose="020B0004020202020204" pitchFamily="34" charset="0"/>
-                      </a:endParaRPr>
-                    </a:p>
-                  </a:txBody>
-                  <a:tcPr marL="34586" marR="34586" marT="10972" marB="10972"/>
-                </a:tc>
-                <a:tc>
-                  <a:txBody>
-                    <a:bodyPr/>
-                    <a:lstStyle/>
-                    <a:p>
-                      <a:pPr algn="ctr">
-                        <a:lnSpc>
-                          <a:spcPct val="107000"/>
-                        </a:lnSpc>
-                        <a:spcAft>
-                          <a:spcPts val="500"/>
-                        </a:spcAft>
-                        <a:buNone/>
-                      </a:pPr>
-                      <a:r>
-                        <a:rPr lang="ko-KR" sz="900" dirty="0">
-                          <a:effectLst/>
-                        </a:rPr>
-                        <a:t>0.199 (0.622)</a:t>
-                      </a:r>
-                      <a:endParaRPr lang="ko-KR" sz="1000" dirty="0">
-                        <a:solidFill>
-                          <a:srgbClr val="222222"/>
-                        </a:solidFill>
-                        <a:effectLst/>
-                        <a:latin typeface="Aptos" panose="020B0004020202020204" pitchFamily="34" charset="0"/>
-                        <a:ea typeface="Aptos" panose="020B0004020202020204" pitchFamily="34" charset="0"/>
-                        <a:cs typeface="Aptos" panose="020B0004020202020204" pitchFamily="34" charset="0"/>
-                      </a:endParaRPr>
-                    </a:p>
-                  </a:txBody>
-                  <a:tcPr marL="34586" marR="34586" marT="10972" marB="10972"/>
-                </a:tc>
-                <a:extLst>
-                  <a:ext uri="{0D108BD9-81ED-4DB2-BD59-A6C34878D82A}">
-                    <a16:rowId xmlns:a16="http://schemas.microsoft.com/office/drawing/2014/main" val="4009334149"/>
-                  </a:ext>
-                </a:extLst>
-              </a:tr>
-              <a:tr h="187452">
-                <a:tc>
-                  <a:txBody>
-                    <a:bodyPr/>
-                    <a:lstStyle/>
-                    <a:p>
-                      <a:pPr algn="just">
-                        <a:lnSpc>
-                          <a:spcPct val="107000"/>
-                        </a:lnSpc>
-                        <a:spcAft>
-                          <a:spcPts val="500"/>
-                        </a:spcAft>
-                        <a:buNone/>
-                      </a:pPr>
-                      <a:r>
-                        <a:rPr lang="ko-KR" sz="900">
-                          <a:effectLst/>
-                        </a:rPr>
-                        <a:t>Affordability</a:t>
-                      </a:r>
-                      <a:endParaRPr lang="ko-KR" sz="1000">
-                        <a:solidFill>
-                          <a:srgbClr val="222222"/>
-                        </a:solidFill>
-                        <a:effectLst/>
-                        <a:latin typeface="Aptos" panose="020B0004020202020204" pitchFamily="34" charset="0"/>
-                        <a:ea typeface="Aptos" panose="020B0004020202020204" pitchFamily="34" charset="0"/>
-                        <a:cs typeface="Aptos" panose="020B0004020202020204" pitchFamily="34" charset="0"/>
-                      </a:endParaRPr>
-                    </a:p>
-                  </a:txBody>
-                  <a:tcPr marL="34586" marR="34586" marT="10972" marB="10972" anchor="ctr"/>
-                </a:tc>
-                <a:tc>
-                  <a:txBody>
-                    <a:bodyPr/>
-                    <a:lstStyle/>
-                    <a:p>
-                      <a:pPr algn="ctr">
-                        <a:lnSpc>
-                          <a:spcPct val="107000"/>
-                        </a:lnSpc>
-                        <a:spcAft>
-                          <a:spcPts val="500"/>
-                        </a:spcAft>
-                        <a:buNone/>
-                      </a:pPr>
-                      <a:r>
-                        <a:rPr lang="ko-KR" sz="900">
-                          <a:effectLst/>
-                        </a:rPr>
-                        <a:t> </a:t>
-                      </a:r>
-                      <a:endParaRPr lang="ko-KR" sz="1000">
-                        <a:solidFill>
-                          <a:srgbClr val="222222"/>
-                        </a:solidFill>
-                        <a:effectLst/>
-                        <a:latin typeface="Aptos" panose="020B0004020202020204" pitchFamily="34" charset="0"/>
-                        <a:ea typeface="Aptos" panose="020B0004020202020204" pitchFamily="34" charset="0"/>
-                        <a:cs typeface="Aptos" panose="020B0004020202020204" pitchFamily="34" charset="0"/>
-                      </a:endParaRPr>
-                    </a:p>
-                  </a:txBody>
-                  <a:tcPr marL="34586" marR="34586" marT="10972" marB="10972"/>
-                </a:tc>
-                <a:tc>
-                  <a:txBody>
-                    <a:bodyPr/>
-                    <a:lstStyle/>
-                    <a:p>
-                      <a:pPr algn="ctr">
-                        <a:lnSpc>
-                          <a:spcPct val="107000"/>
-                        </a:lnSpc>
-                        <a:spcAft>
-                          <a:spcPts val="500"/>
-                        </a:spcAft>
-                        <a:buNone/>
-                      </a:pPr>
-                      <a:r>
-                        <a:rPr lang="ko-KR" sz="900" dirty="0">
-                          <a:effectLst/>
-                        </a:rPr>
-                        <a:t>-1.343† (0.734)</a:t>
-                      </a:r>
-                      <a:endParaRPr lang="ko-KR" sz="1000" dirty="0">
-                        <a:solidFill>
-                          <a:srgbClr val="222222"/>
-                        </a:solidFill>
-                        <a:effectLst/>
-                        <a:latin typeface="Aptos" panose="020B0004020202020204" pitchFamily="34" charset="0"/>
-                        <a:ea typeface="Aptos" panose="020B0004020202020204" pitchFamily="34" charset="0"/>
-                        <a:cs typeface="Aptos" panose="020B0004020202020204" pitchFamily="34" charset="0"/>
-                      </a:endParaRPr>
-                    </a:p>
-                  </a:txBody>
-                  <a:tcPr marL="34586" marR="34586" marT="10972" marB="10972"/>
-                </a:tc>
-                <a:tc>
-                  <a:txBody>
-                    <a:bodyPr/>
-                    <a:lstStyle/>
-                    <a:p>
-                      <a:pPr algn="ctr">
-                        <a:lnSpc>
-                          <a:spcPct val="107000"/>
-                        </a:lnSpc>
-                        <a:spcAft>
-                          <a:spcPts val="500"/>
-                        </a:spcAft>
-                        <a:buNone/>
-                      </a:pPr>
-                      <a:r>
-                        <a:rPr lang="ko-KR" sz="900">
-                          <a:effectLst/>
-                        </a:rPr>
-                        <a:t>-1.345† (0.727)</a:t>
-                      </a:r>
-                      <a:endParaRPr lang="ko-KR" sz="1000">
-                        <a:solidFill>
-                          <a:srgbClr val="222222"/>
-                        </a:solidFill>
-                        <a:effectLst/>
-                        <a:latin typeface="Aptos" panose="020B0004020202020204" pitchFamily="34" charset="0"/>
-                        <a:ea typeface="Aptos" panose="020B0004020202020204" pitchFamily="34" charset="0"/>
-                        <a:cs typeface="Aptos" panose="020B0004020202020204" pitchFamily="34" charset="0"/>
-                      </a:endParaRPr>
-                    </a:p>
-                  </a:txBody>
-                  <a:tcPr marL="34586" marR="34586" marT="10972" marB="10972"/>
-                </a:tc>
-                <a:extLst>
-                  <a:ext uri="{0D108BD9-81ED-4DB2-BD59-A6C34878D82A}">
-                    <a16:rowId xmlns:a16="http://schemas.microsoft.com/office/drawing/2014/main" val="1041321588"/>
-                  </a:ext>
-                </a:extLst>
-              </a:tr>
-              <a:tr h="187452">
-                <a:tc>
-                  <a:txBody>
-                    <a:bodyPr/>
-                    <a:lstStyle/>
-                    <a:p>
-                      <a:pPr algn="ctr">
-                        <a:lnSpc>
-                          <a:spcPct val="107000"/>
-                        </a:lnSpc>
-                        <a:spcAft>
-                          <a:spcPts val="500"/>
-                        </a:spcAft>
-                        <a:buNone/>
-                      </a:pPr>
-                      <a:r>
-                        <a:rPr lang="ko-KR" sz="900">
-                          <a:effectLst/>
-                        </a:rPr>
-                        <a:t>Retained interactions</a:t>
-                      </a:r>
-                      <a:endParaRPr lang="ko-KR" sz="1000">
-                        <a:solidFill>
-                          <a:srgbClr val="222222"/>
-                        </a:solidFill>
-                        <a:effectLst/>
-                        <a:latin typeface="Aptos" panose="020B0004020202020204" pitchFamily="34" charset="0"/>
-                        <a:ea typeface="Aptos" panose="020B0004020202020204" pitchFamily="34" charset="0"/>
-                        <a:cs typeface="Aptos" panose="020B0004020202020204" pitchFamily="34" charset="0"/>
-                      </a:endParaRPr>
-                    </a:p>
-                  </a:txBody>
-                  <a:tcPr marL="34586" marR="34586" marT="10972" marB="10972" anchor="ctr"/>
-                </a:tc>
-                <a:tc>
-                  <a:txBody>
-                    <a:bodyPr/>
-                    <a:lstStyle/>
-                    <a:p>
-                      <a:pPr algn="ctr">
-                        <a:lnSpc>
-                          <a:spcPct val="107000"/>
-                        </a:lnSpc>
-                        <a:spcAft>
-                          <a:spcPts val="500"/>
-                        </a:spcAft>
-                        <a:buNone/>
-                      </a:pPr>
-                      <a:r>
-                        <a:rPr lang="ko-KR" sz="900">
-                          <a:effectLst/>
-                        </a:rPr>
-                        <a:t> </a:t>
-                      </a:r>
-                      <a:endParaRPr lang="ko-KR" sz="1000">
-                        <a:solidFill>
-                          <a:srgbClr val="222222"/>
-                        </a:solidFill>
-                        <a:effectLst/>
-                        <a:latin typeface="Aptos" panose="020B0004020202020204" pitchFamily="34" charset="0"/>
-                        <a:ea typeface="Aptos" panose="020B0004020202020204" pitchFamily="34" charset="0"/>
-                        <a:cs typeface="Aptos" panose="020B0004020202020204" pitchFamily="34" charset="0"/>
-                      </a:endParaRPr>
-                    </a:p>
-                  </a:txBody>
-                  <a:tcPr marL="34586" marR="34586" marT="10972" marB="10972"/>
-                </a:tc>
-                <a:tc>
-                  <a:txBody>
-                    <a:bodyPr/>
-                    <a:lstStyle/>
-                    <a:p>
-                      <a:pPr algn="ctr">
-                        <a:lnSpc>
-                          <a:spcPct val="107000"/>
-                        </a:lnSpc>
-                        <a:spcAft>
-                          <a:spcPts val="500"/>
-                        </a:spcAft>
-                        <a:buNone/>
-                      </a:pPr>
-                      <a:r>
-                        <a:rPr lang="ko-KR" sz="900" dirty="0">
-                          <a:effectLst/>
-                        </a:rPr>
-                        <a:t> </a:t>
-                      </a:r>
-                      <a:endParaRPr lang="ko-KR" sz="1000" dirty="0">
-                        <a:solidFill>
-                          <a:srgbClr val="222222"/>
-                        </a:solidFill>
-                        <a:effectLst/>
-                        <a:latin typeface="Aptos" panose="020B0004020202020204" pitchFamily="34" charset="0"/>
-                        <a:ea typeface="Aptos" panose="020B0004020202020204" pitchFamily="34" charset="0"/>
-                        <a:cs typeface="Aptos" panose="020B0004020202020204" pitchFamily="34" charset="0"/>
-                      </a:endParaRPr>
-                    </a:p>
-                  </a:txBody>
-                  <a:tcPr marL="34586" marR="34586" marT="10972" marB="10972"/>
-                </a:tc>
-                <a:tc>
-                  <a:txBody>
-                    <a:bodyPr/>
-                    <a:lstStyle/>
-                    <a:p>
-                      <a:pPr algn="ctr">
-                        <a:lnSpc>
-                          <a:spcPct val="107000"/>
-                        </a:lnSpc>
-                        <a:spcAft>
-                          <a:spcPts val="500"/>
-                        </a:spcAft>
-                        <a:buNone/>
-                      </a:pPr>
-                      <a:r>
-                        <a:rPr lang="ko-KR" sz="900" dirty="0">
-                          <a:effectLst/>
-                        </a:rPr>
-                        <a:t> </a:t>
-                      </a:r>
-                      <a:endParaRPr lang="ko-KR" sz="1000" dirty="0">
-                        <a:solidFill>
-                          <a:srgbClr val="222222"/>
-                        </a:solidFill>
-                        <a:effectLst/>
-                        <a:latin typeface="Aptos" panose="020B0004020202020204" pitchFamily="34" charset="0"/>
-                        <a:ea typeface="Aptos" panose="020B0004020202020204" pitchFamily="34" charset="0"/>
-                        <a:cs typeface="Aptos" panose="020B0004020202020204" pitchFamily="34" charset="0"/>
-                      </a:endParaRPr>
-                    </a:p>
-                  </a:txBody>
-                  <a:tcPr marL="34586" marR="34586" marT="10972" marB="10972"/>
-                </a:tc>
-                <a:extLst>
-                  <a:ext uri="{0D108BD9-81ED-4DB2-BD59-A6C34878D82A}">
-                    <a16:rowId xmlns:a16="http://schemas.microsoft.com/office/drawing/2014/main" val="1618182285"/>
-                  </a:ext>
-                </a:extLst>
-              </a:tr>
-              <a:tr h="187452">
-                <a:tc>
-                  <a:txBody>
-                    <a:bodyPr/>
-                    <a:lstStyle/>
-                    <a:p>
-                      <a:pPr algn="just">
-                        <a:lnSpc>
-                          <a:spcPct val="107000"/>
-                        </a:lnSpc>
-                        <a:spcAft>
-                          <a:spcPts val="500"/>
-                        </a:spcAft>
-                        <a:buNone/>
-                      </a:pPr>
-                      <a:r>
-                        <a:rPr lang="ko-KR" sz="900">
-                          <a:effectLst/>
-                        </a:rPr>
-                        <a:t>Connectivity x lower educational attainment</a:t>
-                      </a:r>
-                      <a:endParaRPr lang="ko-KR" sz="1000">
-                        <a:solidFill>
-                          <a:srgbClr val="222222"/>
-                        </a:solidFill>
-                        <a:effectLst/>
-                        <a:latin typeface="Aptos" panose="020B0004020202020204" pitchFamily="34" charset="0"/>
-                        <a:ea typeface="Aptos" panose="020B0004020202020204" pitchFamily="34" charset="0"/>
-                        <a:cs typeface="Aptos" panose="020B0004020202020204" pitchFamily="34" charset="0"/>
-                      </a:endParaRPr>
-                    </a:p>
-                  </a:txBody>
-                  <a:tcPr marL="34586" marR="34586" marT="10972" marB="10972" anchor="ctr"/>
-                </a:tc>
-                <a:tc>
-                  <a:txBody>
-                    <a:bodyPr/>
-                    <a:lstStyle/>
-                    <a:p>
-                      <a:pPr algn="ctr">
-                        <a:lnSpc>
-                          <a:spcPct val="107000"/>
-                        </a:lnSpc>
-                        <a:spcAft>
-                          <a:spcPts val="500"/>
-                        </a:spcAft>
-                        <a:buNone/>
-                      </a:pPr>
-                      <a:r>
-                        <a:rPr lang="ko-KR" sz="900">
-                          <a:effectLst/>
-                        </a:rPr>
-                        <a:t> </a:t>
-                      </a:r>
-                      <a:endParaRPr lang="ko-KR" sz="1000">
-                        <a:solidFill>
-                          <a:srgbClr val="222222"/>
-                        </a:solidFill>
-                        <a:effectLst/>
-                        <a:latin typeface="Aptos" panose="020B0004020202020204" pitchFamily="34" charset="0"/>
-                        <a:ea typeface="Aptos" panose="020B0004020202020204" pitchFamily="34" charset="0"/>
-                        <a:cs typeface="Aptos" panose="020B0004020202020204" pitchFamily="34" charset="0"/>
-                      </a:endParaRPr>
-                    </a:p>
-                  </a:txBody>
-                  <a:tcPr marL="34586" marR="34586" marT="10972" marB="10972"/>
-                </a:tc>
-                <a:tc>
-                  <a:txBody>
-                    <a:bodyPr/>
-                    <a:lstStyle/>
-                    <a:p>
-                      <a:pPr algn="ctr">
-                        <a:lnSpc>
-                          <a:spcPct val="107000"/>
-                        </a:lnSpc>
-                        <a:spcAft>
-                          <a:spcPts val="500"/>
-                        </a:spcAft>
-                        <a:buNone/>
-                      </a:pPr>
-                      <a:r>
-                        <a:rPr lang="ko-KR" sz="900">
-                          <a:effectLst/>
-                        </a:rPr>
-                        <a:t> </a:t>
-                      </a:r>
-                      <a:endParaRPr lang="ko-KR" sz="1000">
-                        <a:solidFill>
-                          <a:srgbClr val="222222"/>
-                        </a:solidFill>
-                        <a:effectLst/>
-                        <a:latin typeface="Aptos" panose="020B0004020202020204" pitchFamily="34" charset="0"/>
-                        <a:ea typeface="Aptos" panose="020B0004020202020204" pitchFamily="34" charset="0"/>
-                        <a:cs typeface="Aptos" panose="020B0004020202020204" pitchFamily="34" charset="0"/>
-                      </a:endParaRPr>
-                    </a:p>
-                  </a:txBody>
-                  <a:tcPr marL="34586" marR="34586" marT="10972" marB="10972"/>
-                </a:tc>
-                <a:tc>
-                  <a:txBody>
-                    <a:bodyPr/>
-                    <a:lstStyle/>
-                    <a:p>
-                      <a:pPr algn="ctr">
-                        <a:lnSpc>
-                          <a:spcPct val="107000"/>
-                        </a:lnSpc>
-                        <a:spcAft>
-                          <a:spcPts val="500"/>
-                        </a:spcAft>
-                        <a:buNone/>
-                      </a:pPr>
-                      <a:r>
-                        <a:rPr lang="ko-KR" sz="900" dirty="0">
-                          <a:effectLst/>
-                        </a:rPr>
-                        <a:t>4.660 (3.278)</a:t>
-                      </a:r>
-                      <a:endParaRPr lang="ko-KR" sz="1000" dirty="0">
-                        <a:solidFill>
-                          <a:srgbClr val="222222"/>
-                        </a:solidFill>
-                        <a:effectLst/>
-                        <a:latin typeface="Aptos" panose="020B0004020202020204" pitchFamily="34" charset="0"/>
-                        <a:ea typeface="Aptos" panose="020B0004020202020204" pitchFamily="34" charset="0"/>
-                        <a:cs typeface="Aptos" panose="020B0004020202020204" pitchFamily="34" charset="0"/>
-                      </a:endParaRPr>
-                    </a:p>
-                  </a:txBody>
-                  <a:tcPr marL="34586" marR="34586" marT="10972" marB="10972"/>
-                </a:tc>
-                <a:extLst>
-                  <a:ext uri="{0D108BD9-81ED-4DB2-BD59-A6C34878D82A}">
-                    <a16:rowId xmlns:a16="http://schemas.microsoft.com/office/drawing/2014/main" val="1537057410"/>
-                  </a:ext>
-                </a:extLst>
-              </a:tr>
-              <a:tr h="187452">
-                <a:tc>
-                  <a:txBody>
-                    <a:bodyPr/>
-                    <a:lstStyle/>
-                    <a:p>
-                      <a:pPr algn="just">
-                        <a:lnSpc>
-                          <a:spcPct val="107000"/>
-                        </a:lnSpc>
-                        <a:spcAft>
-                          <a:spcPts val="500"/>
-                        </a:spcAft>
-                        <a:buNone/>
-                      </a:pPr>
-                      <a:r>
-                        <a:rPr lang="ko-KR" sz="900">
-                          <a:effectLst/>
-                        </a:rPr>
-                        <a:t>Age x lower educational attainment</a:t>
-                      </a:r>
-                      <a:endParaRPr lang="ko-KR" sz="1000">
-                        <a:solidFill>
-                          <a:srgbClr val="222222"/>
-                        </a:solidFill>
-                        <a:effectLst/>
-                        <a:latin typeface="Aptos" panose="020B0004020202020204" pitchFamily="34" charset="0"/>
-                        <a:ea typeface="Aptos" panose="020B0004020202020204" pitchFamily="34" charset="0"/>
-                        <a:cs typeface="Aptos" panose="020B0004020202020204" pitchFamily="34" charset="0"/>
-                      </a:endParaRPr>
-                    </a:p>
-                  </a:txBody>
-                  <a:tcPr marL="34586" marR="34586" marT="10972" marB="10972" anchor="ctr"/>
-                </a:tc>
-                <a:tc>
-                  <a:txBody>
-                    <a:bodyPr/>
-                    <a:lstStyle/>
-                    <a:p>
-                      <a:pPr algn="ctr">
-                        <a:lnSpc>
-                          <a:spcPct val="107000"/>
-                        </a:lnSpc>
-                        <a:spcAft>
-                          <a:spcPts val="500"/>
-                        </a:spcAft>
-                        <a:buNone/>
-                      </a:pPr>
-                      <a:r>
-                        <a:rPr lang="ko-KR" sz="900">
-                          <a:effectLst/>
-                        </a:rPr>
-                        <a:t> </a:t>
-                      </a:r>
-                      <a:endParaRPr lang="ko-KR" sz="1000">
-                        <a:solidFill>
-                          <a:srgbClr val="222222"/>
-                        </a:solidFill>
-                        <a:effectLst/>
-                        <a:latin typeface="Aptos" panose="020B0004020202020204" pitchFamily="34" charset="0"/>
-                        <a:ea typeface="Aptos" panose="020B0004020202020204" pitchFamily="34" charset="0"/>
-                        <a:cs typeface="Aptos" panose="020B0004020202020204" pitchFamily="34" charset="0"/>
-                      </a:endParaRPr>
-                    </a:p>
-                  </a:txBody>
-                  <a:tcPr marL="34586" marR="34586" marT="10972" marB="10972"/>
-                </a:tc>
-                <a:tc>
-                  <a:txBody>
-                    <a:bodyPr/>
-                    <a:lstStyle/>
-                    <a:p>
-                      <a:pPr algn="ctr">
-                        <a:lnSpc>
-                          <a:spcPct val="107000"/>
-                        </a:lnSpc>
-                        <a:spcAft>
-                          <a:spcPts val="500"/>
-                        </a:spcAft>
-                        <a:buNone/>
-                      </a:pPr>
-                      <a:r>
-                        <a:rPr lang="ko-KR" sz="900">
-                          <a:effectLst/>
-                        </a:rPr>
-                        <a:t> </a:t>
-                      </a:r>
-                      <a:endParaRPr lang="ko-KR" sz="1000">
-                        <a:solidFill>
-                          <a:srgbClr val="222222"/>
-                        </a:solidFill>
-                        <a:effectLst/>
-                        <a:latin typeface="Aptos" panose="020B0004020202020204" pitchFamily="34" charset="0"/>
-                        <a:ea typeface="Aptos" panose="020B0004020202020204" pitchFamily="34" charset="0"/>
-                        <a:cs typeface="Aptos" panose="020B0004020202020204" pitchFamily="34" charset="0"/>
-                      </a:endParaRPr>
-                    </a:p>
-                  </a:txBody>
-                  <a:tcPr marL="34586" marR="34586" marT="10972" marB="10972"/>
-                </a:tc>
-                <a:tc>
-                  <a:txBody>
-                    <a:bodyPr/>
-                    <a:lstStyle/>
-                    <a:p>
-                      <a:pPr algn="ctr">
-                        <a:lnSpc>
-                          <a:spcPct val="107000"/>
-                        </a:lnSpc>
-                        <a:spcAft>
-                          <a:spcPts val="500"/>
-                        </a:spcAft>
-                        <a:buNone/>
-                      </a:pPr>
-                      <a:r>
-                        <a:rPr lang="ko-KR" sz="900" dirty="0">
-                          <a:effectLst/>
-                        </a:rPr>
-                        <a:t>-0.395*** (0.079)</a:t>
-                      </a:r>
-                      <a:endParaRPr lang="ko-KR" sz="1000" dirty="0">
-                        <a:solidFill>
-                          <a:srgbClr val="222222"/>
-                        </a:solidFill>
-                        <a:effectLst/>
-                        <a:highlight>
-                          <a:srgbClr val="FFFF00"/>
-                        </a:highlight>
-                        <a:latin typeface="Aptos" panose="020B0004020202020204" pitchFamily="34" charset="0"/>
-                        <a:ea typeface="Aptos" panose="020B0004020202020204" pitchFamily="34" charset="0"/>
-                        <a:cs typeface="Aptos" panose="020B0004020202020204" pitchFamily="34" charset="0"/>
-                      </a:endParaRPr>
-                    </a:p>
-                  </a:txBody>
-                  <a:tcPr marL="34586" marR="34586" marT="10972" marB="10972"/>
-                </a:tc>
-                <a:extLst>
-                  <a:ext uri="{0D108BD9-81ED-4DB2-BD59-A6C34878D82A}">
-                    <a16:rowId xmlns:a16="http://schemas.microsoft.com/office/drawing/2014/main" val="117395619"/>
-                  </a:ext>
-                </a:extLst>
-              </a:tr>
-            </a:tbl>
-          </a:graphicData>
-        </a:graphic>
-      </p:graphicFrame>
-    </p:spTree>
-    <p:extLst>
-      <p:ext uri="{BB962C8B-B14F-4D97-AF65-F5344CB8AC3E}">
-        <p14:creationId xmlns:p14="http://schemas.microsoft.com/office/powerpoint/2010/main" val="2361898664"/>
-      </p:ext>
-    </p:extLst>
-  </p:cSld>
-  <p:clrMapOvr>
-    <a:masterClrMapping/>
-  </p:clrMapOvr>
-</p:sld>
-</file>
-
-<file path=ppt/slides/slide9.xml><?xml version="1.0" encoding="utf-8"?>
-<p:sld xmlns:a="http://schemas.openxmlformats.org/drawingml/2006/main" xmlns:r="http://schemas.openxmlformats.org/officeDocument/2006/relationships" xmlns:p="http://schemas.openxmlformats.org/presentationml/2006/main">
-  <p:cSld>
-    <p:spTree>
-      <p:nvGrpSpPr>
-        <p:cNvPr id="1" name=""/>
-        <p:cNvGrpSpPr/>
-        <p:nvPr/>
-      </p:nvGrpSpPr>
-      <p:grpSpPr>
-        <a:xfrm>
-          <a:off x="0" y="0"/>
-          <a:ext cx="0" cy="0"/>
-          <a:chOff x="0" y="0"/>
-          <a:chExt cx="0" cy="0"/>
-        </a:xfrm>
-      </p:grpSpPr>
-      <p:sp>
-        <p:nvSpPr>
-          <p:cNvPr id="2" name="Text 0"/>
-          <p:cNvSpPr/>
-          <p:nvPr/>
-        </p:nvSpPr>
-        <p:spPr>
-          <a:xfrm>
-            <a:off x="548640" y="182880"/>
-            <a:ext cx="7315200" cy="201168"/>
-          </a:xfrm>
-          <a:prstGeom prst="rect">
-            <a:avLst/>
-          </a:prstGeom>
-          <a:noFill/>
-          <a:ln/>
-        </p:spPr>
-        <p:txBody>
-          <a:bodyPr wrap="square" lIns="0" tIns="0" rIns="0" bIns="0" rtlCol="0" anchor="ctr"/>
-          <a:lstStyle/>
-          <a:p>
-            <a:pPr marL="0" indent="0" algn="l">
-              <a:buNone/>
-            </a:pPr>
-            <a:r>
-              <a:rPr lang="en-US" sz="900" b="1" kern="0" spc="300" dirty="0">
-                <a:solidFill>
-                  <a:srgbClr val="2E869B"/>
-                </a:solidFill>
-                <a:latin typeface="Calibri" pitchFamily="34" charset="0"/>
-                <a:ea typeface="Calibri" pitchFamily="34" charset="-122"/>
-                <a:cs typeface="Calibri" pitchFamily="34" charset="-120"/>
-              </a:rPr>
-              <a:t>SECTION III  ·  PRELIMINARY RESULTS  ·  3 / 6</a:t>
-            </a:r>
-            <a:endParaRPr lang="en-US" sz="900" dirty="0"/>
-          </a:p>
-        </p:txBody>
-      </p:sp>
-      <p:sp>
-        <p:nvSpPr>
-          <p:cNvPr id="3" name="Text 1"/>
-          <p:cNvSpPr/>
-          <p:nvPr/>
-        </p:nvSpPr>
-        <p:spPr>
-          <a:xfrm>
-            <a:off x="548640" y="365760"/>
-            <a:ext cx="10058400" cy="594360"/>
-          </a:xfrm>
-          <a:prstGeom prst="rect">
-            <a:avLst/>
-          </a:prstGeom>
-          <a:noFill/>
-          <a:ln/>
-        </p:spPr>
-        <p:txBody>
-          <a:bodyPr wrap="square" lIns="0" tIns="0" rIns="0" bIns="0" rtlCol="0" anchor="b"/>
-          <a:lstStyle/>
-          <a:p>
-            <a:pPr marL="0" indent="0" algn="l">
-              <a:buNone/>
-            </a:pPr>
-            <a:r>
-              <a:rPr lang="en-US" sz="3000" b="1" dirty="0">
-                <a:solidFill>
-                  <a:srgbClr val="14263D"/>
-                </a:solidFill>
-                <a:latin typeface="Calibri" pitchFamily="34" charset="0"/>
-                <a:ea typeface="Calibri" pitchFamily="34" charset="-122"/>
-                <a:cs typeface="Calibri" pitchFamily="34" charset="-120"/>
-              </a:rPr>
-              <a:t>Why does the gap exist? — Individual differences dominate</a:t>
-            </a:r>
-            <a:endParaRPr lang="en-US" sz="3000" dirty="0"/>
-          </a:p>
-        </p:txBody>
-      </p:sp>
-      <p:sp>
-        <p:nvSpPr>
           <p:cNvPr id="6" name="Shape 4"/>
           <p:cNvSpPr/>
           <p:nvPr/>
@@ -24390,7 +19331,7 @@
         </p:nvSpPr>
         <p:spPr>
           <a:xfrm>
-            <a:off x="548640" y="1600200"/>
+            <a:off x="620557" y="1955936"/>
             <a:ext cx="5303520" cy="274320"/>
           </a:xfrm>
           <a:prstGeom prst="rect">
@@ -24429,8 +19370,8 @@
         </p:nvSpPr>
         <p:spPr>
           <a:xfrm>
-            <a:off x="548640" y="1825092"/>
-            <a:ext cx="5303520" cy="960120"/>
+            <a:off x="621793" y="1909294"/>
+            <a:ext cx="11064239" cy="960120"/>
           </a:xfrm>
           <a:prstGeom prst="rect">
             <a:avLst/>
@@ -24509,181 +19450,6 @@
       </p:sp>
       <p:sp>
         <p:nvSpPr>
-          <p:cNvPr id="10" name="Bar Label Districts"/>
-          <p:cNvSpPr/>
-          <p:nvPr/>
-        </p:nvSpPr>
-        <p:spPr>
-          <a:xfrm>
-            <a:off x="548640" y="2786968"/>
-            <a:ext cx="2400000" cy="220000"/>
-          </a:xfrm>
-          <a:prstGeom prst="rect">
-            <a:avLst/>
-          </a:prstGeom>
-          <a:noFill/>
-          <a:ln/>
-        </p:spPr>
-        <p:txBody>
-          <a:bodyPr wrap="square" lIns="0" tIns="0" rIns="0" bIns="0" rtlCol="0" anchor="b"/>
-          <a:lstStyle/>
-          <a:p>
-            <a:pPr marL="0" indent="0" algn="l">
-              <a:buNone/>
-            </a:pPr>
-            <a:r>
-              <a:rPr lang="en-US" sz="1100" b="1" dirty="0">
-                <a:solidFill>
-                  <a:srgbClr val="C94545"/>
-                </a:solidFill>
-                <a:latin typeface="Calibri" pitchFamily="34" charset="0"/>
-                <a:ea typeface="Calibri" pitchFamily="34" charset="-122"/>
-                <a:cs typeface="Calibri" pitchFamily="34" charset="-120"/>
-              </a:rPr>
-              <a:t>Between districts  0.5%</a:t>
-            </a:r>
-            <a:endParaRPr lang="en-US" sz="1100" dirty="0"/>
-          </a:p>
-        </p:txBody>
-      </p:sp>
-      <p:sp>
-        <p:nvSpPr>
-          <p:cNvPr id="40" name="Bar Label Individuals"/>
-          <p:cNvSpPr/>
-          <p:nvPr/>
-        </p:nvSpPr>
-        <p:spPr>
-          <a:xfrm>
-            <a:off x="3000000" y="2786968"/>
-            <a:ext cx="2852160" cy="220000"/>
-          </a:xfrm>
-          <a:prstGeom prst="rect">
-            <a:avLst/>
-          </a:prstGeom>
-          <a:noFill/>
-          <a:ln/>
-        </p:spPr>
-        <p:txBody>
-          <a:bodyPr wrap="square" lIns="0" tIns="0" rIns="0" bIns="0" rtlCol="0" anchor="b"/>
-          <a:lstStyle/>
-          <a:p>
-            <a:pPr marL="0" indent="0" algn="r">
-              <a:buNone/>
-            </a:pPr>
-            <a:r>
-              <a:rPr lang="en-US" sz="1100" b="1" dirty="0">
-                <a:solidFill>
-                  <a:srgbClr val="14263D"/>
-                </a:solidFill>
-                <a:latin typeface="Calibri" pitchFamily="34" charset="0"/>
-                <a:ea typeface="Calibri" pitchFamily="34" charset="-122"/>
-                <a:cs typeface="Calibri" pitchFamily="34" charset="-120"/>
-              </a:rPr>
-              <a:t>Between individuals  99.5%</a:t>
-            </a:r>
-            <a:endParaRPr lang="en-US" sz="1100" dirty="0"/>
-          </a:p>
-        </p:txBody>
-      </p:sp>
-      <p:sp>
-        <p:nvSpPr>
-          <p:cNvPr id="41" name="Bar Individuals"/>
-          <p:cNvSpPr/>
-          <p:nvPr/>
-        </p:nvSpPr>
-        <p:spPr>
-          <a:xfrm>
-            <a:off x="548640" y="3026968"/>
-            <a:ext cx="5303520" cy="160000"/>
-          </a:xfrm>
-          <a:prstGeom prst="rect">
-            <a:avLst/>
-          </a:prstGeom>
-          <a:solidFill>
-            <a:srgbClr val="14263D"/>
-          </a:solidFill>
-          <a:ln>
-            <a:noFill/>
-          </a:ln>
-        </p:spPr>
-        <p:txBody>
-          <a:bodyPr/>
-          <a:lstStyle/>
-          <a:p>
-            <a:endParaRPr lang="ko-KR" altLang="en-US"/>
-          </a:p>
-        </p:txBody>
-      </p:sp>
-      <p:sp>
-        <p:nvSpPr>
-          <p:cNvPr id="42" name="Bar Districts Sliver"/>
-          <p:cNvSpPr/>
-          <p:nvPr/>
-        </p:nvSpPr>
-        <p:spPr>
-          <a:xfrm>
-            <a:off x="548640" y="3026968"/>
-            <a:ext cx="130000" cy="160000"/>
-          </a:xfrm>
-          <a:prstGeom prst="rect">
-            <a:avLst/>
-          </a:prstGeom>
-          <a:solidFill>
-            <a:srgbClr val="C94545"/>
-          </a:solidFill>
-          <a:ln>
-            <a:noFill/>
-          </a:ln>
-        </p:spPr>
-        <p:txBody>
-          <a:bodyPr/>
-          <a:lstStyle/>
-          <a:p>
-            <a:endParaRPr lang="ko-KR" altLang="en-US"/>
-          </a:p>
-        </p:txBody>
-      </p:sp>
-      <p:sp>
-        <p:nvSpPr>
-          <p:cNvPr id="43" name="Caption Note"/>
-          <p:cNvSpPr/>
-          <p:nvPr/>
-        </p:nvSpPr>
-        <p:spPr>
-          <a:xfrm>
-            <a:off x="548640" y="3216968"/>
-            <a:ext cx="5303520" cy="140000"/>
-          </a:xfrm>
-          <a:prstGeom prst="rect">
-            <a:avLst/>
-          </a:prstGeom>
-          <a:noFill/>
-          <a:ln/>
-        </p:spPr>
-        <p:txBody>
-          <a:bodyPr wrap="square" lIns="0" tIns="0" rIns="0" bIns="0" rtlCol="0" anchor="t"/>
-          <a:lstStyle/>
-          <a:p>
-            <a:pPr marL="0" indent="0" algn="l">
-              <a:buNone/>
-            </a:pPr>
-            <a:r>
-              <a:rPr lang="en-US" sz="900" i="1" dirty="0">
-                <a:solidFill>
-                  <a:srgbClr val="8A8A8A"/>
-                </a:solidFill>
-                <a:latin typeface="Calibri" pitchFamily="34" charset="0"/>
-                <a:ea typeface="Calibri" pitchFamily="34" charset="-122"/>
-                <a:cs typeface="Calibri" pitchFamily="34" charset="-120"/>
-              </a:rPr>
-              <a:t>Variance decomposition from null HLM (bar widths schematic). ICC = 0.49%, design effect = 2.94.</a:t>
-            </a:r>
-            <a:endParaRPr lang="en-US" sz="900" dirty="0"/>
-          </a:p>
-        </p:txBody>
-      </p:sp>
-      <p:sp>
-        <p:nvSpPr>
           <p:cNvPr id="11" name="Shape 9"/>
           <p:cNvSpPr/>
           <p:nvPr/>
@@ -24820,7 +19586,7 @@
                 <a:ea typeface="Calibri" pitchFamily="34" charset="-122"/>
                 <a:cs typeface="Calibri" pitchFamily="34" charset="-120"/>
               </a:rPr>
-              <a:t>−22.6 pts</a:t>
+              <a:t>−18.4 pts</a:t>
             </a:r>
             <a:endParaRPr lang="en-US" sz="1600" dirty="0"/>
           </a:p>
@@ -24937,7 +19703,7 @@
                 <a:ea typeface="Calibri" pitchFamily="34" charset="-122"/>
                 <a:cs typeface="Calibri" pitchFamily="34" charset="-120"/>
               </a:rPr>
-              <a:t>−0.35 / yr</a:t>
+              <a:t>−0.34 / yr</a:t>
             </a:r>
             <a:endParaRPr lang="en-US" sz="1600" dirty="0"/>
           </a:p>
@@ -25015,7 +19781,7 @@
                 <a:ea typeface="Calibri" pitchFamily="34" charset="-122"/>
                 <a:cs typeface="Calibri" pitchFamily="34" charset="-120"/>
               </a:rPr>
-              <a:t>Elderly × 1-person HH</a:t>
+              <a:t>Single-person household</a:t>
             </a:r>
             <a:endParaRPr lang="en-US" sz="1400" dirty="0"/>
           </a:p>
@@ -25054,7 +19820,7 @@
                 <a:ea typeface="Calibri" pitchFamily="34" charset="-122"/>
                 <a:cs typeface="Calibri" pitchFamily="34" charset="-120"/>
               </a:rPr>
-              <a:t>−4.0 pts</a:t>
+              <a:t>−1.7 pts</a:t>
             </a:r>
             <a:endParaRPr lang="en-US" sz="1600" dirty="0"/>
           </a:p>
@@ -25171,7 +19937,7 @@
                 <a:ea typeface="Calibri" pitchFamily="34" charset="-122"/>
                 <a:cs typeface="Calibri" pitchFamily="34" charset="-120"/>
               </a:rPr>
-              <a:t>+2.9 pts</a:t>
+              <a:t>+3.1 pts</a:t>
             </a:r>
             <a:endParaRPr lang="en-US" sz="1600" dirty="0"/>
           </a:p>
@@ -25288,7 +20054,7 @@
                 <a:ea typeface="Calibri" pitchFamily="34" charset="-122"/>
                 <a:cs typeface="Calibri" pitchFamily="34" charset="-120"/>
               </a:rPr>
-              <a:t>−2.5 pts</a:t>
+              <a:t>−2.4 pts</a:t>
             </a:r>
             <a:endParaRPr lang="en-US" sz="1600" dirty="0"/>
           </a:p>
@@ -25450,9 +20216,36 @@
           </a:p>
         </p:txBody>
       </p:sp>
+      <p:sp>
+        <p:nvSpPr>
+          <p:cNvPr id="33" name="Shape 30"/>
+          <p:cNvSpPr/>
+          <p:nvPr/>
+        </p:nvSpPr>
+        <p:spPr>
+          <a:xfrm>
+            <a:off x="548640" y="6263640"/>
+            <a:ext cx="11064240" cy="7315"/>
+          </a:xfrm>
+          <a:prstGeom prst="rect">
+            <a:avLst/>
+          </a:prstGeom>
+          <a:solidFill>
+            <a:srgbClr val="D0D0D0"/>
+          </a:solidFill>
+          <a:ln/>
+        </p:spPr>
+        <p:txBody>
+          <a:bodyPr/>
+          <a:lstStyle/>
+          <a:p>
+            <a:endParaRPr lang="ko-KR" altLang="en-US"/>
+          </a:p>
+        </p:txBody>
+      </p:sp>
       <p:pic>
         <p:nvPicPr>
-          <p:cNvPr id="31" name="Image 0" descr="/home/claude/work/fig_forest_plot.png"/>
+          <p:cNvPr id="34" name="Image 1" descr="/home/claude/work/logo_gateway.jpeg"/>
           <p:cNvPicPr>
             <a:picLocks noChangeAspect="1"/>
           </p:cNvPicPr>
@@ -25460,51 +20253,23 @@
         </p:nvPicPr>
         <p:blipFill>
           <a:blip r:embed="rId3"/>
-          <a:srcRect t="4815" b="6781"/>
           <a:stretch>
             <a:fillRect/>
           </a:stretch>
         </p:blipFill>
         <p:spPr>
           <a:xfrm>
-            <a:off x="5853394" y="1501890"/>
-            <a:ext cx="5868224" cy="4183606"/>
+            <a:off x="9555480" y="6355080"/>
+            <a:ext cx="640080" cy="411480"/>
           </a:xfrm>
           <a:prstGeom prst="rect">
             <a:avLst/>
           </a:prstGeom>
         </p:spPr>
       </p:pic>
-      <p:sp>
-        <p:nvSpPr>
-          <p:cNvPr id="33" name="Shape 30"/>
-          <p:cNvSpPr/>
-          <p:nvPr/>
-        </p:nvSpPr>
-        <p:spPr>
-          <a:xfrm>
-            <a:off x="548640" y="6263640"/>
-            <a:ext cx="11064240" cy="7315"/>
-          </a:xfrm>
-          <a:prstGeom prst="rect">
-            <a:avLst/>
-          </a:prstGeom>
-          <a:solidFill>
-            <a:srgbClr val="D0D0D0"/>
-          </a:solidFill>
-          <a:ln/>
-        </p:spPr>
-        <p:txBody>
-          <a:bodyPr/>
-          <a:lstStyle/>
-          <a:p>
-            <a:endParaRPr lang="ko-KR" altLang="en-US"/>
-          </a:p>
-        </p:txBody>
-      </p:sp>
       <p:pic>
         <p:nvPicPr>
-          <p:cNvPr id="34" name="Image 1" descr="/home/claude/work/logo_gateway.jpeg"/>
+          <p:cNvPr id="35" name="Image 2" descr="/home/claude/work/logo_eu.jpeg"/>
           <p:cNvPicPr>
             <a:picLocks noChangeAspect="1"/>
           </p:cNvPicPr>
@@ -25518,30 +20283,6 @@
         </p:blipFill>
         <p:spPr>
           <a:xfrm>
-            <a:off x="9555480" y="6355080"/>
-            <a:ext cx="640080" cy="411480"/>
-          </a:xfrm>
-          <a:prstGeom prst="rect">
-            <a:avLst/>
-          </a:prstGeom>
-        </p:spPr>
-      </p:pic>
-      <p:pic>
-        <p:nvPicPr>
-          <p:cNvPr id="35" name="Image 2" descr="/home/claude/work/logo_eu.jpeg"/>
-          <p:cNvPicPr>
-            <a:picLocks noChangeAspect="1"/>
-          </p:cNvPicPr>
-          <p:nvPr/>
-        </p:nvPicPr>
-        <p:blipFill>
-          <a:blip r:embed="rId5"/>
-          <a:stretch>
-            <a:fillRect/>
-          </a:stretch>
-        </p:blipFill>
-        <p:spPr>
-          <a:xfrm>
             <a:off x="10296144" y="6400800"/>
             <a:ext cx="1280160" cy="320040"/>
           </a:xfrm>
@@ -25559,7 +20300,7 @@
           <p:nvPr/>
         </p:nvPicPr>
         <p:blipFill>
-          <a:blip r:embed="rId6"/>
+          <a:blip r:embed="rId5"/>
           <a:stretch>
             <a:fillRect/>
           </a:stretch>
@@ -25644,6 +20385,17 @@
               <a:buNone/>
             </a:pPr>
             <a:r>
+              <a:rPr lang="en-US" sz="1200" i="1">
+                <a:solidFill>
+                  <a:srgbClr val="6B6B6B"/>
+                </a:solidFill>
+                <a:latin typeface="Calibri" pitchFamily="34" charset="0"/>
+                <a:ea typeface="Calibri" pitchFamily="34" charset="-122"/>
+                <a:cs typeface="Calibri" pitchFamily="34" charset="-120"/>
+              </a:rPr>
+              <a:t>Model 3 </a:t>
+            </a:r>
+            <a:r>
               <a:rPr lang="en-US" sz="1200" i="1" dirty="0">
                 <a:solidFill>
                   <a:srgbClr val="6B6B6B"/>
@@ -25652,9 +20404,951 @@
                 <a:ea typeface="Calibri" pitchFamily="34" charset="-122"/>
                 <a:cs typeface="Calibri" pitchFamily="34" charset="-120"/>
               </a:rPr>
-              <a:t>Model 3 key fixed effects (95% CI).</a:t>
+              <a:t>vs Model 4</a:t>
             </a:r>
             <a:endParaRPr lang="en-US" sz="1200" dirty="0"/>
+          </a:p>
+        </p:txBody>
+      </p:sp>
+      <p:pic>
+        <p:nvPicPr>
+          <p:cNvPr id="44" name="Picture 43" descr="07_coefficient_comparison_ci.png"/>
+          <p:cNvPicPr>
+            <a:picLocks noChangeAspect="1"/>
+          </p:cNvPicPr>
+          <p:nvPr/>
+        </p:nvPicPr>
+        <p:blipFill>
+          <a:blip r:embed="rId6"/>
+          <a:stretch>
+            <a:fillRect/>
+          </a:stretch>
+        </p:blipFill>
+        <p:spPr>
+          <a:xfrm>
+            <a:off x="5852160" y="3671033"/>
+            <a:ext cx="5868224" cy="1909680"/>
+          </a:xfrm>
+          <a:prstGeom prst="rect">
+            <a:avLst/>
+          </a:prstGeom>
+        </p:spPr>
+      </p:pic>
+    </p:spTree>
+  </p:cSld>
+  <p:clrMapOvr>
+    <a:masterClrMapping/>
+  </p:clrMapOvr>
+</p:sld>
+</file>
+
+<file path=ppt/slides/slide9.xml><?xml version="1.0" encoding="utf-8"?>
+<p:sld xmlns:a="http://schemas.openxmlformats.org/drawingml/2006/main" xmlns:r="http://schemas.openxmlformats.org/officeDocument/2006/relationships" xmlns:p="http://schemas.openxmlformats.org/presentationml/2006/main">
+  <p:cSld>
+    <p:spTree>
+      <p:nvGrpSpPr>
+        <p:cNvPr id="1" name=""/>
+        <p:cNvGrpSpPr/>
+        <p:nvPr/>
+      </p:nvGrpSpPr>
+      <p:grpSpPr>
+        <a:xfrm>
+          <a:off x="0" y="0"/>
+          <a:ext cx="0" cy="0"/>
+          <a:chOff x="0" y="0"/>
+          <a:chExt cx="0" cy="0"/>
+        </a:xfrm>
+      </p:grpSpPr>
+      <p:sp>
+        <p:nvSpPr>
+          <p:cNvPr id="2" name="Text 0"/>
+          <p:cNvSpPr/>
+          <p:nvPr/>
+        </p:nvSpPr>
+        <p:spPr>
+          <a:xfrm>
+            <a:off x="548640" y="182880"/>
+            <a:ext cx="7315200" cy="201168"/>
+          </a:xfrm>
+          <a:prstGeom prst="rect">
+            <a:avLst/>
+          </a:prstGeom>
+          <a:noFill/>
+          <a:ln/>
+        </p:spPr>
+        <p:txBody>
+          <a:bodyPr wrap="square" lIns="0" tIns="0" rIns="0" bIns="0" rtlCol="0" anchor="ctr"/>
+          <a:lstStyle/>
+          <a:p>
+            <a:pPr marL="0" indent="0" algn="l">
+              <a:buNone/>
+            </a:pPr>
+            <a:r>
+              <a:rPr lang="en-US" sz="900" b="1" kern="0" spc="300" dirty="0">
+                <a:solidFill>
+                  <a:srgbClr val="2E869B"/>
+                </a:solidFill>
+                <a:latin typeface="Calibri" pitchFamily="34" charset="0"/>
+                <a:ea typeface="Calibri" pitchFamily="34" charset="-122"/>
+                <a:cs typeface="Calibri" pitchFamily="34" charset="-120"/>
+              </a:rPr>
+              <a:t>SECTION III  ·  PRELIMINARY RESULTS  ·  4 / 6</a:t>
+            </a:r>
+            <a:endParaRPr lang="en-US" sz="900" dirty="0"/>
+          </a:p>
+        </p:txBody>
+      </p:sp>
+      <p:sp>
+        <p:nvSpPr>
+          <p:cNvPr id="3" name="Text 1"/>
+          <p:cNvSpPr/>
+          <p:nvPr/>
+        </p:nvSpPr>
+        <p:spPr>
+          <a:xfrm>
+            <a:off x="548640" y="365760"/>
+            <a:ext cx="10058400" cy="594360"/>
+          </a:xfrm>
+          <a:prstGeom prst="rect">
+            <a:avLst/>
+          </a:prstGeom>
+          <a:noFill/>
+          <a:ln/>
+        </p:spPr>
+        <p:txBody>
+          <a:bodyPr wrap="square" lIns="0" tIns="0" rIns="0" bIns="0" rtlCol="0" anchor="b"/>
+          <a:lstStyle/>
+          <a:p>
+            <a:pPr marL="0" indent="0" algn="l">
+              <a:buNone/>
+            </a:pPr>
+            <a:r>
+              <a:rPr lang="en-US" sz="3000" b="1" dirty="0">
+                <a:solidFill>
+                  <a:srgbClr val="14263D"/>
+                </a:solidFill>
+                <a:latin typeface="Calibri" pitchFamily="34" charset="0"/>
+                <a:ea typeface="Calibri" pitchFamily="34" charset="-122"/>
+                <a:cs typeface="Calibri" pitchFamily="34" charset="-120"/>
+              </a:rPr>
+              <a:t>Does infrastructure offset individual vulnerability?</a:t>
+            </a:r>
+            <a:endParaRPr lang="en-US" sz="3000" dirty="0"/>
+          </a:p>
+        </p:txBody>
+      </p:sp>
+      <p:sp>
+        <p:nvSpPr>
+          <p:cNvPr id="6" name="Shape 4"/>
+          <p:cNvSpPr/>
+          <p:nvPr/>
+        </p:nvSpPr>
+        <p:spPr>
+          <a:xfrm>
+            <a:off x="548640" y="978408"/>
+            <a:ext cx="594360" cy="41148"/>
+          </a:xfrm>
+          <a:prstGeom prst="rect">
+            <a:avLst/>
+          </a:prstGeom>
+          <a:solidFill>
+            <a:srgbClr val="2E869B"/>
+          </a:solidFill>
+          <a:ln/>
+        </p:spPr>
+        <p:txBody>
+          <a:bodyPr/>
+          <a:lstStyle/>
+          <a:p>
+            <a:endParaRPr lang="ko-KR" altLang="en-US"/>
+          </a:p>
+        </p:txBody>
+      </p:sp>
+      <p:sp>
+        <p:nvSpPr>
+          <p:cNvPr id="7" name="Text 5"/>
+          <p:cNvSpPr/>
+          <p:nvPr/>
+        </p:nvSpPr>
+        <p:spPr>
+          <a:xfrm>
+            <a:off x="548640" y="1069848"/>
+            <a:ext cx="11064240" cy="320040"/>
+          </a:xfrm>
+          <a:prstGeom prst="rect">
+            <a:avLst/>
+          </a:prstGeom>
+          <a:noFill/>
+          <a:ln/>
+        </p:spPr>
+        <p:txBody>
+          <a:bodyPr wrap="square" lIns="0" tIns="0" rIns="0" bIns="0" rtlCol="0" anchor="t"/>
+          <a:lstStyle/>
+          <a:p>
+            <a:pPr marL="0" indent="0" algn="l">
+              <a:buNone/>
+            </a:pPr>
+            <a:r>
+              <a:rPr lang="en-US" sz="1400" dirty="0">
+                <a:solidFill>
+                  <a:srgbClr val="6B6B6B"/>
+                </a:solidFill>
+                <a:latin typeface="Calibri" pitchFamily="34" charset="0"/>
+                <a:ea typeface="Calibri" pitchFamily="34" charset="-122"/>
+                <a:cs typeface="Calibri" pitchFamily="34" charset="-120"/>
+              </a:rPr>
+              <a:t>HLM: cross-level interactions</a:t>
+            </a:r>
+            <a:endParaRPr lang="en-US" sz="1400" dirty="0"/>
+          </a:p>
+        </p:txBody>
+      </p:sp>
+      <p:sp>
+        <p:nvSpPr>
+          <p:cNvPr id="9" name="Text 6"/>
+          <p:cNvSpPr/>
+          <p:nvPr/>
+        </p:nvSpPr>
+        <p:spPr>
+          <a:xfrm>
+            <a:off x="365760" y="5917401"/>
+            <a:ext cx="7315200" cy="228600"/>
+          </a:xfrm>
+          <a:prstGeom prst="rect">
+            <a:avLst/>
+          </a:prstGeom>
+          <a:noFill/>
+          <a:ln/>
+        </p:spPr>
+        <p:txBody>
+          <a:bodyPr wrap="square" lIns="0" tIns="0" rIns="0" bIns="0" rtlCol="0" anchor="ctr"/>
+          <a:lstStyle/>
+          <a:p>
+            <a:pPr marL="0" indent="0" algn="ctr">
+              <a:buNone/>
+            </a:pPr>
+            <a:r>
+              <a:rPr lang="en-US" sz="1200" i="1" dirty="0">
+                <a:solidFill>
+                  <a:srgbClr val="6B6B6B"/>
+                </a:solidFill>
+                <a:latin typeface="Calibri" pitchFamily="34" charset="0"/>
+                <a:ea typeface="Calibri" pitchFamily="34" charset="-122"/>
+                <a:cs typeface="Calibri" pitchFamily="34" charset="-120"/>
+              </a:rPr>
+              <a:t>Cross-level interactions: how district-level UMC dimensions interact with vulnerable groups.</a:t>
+            </a:r>
+            <a:endParaRPr lang="en-US" sz="1200" dirty="0"/>
+          </a:p>
+        </p:txBody>
+      </p:sp>
+      <p:sp>
+        <p:nvSpPr>
+          <p:cNvPr id="10" name="Text 7"/>
+          <p:cNvSpPr/>
+          <p:nvPr/>
+        </p:nvSpPr>
+        <p:spPr>
+          <a:xfrm>
+            <a:off x="566928" y="1538415"/>
+            <a:ext cx="2603784" cy="239623"/>
+          </a:xfrm>
+          <a:prstGeom prst="rect">
+            <a:avLst/>
+          </a:prstGeom>
+          <a:noFill/>
+          <a:ln/>
+        </p:spPr>
+        <p:txBody>
+          <a:bodyPr wrap="square" lIns="0" tIns="0" rIns="0" bIns="0" rtlCol="0" anchor="ctr"/>
+          <a:lstStyle/>
+          <a:p>
+            <a:pPr marL="0" indent="0" algn="l">
+              <a:buNone/>
+            </a:pPr>
+            <a:r>
+              <a:rPr lang="en-US" sz="1600" b="1" kern="0" spc="200" dirty="0">
+                <a:solidFill>
+                  <a:srgbClr val="2E869B"/>
+                </a:solidFill>
+                <a:latin typeface="Calibri" pitchFamily="34" charset="0"/>
+                <a:ea typeface="Calibri" pitchFamily="34" charset="-122"/>
+                <a:cs typeface="Calibri" pitchFamily="34" charset="-120"/>
+              </a:rPr>
+              <a:t>MAIN EFFECT</a:t>
+            </a:r>
+            <a:endParaRPr lang="en-US" sz="1600" dirty="0"/>
+          </a:p>
+        </p:txBody>
+      </p:sp>
+      <p:sp>
+        <p:nvSpPr>
+          <p:cNvPr id="11" name="Text 8"/>
+          <p:cNvSpPr/>
+          <p:nvPr/>
+        </p:nvSpPr>
+        <p:spPr>
+          <a:xfrm>
+            <a:off x="566928" y="1862163"/>
+            <a:ext cx="5132833" cy="500000"/>
+          </a:xfrm>
+          <a:prstGeom prst="rect">
+            <a:avLst/>
+          </a:prstGeom>
+          <a:noFill/>
+          <a:ln/>
+        </p:spPr>
+        <p:txBody>
+          <a:bodyPr wrap="square" lIns="0" tIns="0" rIns="0" bIns="0" rtlCol="0" anchor="t"/>
+          <a:lstStyle/>
+          <a:p>
+            <a:pPr marL="0" indent="0" algn="l">
+              <a:lnSpc>
+                <a:spcPct val="110000"/>
+              </a:lnSpc>
+              <a:buNone/>
+            </a:pPr>
+            <a:r>
+              <a:rPr lang="en-US" sz="1300" dirty="0">
+                <a:solidFill>
+                  <a:srgbClr val="333333"/>
+                </a:solidFill>
+                <a:latin typeface="Calibri" pitchFamily="34" charset="0"/>
+                <a:ea typeface="Calibri" pitchFamily="34" charset="-122"/>
+                <a:cs typeface="Calibri" pitchFamily="34" charset="-120"/>
+              </a:rPr>
+              <a:t>District-level UMC dimensions show only weak, contextual associations with individual digital use.</a:t>
+            </a:r>
+            <a:endParaRPr lang="en-US" sz="1300" dirty="0"/>
+          </a:p>
+        </p:txBody>
+      </p:sp>
+      <p:sp>
+        <p:nvSpPr>
+          <p:cNvPr id="12" name="Shape 9"/>
+          <p:cNvSpPr/>
+          <p:nvPr/>
+        </p:nvSpPr>
+        <p:spPr>
+          <a:xfrm>
+            <a:off x="7794639" y="2407095"/>
+            <a:ext cx="4023360" cy="7315"/>
+          </a:xfrm>
+          <a:prstGeom prst="rect">
+            <a:avLst/>
+          </a:prstGeom>
+          <a:solidFill>
+            <a:srgbClr val="D0D0D0"/>
+          </a:solidFill>
+          <a:ln/>
+        </p:spPr>
+        <p:txBody>
+          <a:bodyPr/>
+          <a:lstStyle/>
+          <a:p>
+            <a:endParaRPr lang="ko-KR" altLang="en-US"/>
+          </a:p>
+        </p:txBody>
+      </p:sp>
+      <p:sp>
+        <p:nvSpPr>
+          <p:cNvPr id="13" name="Text 10"/>
+          <p:cNvSpPr/>
+          <p:nvPr/>
+        </p:nvSpPr>
+        <p:spPr>
+          <a:xfrm>
+            <a:off x="566928" y="2544255"/>
+            <a:ext cx="2995669" cy="268971"/>
+          </a:xfrm>
+          <a:prstGeom prst="rect">
+            <a:avLst/>
+          </a:prstGeom>
+          <a:noFill/>
+          <a:ln/>
+        </p:spPr>
+        <p:txBody>
+          <a:bodyPr wrap="square" lIns="0" tIns="0" rIns="0" bIns="0" rtlCol="0" anchor="ctr"/>
+          <a:lstStyle/>
+          <a:p>
+            <a:pPr marL="0" indent="0" algn="l">
+              <a:buNone/>
+            </a:pPr>
+            <a:r>
+              <a:rPr lang="en-US" sz="1400" b="1" kern="0" spc="200" dirty="0">
+                <a:solidFill>
+                  <a:srgbClr val="2E869B"/>
+                </a:solidFill>
+                <a:latin typeface="Calibri" pitchFamily="34" charset="0"/>
+                <a:ea typeface="Calibri" pitchFamily="34" charset="-122"/>
+                <a:cs typeface="Calibri" pitchFamily="34" charset="-120"/>
+              </a:rPr>
+              <a:t>CROSS-LEVEL INTERACTIONS</a:t>
+            </a:r>
+            <a:endParaRPr lang="en-US" sz="1400" dirty="0"/>
+          </a:p>
+        </p:txBody>
+      </p:sp>
+      <p:sp>
+        <p:nvSpPr>
+          <p:cNvPr id="14" name="Text 11"/>
+          <p:cNvSpPr/>
+          <p:nvPr/>
+        </p:nvSpPr>
+        <p:spPr>
+          <a:xfrm>
+            <a:off x="566928" y="2864295"/>
+            <a:ext cx="3291840" cy="300000"/>
+          </a:xfrm>
+          <a:prstGeom prst="rect">
+            <a:avLst/>
+          </a:prstGeom>
+          <a:noFill/>
+          <a:ln/>
+        </p:spPr>
+        <p:txBody>
+          <a:bodyPr wrap="square" lIns="0" tIns="0" rIns="0" bIns="0" rtlCol="0" anchor="ctr"/>
+          <a:lstStyle/>
+          <a:p>
+            <a:pPr marL="0" indent="0" algn="l">
+              <a:buNone/>
+            </a:pPr>
+            <a:r>
+              <a:rPr lang="en-US" sz="1300" dirty="0">
+                <a:solidFill>
+                  <a:srgbClr val="333333"/>
+                </a:solidFill>
+                <a:latin typeface="Calibri" pitchFamily="34" charset="0"/>
+                <a:ea typeface="Calibri" pitchFamily="34" charset="-122"/>
+                <a:cs typeface="Calibri" pitchFamily="34" charset="-120"/>
+              </a:rPr>
+              <a:t>Connectivity × low education</a:t>
+            </a:r>
+            <a:endParaRPr lang="en-US" sz="1300" dirty="0"/>
+          </a:p>
+        </p:txBody>
+      </p:sp>
+      <p:sp>
+        <p:nvSpPr>
+          <p:cNvPr id="15" name="Text 12"/>
+          <p:cNvSpPr/>
+          <p:nvPr/>
+        </p:nvSpPr>
+        <p:spPr>
+          <a:xfrm>
+            <a:off x="3950208" y="2864295"/>
+            <a:ext cx="2194560" cy="300000"/>
+          </a:xfrm>
+          <a:prstGeom prst="rect">
+            <a:avLst/>
+          </a:prstGeom>
+          <a:noFill/>
+          <a:ln/>
+        </p:spPr>
+        <p:txBody>
+          <a:bodyPr wrap="square" lIns="0" tIns="0" rIns="0" bIns="0" rtlCol="0" anchor="ctr"/>
+          <a:lstStyle/>
+          <a:p>
+            <a:pPr marL="0" indent="0" algn="r">
+              <a:buNone/>
+            </a:pPr>
+            <a:r>
+              <a:rPr lang="en-US" sz="1400" b="1" dirty="0">
+                <a:solidFill>
+                  <a:srgbClr val="14263D"/>
+                </a:solidFill>
+                <a:latin typeface="Calibri" pitchFamily="34" charset="0"/>
+                <a:ea typeface="Calibri" pitchFamily="34" charset="-122"/>
+                <a:cs typeface="Calibri" pitchFamily="34" charset="-120"/>
+              </a:rPr>
+              <a:t>+4.66  n.s. (M3)</a:t>
+            </a:r>
+            <a:endParaRPr lang="en-US" sz="1400" dirty="0"/>
+          </a:p>
+        </p:txBody>
+      </p:sp>
+      <p:sp>
+        <p:nvSpPr>
+          <p:cNvPr id="16" name="Text 13"/>
+          <p:cNvSpPr/>
+          <p:nvPr/>
+        </p:nvSpPr>
+        <p:spPr>
+          <a:xfrm>
+            <a:off x="566928" y="3164295"/>
+            <a:ext cx="3291840" cy="300000"/>
+          </a:xfrm>
+          <a:prstGeom prst="rect">
+            <a:avLst/>
+          </a:prstGeom>
+          <a:noFill/>
+          <a:ln/>
+        </p:spPr>
+        <p:txBody>
+          <a:bodyPr wrap="square" lIns="0" tIns="0" rIns="0" bIns="0" rtlCol="0" anchor="ctr"/>
+          <a:lstStyle/>
+          <a:p>
+            <a:pPr marL="0" indent="0" algn="l">
+              <a:buNone/>
+            </a:pPr>
+            <a:r>
+              <a:rPr lang="en-US" sz="1300" dirty="0">
+                <a:solidFill>
+                  <a:srgbClr val="6B6B6B"/>
+                </a:solidFill>
+                <a:latin typeface="Calibri" pitchFamily="34" charset="0"/>
+                <a:ea typeface="Calibri" pitchFamily="34" charset="-122"/>
+                <a:cs typeface="Calibri" pitchFamily="34" charset="-120"/>
+              </a:rPr>
+              <a:t>Age × low education</a:t>
+            </a:r>
+            <a:endParaRPr lang="en-US" sz="1300" dirty="0"/>
+          </a:p>
+        </p:txBody>
+      </p:sp>
+      <p:sp>
+        <p:nvSpPr>
+          <p:cNvPr id="17" name="Text 14"/>
+          <p:cNvSpPr/>
+          <p:nvPr/>
+        </p:nvSpPr>
+        <p:spPr>
+          <a:xfrm>
+            <a:off x="3950208" y="3164295"/>
+            <a:ext cx="2194560" cy="300000"/>
+          </a:xfrm>
+          <a:prstGeom prst="rect">
+            <a:avLst/>
+          </a:prstGeom>
+          <a:noFill/>
+          <a:ln/>
+        </p:spPr>
+        <p:txBody>
+          <a:bodyPr wrap="square" lIns="0" tIns="0" rIns="0" bIns="0" rtlCol="0" anchor="ctr"/>
+          <a:lstStyle/>
+          <a:p>
+            <a:pPr marL="0" indent="0" algn="r">
+              <a:buNone/>
+            </a:pPr>
+            <a:r>
+              <a:rPr lang="en-US" sz="1400" b="1" dirty="0">
+                <a:solidFill>
+                  <a:srgbClr val="8A8A8A"/>
+                </a:solidFill>
+                <a:latin typeface="Calibri" pitchFamily="34" charset="0"/>
+                <a:ea typeface="Calibri" pitchFamily="34" charset="-122"/>
+                <a:cs typeface="Calibri" pitchFamily="34" charset="-120"/>
+              </a:rPr>
+              <a:t>−0.40  *** (M3)</a:t>
+            </a:r>
+            <a:endParaRPr lang="en-US" sz="1400" dirty="0"/>
+          </a:p>
+        </p:txBody>
+      </p:sp>
+      <p:sp>
+        <p:nvSpPr>
+          <p:cNvPr id="18" name="Text 15"/>
+          <p:cNvSpPr/>
+          <p:nvPr/>
+        </p:nvSpPr>
+        <p:spPr>
+          <a:xfrm>
+            <a:off x="566928" y="3464295"/>
+            <a:ext cx="3291840" cy="300000"/>
+          </a:xfrm>
+          <a:prstGeom prst="rect">
+            <a:avLst/>
+          </a:prstGeom>
+          <a:noFill/>
+          <a:ln/>
+        </p:spPr>
+        <p:txBody>
+          <a:bodyPr wrap="square" lIns="0" tIns="0" rIns="0" bIns="0" rtlCol="0" anchor="ctr"/>
+          <a:lstStyle/>
+          <a:p>
+            <a:pPr marL="0" indent="0" algn="l">
+              <a:buNone/>
+            </a:pPr>
+            <a:r>
+              <a:rPr lang="en-US" sz="1300" dirty="0">
+                <a:solidFill>
+                  <a:srgbClr val="6B6B6B"/>
+                </a:solidFill>
+                <a:latin typeface="Calibri" pitchFamily="34" charset="0"/>
+                <a:ea typeface="Calibri" pitchFamily="34" charset="-122"/>
+                <a:cs typeface="Calibri" pitchFamily="34" charset="-120"/>
+              </a:rPr>
+              <a:t>Older (65+) × low education</a:t>
+            </a:r>
+            <a:endParaRPr lang="en-US" sz="1300" dirty="0"/>
+          </a:p>
+        </p:txBody>
+      </p:sp>
+      <p:sp>
+        <p:nvSpPr>
+          <p:cNvPr id="19" name="Text 16"/>
+          <p:cNvSpPr/>
+          <p:nvPr/>
+        </p:nvSpPr>
+        <p:spPr>
+          <a:xfrm>
+            <a:off x="3950208" y="3464295"/>
+            <a:ext cx="2194560" cy="300000"/>
+          </a:xfrm>
+          <a:prstGeom prst="rect">
+            <a:avLst/>
+          </a:prstGeom>
+          <a:noFill/>
+          <a:ln/>
+        </p:spPr>
+        <p:txBody>
+          <a:bodyPr wrap="square" lIns="0" tIns="0" rIns="0" bIns="0" rtlCol="0" anchor="ctr"/>
+          <a:lstStyle/>
+          <a:p>
+            <a:pPr marL="0" indent="0" algn="r">
+              <a:buNone/>
+            </a:pPr>
+            <a:r>
+              <a:rPr lang="en-US" sz="1400" b="1" dirty="0">
+                <a:solidFill>
+                  <a:srgbClr val="8A8A8A"/>
+                </a:solidFill>
+                <a:latin typeface="Calibri" pitchFamily="34" charset="0"/>
+                <a:ea typeface="Calibri" pitchFamily="34" charset="-122"/>
+                <a:cs typeface="Calibri" pitchFamily="34" charset="-120"/>
+              </a:rPr>
+              <a:t>−3.53  * (M4 supp.)</a:t>
+            </a:r>
+            <a:endParaRPr lang="en-US" sz="1400" dirty="0"/>
+          </a:p>
+        </p:txBody>
+      </p:sp>
+      <p:sp>
+        <p:nvSpPr>
+          <p:cNvPr id="50" name="Text Row 4 Label"/>
+          <p:cNvSpPr/>
+          <p:nvPr/>
+        </p:nvSpPr>
+        <p:spPr>
+          <a:xfrm>
+            <a:off x="566928" y="3764295"/>
+            <a:ext cx="3291840" cy="300000"/>
+          </a:xfrm>
+          <a:prstGeom prst="rect">
+            <a:avLst/>
+          </a:prstGeom>
+          <a:noFill/>
+          <a:ln/>
+        </p:spPr>
+        <p:txBody>
+          <a:bodyPr wrap="square" lIns="0" tIns="0" rIns="0" bIns="0" rtlCol="0" anchor="ctr"/>
+          <a:lstStyle/>
+          <a:p>
+            <a:pPr marL="0" indent="0" algn="l">
+              <a:buNone/>
+            </a:pPr>
+            <a:r>
+              <a:rPr lang="en-US" sz="1300" dirty="0">
+                <a:solidFill>
+                  <a:srgbClr val="6B6B6B"/>
+                </a:solidFill>
+                <a:latin typeface="Calibri" pitchFamily="34" charset="0"/>
+                <a:ea typeface="Calibri" pitchFamily="34" charset="-122"/>
+                <a:cs typeface="Calibri" pitchFamily="34" charset="-120"/>
+              </a:rPr>
+              <a:t>L2 Affordability (main)</a:t>
+            </a:r>
+            <a:endParaRPr lang="en-US" sz="1300" dirty="0"/>
+          </a:p>
+        </p:txBody>
+      </p:sp>
+      <p:sp>
+        <p:nvSpPr>
+          <p:cNvPr id="51" name="Text Row 4 Value"/>
+          <p:cNvSpPr/>
+          <p:nvPr/>
+        </p:nvSpPr>
+        <p:spPr>
+          <a:xfrm>
+            <a:off x="3950208" y="3764295"/>
+            <a:ext cx="2194560" cy="300000"/>
+          </a:xfrm>
+          <a:prstGeom prst="rect">
+            <a:avLst/>
+          </a:prstGeom>
+          <a:noFill/>
+          <a:ln/>
+        </p:spPr>
+        <p:txBody>
+          <a:bodyPr wrap="square" lIns="0" tIns="0" rIns="0" bIns="0" rtlCol="0" anchor="ctr"/>
+          <a:lstStyle/>
+          <a:p>
+            <a:pPr marL="0" indent="0" algn="r">
+              <a:buNone/>
+            </a:pPr>
+            <a:r>
+              <a:rPr lang="en-US" sz="1400" b="1" dirty="0">
+                <a:solidFill>
+                  <a:srgbClr val="8A8A8A"/>
+                </a:solidFill>
+                <a:latin typeface="Calibri" pitchFamily="34" charset="0"/>
+                <a:ea typeface="Calibri" pitchFamily="34" charset="-122"/>
+                <a:cs typeface="Calibri" pitchFamily="34" charset="-120"/>
+              </a:rPr>
+              <a:t>−1.35  † (M3)</a:t>
+            </a:r>
+            <a:endParaRPr lang="en-US" sz="1400" dirty="0"/>
+          </a:p>
+        </p:txBody>
+      </p:sp>
+      <p:sp>
+        <p:nvSpPr>
+          <p:cNvPr id="20" name="Shape 17"/>
+          <p:cNvSpPr/>
+          <p:nvPr/>
+        </p:nvSpPr>
+        <p:spPr>
+          <a:xfrm>
+            <a:off x="6492240" y="1554480"/>
+            <a:ext cx="5120640" cy="4480560"/>
+          </a:xfrm>
+          <a:prstGeom prst="roundRect">
+            <a:avLst>
+              <a:gd name="adj" fmla="val 2703"/>
+            </a:avLst>
+          </a:prstGeom>
+          <a:solidFill>
+            <a:srgbClr val="1F3864"/>
+          </a:solidFill>
+          <a:ln/>
+        </p:spPr>
+        <p:txBody>
+          <a:bodyPr/>
+          <a:lstStyle/>
+          <a:p>
+            <a:endParaRPr lang="ko-KR" altLang="en-US"/>
+          </a:p>
+        </p:txBody>
+      </p:sp>
+      <p:sp>
+        <p:nvSpPr>
+          <p:cNvPr id="21" name="Text 18"/>
+          <p:cNvSpPr/>
+          <p:nvPr/>
+        </p:nvSpPr>
+        <p:spPr>
+          <a:xfrm>
+            <a:off x="6693408" y="1691640"/>
+            <a:ext cx="4754880" cy="274320"/>
+          </a:xfrm>
+          <a:prstGeom prst="rect">
+            <a:avLst/>
+          </a:prstGeom>
+          <a:noFill/>
+          <a:ln/>
+        </p:spPr>
+        <p:txBody>
+          <a:bodyPr wrap="square" lIns="0" tIns="0" rIns="0" bIns="0" rtlCol="0" anchor="ctr"/>
+          <a:lstStyle/>
+          <a:p>
+            <a:pPr marL="0" indent="0" algn="l">
+              <a:buNone/>
+            </a:pPr>
+            <a:r>
+              <a:rPr lang="en-US" sz="1600" b="1" kern="0" spc="200" dirty="0">
+                <a:solidFill>
+                  <a:srgbClr val="7FE4C4"/>
+                </a:solidFill>
+                <a:latin typeface="Calibri" pitchFamily="34" charset="0"/>
+                <a:ea typeface="Calibri" pitchFamily="34" charset="-122"/>
+                <a:cs typeface="Calibri" pitchFamily="34" charset="-120"/>
+              </a:rPr>
+              <a:t>INTERPRETATION</a:t>
+            </a:r>
+            <a:endParaRPr lang="en-US" sz="1600" dirty="0"/>
+          </a:p>
+        </p:txBody>
+      </p:sp>
+      <p:sp>
+        <p:nvSpPr>
+          <p:cNvPr id="22" name="Text 19"/>
+          <p:cNvSpPr/>
+          <p:nvPr/>
+        </p:nvSpPr>
+        <p:spPr>
+          <a:xfrm>
+            <a:off x="6693408" y="2011680"/>
+            <a:ext cx="4754880" cy="3840480"/>
+          </a:xfrm>
+          <a:prstGeom prst="rect">
+            <a:avLst/>
+          </a:prstGeom>
+          <a:noFill/>
+          <a:ln/>
+        </p:spPr>
+        <p:txBody>
+          <a:bodyPr wrap="square" lIns="0" tIns="0" rIns="0" bIns="0" rtlCol="0" anchor="t"/>
+          <a:lstStyle/>
+          <a:p>
+            <a:pPr marL="0" indent="0" algn="l">
+              <a:lnSpc>
+                <a:spcPct val="115000"/>
+              </a:lnSpc>
+              <a:spcAft>
+                <a:spcPts val="400"/>
+              </a:spcAft>
+              <a:buNone/>
+            </a:pPr>
+            <a:r>
+              <a:rPr lang="en-US" sz="1200" dirty="0">
+                <a:solidFill>
+                  <a:srgbClr val="FFFFFF"/>
+                </a:solidFill>
+                <a:latin typeface="Calibri" pitchFamily="34" charset="0"/>
+                <a:ea typeface="Calibri" pitchFamily="34" charset="-122"/>
+                <a:cs typeface="Calibri" pitchFamily="34" charset="-120"/>
+              </a:rPr>
+              <a:t>Retained interactions are individual-level: the low-education penalty steepens with age (Age × low education −0.40***, M3) and with being 65+ (Older × low education −3.53*, M4 supplementary). District-level UMC dimensions show only weak, marginal main associations (Connectivity −1.34†, Affordability −1.35† in M3); the Connectivity × low-education term is positive but non-significant (+4.66, p=.16). District scores locate where vulnerable residents concentrate — supporting place-sensitive (not place-based) targeting.</a:t>
+            </a:r>
+            <a:endParaRPr lang="en-US" sz="1200" dirty="0"/>
+          </a:p>
+        </p:txBody>
+      </p:sp>
+      <p:sp>
+        <p:nvSpPr>
+          <p:cNvPr id="23" name="Shape 20"/>
+          <p:cNvSpPr/>
+          <p:nvPr/>
+        </p:nvSpPr>
+        <p:spPr>
+          <a:xfrm>
+            <a:off x="548640" y="6263640"/>
+            <a:ext cx="11064240" cy="7315"/>
+          </a:xfrm>
+          <a:prstGeom prst="rect">
+            <a:avLst/>
+          </a:prstGeom>
+          <a:solidFill>
+            <a:srgbClr val="D0D0D0"/>
+          </a:solidFill>
+          <a:ln/>
+        </p:spPr>
+        <p:txBody>
+          <a:bodyPr/>
+          <a:lstStyle/>
+          <a:p>
+            <a:endParaRPr lang="ko-KR" altLang="en-US"/>
+          </a:p>
+        </p:txBody>
+      </p:sp>
+      <p:pic>
+        <p:nvPicPr>
+          <p:cNvPr id="24" name="Image 1" descr="/home/claude/work/logo_gateway.jpeg"/>
+          <p:cNvPicPr>
+            <a:picLocks noChangeAspect="1"/>
+          </p:cNvPicPr>
+          <p:nvPr/>
+        </p:nvPicPr>
+        <p:blipFill>
+          <a:blip r:embed="rId3"/>
+          <a:stretch>
+            <a:fillRect/>
+          </a:stretch>
+        </p:blipFill>
+        <p:spPr>
+          <a:xfrm>
+            <a:off x="9555480" y="6355080"/>
+            <a:ext cx="640080" cy="411480"/>
+          </a:xfrm>
+          <a:prstGeom prst="rect">
+            <a:avLst/>
+          </a:prstGeom>
+        </p:spPr>
+      </p:pic>
+      <p:pic>
+        <p:nvPicPr>
+          <p:cNvPr id="25" name="Image 2" descr="/home/claude/work/logo_eu.jpeg"/>
+          <p:cNvPicPr>
+            <a:picLocks noChangeAspect="1"/>
+          </p:cNvPicPr>
+          <p:nvPr/>
+        </p:nvPicPr>
+        <p:blipFill>
+          <a:blip r:embed="rId4"/>
+          <a:stretch>
+            <a:fillRect/>
+          </a:stretch>
+        </p:blipFill>
+        <p:spPr>
+          <a:xfrm>
+            <a:off x="10296144" y="6400800"/>
+            <a:ext cx="1280160" cy="320040"/>
+          </a:xfrm>
+          <a:prstGeom prst="rect">
+            <a:avLst/>
+          </a:prstGeom>
+        </p:spPr>
+      </p:pic>
+      <p:pic>
+        <p:nvPicPr>
+          <p:cNvPr id="26" name="Image 3" descr="/home/claude/work/logo_itu.png"/>
+          <p:cNvPicPr>
+            <a:picLocks noChangeAspect="1"/>
+          </p:cNvPicPr>
+          <p:nvPr/>
+        </p:nvPicPr>
+        <p:blipFill>
+          <a:blip r:embed="rId5"/>
+          <a:stretch>
+            <a:fillRect/>
+          </a:stretch>
+        </p:blipFill>
+        <p:spPr>
+          <a:xfrm>
+            <a:off x="11686032" y="6355080"/>
+            <a:ext cx="411480" cy="411480"/>
+          </a:xfrm>
+          <a:prstGeom prst="rect">
+            <a:avLst/>
+          </a:prstGeom>
+        </p:spPr>
+      </p:pic>
+      <p:sp>
+        <p:nvSpPr>
+          <p:cNvPr id="27" name="Text 21"/>
+          <p:cNvSpPr/>
+          <p:nvPr/>
+        </p:nvSpPr>
+        <p:spPr>
+          <a:xfrm>
+            <a:off x="548640" y="6565392"/>
+            <a:ext cx="1371600" cy="201168"/>
+          </a:xfrm>
+          <a:prstGeom prst="rect">
+            <a:avLst/>
+          </a:prstGeom>
+          <a:noFill/>
+          <a:ln/>
+        </p:spPr>
+        <p:txBody>
+          <a:bodyPr wrap="square" lIns="0" tIns="0" rIns="0" bIns="0" rtlCol="0" anchor="ctr"/>
+          <a:lstStyle/>
+          <a:p>
+            <a:pPr marL="0" indent="0" algn="l">
+              <a:buNone/>
+            </a:pPr>
+            <a:r>
+              <a:rPr lang="en-US" sz="900" dirty="0">
+                <a:solidFill>
+                  <a:srgbClr val="B0B0B0"/>
+                </a:solidFill>
+                <a:latin typeface="Calibri" pitchFamily="34" charset="0"/>
+                <a:ea typeface="Calibri" pitchFamily="34" charset="-122"/>
+                <a:cs typeface="Calibri" pitchFamily="34" charset="-120"/>
+              </a:rPr>
+              <a:t>10 / 13</a:t>
+            </a:r>
+            <a:endParaRPr lang="en-US" sz="900" dirty="0"/>
           </a:p>
         </p:txBody>
       </p:sp>

--- a/ppt/HighFive_Step3_Submission.pptx
+++ b/ppt/HighFive_Step3_Submission.pptx
@@ -2047,7 +2047,7 @@
                 <a:ea typeface="Calibri" pitchFamily="34" charset="-122"/>
                 <a:cs typeface="Calibri" pitchFamily="34" charset="-120"/>
               </a:rPr>
-              <a:t>Seoul — a hard case for testing UMC.</a:t>
+              <a:t>Seoul: a demanding test case for universal meaningful connectivity.</a:t>
             </a:r>
             <a:endParaRPr lang="en-US" sz="2000" dirty="0"/>
           </a:p>
@@ -2166,7 +2166,7 @@
                 <a:ea typeface="Calibri" pitchFamily="34" charset="-122"/>
                 <a:cs typeface="Calibri" pitchFamily="34" charset="-120"/>
               </a:rPr>
-              <a:t>. Seoul is therefore the natural setting for asking how UMC should be defined and measured beyond infrastructure.</a:t>
+              <a:t>. Seoul therefore offers a setting for asking how UMC should be defined and measured beyond infrastructure.</a:t>
             </a:r>
             <a:endParaRPr lang="en-US" sz="1400" dirty="0"/>
           </a:p>
@@ -3458,7 +3458,7 @@
                 <a:ea typeface="Calibri" pitchFamily="34" charset="-122"/>
                 <a:cs typeface="Calibri" pitchFamily="34" charset="-120"/>
               </a:rPr>
-              <a:t>Where infrastructure indicators may miss the problem</a:t>
+              <a:t>Where measured indicators and platform signals diverge</a:t>
             </a:r>
             <a:endParaRPr lang="en-US" sz="3000" dirty="0"/>
           </a:p>
@@ -4449,7 +4449,7 @@
                   <a:ea typeface="Calibri" pitchFamily="34" charset="-122"/>
                   <a:cs typeface="Calibri" pitchFamily="34" charset="-120"/>
                 </a:rPr>
-                <a:t>POSITIVE shift</a:t>
+                <a:t>Positive shift</a:t>
               </a:r>
               <a:r>
                 <a:rPr lang="en-US" sz="1600" dirty="0">
@@ -4500,7 +4500,7 @@
                   <a:ea typeface="Calibri" pitchFamily="34" charset="-122"/>
                   <a:cs typeface="Calibri" pitchFamily="34" charset="-120"/>
                 </a:rPr>
-                <a:t>NEGATIVE shift</a:t>
+                <a:t>Negative shift</a:t>
               </a:r>
               <a:r>
                 <a:rPr lang="en-US" sz="1600" dirty="0">
@@ -4766,7 +4766,7 @@
                   <a:ea typeface="Calibri" pitchFamily="34" charset="-122"/>
                   <a:cs typeface="Calibri" pitchFamily="34" charset="-120"/>
                 </a:rPr>
-                <a:t>1.29M</a:t>
+                <a:t>1,287,761</a:t>
               </a:r>
               <a:endParaRPr lang="en-US" sz="2600" dirty="0"/>
             </a:p>
@@ -4879,7 +4879,7 @@
                   <a:ea typeface="Calibri" pitchFamily="34" charset="-122"/>
                   <a:cs typeface="Calibri" pitchFamily="34" charset="-120"/>
                 </a:rPr>
-                <a:t>~520k</a:t>
+                <a:t>480,972</a:t>
               </a:r>
               <a:endParaRPr lang="en-US" sz="2600" dirty="0"/>
             </a:p>
@@ -5205,7 +5205,7 @@
                 <a:ea typeface="Calibri" pitchFamily="34" charset="-122"/>
                 <a:cs typeface="Calibri" pitchFamily="34" charset="-120"/>
               </a:rPr>
-              <a:t>How is the gap experienced?</a:t>
+              <a:t>Deprivation signatures in community discourse</a:t>
             </a:r>
             <a:endParaRPr lang="en-US" sz="3000" dirty="0"/>
           </a:p>
@@ -5268,7 +5268,7 @@
                 <a:ea typeface="Calibri" pitchFamily="34" charset="-122"/>
                 <a:cs typeface="Calibri" pitchFamily="34" charset="-120"/>
               </a:rPr>
-              <a:t>Platform text analysis — deprivation patterns from ~520k community posts.</a:t>
+              <a:t>Platform text analysis: deprivation patterns across the screened community-post sample.</a:t>
             </a:r>
             <a:endParaRPr lang="en-US" sz="1400" dirty="0"/>
           </a:p>
@@ -5520,7 +5520,7 @@
                   <a:ea typeface="Calibri" pitchFamily="34" charset="-122"/>
                   <a:cs typeface="Calibri" pitchFamily="34" charset="-120"/>
                 </a:rPr>
-                <a:t>Deprivation Types (n=100) — 88% of posts overlap 2 or more types.</a:t>
+                <a:t>Deprivation types (n=100): 88% of posts overlap two or more types.</a:t>
               </a:r>
               <a:endParaRPr lang="en-US" altLang="ko-KR" sz="1200" dirty="0"/>
             </a:p>
@@ -5586,7 +5586,7 @@
                   <a:ea typeface="Calibri" pitchFamily="34" charset="-122"/>
                   <a:cs typeface="Calibri" pitchFamily="34" charset="-120"/>
                 </a:rPr>
-                <a:t>REPRESENTATIVE CASES</a:t>
+                <a:t>Representative cases</a:t>
               </a:r>
               <a:endParaRPr lang="en-US" dirty="0"/>
             </a:p>
@@ -6151,7 +6151,7 @@
                 <a:ea typeface="Calibri" pitchFamily="34" charset="-122"/>
                 <a:cs typeface="Calibri" pitchFamily="34" charset="-120"/>
               </a:rPr>
-              <a:t>✓  ANALYSIS COMPLETE</a:t>
+              <a:t>Complete — Analysis</a:t>
             </a:r>
             <a:endParaRPr lang="en-US" sz="1000" dirty="0"/>
           </a:p>
@@ -6421,7 +6421,7 @@
                 <a:ea typeface="Calibri" pitchFamily="34" charset="-122"/>
                 <a:cs typeface="Calibri" pitchFamily="34" charset="-120"/>
               </a:rPr>
-              <a:t>◐  MAIN RESULTS DRAFTED</a:t>
+              <a:t>In progress — Main results drafted</a:t>
             </a:r>
             <a:endParaRPr lang="en-US" sz="1000" dirty="0"/>
           </a:p>
@@ -6691,7 +6691,7 @@
                 <a:ea typeface="Calibri" pitchFamily="34" charset="-122"/>
                 <a:cs typeface="Calibri" pitchFamily="34" charset="-120"/>
               </a:rPr>
-              <a:t>◑  PHASE 2 IN PROGRESS</a:t>
+              <a:t>In progress — Phase 2</a:t>
             </a:r>
             <a:endParaRPr lang="en-US" sz="1000" dirty="0"/>
           </a:p>
@@ -16485,7 +16485,7 @@
                 <a:ea typeface="Calibri" pitchFamily="34" charset="-122"/>
                 <a:cs typeface="Calibri" pitchFamily="34" charset="-120"/>
               </a:rPr>
-              <a:t>Preliminary results — Where is the gap?</a:t>
+              <a:t>Geographic distribution of connectivity gaps across districts</a:t>
             </a:r>
             <a:endParaRPr lang="en-US" sz="3000" dirty="0"/>
           </a:p>
@@ -18965,7 +18965,7 @@
                   <a:ea typeface="Calibri" pitchFamily="34" charset="-122"/>
                   <a:cs typeface="Calibri" pitchFamily="34" charset="-120"/>
                 </a:rPr>
-                <a:t>Physical infrastructure exists — what is missing is human and economic capacity</a:t>
+                <a:t>Infrastructure measures are present, while human and economic capacity gaps remain</a:t>
               </a:r>
               <a:endParaRPr lang="en-US" sz="1400" dirty="0"/>
             </a:p>
@@ -19009,7 +19009,7 @@
                   <a:ea typeface="Calibri" pitchFamily="34" charset="-122"/>
                   <a:cs typeface="Calibri" pitchFamily="34" charset="-120"/>
                 </a:rPr>
-                <a:t>Implication: dimension-specific intervention, not uniform infrastructure investment</a:t>
+                <a:t>Pattern suggests dimension-specific targeting as a testable direction, not a causal conclusion</a:t>
               </a:r>
               <a:endParaRPr lang="en-US" sz="1400" dirty="0"/>
             </a:p>
@@ -19251,7 +19251,7 @@
                 <a:ea typeface="Calibri" pitchFamily="34" charset="-122"/>
                 <a:cs typeface="Calibri" pitchFamily="34" charset="-120"/>
               </a:rPr>
-              <a:t>Why does the gap exist? — Individual differences dominate</a:t>
+              <a:t>Individual-level factors account for most variation in digital use</a:t>
             </a:r>
             <a:endParaRPr lang="en-US" sz="3000" dirty="0"/>
           </a:p>
@@ -19356,7 +19356,7 @@
                 <a:ea typeface="Calibri" pitchFamily="34" charset="-122"/>
                 <a:cs typeface="Calibri" pitchFamily="34" charset="-120"/>
               </a:rPr>
-              <a:t>WHERE THE GAP LIVES</a:t>
+              <a:t>Where the variation sits</a:t>
             </a:r>
             <a:endParaRPr lang="en-US" sz="1600" dirty="0"/>
           </a:p>
@@ -19508,7 +19508,7 @@
                 <a:ea typeface="Calibri" pitchFamily="34" charset="-122"/>
                 <a:cs typeface="Calibri" pitchFamily="34" charset="-120"/>
               </a:rPr>
-              <a:t>STRONGEST PREDICTORS</a:t>
+              <a:t>Strongest individual-level associations</a:t>
             </a:r>
             <a:endParaRPr lang="en-US" sz="1400" dirty="0"/>
           </a:p>
@@ -20348,7 +20348,7 @@
                 <a:ea typeface="Calibri" pitchFamily="34" charset="-122"/>
                 <a:cs typeface="Calibri" pitchFamily="34" charset="-120"/>
               </a:rPr>
-              <a:t>9 / 13</a:t>
+              <a:t>8 / 13</a:t>
             </a:r>
             <a:endParaRPr lang="en-US" sz="900" dirty="0"/>
           </a:p>
@@ -20531,7 +20531,7 @@
                 <a:ea typeface="Calibri" pitchFamily="34" charset="-122"/>
                 <a:cs typeface="Calibri" pitchFamily="34" charset="-120"/>
               </a:rPr>
-              <a:t>Does infrastructure offset individual vulnerability?</a:t>
+              <a:t>Limited cross-level associations between district infrastructure and individual use</a:t>
             </a:r>
             <a:endParaRPr lang="en-US" sz="3000" dirty="0"/>
           </a:p>
@@ -20675,7 +20675,7 @@
                 <a:ea typeface="Calibri" pitchFamily="34" charset="-122"/>
                 <a:cs typeface="Calibri" pitchFamily="34" charset="-120"/>
               </a:rPr>
-              <a:t>MAIN EFFECT</a:t>
+              <a:t>Main effect</a:t>
             </a:r>
             <a:endParaRPr lang="en-US" sz="1600" dirty="0"/>
           </a:p>
@@ -20783,7 +20783,7 @@
                 <a:ea typeface="Calibri" pitchFamily="34" charset="-122"/>
                 <a:cs typeface="Calibri" pitchFamily="34" charset="-120"/>
               </a:rPr>
-              <a:t>CROSS-LEVEL INTERACTIONS</a:t>
+              <a:t>Cross-level interactions</a:t>
             </a:r>
             <a:endParaRPr lang="en-US" sz="1400" dirty="0"/>
           </a:p>
@@ -21163,7 +21163,7 @@
                 <a:ea typeface="Calibri" pitchFamily="34" charset="-122"/>
                 <a:cs typeface="Calibri" pitchFamily="34" charset="-120"/>
               </a:rPr>
-              <a:t>INTERPRETATION</a:t>
+              <a:t>Interpretation</a:t>
             </a:r>
             <a:endParaRPr lang="en-US" sz="1600" dirty="0"/>
           </a:p>
@@ -21208,7 +21208,7 @@
                 <a:ea typeface="Calibri" pitchFamily="34" charset="-122"/>
                 <a:cs typeface="Calibri" pitchFamily="34" charset="-120"/>
               </a:rPr>
-              <a:t>Retained interactions are individual-level: the low-education penalty steepens with age (Age × low education −0.40***, M3) and with being 65+ (Older × low education −3.53*, M4 supplementary). District-level UMC dimensions show only weak, marginal main associations (Connectivity −1.34†, Affordability −1.35† in M3); the Connectivity × low-education term is positive but non-significant (+4.66, p=.16). District scores locate where vulnerable residents concentrate — supporting place-sensitive (not place-based) targeting.</a:t>
+              <a:t>Retained interactions are individual-level: the low-education penalty steepens with age (Age × low education −0.40***, M3) and with being 65+ (Older × low education −3.53*, M4 supplementary). District-level UMC dimensions show only weak, marginal main associations (Connectivity −1.34†, Affordability −1.35† in M3); the Connectivity × low-education term is positive but non-significant (+4.66, p=.16). District scores locate where vulnerable residents concentrate, supporting place-sensitive (not place-based) targeting.</a:t>
             </a:r>
             <a:endParaRPr lang="en-US" sz="1200" dirty="0"/>
           </a:p>
